--- a/Programacion II/Clases/Clase 12 - Integracion de modulos/Presentacion.pptx
+++ b/Programacion II/Clases/Clase 12 - Integracion de modulos/Presentacion.pptx
@@ -18,6 +18,12 @@
     <p:sldId id="266" r:id="rId17"/>
     <p:sldId id="267" r:id="rId18"/>
     <p:sldId id="268" r:id="rId19"/>
+    <p:sldId id="269" r:id="rId20"/>
+    <p:sldId id="270" r:id="rId21"/>
+    <p:sldId id="271" r:id="rId22"/>
+    <p:sldId id="272" r:id="rId23"/>
+    <p:sldId id="273" r:id="rId24"/>
+    <p:sldId id="274" r:id="rId25"/>
   </p:sldIdLst>
   <p:sldSz cx="12191695" cy="6858000" type="screen4x3"/>
   <p:notesSz cx="6858000" cy="9144000"/>
@@ -3618,154 +3624,21 @@
                 </a:solidFill>
                 <a:latin typeface="Calibri"/>
               </a:rPr>
-              <a:t>Antes de entregar — autochequeo</a:t>
-            </a:r>
-          </a:p>
-        </p:txBody>
-      </p:sp>
-      <p:sp>
-        <p:nvSpPr>
-          <p:cNvPr id="5" name="Rounded Rectangle 4"/>
-          <p:cNvSpPr/>
-          <p:nvPr/>
-        </p:nvSpPr>
-        <p:spPr>
-          <a:xfrm>
-            <a:off x="457200" y="1261872"/>
-            <a:ext cx="11277295" cy="566928"/>
-          </a:xfrm>
-          <a:prstGeom prst="roundRect">
-            <a:avLst>
-              <a:gd name="adj" fmla="val 12000"/>
-            </a:avLst>
-          </a:prstGeom>
-          <a:solidFill>
-            <a:srgbClr val="F2F2F2"/>
-          </a:solidFill>
-          <a:ln>
-            <a:noFill/>
-          </a:ln>
-        </p:spPr>
-        <p:style>
-          <a:lnRef idx="1">
-            <a:schemeClr val="accent1"/>
-          </a:lnRef>
-          <a:fillRef idx="3">
-            <a:schemeClr val="accent1"/>
-          </a:fillRef>
-          <a:effectRef idx="2">
-            <a:schemeClr val="accent1"/>
-          </a:effectRef>
-          <a:fontRef idx="minor">
-            <a:schemeClr val="lt1"/>
-          </a:fontRef>
-        </p:style>
-        <p:txBody>
-          <a:bodyPr rtlCol="0" anchor="ctr"/>
-          <a:lstStyle/>
-          <a:p>
-            <a:pPr algn="ctr"/>
-          </a:p>
-        </p:txBody>
-      </p:sp>
-      <p:sp>
-        <p:nvSpPr>
-          <p:cNvPr id="6" name="Rectangle 5"/>
-          <p:cNvSpPr/>
-          <p:nvPr/>
-        </p:nvSpPr>
-        <p:spPr>
-          <a:xfrm>
-            <a:off x="640080" y="1408175"/>
-            <a:ext cx="274320" cy="274320"/>
-          </a:xfrm>
-          <a:prstGeom prst="rect">
-            <a:avLst/>
-          </a:prstGeom>
-          <a:solidFill>
-            <a:srgbClr val="FFFFFF"/>
-          </a:solidFill>
-          <a:ln>
-            <a:solidFill>
-              <a:srgbClr val="333333"/>
-            </a:solidFill>
-          </a:ln>
-        </p:spPr>
-        <p:style>
-          <a:lnRef idx="1">
-            <a:schemeClr val="accent1"/>
-          </a:lnRef>
-          <a:fillRef idx="3">
-            <a:schemeClr val="accent1"/>
-          </a:fillRef>
-          <a:effectRef idx="2">
-            <a:schemeClr val="accent1"/>
-          </a:effectRef>
-          <a:fontRef idx="minor">
-            <a:schemeClr val="lt1"/>
-          </a:fontRef>
-        </p:style>
-        <p:txBody>
-          <a:bodyPr rtlCol="0" anchor="ctr"/>
-          <a:lstStyle/>
-          <a:p>
-            <a:pPr algn="ctr"/>
-          </a:p>
-        </p:txBody>
-      </p:sp>
-      <p:sp>
-        <p:nvSpPr>
-          <p:cNvPr id="7" name="Rectangle 6"/>
-          <p:cNvSpPr/>
-          <p:nvPr/>
-        </p:nvSpPr>
-        <p:spPr>
-          <a:xfrm>
-            <a:off x="640080" y="1408175"/>
-            <a:ext cx="73152" cy="274320"/>
-          </a:xfrm>
-          <a:prstGeom prst="rect">
-            <a:avLst/>
-          </a:prstGeom>
-          <a:solidFill>
-            <a:srgbClr val="269CCB"/>
-          </a:solidFill>
-          <a:ln>
-            <a:noFill/>
-          </a:ln>
-        </p:spPr>
-        <p:style>
-          <a:lnRef idx="1">
-            <a:schemeClr val="accent1"/>
-          </a:lnRef>
-          <a:fillRef idx="3">
-            <a:schemeClr val="accent1"/>
-          </a:fillRef>
-          <a:effectRef idx="2">
-            <a:schemeClr val="accent1"/>
-          </a:effectRef>
-          <a:fontRef idx="minor">
-            <a:schemeClr val="lt1"/>
-          </a:fontRef>
-        </p:style>
-        <p:txBody>
-          <a:bodyPr rtlCol="0" anchor="ctr"/>
-          <a:lstStyle/>
-          <a:p>
-            <a:pPr algn="ctr"/>
-          </a:p>
-        </p:txBody>
-      </p:sp>
-      <p:sp>
-        <p:nvSpPr>
-          <p:cNvPr id="8" name="TextBox 7"/>
+              <a:t>La forma de integrar sin sufrir es por goteo y no de un solo golpe (2/2)</a:t>
+            </a:r>
+          </a:p>
+        </p:txBody>
+      </p:sp>
+      <p:sp>
+        <p:nvSpPr>
+          <p:cNvPr id="5" name="TextBox 4"/>
           <p:cNvSpPr txBox="1"/>
           <p:nvPr/>
         </p:nvSpPr>
         <p:spPr>
           <a:xfrm>
-            <a:off x="1097280" y="1353312"/>
-            <a:ext cx="10362895" cy="402336"/>
+            <a:off x="457200" y="1170432"/>
+            <a:ext cx="11277295" cy="5230368"/>
           </a:xfrm>
           <a:prstGeom prst="rect">
             <a:avLst/>
@@ -3773,354 +3646,79 @@
           <a:noFill/>
         </p:spPr>
         <p:txBody>
-          <a:bodyPr wrap="square" anchor="ctr"/>
-          <a:lstStyle/>
-          <a:p>
-            <a:r>
-              <a:rPr sz="1500" b="0" i="0">
+          <a:bodyPr wrap="square">
+            <a:spAutoFit/>
+          </a:bodyPr>
+          <a:lstStyle/>
+          <a:p>
+            <a:pPr>
+              <a:spcAft>
+                <a:spcPts val="800"/>
+              </a:spcAft>
+            </a:pPr>
+            <a:r>
+              <a:rPr sz="2000" b="0" i="0">
                 <a:solidFill>
                   <a:srgbClr val="333333"/>
                 </a:solidFill>
                 <a:latin typeface="Calibri"/>
               </a:rPr>
-              <a:t>Si la consola dice 'Mascotas cargadas: 12' pero la tabla aparece vacía, ¿el problema está en el archivo, en la carga o en el momento en que se llena la tabla?</a:t>
-            </a:r>
-          </a:p>
-        </p:txBody>
-      </p:sp>
-      <p:sp>
-        <p:nvSpPr>
-          <p:cNvPr id="9" name="Rounded Rectangle 8"/>
-          <p:cNvSpPr/>
-          <p:nvPr/>
-        </p:nvSpPr>
-        <p:spPr>
-          <a:xfrm>
-            <a:off x="457200" y="1938528"/>
-            <a:ext cx="11277295" cy="566928"/>
-          </a:xfrm>
-          <a:prstGeom prst="roundRect">
-            <a:avLst>
-              <a:gd name="adj" fmla="val 12000"/>
-            </a:avLst>
-          </a:prstGeom>
-          <a:solidFill>
-            <a:srgbClr val="F2F2F2"/>
-          </a:solidFill>
-          <a:ln>
-            <a:noFill/>
-          </a:ln>
-        </p:spPr>
-        <p:style>
-          <a:lnRef idx="1">
-            <a:schemeClr val="accent1"/>
-          </a:lnRef>
-          <a:fillRef idx="3">
-            <a:schemeClr val="accent1"/>
-          </a:fillRef>
-          <a:effectRef idx="2">
-            <a:schemeClr val="accent1"/>
-          </a:effectRef>
-          <a:fontRef idx="minor">
-            <a:schemeClr val="lt1"/>
-          </a:fontRef>
-        </p:style>
-        <p:txBody>
-          <a:bodyPr rtlCol="0" anchor="ctr"/>
-          <a:lstStyle/>
-          <a:p>
-            <a:pPr algn="ctr"/>
-          </a:p>
-        </p:txBody>
-      </p:sp>
-      <p:sp>
-        <p:nvSpPr>
-          <p:cNvPr id="10" name="Rectangle 9"/>
-          <p:cNvSpPr/>
-          <p:nvPr/>
-        </p:nvSpPr>
-        <p:spPr>
-          <a:xfrm>
-            <a:off x="640080" y="2084832"/>
-            <a:ext cx="274320" cy="274320"/>
-          </a:xfrm>
-          <a:prstGeom prst="rect">
-            <a:avLst/>
-          </a:prstGeom>
-          <a:solidFill>
-            <a:srgbClr val="FFFFFF"/>
-          </a:solidFill>
-          <a:ln>
-            <a:solidFill>
-              <a:srgbClr val="333333"/>
-            </a:solidFill>
-          </a:ln>
-        </p:spPr>
-        <p:style>
-          <a:lnRef idx="1">
-            <a:schemeClr val="accent1"/>
-          </a:lnRef>
-          <a:fillRef idx="3">
-            <a:schemeClr val="accent1"/>
-          </a:fillRef>
-          <a:effectRef idx="2">
-            <a:schemeClr val="accent1"/>
-          </a:effectRef>
-          <a:fontRef idx="minor">
-            <a:schemeClr val="lt1"/>
-          </a:fontRef>
-        </p:style>
-        <p:txBody>
-          <a:bodyPr rtlCol="0" anchor="ctr"/>
-          <a:lstStyle/>
-          <a:p>
-            <a:pPr algn="ctr"/>
-          </a:p>
-        </p:txBody>
-      </p:sp>
-      <p:sp>
-        <p:nvSpPr>
-          <p:cNvPr id="11" name="Rectangle 10"/>
-          <p:cNvSpPr/>
-          <p:nvPr/>
-        </p:nvSpPr>
-        <p:spPr>
-          <a:xfrm>
-            <a:off x="640080" y="2084832"/>
-            <a:ext cx="73152" cy="274320"/>
-          </a:xfrm>
-          <a:prstGeom prst="rect">
-            <a:avLst/>
-          </a:prstGeom>
-          <a:solidFill>
-            <a:srgbClr val="269CCB"/>
-          </a:solidFill>
-          <a:ln>
-            <a:noFill/>
-          </a:ln>
-        </p:spPr>
-        <p:style>
-          <a:lnRef idx="1">
-            <a:schemeClr val="accent1"/>
-          </a:lnRef>
-          <a:fillRef idx="3">
-            <a:schemeClr val="accent1"/>
-          </a:fillRef>
-          <a:effectRef idx="2">
-            <a:schemeClr val="accent1"/>
-          </a:effectRef>
-          <a:fontRef idx="minor">
-            <a:schemeClr val="lt1"/>
-          </a:fontRef>
-        </p:style>
-        <p:txBody>
-          <a:bodyPr rtlCol="0" anchor="ctr"/>
-          <a:lstStyle/>
-          <a:p>
-            <a:pPr algn="ctr"/>
-          </a:p>
-        </p:txBody>
-      </p:sp>
-      <p:sp>
-        <p:nvSpPr>
-          <p:cNvPr id="12" name="TextBox 11"/>
-          <p:cNvSpPr txBox="1"/>
-          <p:nvPr/>
-        </p:nvSpPr>
-        <p:spPr>
-          <a:xfrm>
-            <a:off x="1097280" y="2029968"/>
-            <a:ext cx="10362895" cy="402336"/>
-          </a:xfrm>
-          <a:prstGeom prst="rect">
-            <a:avLst/>
-          </a:prstGeom>
-          <a:noFill/>
-        </p:spPr>
-        <p:txBody>
-          <a:bodyPr wrap="square" anchor="ctr"/>
-          <a:lstStyle/>
-          <a:p>
-            <a:r>
-              <a:rPr sz="1500" b="0" i="0">
+              <a:t>–   Cuando algo se rompe, uno sabe exactamente qué fue lo último que tocó.</a:t>
+            </a:r>
+          </a:p>
+          <a:p>
+            <a:pPr>
+              <a:spcAft>
+                <a:spcPts val="800"/>
+              </a:spcAft>
+            </a:pPr>
+            <a:r>
+              <a:rPr sz="2000" b="0" i="0">
                 <a:solidFill>
                   <a:srgbClr val="333333"/>
                 </a:solidFill>
                 <a:latin typeface="Calibri"/>
               </a:rPr>
-              <a:t>¿Cuántas veces aparece la expresión new ServicioVetCare en todo su proyecto, y qué pasaría si aparece más de una?</a:t>
-            </a:r>
-          </a:p>
-        </p:txBody>
-      </p:sp>
-      <p:sp>
-        <p:nvSpPr>
-          <p:cNvPr id="13" name="Rounded Rectangle 12"/>
-          <p:cNvSpPr/>
-          <p:nvPr/>
-        </p:nvSpPr>
-        <p:spPr>
-          <a:xfrm>
-            <a:off x="457200" y="2615184"/>
-            <a:ext cx="11277295" cy="566928"/>
-          </a:xfrm>
-          <a:prstGeom prst="roundRect">
-            <a:avLst>
-              <a:gd name="adj" fmla="val 12000"/>
-            </a:avLst>
-          </a:prstGeom>
-          <a:solidFill>
-            <a:srgbClr val="F2F2F2"/>
-          </a:solidFill>
-          <a:ln>
-            <a:noFill/>
-          </a:ln>
-        </p:spPr>
-        <p:style>
-          <a:lnRef idx="1">
-            <a:schemeClr val="accent1"/>
-          </a:lnRef>
-          <a:fillRef idx="3">
-            <a:schemeClr val="accent1"/>
-          </a:fillRef>
-          <a:effectRef idx="2">
-            <a:schemeClr val="accent1"/>
-          </a:effectRef>
-          <a:fontRef idx="minor">
-            <a:schemeClr val="lt1"/>
-          </a:fontRef>
-        </p:style>
-        <p:txBody>
-          <a:bodyPr rtlCol="0" anchor="ctr"/>
-          <a:lstStyle/>
-          <a:p>
-            <a:pPr algn="ctr"/>
-          </a:p>
-        </p:txBody>
-      </p:sp>
-      <p:sp>
-        <p:nvSpPr>
-          <p:cNvPr id="14" name="Rectangle 13"/>
-          <p:cNvSpPr/>
-          <p:nvPr/>
-        </p:nvSpPr>
-        <p:spPr>
-          <a:xfrm>
-            <a:off x="640080" y="2761488"/>
-            <a:ext cx="274320" cy="274320"/>
-          </a:xfrm>
-          <a:prstGeom prst="rect">
-            <a:avLst/>
-          </a:prstGeom>
-          <a:solidFill>
-            <a:srgbClr val="FFFFFF"/>
-          </a:solidFill>
-          <a:ln>
-            <a:solidFill>
-              <a:srgbClr val="333333"/>
-            </a:solidFill>
-          </a:ln>
-        </p:spPr>
-        <p:style>
-          <a:lnRef idx="1">
-            <a:schemeClr val="accent1"/>
-          </a:lnRef>
-          <a:fillRef idx="3">
-            <a:schemeClr val="accent1"/>
-          </a:fillRef>
-          <a:effectRef idx="2">
-            <a:schemeClr val="accent1"/>
-          </a:effectRef>
-          <a:fontRef idx="minor">
-            <a:schemeClr val="lt1"/>
-          </a:fontRef>
-        </p:style>
-        <p:txBody>
-          <a:bodyPr rtlCol="0" anchor="ctr"/>
-          <a:lstStyle/>
-          <a:p>
-            <a:pPr algn="ctr"/>
-          </a:p>
-        </p:txBody>
-      </p:sp>
-      <p:sp>
-        <p:nvSpPr>
-          <p:cNvPr id="15" name="Rectangle 14"/>
-          <p:cNvSpPr/>
-          <p:nvPr/>
-        </p:nvSpPr>
-        <p:spPr>
-          <a:xfrm>
-            <a:off x="640080" y="2761488"/>
-            <a:ext cx="73152" cy="274320"/>
-          </a:xfrm>
-          <a:prstGeom prst="rect">
-            <a:avLst/>
-          </a:prstGeom>
-          <a:solidFill>
-            <a:srgbClr val="269CCB"/>
-          </a:solidFill>
-          <a:ln>
-            <a:noFill/>
-          </a:ln>
-        </p:spPr>
-        <p:style>
-          <a:lnRef idx="1">
-            <a:schemeClr val="accent1"/>
-          </a:lnRef>
-          <a:fillRef idx="3">
-            <a:schemeClr val="accent1"/>
-          </a:fillRef>
-          <a:effectRef idx="2">
-            <a:schemeClr val="accent1"/>
-          </a:effectRef>
-          <a:fontRef idx="minor">
-            <a:schemeClr val="lt1"/>
-          </a:fontRef>
-        </p:style>
-        <p:txBody>
-          <a:bodyPr rtlCol="0" anchor="ctr"/>
-          <a:lstStyle/>
-          <a:p>
-            <a:pPr algn="ctr"/>
-          </a:p>
-        </p:txBody>
-      </p:sp>
-      <p:sp>
-        <p:nvSpPr>
-          <p:cNvPr id="16" name="TextBox 15"/>
-          <p:cNvSpPr txBox="1"/>
-          <p:nvPr/>
-        </p:nvSpPr>
-        <p:spPr>
-          <a:xfrm>
-            <a:off x="1097280" y="2706624"/>
-            <a:ext cx="10362895" cy="402336"/>
-          </a:xfrm>
-          <a:prstGeom prst="rect">
-            <a:avLst/>
-          </a:prstGeom>
-          <a:noFill/>
-        </p:spPr>
-        <p:txBody>
-          <a:bodyPr wrap="square" anchor="ctr"/>
-          <a:lstStyle/>
-          <a:p>
-            <a:r>
-              <a:rPr sz="1500" b="0" i="0">
+              <a:t>–   Tres hábitos más que valen oro: fijar por escrito el contrato entre módulos, es decir la firma de los métodos públicos del servicio y el orden exacto de los campos del CSV, para que quien escribe y quien lee no se contradigan</a:t>
+            </a:r>
+          </a:p>
+          <a:p>
+            <a:pPr>
+              <a:spcAft>
+                <a:spcPts val="800"/>
+              </a:spcAft>
+            </a:pPr>
+            <a:r>
+              <a:rPr sz="2000" b="0" i="0">
                 <a:solidFill>
                   <a:srgbClr val="333333"/>
                 </a:solidFill>
                 <a:latin typeface="Calibri"/>
               </a:rPr>
-              <a:t>Cuando el dato llega mal, ¿ya comprobó con el debugger si sale mal del formulario o si se daña más adelante, en el servicio o al escribir la línea del archivo?</a:t>
-            </a:r>
-          </a:p>
-        </p:txBody>
-      </p:sp>
-      <p:sp>
-        <p:nvSpPr>
-          <p:cNvPr id="17" name="TextBox 16"/>
+              <a:t>–   Poner el try-catch en las fronteras, o sea en el manejador del botón y en el acceso al archivo</a:t>
+            </a:r>
+          </a:p>
+          <a:p>
+            <a:pPr>
+              <a:spcAft>
+                <a:spcPts val="800"/>
+              </a:spcAft>
+            </a:pPr>
+            <a:r>
+              <a:rPr sz="2000" b="0" i="0">
+                <a:solidFill>
+                  <a:srgbClr val="333333"/>
+                </a:solidFill>
+                <a:latin typeface="Calibri"/>
+              </a:rPr>
+              <a:t>–   Y no repartido por todo el modelo; y llevar la bitácora de integración con síntoma, causa y corrección de cada defecto, que es lo que se entrega y lo que salva en la sustentación.</a:t>
+            </a:r>
+          </a:p>
+        </p:txBody>
+      </p:sp>
+      <p:sp>
+        <p:nvSpPr>
+          <p:cNvPr id="6" name="TextBox 5"/>
           <p:cNvSpPr txBox="1"/>
           <p:nvPr/>
         </p:nvSpPr>
@@ -4294,21 +3892,141 @@
                 </a:solidFill>
                 <a:latin typeface="Calibri"/>
               </a:rPr>
-              <a:t>Criterios de exito / entregable</a:t>
-            </a:r>
-          </a:p>
-        </p:txBody>
-      </p:sp>
-      <p:sp>
-        <p:nvSpPr>
-          <p:cNvPr id="5" name="TextBox 4"/>
+              <a:t>El main que amarra las cuatro capas de VetCare</a:t>
+            </a:r>
+          </a:p>
+        </p:txBody>
+      </p:sp>
+      <p:sp>
+        <p:nvSpPr>
+          <p:cNvPr id="5" name="Rounded Rectangle 4"/>
+          <p:cNvSpPr/>
+          <p:nvPr/>
+        </p:nvSpPr>
+        <p:spPr>
+          <a:xfrm>
+            <a:off x="457200" y="1261872"/>
+            <a:ext cx="11277295" cy="4773168"/>
+          </a:xfrm>
+          <a:prstGeom prst="roundRect">
+            <a:avLst>
+              <a:gd name="adj" fmla="val 12000"/>
+            </a:avLst>
+          </a:prstGeom>
+          <a:solidFill>
+            <a:srgbClr val="1E2A38"/>
+          </a:solidFill>
+          <a:ln>
+            <a:noFill/>
+          </a:ln>
+        </p:spPr>
+        <p:style>
+          <a:lnRef idx="1">
+            <a:schemeClr val="accent1"/>
+          </a:lnRef>
+          <a:fillRef idx="3">
+            <a:schemeClr val="accent1"/>
+          </a:fillRef>
+          <a:effectRef idx="2">
+            <a:schemeClr val="accent1"/>
+          </a:effectRef>
+          <a:fontRef idx="minor">
+            <a:schemeClr val="lt1"/>
+          </a:fontRef>
+        </p:style>
+        <p:txBody>
+          <a:bodyPr rtlCol="0" anchor="ctr"/>
+          <a:lstStyle/>
+          <a:p>
+            <a:pPr algn="ctr"/>
+          </a:p>
+        </p:txBody>
+      </p:sp>
+      <p:sp>
+        <p:nvSpPr>
+          <p:cNvPr id="6" name="Rectangle 5"/>
+          <p:cNvSpPr/>
+          <p:nvPr/>
+        </p:nvSpPr>
+        <p:spPr>
+          <a:xfrm>
+            <a:off x="457200" y="1261872"/>
+            <a:ext cx="11277295" cy="320040"/>
+          </a:xfrm>
+          <a:prstGeom prst="rect">
+            <a:avLst/>
+          </a:prstGeom>
+          <a:solidFill>
+            <a:srgbClr val="095292"/>
+          </a:solidFill>
+          <a:ln>
+            <a:noFill/>
+          </a:ln>
+        </p:spPr>
+        <p:style>
+          <a:lnRef idx="1">
+            <a:schemeClr val="accent1"/>
+          </a:lnRef>
+          <a:fillRef idx="3">
+            <a:schemeClr val="accent1"/>
+          </a:fillRef>
+          <a:effectRef idx="2">
+            <a:schemeClr val="accent1"/>
+          </a:effectRef>
+          <a:fontRef idx="minor">
+            <a:schemeClr val="lt1"/>
+          </a:fontRef>
+        </p:style>
+        <p:txBody>
+          <a:bodyPr rtlCol="0" anchor="ctr"/>
+          <a:lstStyle/>
+          <a:p>
+            <a:pPr algn="ctr"/>
+          </a:p>
+        </p:txBody>
+      </p:sp>
+      <p:sp>
+        <p:nvSpPr>
+          <p:cNvPr id="7" name="TextBox 6"/>
           <p:cNvSpPr txBox="1"/>
           <p:nvPr/>
         </p:nvSpPr>
         <p:spPr>
           <a:xfrm>
-            <a:off x="457200" y="1170432"/>
-            <a:ext cx="11277295" cy="5230368"/>
+            <a:off x="685800" y="1307592"/>
+            <a:ext cx="10820095" cy="256032"/>
+          </a:xfrm>
+          <a:prstGeom prst="rect">
+            <a:avLst/>
+          </a:prstGeom>
+          <a:noFill/>
+        </p:spPr>
+        <p:txBody>
+          <a:bodyPr wrap="square" anchor="ctr"/>
+          <a:lstStyle/>
+          <a:p>
+            <a:r>
+              <a:rPr sz="1000" b="1" i="0">
+                <a:solidFill>
+                  <a:srgbClr val="269CCB"/>
+                </a:solidFill>
+                <a:latin typeface="Calibri"/>
+              </a:rPr>
+              <a:t>● ● ●</a:t>
+            </a:r>
+          </a:p>
+        </p:txBody>
+      </p:sp>
+      <p:sp>
+        <p:nvSpPr>
+          <p:cNvPr id="8" name="TextBox 7"/>
+          <p:cNvSpPr txBox="1"/>
+          <p:nvPr/>
+        </p:nvSpPr>
+        <p:spPr>
+          <a:xfrm>
+            <a:off x="777240" y="1719072"/>
+            <a:ext cx="10637215" cy="4133087"/>
           </a:xfrm>
           <a:prstGeom prst="rect">
             <a:avLst/>
@@ -4323,212 +4041,251 @@
           <a:p>
             <a:pPr>
               <a:spcAft>
-                <a:spcPts val="800"/>
+                <a:spcPts val="400"/>
               </a:spcAft>
             </a:pPr>
             <a:r>
-              <a:rPr sz="2000" b="0" i="0">
-                <a:solidFill>
-                  <a:srgbClr val="333333"/>
-                </a:solidFill>
-                <a:latin typeface="Calibri"/>
-              </a:rPr>
-              <a:t>–   </a:t>
-            </a:r>
-            <a:r>
-              <a:rPr sz="2000" b="1" i="0">
-                <a:solidFill>
-                  <a:srgbClr val="333333"/>
-                </a:solidFill>
-                <a:latin typeface="Calibri"/>
-              </a:rPr>
-              <a:t>Entregable:</a:t>
-            </a:r>
-            <a:r>
-              <a:rPr sz="2000" b="0" i="0">
-                <a:solidFill>
-                  <a:srgbClr val="333333"/>
-                </a:solidFill>
-                <a:latin typeface="Calibri"/>
-              </a:rPr>
-              <a:t> El proyecto VetCare ejecutable (carpeta del proyecto o JAR) más la bitácora de integración con tres defectos hallados con el debugger, cada uno con síntoma, causa, corrección y evidencia, subidos a la plataforma del curso.</a:t>
+              <a:rPr sz="1400" b="0" i="0">
+                <a:solidFill>
+                  <a:srgbClr val="FFFFFF"/>
+                </a:solidFill>
+                <a:latin typeface="Calibri"/>
+              </a:rPr>
+              <a:t>public static void main(String[] args) {</a:t>
             </a:r>
           </a:p>
           <a:p>
             <a:pPr>
               <a:spcAft>
-                <a:spcPts val="800"/>
+                <a:spcPts val="400"/>
               </a:spcAft>
             </a:pPr>
             <a:r>
-              <a:rPr sz="2000" b="0" i="0">
-                <a:solidFill>
-                  <a:srgbClr val="333333"/>
-                </a:solidFill>
-                <a:latin typeface="Calibri"/>
-              </a:rPr>
-              <a:t>–   </a:t>
-            </a:r>
-            <a:r>
-              <a:rPr sz="2000" b="1" i="0">
-                <a:solidFill>
-                  <a:srgbClr val="333333"/>
-                </a:solidFill>
-                <a:latin typeface="Calibri"/>
-              </a:rPr>
-              <a:t>Exito:</a:t>
-            </a:r>
-            <a:r>
-              <a:rPr sz="2000" b="0" i="0">
-                <a:solidFill>
-                  <a:srgbClr val="333333"/>
-                </a:solidFill>
-                <a:latin typeface="Calibri"/>
-              </a:rPr>
-              <a:t> La aplicación arranca desde un único main, muestra la tabla con los datos del archivo y no requiere tocar código para completar el guion de humo.</a:t>
+              <a:rPr sz="1400" b="0" i="0">
+                <a:solidFill>
+                  <a:srgbClr val="FFFFFF"/>
+                </a:solidFill>
+                <a:latin typeface="Calibri"/>
+              </a:rPr>
+              <a:t>    RepositorioMascotasCSV repositorio = new RepositorioMascotasCSV("mascotas.csv"); // capa de datos</a:t>
             </a:r>
           </a:p>
           <a:p>
             <a:pPr>
               <a:spcAft>
-                <a:spcPts val="800"/>
+                <a:spcPts val="400"/>
               </a:spcAft>
             </a:pPr>
             <a:r>
-              <a:rPr sz="2000" b="0" i="0">
-                <a:solidFill>
-                  <a:srgbClr val="333333"/>
-                </a:solidFill>
-                <a:latin typeface="Calibri"/>
-              </a:rPr>
-              <a:t>–   </a:t>
-            </a:r>
-            <a:r>
-              <a:rPr sz="2000" b="1" i="0">
-                <a:solidFill>
-                  <a:srgbClr val="333333"/>
-                </a:solidFill>
-                <a:latin typeface="Calibri"/>
-              </a:rPr>
-              <a:t>Exito:</a:t>
-            </a:r>
-            <a:r>
-              <a:rPr sz="2000" b="0" i="0">
-                <a:solidFill>
-                  <a:srgbClr val="333333"/>
-                </a:solidFill>
-                <a:latin typeface="Calibri"/>
-              </a:rPr>
-              <a:t> Existe una sola instancia del servicio y del repositorio en toda la aplicación, verificable con el debugger: lo que se ve en la tabla es lo que se guarda al cerrar.</a:t>
+              <a:rPr sz="1400" b="0" i="0">
+                <a:solidFill>
+                  <a:srgbClr val="FFFFFF"/>
+                </a:solidFill>
+                <a:latin typeface="Calibri"/>
+              </a:rPr>
+              <a:t>    ServicioVetCare servicio = new ServicioVetCare(repositorio);   // logica: dueno del ArrayList</a:t>
             </a:r>
           </a:p>
           <a:p>
             <a:pPr>
               <a:spcAft>
-                <a:spcPts val="800"/>
+                <a:spcPts val="400"/>
               </a:spcAft>
             </a:pPr>
             <a:r>
-              <a:rPr sz="2000" b="0" i="0">
-                <a:solidFill>
-                  <a:srgbClr val="333333"/>
-                </a:solidFill>
-                <a:latin typeface="Calibri"/>
-              </a:rPr>
-              <a:t>–   </a:t>
-            </a:r>
-            <a:r>
-              <a:rPr sz="2000" b="1" i="0">
-                <a:solidFill>
-                  <a:srgbClr val="333333"/>
-                </a:solidFill>
-                <a:latin typeface="Calibri"/>
-              </a:rPr>
-              <a:t>Exito:</a:t>
-            </a:r>
-            <a:r>
-              <a:rPr sz="2000" b="0" i="0">
-                <a:solidFill>
-                  <a:srgbClr val="333333"/>
-                </a:solidFill>
-                <a:latin typeface="Calibri"/>
-              </a:rPr>
-              <a:t> Los cinco pasos del guion de humo se ejecutan de corrido dos veces seguidas, y al reabrir aparecen las mascotas registradas en la corrida anterior.</a:t>
+              <a:rPr sz="1400" b="0" i="0">
+                <a:solidFill>
+                  <a:srgbClr val="FFFFFF"/>
+                </a:solidFill>
+                <a:latin typeface="Calibri"/>
+              </a:rPr>
+              <a:t>    servicio.cargarDesdeArchivo();      // PRIMERO los datos...</a:t>
             </a:r>
           </a:p>
           <a:p>
             <a:pPr>
               <a:spcAft>
-                <a:spcPts val="800"/>
+                <a:spcPts val="400"/>
               </a:spcAft>
             </a:pPr>
             <a:r>
-              <a:rPr sz="2000" b="0" i="0">
-                <a:solidFill>
-                  <a:srgbClr val="333333"/>
-                </a:solidFill>
-                <a:latin typeface="Calibri"/>
-              </a:rPr>
-              <a:t>–   </a:t>
-            </a:r>
-            <a:r>
-              <a:rPr sz="2000" b="1" i="0">
-                <a:solidFill>
-                  <a:srgbClr val="333333"/>
-                </a:solidFill>
-                <a:latin typeface="Calibri"/>
-              </a:rPr>
-              <a:t>Exito:</a:t>
-            </a:r>
-            <a:r>
-              <a:rPr sz="2000" b="0" i="0">
-                <a:solidFill>
-                  <a:srgbClr val="333333"/>
-                </a:solidFill>
-                <a:latin typeface="Calibri"/>
-              </a:rPr>
-              <a:t> La bitácora documenta tres defectos con síntoma observable, causa encontrada con el debugger, corrección aplicada y forma de verificarla; ningún defecto quedó 'arreglado' sin explicación.</a:t>
+              <a:rPr sz="1400" b="0" i="0">
+                <a:solidFill>
+                  <a:srgbClr val="FFFFFF"/>
+                </a:solidFill>
+                <a:latin typeface="Calibri"/>
+              </a:rPr>
+              <a:t>    SwingUtilities.invokeLater(() -&gt; new VetCareApp(servicio).setVisible(true)); // ...DESPUES la ventana</a:t>
             </a:r>
           </a:p>
           <a:p>
             <a:pPr>
               <a:spcAft>
-                <a:spcPts val="800"/>
+                <a:spcPts val="400"/>
               </a:spcAft>
             </a:pPr>
             <a:r>
-              <a:rPr sz="2000" b="0" i="0">
-                <a:solidFill>
-                  <a:srgbClr val="333333"/>
-                </a:solidFill>
-                <a:latin typeface="Calibri"/>
-              </a:rPr>
-              <a:t>–   </a:t>
-            </a:r>
-            <a:r>
-              <a:rPr sz="2000" b="1" i="0">
-                <a:solidFill>
-                  <a:srgbClr val="333333"/>
-                </a:solidFill>
-                <a:latin typeface="Calibri"/>
-              </a:rPr>
-              <a:t>Entrega en la plataforma del curso</a:t>
-            </a:r>
-            <a:r>
-              <a:rPr sz="2000" b="0" i="0">
-                <a:solidFill>
-                  <a:srgbClr val="333333"/>
-                </a:solidFill>
-                <a:latin typeface="Calibri"/>
-              </a:rPr>
-              <a:t> — en la fecha que indique el docente.</a:t>
-            </a:r>
-          </a:p>
-        </p:txBody>
-      </p:sp>
-      <p:sp>
-        <p:nvSpPr>
-          <p:cNvPr id="6" name="TextBox 5"/>
+              <a:rPr sz="1400" b="0" i="0">
+                <a:solidFill>
+                  <a:srgbClr val="FFFFFF"/>
+                </a:solidFill>
+                <a:latin typeface="Calibri"/>
+              </a:rPr>
+              <a:t>}</a:t>
+            </a:r>
+          </a:p>
+          <a:p>
+            <a:pPr>
+              <a:spcAft>
+                <a:spcPts val="400"/>
+              </a:spcAft>
+            </a:pPr>
+            <a:r>
+              <a:rPr sz="1400" b="0" i="0">
+                <a:solidFill>
+                  <a:srgbClr val="FFFFFF"/>
+                </a:solidFill>
+                <a:latin typeface="Calibri"/>
+              </a:rPr>
+              <a:t>// Una sola instancia de servicio para toda la app: la ventana NO crea la suya.</a:t>
+            </a:r>
+          </a:p>
+          <a:p>
+            <a:pPr>
+              <a:spcAft>
+                <a:spcPts val="400"/>
+              </a:spcAft>
+            </a:pPr>
+            <a:r>
+              <a:rPr sz="1400" b="0" i="0">
+                <a:solidFill>
+                  <a:srgbClr val="FFFFFF"/>
+                </a:solidFill>
+                <a:latin typeface="Calibri"/>
+              </a:rPr>
+              <a:t>// Breakpoint en la linea del cargarDesdeArchivo (Ctrl+F8) y F7 para entrar:</a:t>
+            </a:r>
+          </a:p>
+          <a:p>
+            <a:pPr>
+              <a:spcAft>
+                <a:spcPts val="400"/>
+              </a:spcAft>
+            </a:pPr>
+            <a:r>
+              <a:rPr sz="1400" b="0" i="0">
+                <a:solidFill>
+                  <a:srgbClr val="FFFFFF"/>
+                </a:solidFill>
+                <a:latin typeface="Calibri"/>
+              </a:rPr>
+              <a:t>// en la ventana Variables se ve cuantas mascotas trajo el CSV antes de que</a:t>
+            </a:r>
+          </a:p>
+          <a:p>
+            <a:pPr>
+              <a:spcAft>
+                <a:spcPts val="400"/>
+              </a:spcAft>
+            </a:pPr>
+            <a:r>
+              <a:rPr sz="1400" b="0" i="0">
+                <a:solidFill>
+                  <a:srgbClr val="FFFFFF"/>
+                </a:solidFill>
+                <a:latin typeface="Calibri"/>
+              </a:rPr>
+              <a:t>// exista un solo boton en pantalla.</a:t>
+            </a:r>
+          </a:p>
+          <a:p>
+            <a:pPr>
+              <a:spcAft>
+                <a:spcPts val="400"/>
+              </a:spcAft>
+            </a:pPr>
+            <a:r>
+              <a:rPr sz="1400" b="0" i="0">
+                <a:solidFill>
+                  <a:srgbClr val="FFFFFF"/>
+                </a:solidFill>
+                <a:latin typeface="Calibri"/>
+              </a:rPr>
+              <a:t>// Si la tabla sale vacia pero la consola dice "Mascotas cargadas: 12", el</a:t>
+            </a:r>
+          </a:p>
+          <a:p>
+            <a:pPr>
+              <a:spcAft>
+                <a:spcPts val="400"/>
+              </a:spcAft>
+            </a:pPr>
+            <a:r>
+              <a:rPr sz="1400" b="0" i="0">
+                <a:solidFill>
+                  <a:srgbClr val="FFFFFF"/>
+                </a:solidFill>
+                <a:latin typeface="Calibri"/>
+              </a:rPr>
+              <a:t>// defecto NO esta en el archivo: esta en refrescarTabla() o en que la ventana</a:t>
+            </a:r>
+          </a:p>
+          <a:p>
+            <a:pPr>
+              <a:spcAft>
+                <a:spcPts val="400"/>
+              </a:spcAft>
+            </a:pPr>
+            <a:r>
+              <a:rPr sz="1400" b="0" i="0">
+                <a:solidFill>
+                  <a:srgbClr val="FFFFFF"/>
+                </a:solidFill>
+                <a:latin typeface="Calibri"/>
+              </a:rPr>
+              <a:t>// esta mirando otro objeto servicio.</a:t>
+            </a:r>
+          </a:p>
+        </p:txBody>
+      </p:sp>
+      <p:sp>
+        <p:nvSpPr>
+          <p:cNvPr id="9" name="TextBox 8"/>
+          <p:cNvSpPr txBox="1"/>
+          <p:nvPr/>
+        </p:nvSpPr>
+        <p:spPr>
+          <a:xfrm>
+            <a:off x="457200" y="6080760"/>
+            <a:ext cx="11277295" cy="320040"/>
+          </a:xfrm>
+          <a:prstGeom prst="rect">
+            <a:avLst/>
+          </a:prstGeom>
+          <a:noFill/>
+        </p:spPr>
+        <p:txBody>
+          <a:bodyPr wrap="square">
+            <a:spAutoFit/>
+          </a:bodyPr>
+          <a:lstStyle/>
+          <a:p>
+            <a:pPr algn="ctr"/>
+            <a:r>
+              <a:rPr sz="1200" b="0" i="1">
+                <a:solidFill>
+                  <a:srgbClr val="666666"/>
+                </a:solidFill>
+                <a:latin typeface="Calibri"/>
+              </a:rPr>
+              <a:t>El orden de arranque y la instancia única no son detalles de estilo: son la causa de los dos defectos de integración más frecuentes.</a:t>
+            </a:r>
+          </a:p>
+        </p:txBody>
+      </p:sp>
+      <p:sp>
+        <p:nvSpPr>
+          <p:cNvPr id="10" name="TextBox 9"/>
           <p:cNvSpPr txBox="1"/>
           <p:nvPr/>
         </p:nvSpPr>
@@ -4702,109 +4459,21 @@
                 </a:solidFill>
                 <a:latin typeface="Calibri"/>
               </a:rPr>
-              <a:t>Para el PI esta semana</a:t>
-            </a:r>
-          </a:p>
-        </p:txBody>
-      </p:sp>
-      <p:sp>
-        <p:nvSpPr>
-          <p:cNvPr id="5" name="Rounded Rectangle 4"/>
-          <p:cNvSpPr/>
-          <p:nvPr/>
-        </p:nvSpPr>
-        <p:spPr>
-          <a:xfrm>
-            <a:off x="457200" y="1261872"/>
-            <a:ext cx="11277295" cy="1051560"/>
-          </a:xfrm>
-          <a:prstGeom prst="roundRect">
-            <a:avLst>
-              <a:gd name="adj" fmla="val 12000"/>
-            </a:avLst>
-          </a:prstGeom>
-          <a:solidFill>
-            <a:srgbClr val="E8F4FA"/>
-          </a:solidFill>
-          <a:ln>
-            <a:noFill/>
-          </a:ln>
-        </p:spPr>
-        <p:style>
-          <a:lnRef idx="1">
-            <a:schemeClr val="accent1"/>
-          </a:lnRef>
-          <a:fillRef idx="3">
-            <a:schemeClr val="accent1"/>
-          </a:fillRef>
-          <a:effectRef idx="2">
-            <a:schemeClr val="accent1"/>
-          </a:effectRef>
-          <a:fontRef idx="minor">
-            <a:schemeClr val="lt1"/>
-          </a:fontRef>
-        </p:style>
-        <p:txBody>
-          <a:bodyPr rtlCol="0" anchor="ctr"/>
-          <a:lstStyle/>
-          <a:p>
-            <a:pPr algn="ctr"/>
-          </a:p>
-        </p:txBody>
-      </p:sp>
-      <p:sp>
-        <p:nvSpPr>
-          <p:cNvPr id="6" name="Rectangle 5"/>
-          <p:cNvSpPr/>
-          <p:nvPr/>
-        </p:nvSpPr>
-        <p:spPr>
-          <a:xfrm>
-            <a:off x="457200" y="1261872"/>
-            <a:ext cx="128016" cy="1051560"/>
-          </a:xfrm>
-          <a:prstGeom prst="rect">
-            <a:avLst/>
-          </a:prstGeom>
-          <a:solidFill>
-            <a:srgbClr val="269CCB"/>
-          </a:solidFill>
-          <a:ln>
-            <a:noFill/>
-          </a:ln>
-        </p:spPr>
-        <p:style>
-          <a:lnRef idx="1">
-            <a:schemeClr val="accent1"/>
-          </a:lnRef>
-          <a:fillRef idx="3">
-            <a:schemeClr val="accent1"/>
-          </a:fillRef>
-          <a:effectRef idx="2">
-            <a:schemeClr val="accent1"/>
-          </a:effectRef>
-          <a:fontRef idx="minor">
-            <a:schemeClr val="lt1"/>
-          </a:fontRef>
-        </p:style>
-        <p:txBody>
-          <a:bodyPr rtlCol="0" anchor="ctr"/>
-          <a:lstStyle/>
-          <a:p>
-            <a:pPr algn="ctr"/>
-          </a:p>
-        </p:txBody>
-      </p:sp>
-      <p:sp>
-        <p:nvSpPr>
-          <p:cNvPr id="7" name="TextBox 6"/>
+              <a:t>Demo del dia</a:t>
+            </a:r>
+          </a:p>
+        </p:txBody>
+      </p:sp>
+      <p:sp>
+        <p:nvSpPr>
+          <p:cNvPr id="5" name="TextBox 4"/>
           <p:cNvSpPr txBox="1"/>
           <p:nvPr/>
         </p:nvSpPr>
         <p:spPr>
           <a:xfrm>
-            <a:off x="777240" y="1399031"/>
-            <a:ext cx="10774375" cy="822959"/>
+            <a:off x="457200" y="1170432"/>
+            <a:ext cx="11277295" cy="5230368"/>
           </a:xfrm>
           <a:prstGeom prst="rect">
             <a:avLst/>
@@ -4817,313 +4486,94 @@
           </a:bodyPr>
           <a:lstStyle/>
           <a:p>
-            <a:r>
-              <a:rPr sz="1200" b="1" i="0">
-                <a:solidFill>
-                  <a:srgbClr val="269CCB"/>
-                </a:solidFill>
-                <a:latin typeface="Calibri"/>
-              </a:rPr>
-              <a:t>Info</a:t>
-            </a:r>
-          </a:p>
-          <a:p>
             <a:pPr>
-              <a:spcBef>
-                <a:spcPts val="400"/>
-              </a:spcBef>
+              <a:spcAft>
+                <a:spcPts val="800"/>
+              </a:spcAft>
             </a:pPr>
             <a:r>
-              <a:rPr sz="1400" b="0" i="0">
+              <a:rPr sz="2000" b="0" i="0">
                 <a:solidFill>
                   <a:srgbClr val="333333"/>
                 </a:solidFill>
                 <a:latin typeface="Calibri"/>
               </a:rPr>
-              <a:t>Hito: VetCare arranca, carga el archivo, registra, busca por ID, lista y guarda al cerrar: el flujo completo del PI corre sin tocar código.</a:t>
-            </a:r>
-          </a:p>
-        </p:txBody>
-      </p:sp>
-      <p:sp>
-        <p:nvSpPr>
-          <p:cNvPr id="8" name="Rounded Rectangle 7"/>
-          <p:cNvSpPr/>
-          <p:nvPr/>
-        </p:nvSpPr>
-        <p:spPr>
-          <a:xfrm>
-            <a:off x="457200" y="2478024"/>
-            <a:ext cx="11277295" cy="1051560"/>
-          </a:xfrm>
-          <a:prstGeom prst="roundRect">
-            <a:avLst>
-              <a:gd name="adj" fmla="val 12000"/>
-            </a:avLst>
-          </a:prstGeom>
-          <a:solidFill>
-            <a:srgbClr val="FFF8E1"/>
-          </a:solidFill>
-          <a:ln>
-            <a:noFill/>
-          </a:ln>
-        </p:spPr>
-        <p:style>
-          <a:lnRef idx="1">
-            <a:schemeClr val="accent1"/>
-          </a:lnRef>
-          <a:fillRef idx="3">
-            <a:schemeClr val="accent1"/>
-          </a:fillRef>
-          <a:effectRef idx="2">
-            <a:schemeClr val="accent1"/>
-          </a:effectRef>
-          <a:fontRef idx="minor">
-            <a:schemeClr val="lt1"/>
-          </a:fontRef>
-        </p:style>
-        <p:txBody>
-          <a:bodyPr rtlCol="0" anchor="ctr"/>
-          <a:lstStyle/>
-          <a:p>
-            <a:pPr algn="ctr"/>
-          </a:p>
-        </p:txBody>
-      </p:sp>
-      <p:sp>
-        <p:nvSpPr>
-          <p:cNvPr id="9" name="Rectangle 8"/>
-          <p:cNvSpPr/>
-          <p:nvPr/>
-        </p:nvSpPr>
-        <p:spPr>
-          <a:xfrm>
-            <a:off x="457200" y="2478024"/>
-            <a:ext cx="128016" cy="1051560"/>
-          </a:xfrm>
-          <a:prstGeom prst="rect">
-            <a:avLst/>
-          </a:prstGeom>
-          <a:solidFill>
-            <a:srgbClr val="FFD000"/>
-          </a:solidFill>
-          <a:ln>
-            <a:noFill/>
-          </a:ln>
-        </p:spPr>
-        <p:style>
-          <a:lnRef idx="1">
-            <a:schemeClr val="accent1"/>
-          </a:lnRef>
-          <a:fillRef idx="3">
-            <a:schemeClr val="accent1"/>
-          </a:fillRef>
-          <a:effectRef idx="2">
-            <a:schemeClr val="accent1"/>
-          </a:effectRef>
-          <a:fontRef idx="minor">
-            <a:schemeClr val="lt1"/>
-          </a:fontRef>
-        </p:style>
-        <p:txBody>
-          <a:bodyPr rtlCol="0" anchor="ctr"/>
-          <a:lstStyle/>
-          <a:p>
-            <a:pPr algn="ctr"/>
-          </a:p>
-        </p:txBody>
-      </p:sp>
-      <p:sp>
-        <p:nvSpPr>
-          <p:cNvPr id="10" name="TextBox 9"/>
-          <p:cNvSpPr txBox="1"/>
-          <p:nvPr/>
-        </p:nvSpPr>
-        <p:spPr>
-          <a:xfrm>
-            <a:off x="777240" y="2615184"/>
-            <a:ext cx="10774375" cy="822959"/>
-          </a:xfrm>
-          <a:prstGeom prst="rect">
-            <a:avLst/>
-          </a:prstGeom>
-          <a:noFill/>
-        </p:spPr>
-        <p:txBody>
-          <a:bodyPr wrap="square">
-            <a:spAutoFit/>
-          </a:bodyPr>
-          <a:lstStyle/>
-          <a:p>
-            <a:r>
-              <a:rPr sz="1200" b="1" i="0">
-                <a:solidFill>
-                  <a:srgbClr val="FFD000"/>
-                </a:solidFill>
-                <a:latin typeface="Calibri"/>
-              </a:rPr>
-              <a:t>Aclaración</a:t>
+              <a:t>–   </a:t>
+            </a:r>
+            <a:r>
+              <a:rPr sz="2000" b="1" i="0">
+                <a:solidFill>
+                  <a:srgbClr val="333333"/>
+                </a:solidFill>
+                <a:latin typeface="Calibri"/>
+              </a:rPr>
+              <a:t>Herramienta:</a:t>
+            </a:r>
+            <a:r>
+              <a:rPr sz="2000" b="0" i="0">
+                <a:solidFill>
+                  <a:srgbClr val="333333"/>
+                </a:solidFill>
+                <a:latin typeface="Calibri"/>
+              </a:rPr>
+              <a:t> Visual Studio Code (Java)</a:t>
             </a:r>
           </a:p>
           <a:p>
             <a:pPr>
-              <a:spcBef>
-                <a:spcPts val="400"/>
-              </a:spcBef>
+              <a:spcAft>
+                <a:spcPts val="800"/>
+              </a:spcAft>
             </a:pPr>
             <a:r>
-              <a:rPr sz="1400" b="0" i="0">
+              <a:rPr sz="2000" b="0" i="0">
                 <a:solidFill>
                   <a:srgbClr val="333333"/>
                 </a:solidFill>
                 <a:latin typeface="Calibri"/>
               </a:rPr>
-              <a:t>Enunciado completo: Clases/Proyecto Integrador/ (VetCare).</a:t>
-            </a:r>
-          </a:p>
-        </p:txBody>
-      </p:sp>
-      <p:sp>
-        <p:nvSpPr>
-          <p:cNvPr id="11" name="Rounded Rectangle 10"/>
-          <p:cNvSpPr/>
-          <p:nvPr/>
-        </p:nvSpPr>
-        <p:spPr>
-          <a:xfrm>
-            <a:off x="457200" y="3694176"/>
-            <a:ext cx="11277295" cy="1051560"/>
-          </a:xfrm>
-          <a:prstGeom prst="roundRect">
-            <a:avLst>
-              <a:gd name="adj" fmla="val 12000"/>
-            </a:avLst>
-          </a:prstGeom>
-          <a:solidFill>
-            <a:srgbClr val="FBE4E4"/>
-          </a:solidFill>
-          <a:ln>
-            <a:noFill/>
-          </a:ln>
-        </p:spPr>
-        <p:style>
-          <a:lnRef idx="1">
-            <a:schemeClr val="accent1"/>
-          </a:lnRef>
-          <a:fillRef idx="3">
-            <a:schemeClr val="accent1"/>
-          </a:fillRef>
-          <a:effectRef idx="2">
-            <a:schemeClr val="accent1"/>
-          </a:effectRef>
-          <a:fontRef idx="minor">
-            <a:schemeClr val="lt1"/>
-          </a:fontRef>
-        </p:style>
-        <p:txBody>
-          <a:bodyPr rtlCol="0" anchor="ctr"/>
-          <a:lstStyle/>
-          <a:p>
-            <a:pPr algn="ctr"/>
-          </a:p>
-        </p:txBody>
-      </p:sp>
-      <p:sp>
-        <p:nvSpPr>
-          <p:cNvPr id="12" name="Rectangle 11"/>
-          <p:cNvSpPr/>
-          <p:nvPr/>
-        </p:nvSpPr>
-        <p:spPr>
-          <a:xfrm>
-            <a:off x="457200" y="3694176"/>
-            <a:ext cx="128016" cy="1051560"/>
-          </a:xfrm>
-          <a:prstGeom prst="rect">
-            <a:avLst/>
-          </a:prstGeom>
-          <a:solidFill>
-            <a:srgbClr val="A02030"/>
-          </a:solidFill>
-          <a:ln>
-            <a:noFill/>
-          </a:ln>
-        </p:spPr>
-        <p:style>
-          <a:lnRef idx="1">
-            <a:schemeClr val="accent1"/>
-          </a:lnRef>
-          <a:fillRef idx="3">
-            <a:schemeClr val="accent1"/>
-          </a:fillRef>
-          <a:effectRef idx="2">
-            <a:schemeClr val="accent1"/>
-          </a:effectRef>
-          <a:fontRef idx="minor">
-            <a:schemeClr val="lt1"/>
-          </a:fontRef>
-        </p:style>
-        <p:txBody>
-          <a:bodyPr rtlCol="0" anchor="ctr"/>
-          <a:lstStyle/>
-          <a:p>
-            <a:pPr algn="ctr"/>
-          </a:p>
-        </p:txBody>
-      </p:sp>
-      <p:sp>
-        <p:nvSpPr>
-          <p:cNvPr id="13" name="TextBox 12"/>
-          <p:cNvSpPr txBox="1"/>
-          <p:nvPr/>
-        </p:nvSpPr>
-        <p:spPr>
-          <a:xfrm>
-            <a:off x="777240" y="3831336"/>
-            <a:ext cx="10774375" cy="822959"/>
-          </a:xfrm>
-          <a:prstGeom prst="rect">
-            <a:avLst/>
-          </a:prstGeom>
-          <a:noFill/>
-        </p:spPr>
-        <p:txBody>
-          <a:bodyPr wrap="square">
-            <a:spAutoFit/>
-          </a:bodyPr>
-          <a:lstStyle/>
-          <a:p>
-            <a:r>
-              <a:rPr sz="1200" b="1" i="0">
-                <a:solidFill>
-                  <a:srgbClr val="A02030"/>
-                </a:solidFill>
-                <a:latin typeface="Calibri"/>
-              </a:rPr>
-              <a:t>Atención</a:t>
+              <a:t>–   </a:t>
+            </a:r>
+            <a:r>
+              <a:rPr sz="2000" b="1" i="0">
+                <a:solidFill>
+                  <a:srgbClr val="333333"/>
+                </a:solidFill>
+                <a:latin typeface="Calibri"/>
+              </a:rPr>
+              <a:t>Demo:</a:t>
+            </a:r>
+            <a:r>
+              <a:rPr sz="2000" b="0" i="0">
+                <a:solidFill>
+                  <a:srgbClr val="333333"/>
+                </a:solidFill>
+                <a:latin typeface="Calibri"/>
+              </a:rPr>
+              <a:t> El docente corre el guion de humo completo (abrir, registrar, buscar, cerrar, reabrir) y luego pone un breakpoint en el botón Registrar para mostrar con el debugger por qué una edad vacía estaba entrando como cero.</a:t>
             </a:r>
           </a:p>
           <a:p>
             <a:pPr>
-              <a:spcBef>
-                <a:spcPts val="400"/>
-              </a:spcBef>
+              <a:spcAft>
+                <a:spcPts val="800"/>
+              </a:spcAft>
             </a:pPr>
             <a:r>
-              <a:rPr sz="1400" b="0" i="0">
+              <a:rPr sz="2000" b="0" i="0">
                 <a:solidFill>
                   <a:srgbClr val="333333"/>
                 </a:solidFill>
                 <a:latin typeface="Calibri"/>
               </a:rPr>
-              <a:t>Entrega del taller, si el docente lo asigna · en la fecha que indique el docente.</a:t>
-            </a:r>
-          </a:p>
-        </p:txBody>
-      </p:sp>
-      <p:sp>
-        <p:nvSpPr>
-          <p:cNvPr id="14" name="TextBox 13"/>
+              <a:t>–   Mismo dominio VetCare — no otro ejemplo.</a:t>
+            </a:r>
+          </a:p>
+        </p:txBody>
+      </p:sp>
+      <p:sp>
+        <p:nvSpPr>
+          <p:cNvPr id="6" name="TextBox 5"/>
           <p:cNvSpPr txBox="1"/>
           <p:nvPr/>
         </p:nvSpPr>
@@ -5191,6 +4641,3163 @@
         <p:spPr>
           <a:xfrm>
             <a:off x="0" y="0"/>
+            <a:ext cx="12191695" cy="960120"/>
+          </a:xfrm>
+          <a:prstGeom prst="rect">
+            <a:avLst/>
+          </a:prstGeom>
+          <a:solidFill>
+            <a:srgbClr val="095292"/>
+          </a:solidFill>
+          <a:ln>
+            <a:noFill/>
+          </a:ln>
+        </p:spPr>
+        <p:style>
+          <a:lnRef idx="1">
+            <a:schemeClr val="accent1"/>
+          </a:lnRef>
+          <a:fillRef idx="3">
+            <a:schemeClr val="accent1"/>
+          </a:fillRef>
+          <a:effectRef idx="2">
+            <a:schemeClr val="accent1"/>
+          </a:effectRef>
+          <a:fontRef idx="minor">
+            <a:schemeClr val="lt1"/>
+          </a:fontRef>
+        </p:style>
+        <p:txBody>
+          <a:bodyPr rtlCol="0" anchor="ctr"/>
+          <a:lstStyle/>
+          <a:p>
+            <a:pPr algn="ctr"/>
+          </a:p>
+        </p:txBody>
+      </p:sp>
+      <p:sp>
+        <p:nvSpPr>
+          <p:cNvPr id="3" name="Rectangle 2"/>
+          <p:cNvSpPr/>
+          <p:nvPr/>
+        </p:nvSpPr>
+        <p:spPr>
+          <a:xfrm>
+            <a:off x="0" y="960120"/>
+            <a:ext cx="12191695" cy="41148"/>
+          </a:xfrm>
+          <a:prstGeom prst="rect">
+            <a:avLst/>
+          </a:prstGeom>
+          <a:solidFill>
+            <a:srgbClr val="FFD000"/>
+          </a:solidFill>
+          <a:ln>
+            <a:noFill/>
+          </a:ln>
+        </p:spPr>
+        <p:style>
+          <a:lnRef idx="1">
+            <a:schemeClr val="accent1"/>
+          </a:lnRef>
+          <a:fillRef idx="3">
+            <a:schemeClr val="accent1"/>
+          </a:fillRef>
+          <a:effectRef idx="2">
+            <a:schemeClr val="accent1"/>
+          </a:effectRef>
+          <a:fontRef idx="minor">
+            <a:schemeClr val="lt1"/>
+          </a:fontRef>
+        </p:style>
+        <p:txBody>
+          <a:bodyPr rtlCol="0" anchor="ctr"/>
+          <a:lstStyle/>
+          <a:p>
+            <a:pPr algn="ctr"/>
+          </a:p>
+        </p:txBody>
+      </p:sp>
+      <p:sp>
+        <p:nvSpPr>
+          <p:cNvPr id="4" name="TextBox 3"/>
+          <p:cNvSpPr txBox="1"/>
+          <p:nvPr/>
+        </p:nvSpPr>
+        <p:spPr>
+          <a:xfrm>
+            <a:off x="457200" y="164592"/>
+            <a:ext cx="11277295" cy="502920"/>
+          </a:xfrm>
+          <a:prstGeom prst="rect">
+            <a:avLst/>
+          </a:prstGeom>
+          <a:noFill/>
+        </p:spPr>
+        <p:txBody>
+          <a:bodyPr wrap="square">
+            <a:spAutoFit/>
+          </a:bodyPr>
+          <a:lstStyle/>
+          <a:p>
+            <a:r>
+              <a:rPr sz="2600" b="1" i="0">
+                <a:solidFill>
+                  <a:srgbClr val="FFFFFF"/>
+                </a:solidFill>
+                <a:latin typeface="Calibri"/>
+              </a:rPr>
+              <a:t>Taller PI — por que importa</a:t>
+            </a:r>
+          </a:p>
+        </p:txBody>
+      </p:sp>
+      <p:sp>
+        <p:nvSpPr>
+          <p:cNvPr id="5" name="TextBox 4"/>
+          <p:cNvSpPr txBox="1"/>
+          <p:nvPr/>
+        </p:nvSpPr>
+        <p:spPr>
+          <a:xfrm>
+            <a:off x="457200" y="1170432"/>
+            <a:ext cx="11277295" cy="5230368"/>
+          </a:xfrm>
+          <a:prstGeom prst="rect">
+            <a:avLst/>
+          </a:prstGeom>
+          <a:noFill/>
+        </p:spPr>
+        <p:txBody>
+          <a:bodyPr wrap="square">
+            <a:spAutoFit/>
+          </a:bodyPr>
+          <a:lstStyle/>
+          <a:p>
+            <a:pPr>
+              <a:spcAft>
+                <a:spcPts val="800"/>
+              </a:spcAft>
+            </a:pPr>
+            <a:r>
+              <a:rPr sz="2000" b="0" i="0">
+                <a:solidFill>
+                  <a:srgbClr val="333333"/>
+                </a:solidFill>
+                <a:latin typeface="Calibri"/>
+              </a:rPr>
+              <a:t>–   </a:t>
+            </a:r>
+            <a:r>
+              <a:rPr sz="2000" b="1" i="0">
+                <a:solidFill>
+                  <a:srgbClr val="333333"/>
+                </a:solidFill>
+                <a:latin typeface="Calibri"/>
+              </a:rPr>
+              <a:t>Por que importa al PI:</a:t>
+            </a:r>
+            <a:r>
+              <a:rPr sz="2000" b="0" i="0">
+                <a:solidFill>
+                  <a:srgbClr val="333333"/>
+                </a:solidFill>
+                <a:latin typeface="Calibri"/>
+              </a:rPr>
+              <a:t> hasta hoy VetCare eran cuatro talleres que funcionaban por separado; a partir de esta clase es un producto que la clínica Huellitas podría instalar, y eso es exactamente lo que se sustenta al final.</a:t>
+            </a:r>
+          </a:p>
+          <a:p>
+            <a:pPr>
+              <a:spcAft>
+                <a:spcPts val="800"/>
+              </a:spcAft>
+            </a:pPr>
+            <a:r>
+              <a:rPr sz="2000" b="0" i="0">
+                <a:solidFill>
+                  <a:srgbClr val="333333"/>
+                </a:solidFill>
+                <a:latin typeface="Calibri"/>
+              </a:rPr>
+              <a:t>–   Todo lo que se construyó desde la clase 1 (POO, colecciones, GUI, try-catch y persistencia) tiene que aparecer funcionando en el mismo ejecutable: la integración es donde el PI se comprueba como un todo.</a:t>
+            </a:r>
+          </a:p>
+          <a:p>
+            <a:pPr>
+              <a:spcAft>
+                <a:spcPts val="800"/>
+              </a:spcAft>
+            </a:pPr>
+            <a:r>
+              <a:rPr sz="2000" b="0" i="0">
+                <a:solidFill>
+                  <a:srgbClr val="333333"/>
+                </a:solidFill>
+                <a:latin typeface="Calibri"/>
+              </a:rPr>
+              <a:t>–   La bitácora de integración con el debugger es la evidencia de que el equipo sabe diagnosticar y no solo adivinar, que es lo que se evalúa en la defensa del proyecto.</a:t>
+            </a:r>
+          </a:p>
+        </p:txBody>
+      </p:sp>
+      <p:sp>
+        <p:nvSpPr>
+          <p:cNvPr id="6" name="TextBox 5"/>
+          <p:cNvSpPr txBox="1"/>
+          <p:nvPr/>
+        </p:nvSpPr>
+        <p:spPr>
+          <a:xfrm>
+            <a:off x="11185855" y="6473952"/>
+            <a:ext cx="640080" cy="274320"/>
+          </a:xfrm>
+          <a:prstGeom prst="rect">
+            <a:avLst/>
+          </a:prstGeom>
+          <a:noFill/>
+        </p:spPr>
+        <p:txBody>
+          <a:bodyPr wrap="square">
+            <a:spAutoFit/>
+          </a:bodyPr>
+          <a:lstStyle/>
+          <a:p>
+            <a:pPr algn="r"/>
+            <a:r>
+              <a:rPr sz="1100" b="0" i="0">
+                <a:solidFill>
+                  <a:srgbClr val="666666"/>
+                </a:solidFill>
+                <a:latin typeface="Calibri"/>
+              </a:rPr>
+              <a:t>13</a:t>
+            </a:r>
+          </a:p>
+        </p:txBody>
+      </p:sp>
+    </p:spTree>
+  </p:cSld>
+  <p:clrMapOvr>
+    <a:masterClrMapping/>
+  </p:clrMapOvr>
+</p:sld>
+</file>
+
+<file path=ppt/slides/slide14.xml><?xml version="1.0" encoding="utf-8"?>
+<p:sld xmlns:a="http://schemas.openxmlformats.org/drawingml/2006/main" xmlns:p="http://schemas.openxmlformats.org/presentationml/2006/main" xmlns:r="http://schemas.openxmlformats.org/officeDocument/2006/relationships">
+  <p:cSld>
+    <p:bg>
+      <p:bgPr>
+        <a:solidFill>
+          <a:srgbClr val="FFFFFF"/>
+        </a:solidFill>
+        <a:effectLst/>
+      </p:bgPr>
+    </p:bg>
+    <p:spTree>
+      <p:nvGrpSpPr>
+        <p:cNvPr id="1" name=""/>
+        <p:cNvGrpSpPr/>
+        <p:nvPr/>
+      </p:nvGrpSpPr>
+      <p:grpSpPr/>
+      <p:sp>
+        <p:nvSpPr>
+          <p:cNvPr id="2" name="Rectangle 1"/>
+          <p:cNvSpPr/>
+          <p:nvPr/>
+        </p:nvSpPr>
+        <p:spPr>
+          <a:xfrm>
+            <a:off x="0" y="0"/>
+            <a:ext cx="12191695" cy="960120"/>
+          </a:xfrm>
+          <a:prstGeom prst="rect">
+            <a:avLst/>
+          </a:prstGeom>
+          <a:solidFill>
+            <a:srgbClr val="095292"/>
+          </a:solidFill>
+          <a:ln>
+            <a:noFill/>
+          </a:ln>
+        </p:spPr>
+        <p:style>
+          <a:lnRef idx="1">
+            <a:schemeClr val="accent1"/>
+          </a:lnRef>
+          <a:fillRef idx="3">
+            <a:schemeClr val="accent1"/>
+          </a:fillRef>
+          <a:effectRef idx="2">
+            <a:schemeClr val="accent1"/>
+          </a:effectRef>
+          <a:fontRef idx="minor">
+            <a:schemeClr val="lt1"/>
+          </a:fontRef>
+        </p:style>
+        <p:txBody>
+          <a:bodyPr rtlCol="0" anchor="ctr"/>
+          <a:lstStyle/>
+          <a:p>
+            <a:pPr algn="ctr"/>
+          </a:p>
+        </p:txBody>
+      </p:sp>
+      <p:sp>
+        <p:nvSpPr>
+          <p:cNvPr id="3" name="Rectangle 2"/>
+          <p:cNvSpPr/>
+          <p:nvPr/>
+        </p:nvSpPr>
+        <p:spPr>
+          <a:xfrm>
+            <a:off x="0" y="960120"/>
+            <a:ext cx="12191695" cy="41148"/>
+          </a:xfrm>
+          <a:prstGeom prst="rect">
+            <a:avLst/>
+          </a:prstGeom>
+          <a:solidFill>
+            <a:srgbClr val="FFD000"/>
+          </a:solidFill>
+          <a:ln>
+            <a:noFill/>
+          </a:ln>
+        </p:spPr>
+        <p:style>
+          <a:lnRef idx="1">
+            <a:schemeClr val="accent1"/>
+          </a:lnRef>
+          <a:fillRef idx="3">
+            <a:schemeClr val="accent1"/>
+          </a:fillRef>
+          <a:effectRef idx="2">
+            <a:schemeClr val="accent1"/>
+          </a:effectRef>
+          <a:fontRef idx="minor">
+            <a:schemeClr val="lt1"/>
+          </a:fontRef>
+        </p:style>
+        <p:txBody>
+          <a:bodyPr rtlCol="0" anchor="ctr"/>
+          <a:lstStyle/>
+          <a:p>
+            <a:pPr algn="ctr"/>
+          </a:p>
+        </p:txBody>
+      </p:sp>
+      <p:sp>
+        <p:nvSpPr>
+          <p:cNvPr id="4" name="TextBox 3"/>
+          <p:cNvSpPr txBox="1"/>
+          <p:nvPr/>
+        </p:nvSpPr>
+        <p:spPr>
+          <a:xfrm>
+            <a:off x="457200" y="164592"/>
+            <a:ext cx="11277295" cy="502920"/>
+          </a:xfrm>
+          <a:prstGeom prst="rect">
+            <a:avLst/>
+          </a:prstGeom>
+          <a:noFill/>
+        </p:spPr>
+        <p:txBody>
+          <a:bodyPr wrap="square">
+            <a:spAutoFit/>
+          </a:bodyPr>
+          <a:lstStyle/>
+          <a:p>
+            <a:r>
+              <a:rPr sz="2600" b="1" i="0">
+                <a:solidFill>
+                  <a:srgbClr val="FFFFFF"/>
+                </a:solidFill>
+                <a:latin typeface="Calibri"/>
+              </a:rPr>
+              <a:t>Taller PI — punto de partida</a:t>
+            </a:r>
+          </a:p>
+        </p:txBody>
+      </p:sp>
+      <p:sp>
+        <p:nvSpPr>
+          <p:cNvPr id="5" name="TextBox 4"/>
+          <p:cNvSpPr txBox="1"/>
+          <p:nvPr/>
+        </p:nvSpPr>
+        <p:spPr>
+          <a:xfrm>
+            <a:off x="457200" y="1170432"/>
+            <a:ext cx="11277295" cy="5230368"/>
+          </a:xfrm>
+          <a:prstGeom prst="rect">
+            <a:avLst/>
+          </a:prstGeom>
+          <a:noFill/>
+        </p:spPr>
+        <p:txBody>
+          <a:bodyPr wrap="square">
+            <a:spAutoFit/>
+          </a:bodyPr>
+          <a:lstStyle/>
+          <a:p>
+            <a:pPr>
+              <a:spcAft>
+                <a:spcPts val="800"/>
+              </a:spcAft>
+            </a:pPr>
+            <a:r>
+              <a:rPr sz="2000" b="0" i="0">
+                <a:solidFill>
+                  <a:srgbClr val="333333"/>
+                </a:solidFill>
+                <a:latin typeface="Calibri"/>
+              </a:rPr>
+              <a:t>–   Cada estudiante llega con los cuatro módulos funcionando por separado y ya revisados por otro compañero en la clase anterior, con su plan de corrección en la mano.</a:t>
+            </a:r>
+          </a:p>
+          <a:p>
+            <a:pPr>
+              <a:spcAft>
+                <a:spcPts val="800"/>
+              </a:spcAft>
+            </a:pPr>
+            <a:r>
+              <a:rPr sz="2000" b="0" i="0">
+                <a:solidFill>
+                  <a:srgbClr val="333333"/>
+                </a:solidFill>
+                <a:latin typeface="Calibri"/>
+              </a:rPr>
+              <a:t>–   Existe un archivo mascotas.csv con datos reales de pruebas anteriores, y al menos una línea de ese archivo está dañada a propósito para probar el arranque.</a:t>
+            </a:r>
+          </a:p>
+          <a:p>
+            <a:pPr>
+              <a:spcAft>
+                <a:spcPts val="800"/>
+              </a:spcAft>
+            </a:pPr>
+            <a:r>
+              <a:rPr sz="2000" b="0" i="0">
+                <a:solidFill>
+                  <a:srgbClr val="333333"/>
+                </a:solidFill>
+                <a:latin typeface="Calibri"/>
+              </a:rPr>
+              <a:t>–   El contrato acordado del archivo es id;nombre;especie;edad;cedula_dueno y todos deben respetarlo tal cual para poder intercambiar archivos de datos.</a:t>
+            </a:r>
+          </a:p>
+        </p:txBody>
+      </p:sp>
+      <p:sp>
+        <p:nvSpPr>
+          <p:cNvPr id="6" name="TextBox 5"/>
+          <p:cNvSpPr txBox="1"/>
+          <p:nvPr/>
+        </p:nvSpPr>
+        <p:spPr>
+          <a:xfrm>
+            <a:off x="11185855" y="6473952"/>
+            <a:ext cx="640080" cy="274320"/>
+          </a:xfrm>
+          <a:prstGeom prst="rect">
+            <a:avLst/>
+          </a:prstGeom>
+          <a:noFill/>
+        </p:spPr>
+        <p:txBody>
+          <a:bodyPr wrap="square">
+            <a:spAutoFit/>
+          </a:bodyPr>
+          <a:lstStyle/>
+          <a:p>
+            <a:pPr algn="r"/>
+            <a:r>
+              <a:rPr sz="1100" b="0" i="0">
+                <a:solidFill>
+                  <a:srgbClr val="666666"/>
+                </a:solidFill>
+                <a:latin typeface="Calibri"/>
+              </a:rPr>
+              <a:t>14</a:t>
+            </a:r>
+          </a:p>
+        </p:txBody>
+      </p:sp>
+    </p:spTree>
+  </p:cSld>
+  <p:clrMapOvr>
+    <a:masterClrMapping/>
+  </p:clrMapOvr>
+</p:sld>
+</file>
+
+<file path=ppt/slides/slide15.xml><?xml version="1.0" encoding="utf-8"?>
+<p:sld xmlns:a="http://schemas.openxmlformats.org/drawingml/2006/main" xmlns:p="http://schemas.openxmlformats.org/presentationml/2006/main" xmlns:r="http://schemas.openxmlformats.org/officeDocument/2006/relationships">
+  <p:cSld>
+    <p:bg>
+      <p:bgPr>
+        <a:solidFill>
+          <a:srgbClr val="FFFFFF"/>
+        </a:solidFill>
+        <a:effectLst/>
+      </p:bgPr>
+    </p:bg>
+    <p:spTree>
+      <p:nvGrpSpPr>
+        <p:cNvPr id="1" name=""/>
+        <p:cNvGrpSpPr/>
+        <p:nvPr/>
+      </p:nvGrpSpPr>
+      <p:grpSpPr/>
+      <p:sp>
+        <p:nvSpPr>
+          <p:cNvPr id="2" name="Rectangle 1"/>
+          <p:cNvSpPr/>
+          <p:nvPr/>
+        </p:nvSpPr>
+        <p:spPr>
+          <a:xfrm>
+            <a:off x="0" y="0"/>
+            <a:ext cx="12191695" cy="960120"/>
+          </a:xfrm>
+          <a:prstGeom prst="rect">
+            <a:avLst/>
+          </a:prstGeom>
+          <a:solidFill>
+            <a:srgbClr val="095292"/>
+          </a:solidFill>
+          <a:ln>
+            <a:noFill/>
+          </a:ln>
+        </p:spPr>
+        <p:style>
+          <a:lnRef idx="1">
+            <a:schemeClr val="accent1"/>
+          </a:lnRef>
+          <a:fillRef idx="3">
+            <a:schemeClr val="accent1"/>
+          </a:fillRef>
+          <a:effectRef idx="2">
+            <a:schemeClr val="accent1"/>
+          </a:effectRef>
+          <a:fontRef idx="minor">
+            <a:schemeClr val="lt1"/>
+          </a:fontRef>
+        </p:style>
+        <p:txBody>
+          <a:bodyPr rtlCol="0" anchor="ctr"/>
+          <a:lstStyle/>
+          <a:p>
+            <a:pPr algn="ctr"/>
+          </a:p>
+        </p:txBody>
+      </p:sp>
+      <p:sp>
+        <p:nvSpPr>
+          <p:cNvPr id="3" name="Rectangle 2"/>
+          <p:cNvSpPr/>
+          <p:nvPr/>
+        </p:nvSpPr>
+        <p:spPr>
+          <a:xfrm>
+            <a:off x="0" y="960120"/>
+            <a:ext cx="12191695" cy="41148"/>
+          </a:xfrm>
+          <a:prstGeom prst="rect">
+            <a:avLst/>
+          </a:prstGeom>
+          <a:solidFill>
+            <a:srgbClr val="FFD000"/>
+          </a:solidFill>
+          <a:ln>
+            <a:noFill/>
+          </a:ln>
+        </p:spPr>
+        <p:style>
+          <a:lnRef idx="1">
+            <a:schemeClr val="accent1"/>
+          </a:lnRef>
+          <a:fillRef idx="3">
+            <a:schemeClr val="accent1"/>
+          </a:fillRef>
+          <a:effectRef idx="2">
+            <a:schemeClr val="accent1"/>
+          </a:effectRef>
+          <a:fontRef idx="minor">
+            <a:schemeClr val="lt1"/>
+          </a:fontRef>
+        </p:style>
+        <p:txBody>
+          <a:bodyPr rtlCol="0" anchor="ctr"/>
+          <a:lstStyle/>
+          <a:p>
+            <a:pPr algn="ctr"/>
+          </a:p>
+        </p:txBody>
+      </p:sp>
+      <p:sp>
+        <p:nvSpPr>
+          <p:cNvPr id="4" name="TextBox 3"/>
+          <p:cNvSpPr txBox="1"/>
+          <p:nvPr/>
+        </p:nvSpPr>
+        <p:spPr>
+          <a:xfrm>
+            <a:off x="457200" y="164592"/>
+            <a:ext cx="11277295" cy="502920"/>
+          </a:xfrm>
+          <a:prstGeom prst="rect">
+            <a:avLst/>
+          </a:prstGeom>
+          <a:noFill/>
+        </p:spPr>
+        <p:txBody>
+          <a:bodyPr wrap="square">
+            <a:spAutoFit/>
+          </a:bodyPr>
+          <a:lstStyle/>
+          <a:p>
+            <a:r>
+              <a:rPr sz="2600" b="1" i="0">
+                <a:solidFill>
+                  <a:srgbClr val="FFFFFF"/>
+                </a:solidFill>
+                <a:latin typeface="Calibri"/>
+              </a:rPr>
+              <a:t>Taller PI — pasos guiados</a:t>
+            </a:r>
+          </a:p>
+        </p:txBody>
+      </p:sp>
+      <p:sp>
+        <p:nvSpPr>
+          <p:cNvPr id="5" name="Rounded Rectangle 4"/>
+          <p:cNvSpPr/>
+          <p:nvPr/>
+        </p:nvSpPr>
+        <p:spPr>
+          <a:xfrm>
+            <a:off x="457200" y="1234440"/>
+            <a:ext cx="11277295" cy="950976"/>
+          </a:xfrm>
+          <a:prstGeom prst="roundRect">
+            <a:avLst>
+              <a:gd name="adj" fmla="val 12000"/>
+            </a:avLst>
+          </a:prstGeom>
+          <a:solidFill>
+            <a:srgbClr val="F2F2F2"/>
+          </a:solidFill>
+          <a:ln>
+            <a:noFill/>
+          </a:ln>
+        </p:spPr>
+        <p:style>
+          <a:lnRef idx="1">
+            <a:schemeClr val="accent1"/>
+          </a:lnRef>
+          <a:fillRef idx="3">
+            <a:schemeClr val="accent1"/>
+          </a:fillRef>
+          <a:effectRef idx="2">
+            <a:schemeClr val="accent1"/>
+          </a:effectRef>
+          <a:fontRef idx="minor">
+            <a:schemeClr val="lt1"/>
+          </a:fontRef>
+        </p:style>
+        <p:txBody>
+          <a:bodyPr rtlCol="0" anchor="ctr"/>
+          <a:lstStyle/>
+          <a:p>
+            <a:pPr algn="ctr"/>
+          </a:p>
+        </p:txBody>
+      </p:sp>
+      <p:sp>
+        <p:nvSpPr>
+          <p:cNvPr id="6" name="Rounded Rectangle 5"/>
+          <p:cNvSpPr/>
+          <p:nvPr/>
+        </p:nvSpPr>
+        <p:spPr>
+          <a:xfrm>
+            <a:off x="594360" y="1490472"/>
+            <a:ext cx="438912" cy="438912"/>
+          </a:xfrm>
+          <a:prstGeom prst="roundRect">
+            <a:avLst>
+              <a:gd name="adj" fmla="val 12000"/>
+            </a:avLst>
+          </a:prstGeom>
+          <a:solidFill>
+            <a:srgbClr val="095292"/>
+          </a:solidFill>
+          <a:ln>
+            <a:noFill/>
+          </a:ln>
+        </p:spPr>
+        <p:style>
+          <a:lnRef idx="1">
+            <a:schemeClr val="accent1"/>
+          </a:lnRef>
+          <a:fillRef idx="3">
+            <a:schemeClr val="accent1"/>
+          </a:fillRef>
+          <a:effectRef idx="2">
+            <a:schemeClr val="accent1"/>
+          </a:effectRef>
+          <a:fontRef idx="minor">
+            <a:schemeClr val="lt1"/>
+          </a:fontRef>
+        </p:style>
+        <p:txBody>
+          <a:bodyPr rtlCol="0" anchor="ctr"/>
+          <a:lstStyle/>
+          <a:p>
+            <a:pPr algn="ctr"/>
+          </a:p>
+        </p:txBody>
+      </p:sp>
+      <p:sp>
+        <p:nvSpPr>
+          <p:cNvPr id="7" name="TextBox 6"/>
+          <p:cNvSpPr txBox="1"/>
+          <p:nvPr/>
+        </p:nvSpPr>
+        <p:spPr>
+          <a:xfrm>
+            <a:off x="594360" y="1490472"/>
+            <a:ext cx="438912" cy="438912"/>
+          </a:xfrm>
+          <a:prstGeom prst="rect">
+            <a:avLst/>
+          </a:prstGeom>
+          <a:noFill/>
+        </p:spPr>
+        <p:txBody>
+          <a:bodyPr wrap="square" anchor="ctr"/>
+          <a:lstStyle/>
+          <a:p>
+            <a:pPr algn="ctr"/>
+            <a:r>
+              <a:rPr sz="1600" b="1" i="0">
+                <a:solidFill>
+                  <a:srgbClr val="FFFFFF"/>
+                </a:solidFill>
+                <a:latin typeface="Calibri"/>
+              </a:rPr>
+              <a:t>1</a:t>
+            </a:r>
+          </a:p>
+        </p:txBody>
+      </p:sp>
+      <p:sp>
+        <p:nvSpPr>
+          <p:cNvPr id="8" name="TextBox 7"/>
+          <p:cNvSpPr txBox="1"/>
+          <p:nvPr/>
+        </p:nvSpPr>
+        <p:spPr>
+          <a:xfrm>
+            <a:off x="1188720" y="1325880"/>
+            <a:ext cx="10271455" cy="786384"/>
+          </a:xfrm>
+          <a:prstGeom prst="rect">
+            <a:avLst/>
+          </a:prstGeom>
+          <a:noFill/>
+        </p:spPr>
+        <p:txBody>
+          <a:bodyPr wrap="square" anchor="ctr"/>
+          <a:lstStyle/>
+          <a:p>
+            <a:r>
+              <a:rPr sz="1400" b="1" i="0">
+                <a:solidFill>
+                  <a:srgbClr val="095292"/>
+                </a:solidFill>
+                <a:latin typeface="Calibri"/>
+              </a:rPr>
+              <a:t>Organice el proyecto en los paquetes vetcare.modelo, vetcare.datos, vetcare.logica y vetcare.ui, deje un único método main en la clase de arranque, elimine cualquier otro main que haya quedado de los talleres anteriores y verifique que la aplicación abre desde ese único punto.</a:t>
+            </a:r>
+          </a:p>
+        </p:txBody>
+      </p:sp>
+      <p:sp>
+        <p:nvSpPr>
+          <p:cNvPr id="9" name="Rounded Rectangle 8"/>
+          <p:cNvSpPr/>
+          <p:nvPr/>
+        </p:nvSpPr>
+        <p:spPr>
+          <a:xfrm>
+            <a:off x="457200" y="2276856"/>
+            <a:ext cx="11277295" cy="950976"/>
+          </a:xfrm>
+          <a:prstGeom prst="roundRect">
+            <a:avLst>
+              <a:gd name="adj" fmla="val 12000"/>
+            </a:avLst>
+          </a:prstGeom>
+          <a:solidFill>
+            <a:srgbClr val="E8F4FA"/>
+          </a:solidFill>
+          <a:ln>
+            <a:noFill/>
+          </a:ln>
+        </p:spPr>
+        <p:style>
+          <a:lnRef idx="1">
+            <a:schemeClr val="accent1"/>
+          </a:lnRef>
+          <a:fillRef idx="3">
+            <a:schemeClr val="accent1"/>
+          </a:fillRef>
+          <a:effectRef idx="2">
+            <a:schemeClr val="accent1"/>
+          </a:effectRef>
+          <a:fontRef idx="minor">
+            <a:schemeClr val="lt1"/>
+          </a:fontRef>
+        </p:style>
+        <p:txBody>
+          <a:bodyPr rtlCol="0" anchor="ctr"/>
+          <a:lstStyle/>
+          <a:p>
+            <a:pPr algn="ctr"/>
+          </a:p>
+        </p:txBody>
+      </p:sp>
+      <p:sp>
+        <p:nvSpPr>
+          <p:cNvPr id="10" name="Rounded Rectangle 9"/>
+          <p:cNvSpPr/>
+          <p:nvPr/>
+        </p:nvSpPr>
+        <p:spPr>
+          <a:xfrm>
+            <a:off x="594360" y="2532888"/>
+            <a:ext cx="438912" cy="438912"/>
+          </a:xfrm>
+          <a:prstGeom prst="roundRect">
+            <a:avLst>
+              <a:gd name="adj" fmla="val 12000"/>
+            </a:avLst>
+          </a:prstGeom>
+          <a:solidFill>
+            <a:srgbClr val="095292"/>
+          </a:solidFill>
+          <a:ln>
+            <a:noFill/>
+          </a:ln>
+        </p:spPr>
+        <p:style>
+          <a:lnRef idx="1">
+            <a:schemeClr val="accent1"/>
+          </a:lnRef>
+          <a:fillRef idx="3">
+            <a:schemeClr val="accent1"/>
+          </a:fillRef>
+          <a:effectRef idx="2">
+            <a:schemeClr val="accent1"/>
+          </a:effectRef>
+          <a:fontRef idx="minor">
+            <a:schemeClr val="lt1"/>
+          </a:fontRef>
+        </p:style>
+        <p:txBody>
+          <a:bodyPr rtlCol="0" anchor="ctr"/>
+          <a:lstStyle/>
+          <a:p>
+            <a:pPr algn="ctr"/>
+          </a:p>
+        </p:txBody>
+      </p:sp>
+      <p:sp>
+        <p:nvSpPr>
+          <p:cNvPr id="11" name="TextBox 10"/>
+          <p:cNvSpPr txBox="1"/>
+          <p:nvPr/>
+        </p:nvSpPr>
+        <p:spPr>
+          <a:xfrm>
+            <a:off x="594360" y="2532888"/>
+            <a:ext cx="438912" cy="438912"/>
+          </a:xfrm>
+          <a:prstGeom prst="rect">
+            <a:avLst/>
+          </a:prstGeom>
+          <a:noFill/>
+        </p:spPr>
+        <p:txBody>
+          <a:bodyPr wrap="square" anchor="ctr"/>
+          <a:lstStyle/>
+          <a:p>
+            <a:pPr algn="ctr"/>
+            <a:r>
+              <a:rPr sz="1600" b="1" i="0">
+                <a:solidFill>
+                  <a:srgbClr val="FFFFFF"/>
+                </a:solidFill>
+                <a:latin typeface="Calibri"/>
+              </a:rPr>
+              <a:t>2</a:t>
+            </a:r>
+          </a:p>
+        </p:txBody>
+      </p:sp>
+      <p:sp>
+        <p:nvSpPr>
+          <p:cNvPr id="12" name="TextBox 11"/>
+          <p:cNvSpPr txBox="1"/>
+          <p:nvPr/>
+        </p:nvSpPr>
+        <p:spPr>
+          <a:xfrm>
+            <a:off x="1188720" y="2368296"/>
+            <a:ext cx="10271455" cy="786384"/>
+          </a:xfrm>
+          <a:prstGeom prst="rect">
+            <a:avLst/>
+          </a:prstGeom>
+          <a:noFill/>
+        </p:spPr>
+        <p:txBody>
+          <a:bodyPr wrap="square" anchor="ctr"/>
+          <a:lstStyle/>
+          <a:p>
+            <a:r>
+              <a:rPr sz="1400" b="1" i="0">
+                <a:solidFill>
+                  <a:srgbClr val="095292"/>
+                </a:solidFill>
+                <a:latin typeface="Calibri"/>
+              </a:rPr>
+              <a:t>Asegure una sola instancia: cree el repositorio y el servicio en el main y páselos por constructor a la ventana; ponga un breakpoint en el botón Registrar y otro en el cierre, y compruebe en la ventana Variables que el objeto servicio tiene el mismo identificador en ambos puntos.</a:t>
+            </a:r>
+          </a:p>
+        </p:txBody>
+      </p:sp>
+      <p:sp>
+        <p:nvSpPr>
+          <p:cNvPr id="13" name="Rounded Rectangle 12"/>
+          <p:cNvSpPr/>
+          <p:nvPr/>
+        </p:nvSpPr>
+        <p:spPr>
+          <a:xfrm>
+            <a:off x="457200" y="3319272"/>
+            <a:ext cx="11277295" cy="950976"/>
+          </a:xfrm>
+          <a:prstGeom prst="roundRect">
+            <a:avLst>
+              <a:gd name="adj" fmla="val 12000"/>
+            </a:avLst>
+          </a:prstGeom>
+          <a:solidFill>
+            <a:srgbClr val="F2F2F2"/>
+          </a:solidFill>
+          <a:ln>
+            <a:noFill/>
+          </a:ln>
+        </p:spPr>
+        <p:style>
+          <a:lnRef idx="1">
+            <a:schemeClr val="accent1"/>
+          </a:lnRef>
+          <a:fillRef idx="3">
+            <a:schemeClr val="accent1"/>
+          </a:fillRef>
+          <a:effectRef idx="2">
+            <a:schemeClr val="accent1"/>
+          </a:effectRef>
+          <a:fontRef idx="minor">
+            <a:schemeClr val="lt1"/>
+          </a:fontRef>
+        </p:style>
+        <p:txBody>
+          <a:bodyPr rtlCol="0" anchor="ctr"/>
+          <a:lstStyle/>
+          <a:p>
+            <a:pPr algn="ctr"/>
+          </a:p>
+        </p:txBody>
+      </p:sp>
+      <p:sp>
+        <p:nvSpPr>
+          <p:cNvPr id="14" name="Rounded Rectangle 13"/>
+          <p:cNvSpPr/>
+          <p:nvPr/>
+        </p:nvSpPr>
+        <p:spPr>
+          <a:xfrm>
+            <a:off x="594360" y="3575304"/>
+            <a:ext cx="438912" cy="438912"/>
+          </a:xfrm>
+          <a:prstGeom prst="roundRect">
+            <a:avLst>
+              <a:gd name="adj" fmla="val 12000"/>
+            </a:avLst>
+          </a:prstGeom>
+          <a:solidFill>
+            <a:srgbClr val="095292"/>
+          </a:solidFill>
+          <a:ln>
+            <a:noFill/>
+          </a:ln>
+        </p:spPr>
+        <p:style>
+          <a:lnRef idx="1">
+            <a:schemeClr val="accent1"/>
+          </a:lnRef>
+          <a:fillRef idx="3">
+            <a:schemeClr val="accent1"/>
+          </a:fillRef>
+          <a:effectRef idx="2">
+            <a:schemeClr val="accent1"/>
+          </a:effectRef>
+          <a:fontRef idx="minor">
+            <a:schemeClr val="lt1"/>
+          </a:fontRef>
+        </p:style>
+        <p:txBody>
+          <a:bodyPr rtlCol="0" anchor="ctr"/>
+          <a:lstStyle/>
+          <a:p>
+            <a:pPr algn="ctr"/>
+          </a:p>
+        </p:txBody>
+      </p:sp>
+      <p:sp>
+        <p:nvSpPr>
+          <p:cNvPr id="15" name="TextBox 14"/>
+          <p:cNvSpPr txBox="1"/>
+          <p:nvPr/>
+        </p:nvSpPr>
+        <p:spPr>
+          <a:xfrm>
+            <a:off x="594360" y="3575304"/>
+            <a:ext cx="438912" cy="438912"/>
+          </a:xfrm>
+          <a:prstGeom prst="rect">
+            <a:avLst/>
+          </a:prstGeom>
+          <a:noFill/>
+        </p:spPr>
+        <p:txBody>
+          <a:bodyPr wrap="square" anchor="ctr"/>
+          <a:lstStyle/>
+          <a:p>
+            <a:pPr algn="ctr"/>
+            <a:r>
+              <a:rPr sz="1600" b="1" i="0">
+                <a:solidFill>
+                  <a:srgbClr val="FFFFFF"/>
+                </a:solidFill>
+                <a:latin typeface="Calibri"/>
+              </a:rPr>
+              <a:t>3</a:t>
+            </a:r>
+          </a:p>
+        </p:txBody>
+      </p:sp>
+      <p:sp>
+        <p:nvSpPr>
+          <p:cNvPr id="16" name="TextBox 15"/>
+          <p:cNvSpPr txBox="1"/>
+          <p:nvPr/>
+        </p:nvSpPr>
+        <p:spPr>
+          <a:xfrm>
+            <a:off x="1188720" y="3410712"/>
+            <a:ext cx="10271455" cy="786384"/>
+          </a:xfrm>
+          <a:prstGeom prst="rect">
+            <a:avLst/>
+          </a:prstGeom>
+          <a:noFill/>
+        </p:spPr>
+        <p:txBody>
+          <a:bodyPr wrap="square" anchor="ctr"/>
+          <a:lstStyle/>
+          <a:p>
+            <a:r>
+              <a:rPr sz="1500" b="1" i="0">
+                <a:solidFill>
+                  <a:srgbClr val="095292"/>
+                </a:solidFill>
+                <a:latin typeface="Calibri"/>
+              </a:rPr>
+              <a:t>Corra el guion de humo de cinco pasos (abrir con datos, registrar, buscar por ID, cerrar guardando, reabrir y verificar) y anote en qué paso exacto falla y con qué mensaje; si pasa completo a la primera, dañe una línea de mascotas.csv y vuelva a correrlo.</a:t>
+            </a:r>
+          </a:p>
+        </p:txBody>
+      </p:sp>
+      <p:sp>
+        <p:nvSpPr>
+          <p:cNvPr id="17" name="Rounded Rectangle 16"/>
+          <p:cNvSpPr/>
+          <p:nvPr/>
+        </p:nvSpPr>
+        <p:spPr>
+          <a:xfrm>
+            <a:off x="457200" y="4361688"/>
+            <a:ext cx="11277295" cy="950976"/>
+          </a:xfrm>
+          <a:prstGeom prst="roundRect">
+            <a:avLst>
+              <a:gd name="adj" fmla="val 12000"/>
+            </a:avLst>
+          </a:prstGeom>
+          <a:solidFill>
+            <a:srgbClr val="E8F4FA"/>
+          </a:solidFill>
+          <a:ln>
+            <a:noFill/>
+          </a:ln>
+        </p:spPr>
+        <p:style>
+          <a:lnRef idx="1">
+            <a:schemeClr val="accent1"/>
+          </a:lnRef>
+          <a:fillRef idx="3">
+            <a:schemeClr val="accent1"/>
+          </a:fillRef>
+          <a:effectRef idx="2">
+            <a:schemeClr val="accent1"/>
+          </a:effectRef>
+          <a:fontRef idx="minor">
+            <a:schemeClr val="lt1"/>
+          </a:fontRef>
+        </p:style>
+        <p:txBody>
+          <a:bodyPr rtlCol="0" anchor="ctr"/>
+          <a:lstStyle/>
+          <a:p>
+            <a:pPr algn="ctr"/>
+          </a:p>
+        </p:txBody>
+      </p:sp>
+      <p:sp>
+        <p:nvSpPr>
+          <p:cNvPr id="18" name="Rounded Rectangle 17"/>
+          <p:cNvSpPr/>
+          <p:nvPr/>
+        </p:nvSpPr>
+        <p:spPr>
+          <a:xfrm>
+            <a:off x="594360" y="4617720"/>
+            <a:ext cx="438912" cy="438912"/>
+          </a:xfrm>
+          <a:prstGeom prst="roundRect">
+            <a:avLst>
+              <a:gd name="adj" fmla="val 12000"/>
+            </a:avLst>
+          </a:prstGeom>
+          <a:solidFill>
+            <a:srgbClr val="095292"/>
+          </a:solidFill>
+          <a:ln>
+            <a:noFill/>
+          </a:ln>
+        </p:spPr>
+        <p:style>
+          <a:lnRef idx="1">
+            <a:schemeClr val="accent1"/>
+          </a:lnRef>
+          <a:fillRef idx="3">
+            <a:schemeClr val="accent1"/>
+          </a:fillRef>
+          <a:effectRef idx="2">
+            <a:schemeClr val="accent1"/>
+          </a:effectRef>
+          <a:fontRef idx="minor">
+            <a:schemeClr val="lt1"/>
+          </a:fontRef>
+        </p:style>
+        <p:txBody>
+          <a:bodyPr rtlCol="0" anchor="ctr"/>
+          <a:lstStyle/>
+          <a:p>
+            <a:pPr algn="ctr"/>
+          </a:p>
+        </p:txBody>
+      </p:sp>
+      <p:sp>
+        <p:nvSpPr>
+          <p:cNvPr id="19" name="TextBox 18"/>
+          <p:cNvSpPr txBox="1"/>
+          <p:nvPr/>
+        </p:nvSpPr>
+        <p:spPr>
+          <a:xfrm>
+            <a:off x="594360" y="4617720"/>
+            <a:ext cx="438912" cy="438912"/>
+          </a:xfrm>
+          <a:prstGeom prst="rect">
+            <a:avLst/>
+          </a:prstGeom>
+          <a:noFill/>
+        </p:spPr>
+        <p:txBody>
+          <a:bodyPr wrap="square" anchor="ctr"/>
+          <a:lstStyle/>
+          <a:p>
+            <a:pPr algn="ctr"/>
+            <a:r>
+              <a:rPr sz="1600" b="1" i="0">
+                <a:solidFill>
+                  <a:srgbClr val="FFFFFF"/>
+                </a:solidFill>
+                <a:latin typeface="Calibri"/>
+              </a:rPr>
+              <a:t>4</a:t>
+            </a:r>
+          </a:p>
+        </p:txBody>
+      </p:sp>
+      <p:sp>
+        <p:nvSpPr>
+          <p:cNvPr id="20" name="TextBox 19"/>
+          <p:cNvSpPr txBox="1"/>
+          <p:nvPr/>
+        </p:nvSpPr>
+        <p:spPr>
+          <a:xfrm>
+            <a:off x="1188720" y="4453128"/>
+            <a:ext cx="10271455" cy="786384"/>
+          </a:xfrm>
+          <a:prstGeom prst="rect">
+            <a:avLst/>
+          </a:prstGeom>
+          <a:noFill/>
+        </p:spPr>
+        <p:txBody>
+          <a:bodyPr wrap="square" anchor="ctr"/>
+          <a:lstStyle/>
+          <a:p>
+            <a:r>
+              <a:rPr sz="1400" b="1" i="0">
+                <a:solidFill>
+                  <a:srgbClr val="095292"/>
+                </a:solidFill>
+                <a:latin typeface="Calibri"/>
+              </a:rPr>
+              <a:t>Depure el primer defecto con el debugger: breakpoint en el manejador del botón, registre el valor real de cada campo del formulario antes de llegar al servicio, identifique en qué capa se corrompe el dato y aplique la corrección; deje la evidencia en la bitácora.</a:t>
+            </a:r>
+          </a:p>
+        </p:txBody>
+      </p:sp>
+      <p:sp>
+        <p:nvSpPr>
+          <p:cNvPr id="21" name="Rounded Rectangle 20"/>
+          <p:cNvSpPr/>
+          <p:nvPr/>
+        </p:nvSpPr>
+        <p:spPr>
+          <a:xfrm>
+            <a:off x="457200" y="5404104"/>
+            <a:ext cx="11277295" cy="950976"/>
+          </a:xfrm>
+          <a:prstGeom prst="roundRect">
+            <a:avLst>
+              <a:gd name="adj" fmla="val 12000"/>
+            </a:avLst>
+          </a:prstGeom>
+          <a:solidFill>
+            <a:srgbClr val="F2F2F2"/>
+          </a:solidFill>
+          <a:ln>
+            <a:noFill/>
+          </a:ln>
+        </p:spPr>
+        <p:style>
+          <a:lnRef idx="1">
+            <a:schemeClr val="accent1"/>
+          </a:lnRef>
+          <a:fillRef idx="3">
+            <a:schemeClr val="accent1"/>
+          </a:fillRef>
+          <a:effectRef idx="2">
+            <a:schemeClr val="accent1"/>
+          </a:effectRef>
+          <a:fontRef idx="minor">
+            <a:schemeClr val="lt1"/>
+          </a:fontRef>
+        </p:style>
+        <p:txBody>
+          <a:bodyPr rtlCol="0" anchor="ctr"/>
+          <a:lstStyle/>
+          <a:p>
+            <a:pPr algn="ctr"/>
+          </a:p>
+        </p:txBody>
+      </p:sp>
+      <p:sp>
+        <p:nvSpPr>
+          <p:cNvPr id="22" name="Rounded Rectangle 21"/>
+          <p:cNvSpPr/>
+          <p:nvPr/>
+        </p:nvSpPr>
+        <p:spPr>
+          <a:xfrm>
+            <a:off x="594360" y="5660136"/>
+            <a:ext cx="438912" cy="438912"/>
+          </a:xfrm>
+          <a:prstGeom prst="roundRect">
+            <a:avLst>
+              <a:gd name="adj" fmla="val 12000"/>
+            </a:avLst>
+          </a:prstGeom>
+          <a:solidFill>
+            <a:srgbClr val="095292"/>
+          </a:solidFill>
+          <a:ln>
+            <a:noFill/>
+          </a:ln>
+        </p:spPr>
+        <p:style>
+          <a:lnRef idx="1">
+            <a:schemeClr val="accent1"/>
+          </a:lnRef>
+          <a:fillRef idx="3">
+            <a:schemeClr val="accent1"/>
+          </a:fillRef>
+          <a:effectRef idx="2">
+            <a:schemeClr val="accent1"/>
+          </a:effectRef>
+          <a:fontRef idx="minor">
+            <a:schemeClr val="lt1"/>
+          </a:fontRef>
+        </p:style>
+        <p:txBody>
+          <a:bodyPr rtlCol="0" anchor="ctr"/>
+          <a:lstStyle/>
+          <a:p>
+            <a:pPr algn="ctr"/>
+          </a:p>
+        </p:txBody>
+      </p:sp>
+      <p:sp>
+        <p:nvSpPr>
+          <p:cNvPr id="23" name="TextBox 22"/>
+          <p:cNvSpPr txBox="1"/>
+          <p:nvPr/>
+        </p:nvSpPr>
+        <p:spPr>
+          <a:xfrm>
+            <a:off x="594360" y="5660136"/>
+            <a:ext cx="438912" cy="438912"/>
+          </a:xfrm>
+          <a:prstGeom prst="rect">
+            <a:avLst/>
+          </a:prstGeom>
+          <a:noFill/>
+        </p:spPr>
+        <p:txBody>
+          <a:bodyPr wrap="square" anchor="ctr"/>
+          <a:lstStyle/>
+          <a:p>
+            <a:pPr algn="ctr"/>
+            <a:r>
+              <a:rPr sz="1600" b="1" i="0">
+                <a:solidFill>
+                  <a:srgbClr val="FFFFFF"/>
+                </a:solidFill>
+                <a:latin typeface="Calibri"/>
+              </a:rPr>
+              <a:t>5</a:t>
+            </a:r>
+          </a:p>
+        </p:txBody>
+      </p:sp>
+      <p:sp>
+        <p:nvSpPr>
+          <p:cNvPr id="24" name="TextBox 23"/>
+          <p:cNvSpPr txBox="1"/>
+          <p:nvPr/>
+        </p:nvSpPr>
+        <p:spPr>
+          <a:xfrm>
+            <a:off x="1188720" y="5495544"/>
+            <a:ext cx="10271455" cy="786384"/>
+          </a:xfrm>
+          <a:prstGeom prst="rect">
+            <a:avLst/>
+          </a:prstGeom>
+          <a:noFill/>
+        </p:spPr>
+        <p:txBody>
+          <a:bodyPr wrap="square" anchor="ctr"/>
+          <a:lstStyle/>
+          <a:p>
+            <a:r>
+              <a:rPr sz="1500" b="1" i="0">
+                <a:solidFill>
+                  <a:srgbClr val="095292"/>
+                </a:solidFill>
+                <a:latin typeface="Calibri"/>
+              </a:rPr>
+              <a:t>Repita hasta que el guion de humo corra completo dos veces seguidas y entregue la bitácora de integración con tres defectos documentados con síntoma, causa, corrección y cómo lo verificó.</a:t>
+            </a:r>
+          </a:p>
+        </p:txBody>
+      </p:sp>
+      <p:sp>
+        <p:nvSpPr>
+          <p:cNvPr id="25" name="TextBox 24"/>
+          <p:cNvSpPr txBox="1"/>
+          <p:nvPr/>
+        </p:nvSpPr>
+        <p:spPr>
+          <a:xfrm>
+            <a:off x="11185855" y="6473952"/>
+            <a:ext cx="640080" cy="274320"/>
+          </a:xfrm>
+          <a:prstGeom prst="rect">
+            <a:avLst/>
+          </a:prstGeom>
+          <a:noFill/>
+        </p:spPr>
+        <p:txBody>
+          <a:bodyPr wrap="square">
+            <a:spAutoFit/>
+          </a:bodyPr>
+          <a:lstStyle/>
+          <a:p>
+            <a:pPr algn="r"/>
+            <a:r>
+              <a:rPr sz="1100" b="0" i="0">
+                <a:solidFill>
+                  <a:srgbClr val="666666"/>
+                </a:solidFill>
+                <a:latin typeface="Calibri"/>
+              </a:rPr>
+              <a:t>15</a:t>
+            </a:r>
+          </a:p>
+        </p:txBody>
+      </p:sp>
+    </p:spTree>
+  </p:cSld>
+  <p:clrMapOvr>
+    <a:masterClrMapping/>
+  </p:clrMapOvr>
+</p:sld>
+</file>
+
+<file path=ppt/slides/slide16.xml><?xml version="1.0" encoding="utf-8"?>
+<p:sld xmlns:a="http://schemas.openxmlformats.org/drawingml/2006/main" xmlns:p="http://schemas.openxmlformats.org/presentationml/2006/main" xmlns:r="http://schemas.openxmlformats.org/officeDocument/2006/relationships">
+  <p:cSld>
+    <p:bg>
+      <p:bgPr>
+        <a:solidFill>
+          <a:srgbClr val="FFFFFF"/>
+        </a:solidFill>
+        <a:effectLst/>
+      </p:bgPr>
+    </p:bg>
+    <p:spTree>
+      <p:nvGrpSpPr>
+        <p:cNvPr id="1" name=""/>
+        <p:cNvGrpSpPr/>
+        <p:nvPr/>
+      </p:nvGrpSpPr>
+      <p:grpSpPr/>
+      <p:sp>
+        <p:nvSpPr>
+          <p:cNvPr id="2" name="Rectangle 1"/>
+          <p:cNvSpPr/>
+          <p:nvPr/>
+        </p:nvSpPr>
+        <p:spPr>
+          <a:xfrm>
+            <a:off x="0" y="0"/>
+            <a:ext cx="12191695" cy="960120"/>
+          </a:xfrm>
+          <a:prstGeom prst="rect">
+            <a:avLst/>
+          </a:prstGeom>
+          <a:solidFill>
+            <a:srgbClr val="095292"/>
+          </a:solidFill>
+          <a:ln>
+            <a:noFill/>
+          </a:ln>
+        </p:spPr>
+        <p:style>
+          <a:lnRef idx="1">
+            <a:schemeClr val="accent1"/>
+          </a:lnRef>
+          <a:fillRef idx="3">
+            <a:schemeClr val="accent1"/>
+          </a:fillRef>
+          <a:effectRef idx="2">
+            <a:schemeClr val="accent1"/>
+          </a:effectRef>
+          <a:fontRef idx="minor">
+            <a:schemeClr val="lt1"/>
+          </a:fontRef>
+        </p:style>
+        <p:txBody>
+          <a:bodyPr rtlCol="0" anchor="ctr"/>
+          <a:lstStyle/>
+          <a:p>
+            <a:pPr algn="ctr"/>
+          </a:p>
+        </p:txBody>
+      </p:sp>
+      <p:sp>
+        <p:nvSpPr>
+          <p:cNvPr id="3" name="Rectangle 2"/>
+          <p:cNvSpPr/>
+          <p:nvPr/>
+        </p:nvSpPr>
+        <p:spPr>
+          <a:xfrm>
+            <a:off x="0" y="960120"/>
+            <a:ext cx="12191695" cy="41148"/>
+          </a:xfrm>
+          <a:prstGeom prst="rect">
+            <a:avLst/>
+          </a:prstGeom>
+          <a:solidFill>
+            <a:srgbClr val="FFD000"/>
+          </a:solidFill>
+          <a:ln>
+            <a:noFill/>
+          </a:ln>
+        </p:spPr>
+        <p:style>
+          <a:lnRef idx="1">
+            <a:schemeClr val="accent1"/>
+          </a:lnRef>
+          <a:fillRef idx="3">
+            <a:schemeClr val="accent1"/>
+          </a:fillRef>
+          <a:effectRef idx="2">
+            <a:schemeClr val="accent1"/>
+          </a:effectRef>
+          <a:fontRef idx="minor">
+            <a:schemeClr val="lt1"/>
+          </a:fontRef>
+        </p:style>
+        <p:txBody>
+          <a:bodyPr rtlCol="0" anchor="ctr"/>
+          <a:lstStyle/>
+          <a:p>
+            <a:pPr algn="ctr"/>
+          </a:p>
+        </p:txBody>
+      </p:sp>
+      <p:sp>
+        <p:nvSpPr>
+          <p:cNvPr id="4" name="TextBox 3"/>
+          <p:cNvSpPr txBox="1"/>
+          <p:nvPr/>
+        </p:nvSpPr>
+        <p:spPr>
+          <a:xfrm>
+            <a:off x="457200" y="164592"/>
+            <a:ext cx="11277295" cy="502920"/>
+          </a:xfrm>
+          <a:prstGeom prst="rect">
+            <a:avLst/>
+          </a:prstGeom>
+          <a:noFill/>
+        </p:spPr>
+        <p:txBody>
+          <a:bodyPr wrap="square">
+            <a:spAutoFit/>
+          </a:bodyPr>
+          <a:lstStyle/>
+          <a:p>
+            <a:r>
+              <a:rPr sz="2600" b="1" i="0">
+                <a:solidFill>
+                  <a:srgbClr val="FFFFFF"/>
+                </a:solidFill>
+                <a:latin typeface="Calibri"/>
+              </a:rPr>
+              <a:t>Antes de entregar — autochequeo</a:t>
+            </a:r>
+          </a:p>
+        </p:txBody>
+      </p:sp>
+      <p:sp>
+        <p:nvSpPr>
+          <p:cNvPr id="5" name="Rounded Rectangle 4"/>
+          <p:cNvSpPr/>
+          <p:nvPr/>
+        </p:nvSpPr>
+        <p:spPr>
+          <a:xfrm>
+            <a:off x="457200" y="1261872"/>
+            <a:ext cx="11277295" cy="566928"/>
+          </a:xfrm>
+          <a:prstGeom prst="roundRect">
+            <a:avLst>
+              <a:gd name="adj" fmla="val 12000"/>
+            </a:avLst>
+          </a:prstGeom>
+          <a:solidFill>
+            <a:srgbClr val="F2F2F2"/>
+          </a:solidFill>
+          <a:ln>
+            <a:noFill/>
+          </a:ln>
+        </p:spPr>
+        <p:style>
+          <a:lnRef idx="1">
+            <a:schemeClr val="accent1"/>
+          </a:lnRef>
+          <a:fillRef idx="3">
+            <a:schemeClr val="accent1"/>
+          </a:fillRef>
+          <a:effectRef idx="2">
+            <a:schemeClr val="accent1"/>
+          </a:effectRef>
+          <a:fontRef idx="minor">
+            <a:schemeClr val="lt1"/>
+          </a:fontRef>
+        </p:style>
+        <p:txBody>
+          <a:bodyPr rtlCol="0" anchor="ctr"/>
+          <a:lstStyle/>
+          <a:p>
+            <a:pPr algn="ctr"/>
+          </a:p>
+        </p:txBody>
+      </p:sp>
+      <p:sp>
+        <p:nvSpPr>
+          <p:cNvPr id="6" name="Rectangle 5"/>
+          <p:cNvSpPr/>
+          <p:nvPr/>
+        </p:nvSpPr>
+        <p:spPr>
+          <a:xfrm>
+            <a:off x="640080" y="1408175"/>
+            <a:ext cx="274320" cy="274320"/>
+          </a:xfrm>
+          <a:prstGeom prst="rect">
+            <a:avLst/>
+          </a:prstGeom>
+          <a:solidFill>
+            <a:srgbClr val="FFFFFF"/>
+          </a:solidFill>
+          <a:ln>
+            <a:solidFill>
+              <a:srgbClr val="333333"/>
+            </a:solidFill>
+          </a:ln>
+        </p:spPr>
+        <p:style>
+          <a:lnRef idx="1">
+            <a:schemeClr val="accent1"/>
+          </a:lnRef>
+          <a:fillRef idx="3">
+            <a:schemeClr val="accent1"/>
+          </a:fillRef>
+          <a:effectRef idx="2">
+            <a:schemeClr val="accent1"/>
+          </a:effectRef>
+          <a:fontRef idx="minor">
+            <a:schemeClr val="lt1"/>
+          </a:fontRef>
+        </p:style>
+        <p:txBody>
+          <a:bodyPr rtlCol="0" anchor="ctr"/>
+          <a:lstStyle/>
+          <a:p>
+            <a:pPr algn="ctr"/>
+          </a:p>
+        </p:txBody>
+      </p:sp>
+      <p:sp>
+        <p:nvSpPr>
+          <p:cNvPr id="7" name="Rectangle 6"/>
+          <p:cNvSpPr/>
+          <p:nvPr/>
+        </p:nvSpPr>
+        <p:spPr>
+          <a:xfrm>
+            <a:off x="640080" y="1408175"/>
+            <a:ext cx="73152" cy="274320"/>
+          </a:xfrm>
+          <a:prstGeom prst="rect">
+            <a:avLst/>
+          </a:prstGeom>
+          <a:solidFill>
+            <a:srgbClr val="269CCB"/>
+          </a:solidFill>
+          <a:ln>
+            <a:noFill/>
+          </a:ln>
+        </p:spPr>
+        <p:style>
+          <a:lnRef idx="1">
+            <a:schemeClr val="accent1"/>
+          </a:lnRef>
+          <a:fillRef idx="3">
+            <a:schemeClr val="accent1"/>
+          </a:fillRef>
+          <a:effectRef idx="2">
+            <a:schemeClr val="accent1"/>
+          </a:effectRef>
+          <a:fontRef idx="minor">
+            <a:schemeClr val="lt1"/>
+          </a:fontRef>
+        </p:style>
+        <p:txBody>
+          <a:bodyPr rtlCol="0" anchor="ctr"/>
+          <a:lstStyle/>
+          <a:p>
+            <a:pPr algn="ctr"/>
+          </a:p>
+        </p:txBody>
+      </p:sp>
+      <p:sp>
+        <p:nvSpPr>
+          <p:cNvPr id="8" name="TextBox 7"/>
+          <p:cNvSpPr txBox="1"/>
+          <p:nvPr/>
+        </p:nvSpPr>
+        <p:spPr>
+          <a:xfrm>
+            <a:off x="1097280" y="1353312"/>
+            <a:ext cx="10362895" cy="402336"/>
+          </a:xfrm>
+          <a:prstGeom prst="rect">
+            <a:avLst/>
+          </a:prstGeom>
+          <a:noFill/>
+        </p:spPr>
+        <p:txBody>
+          <a:bodyPr wrap="square" anchor="ctr"/>
+          <a:lstStyle/>
+          <a:p>
+            <a:r>
+              <a:rPr sz="1500" b="0" i="0">
+                <a:solidFill>
+                  <a:srgbClr val="333333"/>
+                </a:solidFill>
+                <a:latin typeface="Calibri"/>
+              </a:rPr>
+              <a:t>Si la consola dice 'Mascotas cargadas: 12' pero la tabla aparece vacía, ¿el problema está en el archivo, en la carga o en el momento en que se llena la tabla?</a:t>
+            </a:r>
+          </a:p>
+        </p:txBody>
+      </p:sp>
+      <p:sp>
+        <p:nvSpPr>
+          <p:cNvPr id="9" name="Rounded Rectangle 8"/>
+          <p:cNvSpPr/>
+          <p:nvPr/>
+        </p:nvSpPr>
+        <p:spPr>
+          <a:xfrm>
+            <a:off x="457200" y="1938528"/>
+            <a:ext cx="11277295" cy="566928"/>
+          </a:xfrm>
+          <a:prstGeom prst="roundRect">
+            <a:avLst>
+              <a:gd name="adj" fmla="val 12000"/>
+            </a:avLst>
+          </a:prstGeom>
+          <a:solidFill>
+            <a:srgbClr val="F2F2F2"/>
+          </a:solidFill>
+          <a:ln>
+            <a:noFill/>
+          </a:ln>
+        </p:spPr>
+        <p:style>
+          <a:lnRef idx="1">
+            <a:schemeClr val="accent1"/>
+          </a:lnRef>
+          <a:fillRef idx="3">
+            <a:schemeClr val="accent1"/>
+          </a:fillRef>
+          <a:effectRef idx="2">
+            <a:schemeClr val="accent1"/>
+          </a:effectRef>
+          <a:fontRef idx="minor">
+            <a:schemeClr val="lt1"/>
+          </a:fontRef>
+        </p:style>
+        <p:txBody>
+          <a:bodyPr rtlCol="0" anchor="ctr"/>
+          <a:lstStyle/>
+          <a:p>
+            <a:pPr algn="ctr"/>
+          </a:p>
+        </p:txBody>
+      </p:sp>
+      <p:sp>
+        <p:nvSpPr>
+          <p:cNvPr id="10" name="Rectangle 9"/>
+          <p:cNvSpPr/>
+          <p:nvPr/>
+        </p:nvSpPr>
+        <p:spPr>
+          <a:xfrm>
+            <a:off x="640080" y="2084832"/>
+            <a:ext cx="274320" cy="274320"/>
+          </a:xfrm>
+          <a:prstGeom prst="rect">
+            <a:avLst/>
+          </a:prstGeom>
+          <a:solidFill>
+            <a:srgbClr val="FFFFFF"/>
+          </a:solidFill>
+          <a:ln>
+            <a:solidFill>
+              <a:srgbClr val="333333"/>
+            </a:solidFill>
+          </a:ln>
+        </p:spPr>
+        <p:style>
+          <a:lnRef idx="1">
+            <a:schemeClr val="accent1"/>
+          </a:lnRef>
+          <a:fillRef idx="3">
+            <a:schemeClr val="accent1"/>
+          </a:fillRef>
+          <a:effectRef idx="2">
+            <a:schemeClr val="accent1"/>
+          </a:effectRef>
+          <a:fontRef idx="minor">
+            <a:schemeClr val="lt1"/>
+          </a:fontRef>
+        </p:style>
+        <p:txBody>
+          <a:bodyPr rtlCol="0" anchor="ctr"/>
+          <a:lstStyle/>
+          <a:p>
+            <a:pPr algn="ctr"/>
+          </a:p>
+        </p:txBody>
+      </p:sp>
+      <p:sp>
+        <p:nvSpPr>
+          <p:cNvPr id="11" name="Rectangle 10"/>
+          <p:cNvSpPr/>
+          <p:nvPr/>
+        </p:nvSpPr>
+        <p:spPr>
+          <a:xfrm>
+            <a:off x="640080" y="2084832"/>
+            <a:ext cx="73152" cy="274320"/>
+          </a:xfrm>
+          <a:prstGeom prst="rect">
+            <a:avLst/>
+          </a:prstGeom>
+          <a:solidFill>
+            <a:srgbClr val="269CCB"/>
+          </a:solidFill>
+          <a:ln>
+            <a:noFill/>
+          </a:ln>
+        </p:spPr>
+        <p:style>
+          <a:lnRef idx="1">
+            <a:schemeClr val="accent1"/>
+          </a:lnRef>
+          <a:fillRef idx="3">
+            <a:schemeClr val="accent1"/>
+          </a:fillRef>
+          <a:effectRef idx="2">
+            <a:schemeClr val="accent1"/>
+          </a:effectRef>
+          <a:fontRef idx="minor">
+            <a:schemeClr val="lt1"/>
+          </a:fontRef>
+        </p:style>
+        <p:txBody>
+          <a:bodyPr rtlCol="0" anchor="ctr"/>
+          <a:lstStyle/>
+          <a:p>
+            <a:pPr algn="ctr"/>
+          </a:p>
+        </p:txBody>
+      </p:sp>
+      <p:sp>
+        <p:nvSpPr>
+          <p:cNvPr id="12" name="TextBox 11"/>
+          <p:cNvSpPr txBox="1"/>
+          <p:nvPr/>
+        </p:nvSpPr>
+        <p:spPr>
+          <a:xfrm>
+            <a:off x="1097280" y="2029968"/>
+            <a:ext cx="10362895" cy="402336"/>
+          </a:xfrm>
+          <a:prstGeom prst="rect">
+            <a:avLst/>
+          </a:prstGeom>
+          <a:noFill/>
+        </p:spPr>
+        <p:txBody>
+          <a:bodyPr wrap="square" anchor="ctr"/>
+          <a:lstStyle/>
+          <a:p>
+            <a:r>
+              <a:rPr sz="1500" b="0" i="0">
+                <a:solidFill>
+                  <a:srgbClr val="333333"/>
+                </a:solidFill>
+                <a:latin typeface="Calibri"/>
+              </a:rPr>
+              <a:t>¿Cuántas veces aparece la expresión new ServicioVetCare en todo su proyecto, y qué pasaría si aparece más de una?</a:t>
+            </a:r>
+          </a:p>
+        </p:txBody>
+      </p:sp>
+      <p:sp>
+        <p:nvSpPr>
+          <p:cNvPr id="13" name="Rounded Rectangle 12"/>
+          <p:cNvSpPr/>
+          <p:nvPr/>
+        </p:nvSpPr>
+        <p:spPr>
+          <a:xfrm>
+            <a:off x="457200" y="2615184"/>
+            <a:ext cx="11277295" cy="566928"/>
+          </a:xfrm>
+          <a:prstGeom prst="roundRect">
+            <a:avLst>
+              <a:gd name="adj" fmla="val 12000"/>
+            </a:avLst>
+          </a:prstGeom>
+          <a:solidFill>
+            <a:srgbClr val="F2F2F2"/>
+          </a:solidFill>
+          <a:ln>
+            <a:noFill/>
+          </a:ln>
+        </p:spPr>
+        <p:style>
+          <a:lnRef idx="1">
+            <a:schemeClr val="accent1"/>
+          </a:lnRef>
+          <a:fillRef idx="3">
+            <a:schemeClr val="accent1"/>
+          </a:fillRef>
+          <a:effectRef idx="2">
+            <a:schemeClr val="accent1"/>
+          </a:effectRef>
+          <a:fontRef idx="minor">
+            <a:schemeClr val="lt1"/>
+          </a:fontRef>
+        </p:style>
+        <p:txBody>
+          <a:bodyPr rtlCol="0" anchor="ctr"/>
+          <a:lstStyle/>
+          <a:p>
+            <a:pPr algn="ctr"/>
+          </a:p>
+        </p:txBody>
+      </p:sp>
+      <p:sp>
+        <p:nvSpPr>
+          <p:cNvPr id="14" name="Rectangle 13"/>
+          <p:cNvSpPr/>
+          <p:nvPr/>
+        </p:nvSpPr>
+        <p:spPr>
+          <a:xfrm>
+            <a:off x="640080" y="2761488"/>
+            <a:ext cx="274320" cy="274320"/>
+          </a:xfrm>
+          <a:prstGeom prst="rect">
+            <a:avLst/>
+          </a:prstGeom>
+          <a:solidFill>
+            <a:srgbClr val="FFFFFF"/>
+          </a:solidFill>
+          <a:ln>
+            <a:solidFill>
+              <a:srgbClr val="333333"/>
+            </a:solidFill>
+          </a:ln>
+        </p:spPr>
+        <p:style>
+          <a:lnRef idx="1">
+            <a:schemeClr val="accent1"/>
+          </a:lnRef>
+          <a:fillRef idx="3">
+            <a:schemeClr val="accent1"/>
+          </a:fillRef>
+          <a:effectRef idx="2">
+            <a:schemeClr val="accent1"/>
+          </a:effectRef>
+          <a:fontRef idx="minor">
+            <a:schemeClr val="lt1"/>
+          </a:fontRef>
+        </p:style>
+        <p:txBody>
+          <a:bodyPr rtlCol="0" anchor="ctr"/>
+          <a:lstStyle/>
+          <a:p>
+            <a:pPr algn="ctr"/>
+          </a:p>
+        </p:txBody>
+      </p:sp>
+      <p:sp>
+        <p:nvSpPr>
+          <p:cNvPr id="15" name="Rectangle 14"/>
+          <p:cNvSpPr/>
+          <p:nvPr/>
+        </p:nvSpPr>
+        <p:spPr>
+          <a:xfrm>
+            <a:off x="640080" y="2761488"/>
+            <a:ext cx="73152" cy="274320"/>
+          </a:xfrm>
+          <a:prstGeom prst="rect">
+            <a:avLst/>
+          </a:prstGeom>
+          <a:solidFill>
+            <a:srgbClr val="269CCB"/>
+          </a:solidFill>
+          <a:ln>
+            <a:noFill/>
+          </a:ln>
+        </p:spPr>
+        <p:style>
+          <a:lnRef idx="1">
+            <a:schemeClr val="accent1"/>
+          </a:lnRef>
+          <a:fillRef idx="3">
+            <a:schemeClr val="accent1"/>
+          </a:fillRef>
+          <a:effectRef idx="2">
+            <a:schemeClr val="accent1"/>
+          </a:effectRef>
+          <a:fontRef idx="minor">
+            <a:schemeClr val="lt1"/>
+          </a:fontRef>
+        </p:style>
+        <p:txBody>
+          <a:bodyPr rtlCol="0" anchor="ctr"/>
+          <a:lstStyle/>
+          <a:p>
+            <a:pPr algn="ctr"/>
+          </a:p>
+        </p:txBody>
+      </p:sp>
+      <p:sp>
+        <p:nvSpPr>
+          <p:cNvPr id="16" name="TextBox 15"/>
+          <p:cNvSpPr txBox="1"/>
+          <p:nvPr/>
+        </p:nvSpPr>
+        <p:spPr>
+          <a:xfrm>
+            <a:off x="1097280" y="2706624"/>
+            <a:ext cx="10362895" cy="402336"/>
+          </a:xfrm>
+          <a:prstGeom prst="rect">
+            <a:avLst/>
+          </a:prstGeom>
+          <a:noFill/>
+        </p:spPr>
+        <p:txBody>
+          <a:bodyPr wrap="square" anchor="ctr"/>
+          <a:lstStyle/>
+          <a:p>
+            <a:r>
+              <a:rPr sz="1500" b="0" i="0">
+                <a:solidFill>
+                  <a:srgbClr val="333333"/>
+                </a:solidFill>
+                <a:latin typeface="Calibri"/>
+              </a:rPr>
+              <a:t>Cuando el dato llega mal, ¿ya comprobó con el debugger si sale mal del formulario o si se daña más adelante, en el servicio o al escribir la línea del archivo?</a:t>
+            </a:r>
+          </a:p>
+        </p:txBody>
+      </p:sp>
+      <p:sp>
+        <p:nvSpPr>
+          <p:cNvPr id="17" name="TextBox 16"/>
+          <p:cNvSpPr txBox="1"/>
+          <p:nvPr/>
+        </p:nvSpPr>
+        <p:spPr>
+          <a:xfrm>
+            <a:off x="11185855" y="6473952"/>
+            <a:ext cx="640080" cy="274320"/>
+          </a:xfrm>
+          <a:prstGeom prst="rect">
+            <a:avLst/>
+          </a:prstGeom>
+          <a:noFill/>
+        </p:spPr>
+        <p:txBody>
+          <a:bodyPr wrap="square">
+            <a:spAutoFit/>
+          </a:bodyPr>
+          <a:lstStyle/>
+          <a:p>
+            <a:pPr algn="r"/>
+            <a:r>
+              <a:rPr sz="1100" b="0" i="0">
+                <a:solidFill>
+                  <a:srgbClr val="666666"/>
+                </a:solidFill>
+                <a:latin typeface="Calibri"/>
+              </a:rPr>
+              <a:t>16</a:t>
+            </a:r>
+          </a:p>
+        </p:txBody>
+      </p:sp>
+    </p:spTree>
+  </p:cSld>
+  <p:clrMapOvr>
+    <a:masterClrMapping/>
+  </p:clrMapOvr>
+</p:sld>
+</file>
+
+<file path=ppt/slides/slide17.xml><?xml version="1.0" encoding="utf-8"?>
+<p:sld xmlns:a="http://schemas.openxmlformats.org/drawingml/2006/main" xmlns:p="http://schemas.openxmlformats.org/presentationml/2006/main" xmlns:r="http://schemas.openxmlformats.org/officeDocument/2006/relationships">
+  <p:cSld>
+    <p:bg>
+      <p:bgPr>
+        <a:solidFill>
+          <a:srgbClr val="FFFFFF"/>
+        </a:solidFill>
+        <a:effectLst/>
+      </p:bgPr>
+    </p:bg>
+    <p:spTree>
+      <p:nvGrpSpPr>
+        <p:cNvPr id="1" name=""/>
+        <p:cNvGrpSpPr/>
+        <p:nvPr/>
+      </p:nvGrpSpPr>
+      <p:grpSpPr/>
+      <p:sp>
+        <p:nvSpPr>
+          <p:cNvPr id="2" name="Rectangle 1"/>
+          <p:cNvSpPr/>
+          <p:nvPr/>
+        </p:nvSpPr>
+        <p:spPr>
+          <a:xfrm>
+            <a:off x="0" y="0"/>
+            <a:ext cx="12191695" cy="960120"/>
+          </a:xfrm>
+          <a:prstGeom prst="rect">
+            <a:avLst/>
+          </a:prstGeom>
+          <a:solidFill>
+            <a:srgbClr val="095292"/>
+          </a:solidFill>
+          <a:ln>
+            <a:noFill/>
+          </a:ln>
+        </p:spPr>
+        <p:style>
+          <a:lnRef idx="1">
+            <a:schemeClr val="accent1"/>
+          </a:lnRef>
+          <a:fillRef idx="3">
+            <a:schemeClr val="accent1"/>
+          </a:fillRef>
+          <a:effectRef idx="2">
+            <a:schemeClr val="accent1"/>
+          </a:effectRef>
+          <a:fontRef idx="minor">
+            <a:schemeClr val="lt1"/>
+          </a:fontRef>
+        </p:style>
+        <p:txBody>
+          <a:bodyPr rtlCol="0" anchor="ctr"/>
+          <a:lstStyle/>
+          <a:p>
+            <a:pPr algn="ctr"/>
+          </a:p>
+        </p:txBody>
+      </p:sp>
+      <p:sp>
+        <p:nvSpPr>
+          <p:cNvPr id="3" name="Rectangle 2"/>
+          <p:cNvSpPr/>
+          <p:nvPr/>
+        </p:nvSpPr>
+        <p:spPr>
+          <a:xfrm>
+            <a:off x="0" y="960120"/>
+            <a:ext cx="12191695" cy="41148"/>
+          </a:xfrm>
+          <a:prstGeom prst="rect">
+            <a:avLst/>
+          </a:prstGeom>
+          <a:solidFill>
+            <a:srgbClr val="FFD000"/>
+          </a:solidFill>
+          <a:ln>
+            <a:noFill/>
+          </a:ln>
+        </p:spPr>
+        <p:style>
+          <a:lnRef idx="1">
+            <a:schemeClr val="accent1"/>
+          </a:lnRef>
+          <a:fillRef idx="3">
+            <a:schemeClr val="accent1"/>
+          </a:fillRef>
+          <a:effectRef idx="2">
+            <a:schemeClr val="accent1"/>
+          </a:effectRef>
+          <a:fontRef idx="minor">
+            <a:schemeClr val="lt1"/>
+          </a:fontRef>
+        </p:style>
+        <p:txBody>
+          <a:bodyPr rtlCol="0" anchor="ctr"/>
+          <a:lstStyle/>
+          <a:p>
+            <a:pPr algn="ctr"/>
+          </a:p>
+        </p:txBody>
+      </p:sp>
+      <p:sp>
+        <p:nvSpPr>
+          <p:cNvPr id="4" name="TextBox 3"/>
+          <p:cNvSpPr txBox="1"/>
+          <p:nvPr/>
+        </p:nvSpPr>
+        <p:spPr>
+          <a:xfrm>
+            <a:off x="457200" y="164592"/>
+            <a:ext cx="11277295" cy="502920"/>
+          </a:xfrm>
+          <a:prstGeom prst="rect">
+            <a:avLst/>
+          </a:prstGeom>
+          <a:noFill/>
+        </p:spPr>
+        <p:txBody>
+          <a:bodyPr wrap="square">
+            <a:spAutoFit/>
+          </a:bodyPr>
+          <a:lstStyle/>
+          <a:p>
+            <a:r>
+              <a:rPr sz="2600" b="1" i="0">
+                <a:solidFill>
+                  <a:srgbClr val="FFFFFF"/>
+                </a:solidFill>
+                <a:latin typeface="Calibri"/>
+              </a:rPr>
+              <a:t>Criterios de exito / entregable</a:t>
+            </a:r>
+          </a:p>
+        </p:txBody>
+      </p:sp>
+      <p:sp>
+        <p:nvSpPr>
+          <p:cNvPr id="5" name="TextBox 4"/>
+          <p:cNvSpPr txBox="1"/>
+          <p:nvPr/>
+        </p:nvSpPr>
+        <p:spPr>
+          <a:xfrm>
+            <a:off x="457200" y="1170432"/>
+            <a:ext cx="11277295" cy="5230368"/>
+          </a:xfrm>
+          <a:prstGeom prst="rect">
+            <a:avLst/>
+          </a:prstGeom>
+          <a:noFill/>
+        </p:spPr>
+        <p:txBody>
+          <a:bodyPr wrap="square">
+            <a:spAutoFit/>
+          </a:bodyPr>
+          <a:lstStyle/>
+          <a:p>
+            <a:pPr>
+              <a:spcAft>
+                <a:spcPts val="800"/>
+              </a:spcAft>
+            </a:pPr>
+            <a:r>
+              <a:rPr sz="2000" b="0" i="0">
+                <a:solidFill>
+                  <a:srgbClr val="333333"/>
+                </a:solidFill>
+                <a:latin typeface="Calibri"/>
+              </a:rPr>
+              <a:t>–   </a:t>
+            </a:r>
+            <a:r>
+              <a:rPr sz="2000" b="1" i="0">
+                <a:solidFill>
+                  <a:srgbClr val="333333"/>
+                </a:solidFill>
+                <a:latin typeface="Calibri"/>
+              </a:rPr>
+              <a:t>Entregable:</a:t>
+            </a:r>
+            <a:r>
+              <a:rPr sz="2000" b="0" i="0">
+                <a:solidFill>
+                  <a:srgbClr val="333333"/>
+                </a:solidFill>
+                <a:latin typeface="Calibri"/>
+              </a:rPr>
+              <a:t> El proyecto VetCare ejecutable (carpeta del proyecto o JAR) más la bitácora de integración con tres defectos hallados con el debugger, cada uno con síntoma, causa, corrección y evidencia, subidos a la plataforma del curso.</a:t>
+            </a:r>
+          </a:p>
+          <a:p>
+            <a:pPr>
+              <a:spcAft>
+                <a:spcPts val="800"/>
+              </a:spcAft>
+            </a:pPr>
+            <a:r>
+              <a:rPr sz="2000" b="0" i="0">
+                <a:solidFill>
+                  <a:srgbClr val="333333"/>
+                </a:solidFill>
+                <a:latin typeface="Calibri"/>
+              </a:rPr>
+              <a:t>–   </a:t>
+            </a:r>
+            <a:r>
+              <a:rPr sz="2000" b="1" i="0">
+                <a:solidFill>
+                  <a:srgbClr val="333333"/>
+                </a:solidFill>
+                <a:latin typeface="Calibri"/>
+              </a:rPr>
+              <a:t>Exito:</a:t>
+            </a:r>
+            <a:r>
+              <a:rPr sz="2000" b="0" i="0">
+                <a:solidFill>
+                  <a:srgbClr val="333333"/>
+                </a:solidFill>
+                <a:latin typeface="Calibri"/>
+              </a:rPr>
+              <a:t> La aplicación arranca desde un único main, muestra la tabla con los datos del archivo y no requiere tocar código para completar el guion de humo.</a:t>
+            </a:r>
+          </a:p>
+          <a:p>
+            <a:pPr>
+              <a:spcAft>
+                <a:spcPts val="800"/>
+              </a:spcAft>
+            </a:pPr>
+            <a:r>
+              <a:rPr sz="2000" b="0" i="0">
+                <a:solidFill>
+                  <a:srgbClr val="333333"/>
+                </a:solidFill>
+                <a:latin typeface="Calibri"/>
+              </a:rPr>
+              <a:t>–   </a:t>
+            </a:r>
+            <a:r>
+              <a:rPr sz="2000" b="1" i="0">
+                <a:solidFill>
+                  <a:srgbClr val="333333"/>
+                </a:solidFill>
+                <a:latin typeface="Calibri"/>
+              </a:rPr>
+              <a:t>Exito:</a:t>
+            </a:r>
+            <a:r>
+              <a:rPr sz="2000" b="0" i="0">
+                <a:solidFill>
+                  <a:srgbClr val="333333"/>
+                </a:solidFill>
+                <a:latin typeface="Calibri"/>
+              </a:rPr>
+              <a:t> Existe una sola instancia del servicio y del repositorio en toda la aplicación, verificable con el debugger: lo que se ve en la tabla es lo que se guarda al cerrar.</a:t>
+            </a:r>
+          </a:p>
+          <a:p>
+            <a:pPr>
+              <a:spcAft>
+                <a:spcPts val="800"/>
+              </a:spcAft>
+            </a:pPr>
+            <a:r>
+              <a:rPr sz="2000" b="0" i="0">
+                <a:solidFill>
+                  <a:srgbClr val="333333"/>
+                </a:solidFill>
+                <a:latin typeface="Calibri"/>
+              </a:rPr>
+              <a:t>–   </a:t>
+            </a:r>
+            <a:r>
+              <a:rPr sz="2000" b="1" i="0">
+                <a:solidFill>
+                  <a:srgbClr val="333333"/>
+                </a:solidFill>
+                <a:latin typeface="Calibri"/>
+              </a:rPr>
+              <a:t>Exito:</a:t>
+            </a:r>
+            <a:r>
+              <a:rPr sz="2000" b="0" i="0">
+                <a:solidFill>
+                  <a:srgbClr val="333333"/>
+                </a:solidFill>
+                <a:latin typeface="Calibri"/>
+              </a:rPr>
+              <a:t> Los cinco pasos del guion de humo se ejecutan de corrido dos veces seguidas, y al reabrir aparecen las mascotas registradas en la corrida anterior.</a:t>
+            </a:r>
+          </a:p>
+          <a:p>
+            <a:pPr>
+              <a:spcAft>
+                <a:spcPts val="800"/>
+              </a:spcAft>
+            </a:pPr>
+            <a:r>
+              <a:rPr sz="2000" b="0" i="0">
+                <a:solidFill>
+                  <a:srgbClr val="333333"/>
+                </a:solidFill>
+                <a:latin typeface="Calibri"/>
+              </a:rPr>
+              <a:t>–   </a:t>
+            </a:r>
+            <a:r>
+              <a:rPr sz="2000" b="1" i="0">
+                <a:solidFill>
+                  <a:srgbClr val="333333"/>
+                </a:solidFill>
+                <a:latin typeface="Calibri"/>
+              </a:rPr>
+              <a:t>Exito:</a:t>
+            </a:r>
+            <a:r>
+              <a:rPr sz="2000" b="0" i="0">
+                <a:solidFill>
+                  <a:srgbClr val="333333"/>
+                </a:solidFill>
+                <a:latin typeface="Calibri"/>
+              </a:rPr>
+              <a:t> La bitácora documenta tres defectos con síntoma observable, causa encontrada con el debugger, corrección aplicada y forma de verificarla; ningún defecto quedó 'arreglado' sin explicación.</a:t>
+            </a:r>
+          </a:p>
+          <a:p>
+            <a:pPr>
+              <a:spcAft>
+                <a:spcPts val="800"/>
+              </a:spcAft>
+            </a:pPr>
+            <a:r>
+              <a:rPr sz="2000" b="0" i="0">
+                <a:solidFill>
+                  <a:srgbClr val="333333"/>
+                </a:solidFill>
+                <a:latin typeface="Calibri"/>
+              </a:rPr>
+              <a:t>–   </a:t>
+            </a:r>
+            <a:r>
+              <a:rPr sz="2000" b="1" i="0">
+                <a:solidFill>
+                  <a:srgbClr val="333333"/>
+                </a:solidFill>
+                <a:latin typeface="Calibri"/>
+              </a:rPr>
+              <a:t>Entrega en la plataforma del curso</a:t>
+            </a:r>
+            <a:r>
+              <a:rPr sz="2000" b="0" i="0">
+                <a:solidFill>
+                  <a:srgbClr val="333333"/>
+                </a:solidFill>
+                <a:latin typeface="Calibri"/>
+              </a:rPr>
+              <a:t> — en la fecha que indique el docente.</a:t>
+            </a:r>
+          </a:p>
+        </p:txBody>
+      </p:sp>
+      <p:sp>
+        <p:nvSpPr>
+          <p:cNvPr id="6" name="TextBox 5"/>
+          <p:cNvSpPr txBox="1"/>
+          <p:nvPr/>
+        </p:nvSpPr>
+        <p:spPr>
+          <a:xfrm>
+            <a:off x="11185855" y="6473952"/>
+            <a:ext cx="640080" cy="274320"/>
+          </a:xfrm>
+          <a:prstGeom prst="rect">
+            <a:avLst/>
+          </a:prstGeom>
+          <a:noFill/>
+        </p:spPr>
+        <p:txBody>
+          <a:bodyPr wrap="square">
+            <a:spAutoFit/>
+          </a:bodyPr>
+          <a:lstStyle/>
+          <a:p>
+            <a:pPr algn="r"/>
+            <a:r>
+              <a:rPr sz="1100" b="0" i="0">
+                <a:solidFill>
+                  <a:srgbClr val="666666"/>
+                </a:solidFill>
+                <a:latin typeface="Calibri"/>
+              </a:rPr>
+              <a:t>17</a:t>
+            </a:r>
+          </a:p>
+        </p:txBody>
+      </p:sp>
+    </p:spTree>
+  </p:cSld>
+  <p:clrMapOvr>
+    <a:masterClrMapping/>
+  </p:clrMapOvr>
+</p:sld>
+</file>
+
+<file path=ppt/slides/slide18.xml><?xml version="1.0" encoding="utf-8"?>
+<p:sld xmlns:a="http://schemas.openxmlformats.org/drawingml/2006/main" xmlns:p="http://schemas.openxmlformats.org/presentationml/2006/main" xmlns:r="http://schemas.openxmlformats.org/officeDocument/2006/relationships">
+  <p:cSld>
+    <p:bg>
+      <p:bgPr>
+        <a:solidFill>
+          <a:srgbClr val="FFFFFF"/>
+        </a:solidFill>
+        <a:effectLst/>
+      </p:bgPr>
+    </p:bg>
+    <p:spTree>
+      <p:nvGrpSpPr>
+        <p:cNvPr id="1" name=""/>
+        <p:cNvGrpSpPr/>
+        <p:nvPr/>
+      </p:nvGrpSpPr>
+      <p:grpSpPr/>
+      <p:sp>
+        <p:nvSpPr>
+          <p:cNvPr id="2" name="Rectangle 1"/>
+          <p:cNvSpPr/>
+          <p:nvPr/>
+        </p:nvSpPr>
+        <p:spPr>
+          <a:xfrm>
+            <a:off x="0" y="0"/>
+            <a:ext cx="12191695" cy="960120"/>
+          </a:xfrm>
+          <a:prstGeom prst="rect">
+            <a:avLst/>
+          </a:prstGeom>
+          <a:solidFill>
+            <a:srgbClr val="095292"/>
+          </a:solidFill>
+          <a:ln>
+            <a:noFill/>
+          </a:ln>
+        </p:spPr>
+        <p:style>
+          <a:lnRef idx="1">
+            <a:schemeClr val="accent1"/>
+          </a:lnRef>
+          <a:fillRef idx="3">
+            <a:schemeClr val="accent1"/>
+          </a:fillRef>
+          <a:effectRef idx="2">
+            <a:schemeClr val="accent1"/>
+          </a:effectRef>
+          <a:fontRef idx="minor">
+            <a:schemeClr val="lt1"/>
+          </a:fontRef>
+        </p:style>
+        <p:txBody>
+          <a:bodyPr rtlCol="0" anchor="ctr"/>
+          <a:lstStyle/>
+          <a:p>
+            <a:pPr algn="ctr"/>
+          </a:p>
+        </p:txBody>
+      </p:sp>
+      <p:sp>
+        <p:nvSpPr>
+          <p:cNvPr id="3" name="Rectangle 2"/>
+          <p:cNvSpPr/>
+          <p:nvPr/>
+        </p:nvSpPr>
+        <p:spPr>
+          <a:xfrm>
+            <a:off x="0" y="960120"/>
+            <a:ext cx="12191695" cy="41148"/>
+          </a:xfrm>
+          <a:prstGeom prst="rect">
+            <a:avLst/>
+          </a:prstGeom>
+          <a:solidFill>
+            <a:srgbClr val="FFD000"/>
+          </a:solidFill>
+          <a:ln>
+            <a:noFill/>
+          </a:ln>
+        </p:spPr>
+        <p:style>
+          <a:lnRef idx="1">
+            <a:schemeClr val="accent1"/>
+          </a:lnRef>
+          <a:fillRef idx="3">
+            <a:schemeClr val="accent1"/>
+          </a:fillRef>
+          <a:effectRef idx="2">
+            <a:schemeClr val="accent1"/>
+          </a:effectRef>
+          <a:fontRef idx="minor">
+            <a:schemeClr val="lt1"/>
+          </a:fontRef>
+        </p:style>
+        <p:txBody>
+          <a:bodyPr rtlCol="0" anchor="ctr"/>
+          <a:lstStyle/>
+          <a:p>
+            <a:pPr algn="ctr"/>
+          </a:p>
+        </p:txBody>
+      </p:sp>
+      <p:sp>
+        <p:nvSpPr>
+          <p:cNvPr id="4" name="TextBox 3"/>
+          <p:cNvSpPr txBox="1"/>
+          <p:nvPr/>
+        </p:nvSpPr>
+        <p:spPr>
+          <a:xfrm>
+            <a:off x="457200" y="164592"/>
+            <a:ext cx="11277295" cy="502920"/>
+          </a:xfrm>
+          <a:prstGeom prst="rect">
+            <a:avLst/>
+          </a:prstGeom>
+          <a:noFill/>
+        </p:spPr>
+        <p:txBody>
+          <a:bodyPr wrap="square">
+            <a:spAutoFit/>
+          </a:bodyPr>
+          <a:lstStyle/>
+          <a:p>
+            <a:r>
+              <a:rPr sz="2600" b="1" i="0">
+                <a:solidFill>
+                  <a:srgbClr val="FFFFFF"/>
+                </a:solidFill>
+                <a:latin typeface="Calibri"/>
+              </a:rPr>
+              <a:t>Para el PI esta semana</a:t>
+            </a:r>
+          </a:p>
+        </p:txBody>
+      </p:sp>
+      <p:sp>
+        <p:nvSpPr>
+          <p:cNvPr id="5" name="Rounded Rectangle 4"/>
+          <p:cNvSpPr/>
+          <p:nvPr/>
+        </p:nvSpPr>
+        <p:spPr>
+          <a:xfrm>
+            <a:off x="457200" y="1261872"/>
+            <a:ext cx="11277295" cy="1051560"/>
+          </a:xfrm>
+          <a:prstGeom prst="roundRect">
+            <a:avLst>
+              <a:gd name="adj" fmla="val 12000"/>
+            </a:avLst>
+          </a:prstGeom>
+          <a:solidFill>
+            <a:srgbClr val="E8F4FA"/>
+          </a:solidFill>
+          <a:ln>
+            <a:noFill/>
+          </a:ln>
+        </p:spPr>
+        <p:style>
+          <a:lnRef idx="1">
+            <a:schemeClr val="accent1"/>
+          </a:lnRef>
+          <a:fillRef idx="3">
+            <a:schemeClr val="accent1"/>
+          </a:fillRef>
+          <a:effectRef idx="2">
+            <a:schemeClr val="accent1"/>
+          </a:effectRef>
+          <a:fontRef idx="minor">
+            <a:schemeClr val="lt1"/>
+          </a:fontRef>
+        </p:style>
+        <p:txBody>
+          <a:bodyPr rtlCol="0" anchor="ctr"/>
+          <a:lstStyle/>
+          <a:p>
+            <a:pPr algn="ctr"/>
+          </a:p>
+        </p:txBody>
+      </p:sp>
+      <p:sp>
+        <p:nvSpPr>
+          <p:cNvPr id="6" name="Rectangle 5"/>
+          <p:cNvSpPr/>
+          <p:nvPr/>
+        </p:nvSpPr>
+        <p:spPr>
+          <a:xfrm>
+            <a:off x="457200" y="1261872"/>
+            <a:ext cx="128016" cy="1051560"/>
+          </a:xfrm>
+          <a:prstGeom prst="rect">
+            <a:avLst/>
+          </a:prstGeom>
+          <a:solidFill>
+            <a:srgbClr val="269CCB"/>
+          </a:solidFill>
+          <a:ln>
+            <a:noFill/>
+          </a:ln>
+        </p:spPr>
+        <p:style>
+          <a:lnRef idx="1">
+            <a:schemeClr val="accent1"/>
+          </a:lnRef>
+          <a:fillRef idx="3">
+            <a:schemeClr val="accent1"/>
+          </a:fillRef>
+          <a:effectRef idx="2">
+            <a:schemeClr val="accent1"/>
+          </a:effectRef>
+          <a:fontRef idx="minor">
+            <a:schemeClr val="lt1"/>
+          </a:fontRef>
+        </p:style>
+        <p:txBody>
+          <a:bodyPr rtlCol="0" anchor="ctr"/>
+          <a:lstStyle/>
+          <a:p>
+            <a:pPr algn="ctr"/>
+          </a:p>
+        </p:txBody>
+      </p:sp>
+      <p:sp>
+        <p:nvSpPr>
+          <p:cNvPr id="7" name="TextBox 6"/>
+          <p:cNvSpPr txBox="1"/>
+          <p:nvPr/>
+        </p:nvSpPr>
+        <p:spPr>
+          <a:xfrm>
+            <a:off x="777240" y="1399031"/>
+            <a:ext cx="10774375" cy="822959"/>
+          </a:xfrm>
+          <a:prstGeom prst="rect">
+            <a:avLst/>
+          </a:prstGeom>
+          <a:noFill/>
+        </p:spPr>
+        <p:txBody>
+          <a:bodyPr wrap="square">
+            <a:spAutoFit/>
+          </a:bodyPr>
+          <a:lstStyle/>
+          <a:p>
+            <a:r>
+              <a:rPr sz="1200" b="1" i="0">
+                <a:solidFill>
+                  <a:srgbClr val="269CCB"/>
+                </a:solidFill>
+                <a:latin typeface="Calibri"/>
+              </a:rPr>
+              <a:t>Info</a:t>
+            </a:r>
+          </a:p>
+          <a:p>
+            <a:pPr>
+              <a:spcBef>
+                <a:spcPts val="400"/>
+              </a:spcBef>
+            </a:pPr>
+            <a:r>
+              <a:rPr sz="1400" b="0" i="0">
+                <a:solidFill>
+                  <a:srgbClr val="333333"/>
+                </a:solidFill>
+                <a:latin typeface="Calibri"/>
+              </a:rPr>
+              <a:t>Hito: VetCare arranca, carga el archivo, registra, busca por ID, lista y guarda al cerrar: el flujo completo del PI corre sin tocar código.</a:t>
+            </a:r>
+          </a:p>
+        </p:txBody>
+      </p:sp>
+      <p:sp>
+        <p:nvSpPr>
+          <p:cNvPr id="8" name="Rounded Rectangle 7"/>
+          <p:cNvSpPr/>
+          <p:nvPr/>
+        </p:nvSpPr>
+        <p:spPr>
+          <a:xfrm>
+            <a:off x="457200" y="2478024"/>
+            <a:ext cx="11277295" cy="1051560"/>
+          </a:xfrm>
+          <a:prstGeom prst="roundRect">
+            <a:avLst>
+              <a:gd name="adj" fmla="val 12000"/>
+            </a:avLst>
+          </a:prstGeom>
+          <a:solidFill>
+            <a:srgbClr val="FFF8E1"/>
+          </a:solidFill>
+          <a:ln>
+            <a:noFill/>
+          </a:ln>
+        </p:spPr>
+        <p:style>
+          <a:lnRef idx="1">
+            <a:schemeClr val="accent1"/>
+          </a:lnRef>
+          <a:fillRef idx="3">
+            <a:schemeClr val="accent1"/>
+          </a:fillRef>
+          <a:effectRef idx="2">
+            <a:schemeClr val="accent1"/>
+          </a:effectRef>
+          <a:fontRef idx="minor">
+            <a:schemeClr val="lt1"/>
+          </a:fontRef>
+        </p:style>
+        <p:txBody>
+          <a:bodyPr rtlCol="0" anchor="ctr"/>
+          <a:lstStyle/>
+          <a:p>
+            <a:pPr algn="ctr"/>
+          </a:p>
+        </p:txBody>
+      </p:sp>
+      <p:sp>
+        <p:nvSpPr>
+          <p:cNvPr id="9" name="Rectangle 8"/>
+          <p:cNvSpPr/>
+          <p:nvPr/>
+        </p:nvSpPr>
+        <p:spPr>
+          <a:xfrm>
+            <a:off x="457200" y="2478024"/>
+            <a:ext cx="128016" cy="1051560"/>
+          </a:xfrm>
+          <a:prstGeom prst="rect">
+            <a:avLst/>
+          </a:prstGeom>
+          <a:solidFill>
+            <a:srgbClr val="FFD000"/>
+          </a:solidFill>
+          <a:ln>
+            <a:noFill/>
+          </a:ln>
+        </p:spPr>
+        <p:style>
+          <a:lnRef idx="1">
+            <a:schemeClr val="accent1"/>
+          </a:lnRef>
+          <a:fillRef idx="3">
+            <a:schemeClr val="accent1"/>
+          </a:fillRef>
+          <a:effectRef idx="2">
+            <a:schemeClr val="accent1"/>
+          </a:effectRef>
+          <a:fontRef idx="minor">
+            <a:schemeClr val="lt1"/>
+          </a:fontRef>
+        </p:style>
+        <p:txBody>
+          <a:bodyPr rtlCol="0" anchor="ctr"/>
+          <a:lstStyle/>
+          <a:p>
+            <a:pPr algn="ctr"/>
+          </a:p>
+        </p:txBody>
+      </p:sp>
+      <p:sp>
+        <p:nvSpPr>
+          <p:cNvPr id="10" name="TextBox 9"/>
+          <p:cNvSpPr txBox="1"/>
+          <p:nvPr/>
+        </p:nvSpPr>
+        <p:spPr>
+          <a:xfrm>
+            <a:off x="777240" y="2615184"/>
+            <a:ext cx="10774375" cy="822959"/>
+          </a:xfrm>
+          <a:prstGeom prst="rect">
+            <a:avLst/>
+          </a:prstGeom>
+          <a:noFill/>
+        </p:spPr>
+        <p:txBody>
+          <a:bodyPr wrap="square">
+            <a:spAutoFit/>
+          </a:bodyPr>
+          <a:lstStyle/>
+          <a:p>
+            <a:r>
+              <a:rPr sz="1200" b="1" i="0">
+                <a:solidFill>
+                  <a:srgbClr val="FFD000"/>
+                </a:solidFill>
+                <a:latin typeface="Calibri"/>
+              </a:rPr>
+              <a:t>Aclaración</a:t>
+            </a:r>
+          </a:p>
+          <a:p>
+            <a:pPr>
+              <a:spcBef>
+                <a:spcPts val="400"/>
+              </a:spcBef>
+            </a:pPr>
+            <a:r>
+              <a:rPr sz="1400" b="0" i="0">
+                <a:solidFill>
+                  <a:srgbClr val="333333"/>
+                </a:solidFill>
+                <a:latin typeface="Calibri"/>
+              </a:rPr>
+              <a:t>Enunciado completo: Clases/Proyecto Integrador/ (VetCare).</a:t>
+            </a:r>
+          </a:p>
+        </p:txBody>
+      </p:sp>
+      <p:sp>
+        <p:nvSpPr>
+          <p:cNvPr id="11" name="Rounded Rectangle 10"/>
+          <p:cNvSpPr/>
+          <p:nvPr/>
+        </p:nvSpPr>
+        <p:spPr>
+          <a:xfrm>
+            <a:off x="457200" y="3694176"/>
+            <a:ext cx="11277295" cy="1051560"/>
+          </a:xfrm>
+          <a:prstGeom prst="roundRect">
+            <a:avLst>
+              <a:gd name="adj" fmla="val 12000"/>
+            </a:avLst>
+          </a:prstGeom>
+          <a:solidFill>
+            <a:srgbClr val="FBE4E4"/>
+          </a:solidFill>
+          <a:ln>
+            <a:noFill/>
+          </a:ln>
+        </p:spPr>
+        <p:style>
+          <a:lnRef idx="1">
+            <a:schemeClr val="accent1"/>
+          </a:lnRef>
+          <a:fillRef idx="3">
+            <a:schemeClr val="accent1"/>
+          </a:fillRef>
+          <a:effectRef idx="2">
+            <a:schemeClr val="accent1"/>
+          </a:effectRef>
+          <a:fontRef idx="minor">
+            <a:schemeClr val="lt1"/>
+          </a:fontRef>
+        </p:style>
+        <p:txBody>
+          <a:bodyPr rtlCol="0" anchor="ctr"/>
+          <a:lstStyle/>
+          <a:p>
+            <a:pPr algn="ctr"/>
+          </a:p>
+        </p:txBody>
+      </p:sp>
+      <p:sp>
+        <p:nvSpPr>
+          <p:cNvPr id="12" name="Rectangle 11"/>
+          <p:cNvSpPr/>
+          <p:nvPr/>
+        </p:nvSpPr>
+        <p:spPr>
+          <a:xfrm>
+            <a:off x="457200" y="3694176"/>
+            <a:ext cx="128016" cy="1051560"/>
+          </a:xfrm>
+          <a:prstGeom prst="rect">
+            <a:avLst/>
+          </a:prstGeom>
+          <a:solidFill>
+            <a:srgbClr val="A02030"/>
+          </a:solidFill>
+          <a:ln>
+            <a:noFill/>
+          </a:ln>
+        </p:spPr>
+        <p:style>
+          <a:lnRef idx="1">
+            <a:schemeClr val="accent1"/>
+          </a:lnRef>
+          <a:fillRef idx="3">
+            <a:schemeClr val="accent1"/>
+          </a:fillRef>
+          <a:effectRef idx="2">
+            <a:schemeClr val="accent1"/>
+          </a:effectRef>
+          <a:fontRef idx="minor">
+            <a:schemeClr val="lt1"/>
+          </a:fontRef>
+        </p:style>
+        <p:txBody>
+          <a:bodyPr rtlCol="0" anchor="ctr"/>
+          <a:lstStyle/>
+          <a:p>
+            <a:pPr algn="ctr"/>
+          </a:p>
+        </p:txBody>
+      </p:sp>
+      <p:sp>
+        <p:nvSpPr>
+          <p:cNvPr id="13" name="TextBox 12"/>
+          <p:cNvSpPr txBox="1"/>
+          <p:nvPr/>
+        </p:nvSpPr>
+        <p:spPr>
+          <a:xfrm>
+            <a:off x="777240" y="3831336"/>
+            <a:ext cx="10774375" cy="822959"/>
+          </a:xfrm>
+          <a:prstGeom prst="rect">
+            <a:avLst/>
+          </a:prstGeom>
+          <a:noFill/>
+        </p:spPr>
+        <p:txBody>
+          <a:bodyPr wrap="square">
+            <a:spAutoFit/>
+          </a:bodyPr>
+          <a:lstStyle/>
+          <a:p>
+            <a:r>
+              <a:rPr sz="1200" b="1" i="0">
+                <a:solidFill>
+                  <a:srgbClr val="A02030"/>
+                </a:solidFill>
+                <a:latin typeface="Calibri"/>
+              </a:rPr>
+              <a:t>Atención</a:t>
+            </a:r>
+          </a:p>
+          <a:p>
+            <a:pPr>
+              <a:spcBef>
+                <a:spcPts val="400"/>
+              </a:spcBef>
+            </a:pPr>
+            <a:r>
+              <a:rPr sz="1400" b="0" i="0">
+                <a:solidFill>
+                  <a:srgbClr val="333333"/>
+                </a:solidFill>
+                <a:latin typeface="Calibri"/>
+              </a:rPr>
+              <a:t>Entrega del taller, si el docente lo asigna · en la fecha que indique el docente.</a:t>
+            </a:r>
+          </a:p>
+        </p:txBody>
+      </p:sp>
+      <p:sp>
+        <p:nvSpPr>
+          <p:cNvPr id="14" name="TextBox 13"/>
+          <p:cNvSpPr txBox="1"/>
+          <p:nvPr/>
+        </p:nvSpPr>
+        <p:spPr>
+          <a:xfrm>
+            <a:off x="11185855" y="6473952"/>
+            <a:ext cx="640080" cy="274320"/>
+          </a:xfrm>
+          <a:prstGeom prst="rect">
+            <a:avLst/>
+          </a:prstGeom>
+          <a:noFill/>
+        </p:spPr>
+        <p:txBody>
+          <a:bodyPr wrap="square">
+            <a:spAutoFit/>
+          </a:bodyPr>
+          <a:lstStyle/>
+          <a:p>
+            <a:pPr algn="r"/>
+            <a:r>
+              <a:rPr sz="1100" b="0" i="0">
+                <a:solidFill>
+                  <a:srgbClr val="666666"/>
+                </a:solidFill>
+                <a:latin typeface="Calibri"/>
+              </a:rPr>
+              <a:t>18</a:t>
+            </a:r>
+          </a:p>
+        </p:txBody>
+      </p:sp>
+    </p:spTree>
+  </p:cSld>
+  <p:clrMapOvr>
+    <a:masterClrMapping/>
+  </p:clrMapOvr>
+</p:sld>
+</file>
+
+<file path=ppt/slides/slide19.xml><?xml version="1.0" encoding="utf-8"?>
+<p:sld xmlns:a="http://schemas.openxmlformats.org/drawingml/2006/main" xmlns:p="http://schemas.openxmlformats.org/presentationml/2006/main" xmlns:r="http://schemas.openxmlformats.org/officeDocument/2006/relationships">
+  <p:cSld>
+    <p:bg>
+      <p:bgPr>
+        <a:solidFill>
+          <a:srgbClr val="FFFFFF"/>
+        </a:solidFill>
+        <a:effectLst/>
+      </p:bgPr>
+    </p:bg>
+    <p:spTree>
+      <p:nvGrpSpPr>
+        <p:cNvPr id="1" name=""/>
+        <p:cNvGrpSpPr/>
+        <p:nvPr/>
+      </p:nvGrpSpPr>
+      <p:grpSpPr/>
+      <p:sp>
+        <p:nvSpPr>
+          <p:cNvPr id="2" name="Rectangle 1"/>
+          <p:cNvSpPr/>
+          <p:nvPr/>
+        </p:nvSpPr>
+        <p:spPr>
+          <a:xfrm>
+            <a:off x="0" y="0"/>
             <a:ext cx="12191695" cy="164592"/>
           </a:xfrm>
           <a:prstGeom prst="rect">
@@ -6712,7 +9319,7 @@
                 </a:solidFill>
                 <a:latin typeface="Calibri"/>
               </a:rPr>
-              <a:t>Teoria Core</a:t>
+              <a:t>Integrar es lograr que piezas que ya funcionan por separado funcionen...</a:t>
             </a:r>
           </a:p>
         </p:txBody>
@@ -6751,7 +9358,7 @@
                 </a:solidFill>
                 <a:latin typeface="Calibri"/>
               </a:rPr>
-              <a:t>–   Integrar es lograr que piezas que ya funcionan por separado funcionen juntas dentro de un único ejecutable, y esa…</a:t>
+              <a:t>–   Integrar es lograr que piezas que ya funcionan por separado funcionen juntas dentro de un único ejecutable, y esa palabra 'juntas' esconde casi todo el trabajo.</a:t>
             </a:r>
           </a:p>
           <a:p>
@@ -6767,7 +9374,7 @@
                 </a:solidFill>
                 <a:latin typeface="Calibri"/>
               </a:rPr>
-              <a:t>–   El flujo de punta a punta se define antes de integrar, por escrito, y se llama guion de humo porque su único fin…</a:t>
+              <a:t>–   VetCare tiene cuatro piezas y conviene ponerles nombre de paquete para verlas: vetcare.modelo con Mascota (y Dueno, si el equipo lo separó)</a:t>
             </a:r>
           </a:p>
           <a:p>
@@ -6783,7 +9390,7 @@
                 </a:solidFill>
                 <a:latin typeface="Calibri"/>
               </a:rPr>
-              <a:t>–   Los errores de integración tienen firma propia y conviene reconocerlos por el síntoma</a:t>
+              <a:t>–   Vetcare.datos con RepositorioMascotasCSV, vetcare.logica con ServicioVetCare que administra el ArrayList y aplica las reglas, y vetcare.ui con la ventana Swing.</a:t>
             </a:r>
           </a:p>
           <a:p>
@@ -6799,7 +9406,7 @@
                 </a:solidFill>
                 <a:latin typeface="Calibri"/>
               </a:rPr>
-              <a:t>–   El depurador de VS Code es la herramienta de esta clase y hay que perderle el miedo en vivo</a:t>
+              <a:t>–   Entre ellas rige una regla de dependencia que hay que respetar como si fuera ley: la interfaz conoce al servicio, el servicio conoce al repositorio, el repositorio conoce al modelo</a:t>
             </a:r>
           </a:p>
           <a:p>
@@ -6815,7 +9422,55 @@
                 </a:solidFill>
                 <a:latin typeface="Calibri"/>
               </a:rPr>
-              <a:t>–   La forma de integrar sin sufrir es por goteo y no de un solo golpe</a:t>
+              <a:t>–   Y nadie mira hacia arriba; en particular el servicio no puede llamar a un JOptionPane.</a:t>
+            </a:r>
+          </a:p>
+          <a:p>
+            <a:pPr>
+              <a:spcAft>
+                <a:spcPts val="800"/>
+              </a:spcAft>
+            </a:pPr>
+            <a:r>
+              <a:rPr sz="2000" b="0" i="0">
+                <a:solidFill>
+                  <a:srgbClr val="333333"/>
+                </a:solidFill>
+                <a:latin typeface="Calibri"/>
+              </a:rPr>
+              <a:t>–   ¿Por qué importa?</a:t>
+            </a:r>
+          </a:p>
+          <a:p>
+            <a:pPr>
+              <a:spcAft>
+                <a:spcPts val="800"/>
+              </a:spcAft>
+            </a:pPr>
+            <a:r>
+              <a:rPr sz="2000" b="0" i="0">
+                <a:solidFill>
+                  <a:srgbClr val="333333"/>
+                </a:solidFill>
+                <a:latin typeface="Calibri"/>
+              </a:rPr>
+              <a:t>–   Porque así se puede probar la lógica sin abrir la ventana, porque el día que se cambie el.csv por una base de datos solo se toca una clase, y porque cuando algo falle se sabe en qué capa buscar.</a:t>
+            </a:r>
+          </a:p>
+          <a:p>
+            <a:pPr>
+              <a:spcAft>
+                <a:spcPts val="800"/>
+              </a:spcAft>
+            </a:pPr>
+            <a:r>
+              <a:rPr sz="2000" b="0" i="0">
+                <a:solidFill>
+                  <a:srgbClr val="333333"/>
+                </a:solidFill>
+                <a:latin typeface="Calibri"/>
+              </a:rPr>
+              <a:t>–   Integrar bien no es que compile: es que exista un único punto de entrada, un único servicio y un único archivo de datos, y que cada capa haga su oficio y nada más.</a:t>
             </a:r>
           </a:p>
         </p:txBody>
@@ -6996,141 +9651,21 @@
                 </a:solidFill>
                 <a:latin typeface="Calibri"/>
               </a:rPr>
-              <a:t>El main que amarra las cuatro capas de VetCare</a:t>
-            </a:r>
-          </a:p>
-        </p:txBody>
-      </p:sp>
-      <p:sp>
-        <p:nvSpPr>
-          <p:cNvPr id="5" name="Rounded Rectangle 4"/>
-          <p:cNvSpPr/>
-          <p:nvPr/>
-        </p:nvSpPr>
-        <p:spPr>
-          <a:xfrm>
-            <a:off x="457200" y="1261872"/>
-            <a:ext cx="11277295" cy="4773168"/>
-          </a:xfrm>
-          <a:prstGeom prst="roundRect">
-            <a:avLst>
-              <a:gd name="adj" fmla="val 12000"/>
-            </a:avLst>
-          </a:prstGeom>
-          <a:solidFill>
-            <a:srgbClr val="1E2A38"/>
-          </a:solidFill>
-          <a:ln>
-            <a:noFill/>
-          </a:ln>
-        </p:spPr>
-        <p:style>
-          <a:lnRef idx="1">
-            <a:schemeClr val="accent1"/>
-          </a:lnRef>
-          <a:fillRef idx="3">
-            <a:schemeClr val="accent1"/>
-          </a:fillRef>
-          <a:effectRef idx="2">
-            <a:schemeClr val="accent1"/>
-          </a:effectRef>
-          <a:fontRef idx="minor">
-            <a:schemeClr val="lt1"/>
-          </a:fontRef>
-        </p:style>
-        <p:txBody>
-          <a:bodyPr rtlCol="0" anchor="ctr"/>
-          <a:lstStyle/>
-          <a:p>
-            <a:pPr algn="ctr"/>
-          </a:p>
-        </p:txBody>
-      </p:sp>
-      <p:sp>
-        <p:nvSpPr>
-          <p:cNvPr id="6" name="Rectangle 5"/>
-          <p:cNvSpPr/>
-          <p:nvPr/>
-        </p:nvSpPr>
-        <p:spPr>
-          <a:xfrm>
-            <a:off x="457200" y="1261872"/>
-            <a:ext cx="11277295" cy="320040"/>
-          </a:xfrm>
-          <a:prstGeom prst="rect">
-            <a:avLst/>
-          </a:prstGeom>
-          <a:solidFill>
-            <a:srgbClr val="095292"/>
-          </a:solidFill>
-          <a:ln>
-            <a:noFill/>
-          </a:ln>
-        </p:spPr>
-        <p:style>
-          <a:lnRef idx="1">
-            <a:schemeClr val="accent1"/>
-          </a:lnRef>
-          <a:fillRef idx="3">
-            <a:schemeClr val="accent1"/>
-          </a:fillRef>
-          <a:effectRef idx="2">
-            <a:schemeClr val="accent1"/>
-          </a:effectRef>
-          <a:fontRef idx="minor">
-            <a:schemeClr val="lt1"/>
-          </a:fontRef>
-        </p:style>
-        <p:txBody>
-          <a:bodyPr rtlCol="0" anchor="ctr"/>
-          <a:lstStyle/>
-          <a:p>
-            <a:pPr algn="ctr"/>
-          </a:p>
-        </p:txBody>
-      </p:sp>
-      <p:sp>
-        <p:nvSpPr>
-          <p:cNvPr id="7" name="TextBox 6"/>
+              <a:t>El flujo de punta a punta se define antes de integrar, por escrito, y...</a:t>
+            </a:r>
+          </a:p>
+        </p:txBody>
+      </p:sp>
+      <p:sp>
+        <p:nvSpPr>
+          <p:cNvPr id="5" name="TextBox 4"/>
           <p:cNvSpPr txBox="1"/>
           <p:nvPr/>
         </p:nvSpPr>
         <p:spPr>
           <a:xfrm>
-            <a:off x="685800" y="1307592"/>
-            <a:ext cx="10820095" cy="256032"/>
-          </a:xfrm>
-          <a:prstGeom prst="rect">
-            <a:avLst/>
-          </a:prstGeom>
-          <a:noFill/>
-        </p:spPr>
-        <p:txBody>
-          <a:bodyPr wrap="square" anchor="ctr"/>
-          <a:lstStyle/>
-          <a:p>
-            <a:r>
-              <a:rPr sz="1000" b="1" i="0">
-                <a:solidFill>
-                  <a:srgbClr val="269CCB"/>
-                </a:solidFill>
-                <a:latin typeface="Calibri"/>
-              </a:rPr>
-              <a:t>● ● ●</a:t>
-            </a:r>
-          </a:p>
-        </p:txBody>
-      </p:sp>
-      <p:sp>
-        <p:nvSpPr>
-          <p:cNvPr id="8" name="TextBox 7"/>
-          <p:cNvSpPr txBox="1"/>
-          <p:nvPr/>
-        </p:nvSpPr>
-        <p:spPr>
-          <a:xfrm>
-            <a:off x="777240" y="1719072"/>
-            <a:ext cx="10637215" cy="4133087"/>
+            <a:off x="457200" y="1170432"/>
+            <a:ext cx="11277295" cy="5230368"/>
           </a:xfrm>
           <a:prstGeom prst="rect">
             <a:avLst/>
@@ -7145,251 +9680,120 @@
           <a:p>
             <a:pPr>
               <a:spcAft>
-                <a:spcPts val="400"/>
+                <a:spcPts val="800"/>
               </a:spcAft>
             </a:pPr>
             <a:r>
-              <a:rPr sz="1400" b="0" i="0">
-                <a:solidFill>
-                  <a:srgbClr val="FFFFFF"/>
-                </a:solidFill>
-                <a:latin typeface="Calibri"/>
-              </a:rPr>
-              <a:t>public static void main(String[] args) {</a:t>
+              <a:rPr sz="2000" b="0" i="0">
+                <a:solidFill>
+                  <a:srgbClr val="333333"/>
+                </a:solidFill>
+                <a:latin typeface="Calibri"/>
+              </a:rPr>
+              <a:t>–   El flujo de punta a punta se define antes de integrar, por escrito, y se llama guion de humo porque su único fin es ver si sale humo.</a:t>
             </a:r>
           </a:p>
           <a:p>
             <a:pPr>
               <a:spcAft>
-                <a:spcPts val="400"/>
+                <a:spcPts val="800"/>
               </a:spcAft>
             </a:pPr>
             <a:r>
-              <a:rPr sz="1400" b="0" i="0">
-                <a:solidFill>
-                  <a:srgbClr val="FFFFFF"/>
-                </a:solidFill>
-                <a:latin typeface="Calibri"/>
-              </a:rPr>
-              <a:t>    RepositorioMascotasCSV repositorio = new RepositorioMascotasCSV("mascotas.csv"); // capa de datos</a:t>
+              <a:rPr sz="2000" b="0" i="0">
+                <a:solidFill>
+                  <a:srgbClr val="333333"/>
+                </a:solidFill>
+                <a:latin typeface="Calibri"/>
+              </a:rPr>
+              <a:t>–   Para VetCare son cinco pasos: abrir la aplicación y ver la tabla poblada con lo que había en mascotas.csv; registrar una mascota nueva con dueño y ver que aparece de inmediato en la tabla</a:t>
             </a:r>
           </a:p>
           <a:p>
             <a:pPr>
               <a:spcAft>
-                <a:spcPts val="400"/>
+                <a:spcPts val="800"/>
               </a:spcAft>
             </a:pPr>
             <a:r>
-              <a:rPr sz="1400" b="0" i="0">
-                <a:solidFill>
-                  <a:srgbClr val="FFFFFF"/>
-                </a:solidFill>
-                <a:latin typeface="Calibri"/>
-              </a:rPr>
-              <a:t>    ServicioVetCare servicio = new ServicioVetCare(repositorio);   // logica: dueno del ArrayList</a:t>
+              <a:rPr sz="2000" b="0" i="0">
+                <a:solidFill>
+                  <a:srgbClr val="333333"/>
+                </a:solidFill>
+                <a:latin typeface="Calibri"/>
+              </a:rPr>
+              <a:t>–   Buscar por ID y ver el expediente; cerrar la ventana y confirmar que avisó cuántos registros guardó; volver a abrir y encontrar la mascota nueva.</a:t>
             </a:r>
           </a:p>
           <a:p>
             <a:pPr>
               <a:spcAft>
-                <a:spcPts val="400"/>
+                <a:spcPts val="800"/>
               </a:spcAft>
             </a:pPr>
             <a:r>
-              <a:rPr sz="1400" b="0" i="0">
-                <a:solidFill>
-                  <a:srgbClr val="FFFFFF"/>
-                </a:solidFill>
-                <a:latin typeface="Calibri"/>
-              </a:rPr>
-              <a:t>    servicio.cargarDesdeArchivo();      // PRIMERO los datos...</a:t>
+              <a:rPr sz="2000" b="0" i="0">
+                <a:solidFill>
+                  <a:srgbClr val="333333"/>
+                </a:solidFill>
+                <a:latin typeface="Calibri"/>
+              </a:rPr>
+              <a:t>–   Eso es lo que tiene que correr sin que nadie toque código en la mitad.</a:t>
             </a:r>
           </a:p>
           <a:p>
             <a:pPr>
               <a:spcAft>
-                <a:spcPts val="400"/>
+                <a:spcPts val="800"/>
               </a:spcAft>
             </a:pPr>
             <a:r>
-              <a:rPr sz="1400" b="0" i="0">
-                <a:solidFill>
-                  <a:srgbClr val="FFFFFF"/>
-                </a:solidFill>
-                <a:latin typeface="Calibri"/>
-              </a:rPr>
-              <a:t>    SwingUtilities.invokeLater(() -&gt; new VetCareApp(servicio).setVisible(true)); // ...DESPUES la ventana</a:t>
+              <a:rPr sz="2000" b="0" i="0">
+                <a:solidFill>
+                  <a:srgbClr val="333333"/>
+                </a:solidFill>
+                <a:latin typeface="Calibri"/>
+              </a:rPr>
+              <a:t>–   El ciclo de vida que lo soporta es igual de explícito y su orden no es negociable: el main construye el repositorio, construye el servicio pasándole el repositorio, pide cargar los datos y solo entonces manda a construir y mostrar la ventana</a:t>
             </a:r>
           </a:p>
           <a:p>
             <a:pPr>
               <a:spcAft>
-                <a:spcPts val="400"/>
+                <a:spcPts val="800"/>
               </a:spcAft>
             </a:pPr>
             <a:r>
-              <a:rPr sz="1400" b="0" i="0">
-                <a:solidFill>
-                  <a:srgbClr val="FFFFFF"/>
-                </a:solidFill>
-                <a:latin typeface="Calibri"/>
-              </a:rPr>
-              <a:t>}</a:t>
+              <a:rPr sz="2000" b="0" i="0">
+                <a:solidFill>
+                  <a:srgbClr val="333333"/>
+                </a:solidFill>
+                <a:latin typeface="Calibri"/>
+              </a:rPr>
+              <a:t>–   Al cerrar, el manejador de la ventana pide guardar y solo si el guardado salió bien libera la aplicación.</a:t>
             </a:r>
           </a:p>
           <a:p>
             <a:pPr>
               <a:spcAft>
-                <a:spcPts val="400"/>
+                <a:spcPts val="800"/>
               </a:spcAft>
             </a:pPr>
             <a:r>
-              <a:rPr sz="1400" b="0" i="0">
-                <a:solidFill>
-                  <a:srgbClr val="FFFFFF"/>
-                </a:solidFill>
-                <a:latin typeface="Calibri"/>
-              </a:rPr>
-              <a:t>// Una sola instancia de servicio para toda la app: la ventana NO crea la suya.</a:t>
-            </a:r>
-          </a:p>
-          <a:p>
-            <a:pPr>
-              <a:spcAft>
-                <a:spcPts val="400"/>
-              </a:spcAft>
-            </a:pPr>
-            <a:r>
-              <a:rPr sz="1400" b="0" i="0">
-                <a:solidFill>
-                  <a:srgbClr val="FFFFFF"/>
-                </a:solidFill>
-                <a:latin typeface="Calibri"/>
-              </a:rPr>
-              <a:t>// Breakpoint en la linea del cargarDesdeArchivo (Ctrl+F8) y F7 para entrar:</a:t>
-            </a:r>
-          </a:p>
-          <a:p>
-            <a:pPr>
-              <a:spcAft>
-                <a:spcPts val="400"/>
-              </a:spcAft>
-            </a:pPr>
-            <a:r>
-              <a:rPr sz="1400" b="0" i="0">
-                <a:solidFill>
-                  <a:srgbClr val="FFFFFF"/>
-                </a:solidFill>
-                <a:latin typeface="Calibri"/>
-              </a:rPr>
-              <a:t>// en la ventana Variables se ve cuantas mascotas trajo el CSV antes de que</a:t>
-            </a:r>
-          </a:p>
-          <a:p>
-            <a:pPr>
-              <a:spcAft>
-                <a:spcPts val="400"/>
-              </a:spcAft>
-            </a:pPr>
-            <a:r>
-              <a:rPr sz="1400" b="0" i="0">
-                <a:solidFill>
-                  <a:srgbClr val="FFFFFF"/>
-                </a:solidFill>
-                <a:latin typeface="Calibri"/>
-              </a:rPr>
-              <a:t>// exista un solo boton en pantalla.</a:t>
-            </a:r>
-          </a:p>
-          <a:p>
-            <a:pPr>
-              <a:spcAft>
-                <a:spcPts val="400"/>
-              </a:spcAft>
-            </a:pPr>
-            <a:r>
-              <a:rPr sz="1400" b="0" i="0">
-                <a:solidFill>
-                  <a:srgbClr val="FFFFFF"/>
-                </a:solidFill>
-                <a:latin typeface="Calibri"/>
-              </a:rPr>
-              <a:t>// Si la tabla sale vacia pero la consola dice "Mascotas cargadas: 12", el</a:t>
-            </a:r>
-          </a:p>
-          <a:p>
-            <a:pPr>
-              <a:spcAft>
-                <a:spcPts val="400"/>
-              </a:spcAft>
-            </a:pPr>
-            <a:r>
-              <a:rPr sz="1400" b="0" i="0">
-                <a:solidFill>
-                  <a:srgbClr val="FFFFFF"/>
-                </a:solidFill>
-                <a:latin typeface="Calibri"/>
-              </a:rPr>
-              <a:t>// defecto NO esta en el archivo: esta en refrescarTabla() o en que la ventana</a:t>
-            </a:r>
-          </a:p>
-          <a:p>
-            <a:pPr>
-              <a:spcAft>
-                <a:spcPts val="400"/>
-              </a:spcAft>
-            </a:pPr>
-            <a:r>
-              <a:rPr sz="1400" b="0" i="0">
-                <a:solidFill>
-                  <a:srgbClr val="FFFFFF"/>
-                </a:solidFill>
-                <a:latin typeface="Calibri"/>
-              </a:rPr>
-              <a:t>// esta mirando otro objeto servicio.</a:t>
-            </a:r>
-          </a:p>
-        </p:txBody>
-      </p:sp>
-      <p:sp>
-        <p:nvSpPr>
-          <p:cNvPr id="9" name="TextBox 8"/>
-          <p:cNvSpPr txBox="1"/>
-          <p:nvPr/>
-        </p:nvSpPr>
-        <p:spPr>
-          <a:xfrm>
-            <a:off x="457200" y="6080760"/>
-            <a:ext cx="11277295" cy="320040"/>
-          </a:xfrm>
-          <a:prstGeom prst="rect">
-            <a:avLst/>
-          </a:prstGeom>
-          <a:noFill/>
-        </p:spPr>
-        <p:txBody>
-          <a:bodyPr wrap="square">
-            <a:spAutoFit/>
-          </a:bodyPr>
-          <a:lstStyle/>
-          <a:p>
-            <a:pPr algn="ctr"/>
-            <a:r>
-              <a:rPr sz="1200" b="0" i="1">
-                <a:solidFill>
-                  <a:srgbClr val="666666"/>
-                </a:solidFill>
-                <a:latin typeface="Calibri"/>
-              </a:rPr>
-              <a:t>El orden de arranque y la instancia única no son detalles de estilo: son la causa de los dos defectos de integración más frecuentes.</a:t>
-            </a:r>
-          </a:p>
-        </p:txBody>
-      </p:sp>
-      <p:sp>
-        <p:nvSpPr>
-          <p:cNvPr id="10" name="TextBox 9"/>
+              <a:rPr sz="2000" b="0" i="0">
+                <a:solidFill>
+                  <a:srgbClr val="333333"/>
+                </a:solidFill>
+                <a:latin typeface="Calibri"/>
+              </a:rPr>
+              <a:t>–   Si se invierte el orden y la ventana se construye antes de cargar, la tabla nace vacía aunque el archivo tenga cien mascotas, y el estudiante va a jurar que la persistencia no funciona cuando lo que está mal es la secuencia de arranque.</a:t>
+            </a:r>
+          </a:p>
+        </p:txBody>
+      </p:sp>
+      <p:sp>
+        <p:nvSpPr>
+          <p:cNvPr id="6" name="TextBox 5"/>
           <p:cNvSpPr txBox="1"/>
           <p:nvPr/>
         </p:nvSpPr>
@@ -7563,7 +9967,7 @@
                 </a:solidFill>
                 <a:latin typeface="Calibri"/>
               </a:rPr>
-              <a:t>Demo del dia</a:t>
+              <a:t>Los errores de integración tienen firma propia y conviene reconocerlos...</a:t>
             </a:r>
           </a:p>
         </p:txBody>
@@ -7596,31 +10000,13 @@
               </a:spcAft>
             </a:pPr>
             <a:r>
-              <a:rPr sz="2000" b="0" i="0">
+              <a:rPr sz="1900" b="0" i="0">
                 <a:solidFill>
                   <a:srgbClr val="333333"/>
                 </a:solidFill>
                 <a:latin typeface="Calibri"/>
               </a:rPr>
-              <a:t>–   </a:t>
-            </a:r>
-            <a:r>
-              <a:rPr sz="2000" b="1" i="0">
-                <a:solidFill>
-                  <a:srgbClr val="333333"/>
-                </a:solidFill>
-                <a:latin typeface="Calibri"/>
-              </a:rPr>
-              <a:t>Herramienta:</a:t>
-            </a:r>
-            <a:r>
-              <a:rPr sz="2000" b="0" i="0">
-                <a:solidFill>
-                  <a:srgbClr val="333333"/>
-                </a:solidFill>
-                <a:latin typeface="Calibri"/>
-              </a:rPr>
-              <a:t> Visual Studio Code (Java)</a:t>
+              <a:t>–   Los errores de integración tienen firma propia y conviene reconocerlos por el síntoma.</a:t>
             </a:r>
           </a:p>
           <a:p>
@@ -7630,31 +10016,13 @@
               </a:spcAft>
             </a:pPr>
             <a:r>
-              <a:rPr sz="2000" b="0" i="0">
+              <a:rPr sz="1900" b="0" i="0">
                 <a:solidFill>
                   <a:srgbClr val="333333"/>
                 </a:solidFill>
                 <a:latin typeface="Calibri"/>
               </a:rPr>
-              <a:t>–   </a:t>
-            </a:r>
-            <a:r>
-              <a:rPr sz="2000" b="1" i="0">
-                <a:solidFill>
-                  <a:srgbClr val="333333"/>
-                </a:solidFill>
-                <a:latin typeface="Calibri"/>
-              </a:rPr>
-              <a:t>Demo:</a:t>
-            </a:r>
-            <a:r>
-              <a:rPr sz="2000" b="0" i="0">
-                <a:solidFill>
-                  <a:srgbClr val="333333"/>
-                </a:solidFill>
-                <a:latin typeface="Calibri"/>
-              </a:rPr>
-              <a:t> El docente corre el guion de humo completo (abrir, registrar, buscar, cerrar, reabrir) y luego pone un breakpoint en el botón Registrar para mostrar con el debugger por qué una edad vacía estaba entrando como cero.</a:t>
+              <a:t>–   Primero, el más costoso: dos instancias del mismo servicio, una creada en el main y otra creada dentro del constructor de la ventana</a:t>
             </a:r>
           </a:p>
           <a:p>
@@ -7664,13 +10032,93 @@
               </a:spcAft>
             </a:pPr>
             <a:r>
-              <a:rPr sz="2000" b="0" i="0">
+              <a:rPr sz="1900" b="0" i="0">
                 <a:solidFill>
                   <a:srgbClr val="333333"/>
                 </a:solidFill>
                 <a:latin typeface="Calibri"/>
               </a:rPr>
-              <a:t>–   Mismo dominio VetCare — no otro ejemplo.</a:t>
+              <a:t>–   Se registra en la instancia de la ventana y al cerrar se guarda la del main, así que el archivo queda igual y todo el mundo culpa a la persistencia.</a:t>
+            </a:r>
+          </a:p>
+          <a:p>
+            <a:pPr>
+              <a:spcAft>
+                <a:spcPts val="800"/>
+              </a:spcAft>
+            </a:pPr>
+            <a:r>
+              <a:rPr sz="1900" b="0" i="0">
+                <a:solidFill>
+                  <a:srgbClr val="333333"/>
+                </a:solidFill>
+                <a:latin typeface="Calibri"/>
+              </a:rPr>
+              <a:t>–   Segundo, el orden de arranque invertido que ya mencionamos: tabla vacía con la consola diciendo 'Mascotas cargadas: 12'.</a:t>
+            </a:r>
+          </a:p>
+          <a:p>
+            <a:pPr>
+              <a:spcAft>
+                <a:spcPts val="800"/>
+              </a:spcAft>
+            </a:pPr>
+            <a:r>
+              <a:rPr sz="1900" b="0" i="0">
+                <a:solidFill>
+                  <a:srgbClr val="333333"/>
+                </a:solidFill>
+                <a:latin typeface="Calibri"/>
+              </a:rPr>
+              <a:t>–   Tercero, la ruta del archivo: se ejecuta desde VS Code y el.csv queda en la carpeta del proyecto, se ejecuta el JAR desde el escritorio y queda en otra parte, entonces 'se perdieron los datos'.</a:t>
+            </a:r>
+          </a:p>
+          <a:p>
+            <a:pPr>
+              <a:spcAft>
+                <a:spcPts val="800"/>
+              </a:spcAft>
+            </a:pPr>
+            <a:r>
+              <a:rPr sz="1900" b="0" i="0">
+                <a:solidFill>
+                  <a:srgbClr val="333333"/>
+                </a:solidFill>
+                <a:latin typeface="Calibri"/>
+              </a:rPr>
+              <a:t>–   Cuarto, el contrato del CSV roto entre quien escribe y quien lee, con el orden de campos distinto: el archivo se ve bien en el Bloc de notas pero la tabla muestra 'Canino' en la columna de edad.</a:t>
+            </a:r>
+          </a:p>
+          <a:p>
+            <a:pPr>
+              <a:spcAft>
+                <a:spcPts val="800"/>
+              </a:spcAft>
+            </a:pPr>
+            <a:r>
+              <a:rPr sz="1900" b="0" i="0">
+                <a:solidFill>
+                  <a:srgbClr val="333333"/>
+                </a:solidFill>
+                <a:latin typeface="Calibri"/>
+              </a:rPr>
+              <a:t>–   Quinto, la unión del código de tres personas que trajeron cada una su propia clase Mascota con constructores distintos.</a:t>
+            </a:r>
+          </a:p>
+          <a:p>
+            <a:pPr>
+              <a:spcAft>
+                <a:spcPts val="800"/>
+              </a:spcAft>
+            </a:pPr>
+            <a:r>
+              <a:rPr sz="1900" b="0" i="0">
+                <a:solidFill>
+                  <a:srgbClr val="333333"/>
+                </a:solidFill>
+                <a:latin typeface="Calibri"/>
+              </a:rPr>
+              <a:t>–   Y sexto, el clásico NullPointerException porque buscarPorId devuelve null cuando el ID no existe y nadie valida antes de usar el resultado.</a:t>
             </a:r>
           </a:p>
         </p:txBody>
@@ -7851,7 +10299,7 @@
                 </a:solidFill>
                 <a:latin typeface="Calibri"/>
               </a:rPr>
-              <a:t>Taller PI — por que importa</a:t>
+              <a:t>El depurador de VS Code es la herramienta de esta clase y hay que... (1/2)</a:t>
             </a:r>
           </a:p>
         </p:txBody>
@@ -7890,25 +10338,7 @@
                 </a:solidFill>
                 <a:latin typeface="Calibri"/>
               </a:rPr>
-              <a:t>–   </a:t>
-            </a:r>
-            <a:r>
-              <a:rPr sz="2000" b="1" i="0">
-                <a:solidFill>
-                  <a:srgbClr val="333333"/>
-                </a:solidFill>
-                <a:latin typeface="Calibri"/>
-              </a:rPr>
-              <a:t>Por que importa al PI:</a:t>
-            </a:r>
-            <a:r>
-              <a:rPr sz="2000" b="0" i="0">
-                <a:solidFill>
-                  <a:srgbClr val="333333"/>
-                </a:solidFill>
-                <a:latin typeface="Calibri"/>
-              </a:rPr>
-              <a:t> hasta hoy VetCare eran cuatro talleres que funcionaban por separado; a partir de esta clase es un producto que la clínica Huellitas podría instalar, y eso es exactamente lo que se sustenta al final.</a:t>
+              <a:t>–   El depurador de VS Code es la herramienta de esta clase y hay que perderle el miedo en vivo.</a:t>
             </a:r>
           </a:p>
           <a:p>
@@ -7924,7 +10354,7 @@
                 </a:solidFill>
                 <a:latin typeface="Calibri"/>
               </a:rPr>
-              <a:t>–   Todo lo que se construyó desde la clase 1 (POO, colecciones, GUI, try-catch y persistencia) tiene que aparecer funcionando en el mismo ejecutable: la integración es donde el PI se comprueba como un todo.</a:t>
+              <a:t>–   Se pone un breakpoint haciendo clic en el margen izquierdo de la línea (o con F9), se ejecuta con Depurar proyecto (Ctrl+F5) y la aplicación se congela justo ahí.</a:t>
             </a:r>
           </a:p>
           <a:p>
@@ -7940,7 +10370,23 @@
                 </a:solidFill>
                 <a:latin typeface="Calibri"/>
               </a:rPr>
-              <a:t>–   La bitácora de integración con el debugger es la evidencia de que el equipo sabe diagnosticar y no solo adivinar, que es lo que se evalúa en la defensa del proyecto.</a:t>
+              <a:t>–   Desde ese punto, F8 avanza a la línea siguiente sin entrar a los métodos, F7 entra al método que se está llamando, Ctrl+F7 sale del método actual y F5 continúa hasta el siguiente breakpoint.</a:t>
+            </a:r>
+          </a:p>
+          <a:p>
+            <a:pPr>
+              <a:spcAft>
+                <a:spcPts val="800"/>
+              </a:spcAft>
+            </a:pPr>
+            <a:r>
+              <a:rPr sz="2000" b="0" i="0">
+                <a:solidFill>
+                  <a:srgbClr val="333333"/>
+                </a:solidFill>
+                <a:latin typeface="Calibri"/>
+              </a:rPr>
+              <a:t>–   Mientras está detenido, la ventana Variables muestra el valor real de cada campo y de cada objeto, Watches permite vigilar una expresión concreta como servicio.listar().size()</a:t>
             </a:r>
           </a:p>
         </p:txBody>
@@ -8121,7 +10567,7 @@
                 </a:solidFill>
                 <a:latin typeface="Calibri"/>
               </a:rPr>
-              <a:t>Taller PI — punto de partida</a:t>
+              <a:t>El depurador de VS Code es la herramienta de esta clase y hay que... (2/2)</a:t>
             </a:r>
           </a:p>
         </p:txBody>
@@ -8160,7 +10606,7 @@
                 </a:solidFill>
                 <a:latin typeface="Calibri"/>
               </a:rPr>
-              <a:t>–   Cada estudiante llega con los cuatro módulos funcionando por separado y ya revisados por otro compañero en la clase anterior, con su plan de corrección en la mano.</a:t>
+              <a:t>–   Y Call Stack muestra quién llamó a quién, que es justo lo que uno necesita cuando no entiende por qué se ejecutó algo.</a:t>
             </a:r>
           </a:p>
           <a:p>
@@ -8176,7 +10622,7 @@
                 </a:solidFill>
                 <a:latin typeface="Calibri"/>
               </a:rPr>
-              <a:t>–   Existe un archivo mascotas.csv con datos reales de pruebas anteriores, y al menos una línea de ese archivo está dañada a propósito para probar el arranque.</a:t>
+              <a:t>–   Hay además una joya para integración: el breakpoint condicional, al que se le pone una condición como id.equals("M009") para que solo se detenga en el caso problemático y no en las doscientas iteraciones buenas.</a:t>
             </a:r>
           </a:p>
           <a:p>
@@ -8192,7 +10638,23 @@
                 </a:solidFill>
                 <a:latin typeface="Calibri"/>
               </a:rPr>
-              <a:t>–   El contrato acordado del archivo es id;nombre;especie;edad;cedula_dueno y todos deben respetarlo tal cual para poder intercambiar archivos de datos.</a:t>
+              <a:t>–   Todo esto es superior a llenar el código de System.out.println por tres razones: no ensucia el proyecto ni deja basura que después hay que borrar</a:t>
+            </a:r>
+          </a:p>
+          <a:p>
+            <a:pPr>
+              <a:spcAft>
+                <a:spcPts val="800"/>
+              </a:spcAft>
+            </a:pPr>
+            <a:r>
+              <a:rPr sz="2000" b="0" i="0">
+                <a:solidFill>
+                  <a:srgbClr val="333333"/>
+                </a:solidFill>
+                <a:latin typeface="Calibri"/>
+              </a:rPr>
+              <a:t>–   Muestra el estado completo y no solo lo que uno se acordó de imprimir, y permite mirar el orden real de las llamadas.</a:t>
             </a:r>
           </a:p>
         </p:txBody>
@@ -8373,111 +10835,21 @@
                 </a:solidFill>
                 <a:latin typeface="Calibri"/>
               </a:rPr>
-              <a:t>Taller PI — pasos guiados</a:t>
-            </a:r>
-          </a:p>
-        </p:txBody>
-      </p:sp>
-      <p:sp>
-        <p:nvSpPr>
-          <p:cNvPr id="5" name="Rounded Rectangle 4"/>
-          <p:cNvSpPr/>
-          <p:nvPr/>
-        </p:nvSpPr>
-        <p:spPr>
-          <a:xfrm>
-            <a:off x="457200" y="1234440"/>
-            <a:ext cx="11277295" cy="950976"/>
-          </a:xfrm>
-          <a:prstGeom prst="roundRect">
-            <a:avLst>
-              <a:gd name="adj" fmla="val 12000"/>
-            </a:avLst>
-          </a:prstGeom>
-          <a:solidFill>
-            <a:srgbClr val="F2F2F2"/>
-          </a:solidFill>
-          <a:ln>
-            <a:noFill/>
-          </a:ln>
-        </p:spPr>
-        <p:style>
-          <a:lnRef idx="1">
-            <a:schemeClr val="accent1"/>
-          </a:lnRef>
-          <a:fillRef idx="3">
-            <a:schemeClr val="accent1"/>
-          </a:fillRef>
-          <a:effectRef idx="2">
-            <a:schemeClr val="accent1"/>
-          </a:effectRef>
-          <a:fontRef idx="minor">
-            <a:schemeClr val="lt1"/>
-          </a:fontRef>
-        </p:style>
-        <p:txBody>
-          <a:bodyPr rtlCol="0" anchor="ctr"/>
-          <a:lstStyle/>
-          <a:p>
-            <a:pPr algn="ctr"/>
-          </a:p>
-        </p:txBody>
-      </p:sp>
-      <p:sp>
-        <p:nvSpPr>
-          <p:cNvPr id="6" name="Rounded Rectangle 5"/>
-          <p:cNvSpPr/>
-          <p:nvPr/>
-        </p:nvSpPr>
-        <p:spPr>
-          <a:xfrm>
-            <a:off x="594360" y="1490472"/>
-            <a:ext cx="438912" cy="438912"/>
-          </a:xfrm>
-          <a:prstGeom prst="roundRect">
-            <a:avLst>
-              <a:gd name="adj" fmla="val 12000"/>
-            </a:avLst>
-          </a:prstGeom>
-          <a:solidFill>
-            <a:srgbClr val="095292"/>
-          </a:solidFill>
-          <a:ln>
-            <a:noFill/>
-          </a:ln>
-        </p:spPr>
-        <p:style>
-          <a:lnRef idx="1">
-            <a:schemeClr val="accent1"/>
-          </a:lnRef>
-          <a:fillRef idx="3">
-            <a:schemeClr val="accent1"/>
-          </a:fillRef>
-          <a:effectRef idx="2">
-            <a:schemeClr val="accent1"/>
-          </a:effectRef>
-          <a:fontRef idx="minor">
-            <a:schemeClr val="lt1"/>
-          </a:fontRef>
-        </p:style>
-        <p:txBody>
-          <a:bodyPr rtlCol="0" anchor="ctr"/>
-          <a:lstStyle/>
-          <a:p>
-            <a:pPr algn="ctr"/>
-          </a:p>
-        </p:txBody>
-      </p:sp>
-      <p:sp>
-        <p:nvSpPr>
-          <p:cNvPr id="7" name="TextBox 6"/>
+              <a:t>La forma de integrar sin sufrir es por goteo y no de un solo golpe (1/2)</a:t>
+            </a:r>
+          </a:p>
+        </p:txBody>
+      </p:sp>
+      <p:sp>
+        <p:nvSpPr>
+          <p:cNvPr id="5" name="TextBox 4"/>
           <p:cNvSpPr txBox="1"/>
           <p:nvPr/>
         </p:nvSpPr>
         <p:spPr>
           <a:xfrm>
-            <a:off x="594360" y="1490472"/>
-            <a:ext cx="438912" cy="438912"/>
+            <a:off x="457200" y="1170432"/>
+            <a:ext cx="11277295" cy="5230368"/>
           </a:xfrm>
           <a:prstGeom prst="rect">
             <a:avLst/>
@@ -8485,677 +10857,79 @@
           <a:noFill/>
         </p:spPr>
         <p:txBody>
-          <a:bodyPr wrap="square" anchor="ctr"/>
-          <a:lstStyle/>
-          <a:p>
-            <a:pPr algn="ctr"/>
-            <a:r>
-              <a:rPr sz="1600" b="1" i="0">
-                <a:solidFill>
-                  <a:srgbClr val="FFFFFF"/>
-                </a:solidFill>
-                <a:latin typeface="Calibri"/>
-              </a:rPr>
-              <a:t>1</a:t>
-            </a:r>
-          </a:p>
-        </p:txBody>
-      </p:sp>
-      <p:sp>
-        <p:nvSpPr>
-          <p:cNvPr id="8" name="TextBox 7"/>
-          <p:cNvSpPr txBox="1"/>
-          <p:nvPr/>
-        </p:nvSpPr>
-        <p:spPr>
-          <a:xfrm>
-            <a:off x="1188720" y="1325880"/>
-            <a:ext cx="10271455" cy="786384"/>
-          </a:xfrm>
-          <a:prstGeom prst="rect">
-            <a:avLst/>
-          </a:prstGeom>
-          <a:noFill/>
-        </p:spPr>
-        <p:txBody>
-          <a:bodyPr wrap="square" anchor="ctr"/>
-          <a:lstStyle/>
-          <a:p>
-            <a:r>
-              <a:rPr sz="1400" b="1" i="0">
-                <a:solidFill>
-                  <a:srgbClr val="095292"/>
-                </a:solidFill>
-                <a:latin typeface="Calibri"/>
-              </a:rPr>
-              <a:t>Organice el proyecto en los paquetes vetcare.modelo, vetcare.datos, vetcare.logica y vetcare.ui, deje un único método main en la clase de arranque, elimine cualquier otro main que haya quedado de los talleres anteriores y verifique que la aplicación abre desde ese único punto.</a:t>
-            </a:r>
-          </a:p>
-        </p:txBody>
-      </p:sp>
-      <p:sp>
-        <p:nvSpPr>
-          <p:cNvPr id="9" name="Rounded Rectangle 8"/>
-          <p:cNvSpPr/>
-          <p:nvPr/>
-        </p:nvSpPr>
-        <p:spPr>
-          <a:xfrm>
-            <a:off x="457200" y="2276856"/>
-            <a:ext cx="11277295" cy="950976"/>
-          </a:xfrm>
-          <a:prstGeom prst="roundRect">
-            <a:avLst>
-              <a:gd name="adj" fmla="val 12000"/>
-            </a:avLst>
-          </a:prstGeom>
-          <a:solidFill>
-            <a:srgbClr val="E8F4FA"/>
-          </a:solidFill>
-          <a:ln>
-            <a:noFill/>
-          </a:ln>
-        </p:spPr>
-        <p:style>
-          <a:lnRef idx="1">
-            <a:schemeClr val="accent1"/>
-          </a:lnRef>
-          <a:fillRef idx="3">
-            <a:schemeClr val="accent1"/>
-          </a:fillRef>
-          <a:effectRef idx="2">
-            <a:schemeClr val="accent1"/>
-          </a:effectRef>
-          <a:fontRef idx="minor">
-            <a:schemeClr val="lt1"/>
-          </a:fontRef>
-        </p:style>
-        <p:txBody>
-          <a:bodyPr rtlCol="0" anchor="ctr"/>
-          <a:lstStyle/>
-          <a:p>
-            <a:pPr algn="ctr"/>
-          </a:p>
-        </p:txBody>
-      </p:sp>
-      <p:sp>
-        <p:nvSpPr>
-          <p:cNvPr id="10" name="Rounded Rectangle 9"/>
-          <p:cNvSpPr/>
-          <p:nvPr/>
-        </p:nvSpPr>
-        <p:spPr>
-          <a:xfrm>
-            <a:off x="594360" y="2532888"/>
-            <a:ext cx="438912" cy="438912"/>
-          </a:xfrm>
-          <a:prstGeom prst="roundRect">
-            <a:avLst>
-              <a:gd name="adj" fmla="val 12000"/>
-            </a:avLst>
-          </a:prstGeom>
-          <a:solidFill>
-            <a:srgbClr val="095292"/>
-          </a:solidFill>
-          <a:ln>
-            <a:noFill/>
-          </a:ln>
-        </p:spPr>
-        <p:style>
-          <a:lnRef idx="1">
-            <a:schemeClr val="accent1"/>
-          </a:lnRef>
-          <a:fillRef idx="3">
-            <a:schemeClr val="accent1"/>
-          </a:fillRef>
-          <a:effectRef idx="2">
-            <a:schemeClr val="accent1"/>
-          </a:effectRef>
-          <a:fontRef idx="minor">
-            <a:schemeClr val="lt1"/>
-          </a:fontRef>
-        </p:style>
-        <p:txBody>
-          <a:bodyPr rtlCol="0" anchor="ctr"/>
-          <a:lstStyle/>
-          <a:p>
-            <a:pPr algn="ctr"/>
-          </a:p>
-        </p:txBody>
-      </p:sp>
-      <p:sp>
-        <p:nvSpPr>
-          <p:cNvPr id="11" name="TextBox 10"/>
-          <p:cNvSpPr txBox="1"/>
-          <p:nvPr/>
-        </p:nvSpPr>
-        <p:spPr>
-          <a:xfrm>
-            <a:off x="594360" y="2532888"/>
-            <a:ext cx="438912" cy="438912"/>
-          </a:xfrm>
-          <a:prstGeom prst="rect">
-            <a:avLst/>
-          </a:prstGeom>
-          <a:noFill/>
-        </p:spPr>
-        <p:txBody>
-          <a:bodyPr wrap="square" anchor="ctr"/>
-          <a:lstStyle/>
-          <a:p>
-            <a:pPr algn="ctr"/>
-            <a:r>
-              <a:rPr sz="1600" b="1" i="0">
-                <a:solidFill>
-                  <a:srgbClr val="FFFFFF"/>
-                </a:solidFill>
-                <a:latin typeface="Calibri"/>
-              </a:rPr>
-              <a:t>2</a:t>
-            </a:r>
-          </a:p>
-        </p:txBody>
-      </p:sp>
-      <p:sp>
-        <p:nvSpPr>
-          <p:cNvPr id="12" name="TextBox 11"/>
-          <p:cNvSpPr txBox="1"/>
-          <p:nvPr/>
-        </p:nvSpPr>
-        <p:spPr>
-          <a:xfrm>
-            <a:off x="1188720" y="2368296"/>
-            <a:ext cx="10271455" cy="786384"/>
-          </a:xfrm>
-          <a:prstGeom prst="rect">
-            <a:avLst/>
-          </a:prstGeom>
-          <a:noFill/>
-        </p:spPr>
-        <p:txBody>
-          <a:bodyPr wrap="square" anchor="ctr"/>
-          <a:lstStyle/>
-          <a:p>
-            <a:r>
-              <a:rPr sz="1400" b="1" i="0">
-                <a:solidFill>
-                  <a:srgbClr val="095292"/>
-                </a:solidFill>
-                <a:latin typeface="Calibri"/>
-              </a:rPr>
-              <a:t>Asegure una sola instancia: cree el repositorio y el servicio en el main y páselos por constructor a la ventana; ponga un breakpoint en el botón Registrar y otro en el cierre, y compruebe en la ventana Variables que el objeto servicio tiene el mismo identificador en ambos puntos.</a:t>
-            </a:r>
-          </a:p>
-        </p:txBody>
-      </p:sp>
-      <p:sp>
-        <p:nvSpPr>
-          <p:cNvPr id="13" name="Rounded Rectangle 12"/>
-          <p:cNvSpPr/>
-          <p:nvPr/>
-        </p:nvSpPr>
-        <p:spPr>
-          <a:xfrm>
-            <a:off x="457200" y="3319272"/>
-            <a:ext cx="11277295" cy="950976"/>
-          </a:xfrm>
-          <a:prstGeom prst="roundRect">
-            <a:avLst>
-              <a:gd name="adj" fmla="val 12000"/>
-            </a:avLst>
-          </a:prstGeom>
-          <a:solidFill>
-            <a:srgbClr val="F2F2F2"/>
-          </a:solidFill>
-          <a:ln>
-            <a:noFill/>
-          </a:ln>
-        </p:spPr>
-        <p:style>
-          <a:lnRef idx="1">
-            <a:schemeClr val="accent1"/>
-          </a:lnRef>
-          <a:fillRef idx="3">
-            <a:schemeClr val="accent1"/>
-          </a:fillRef>
-          <a:effectRef idx="2">
-            <a:schemeClr val="accent1"/>
-          </a:effectRef>
-          <a:fontRef idx="minor">
-            <a:schemeClr val="lt1"/>
-          </a:fontRef>
-        </p:style>
-        <p:txBody>
-          <a:bodyPr rtlCol="0" anchor="ctr"/>
-          <a:lstStyle/>
-          <a:p>
-            <a:pPr algn="ctr"/>
-          </a:p>
-        </p:txBody>
-      </p:sp>
-      <p:sp>
-        <p:nvSpPr>
-          <p:cNvPr id="14" name="Rounded Rectangle 13"/>
-          <p:cNvSpPr/>
-          <p:nvPr/>
-        </p:nvSpPr>
-        <p:spPr>
-          <a:xfrm>
-            <a:off x="594360" y="3575304"/>
-            <a:ext cx="438912" cy="438912"/>
-          </a:xfrm>
-          <a:prstGeom prst="roundRect">
-            <a:avLst>
-              <a:gd name="adj" fmla="val 12000"/>
-            </a:avLst>
-          </a:prstGeom>
-          <a:solidFill>
-            <a:srgbClr val="095292"/>
-          </a:solidFill>
-          <a:ln>
-            <a:noFill/>
-          </a:ln>
-        </p:spPr>
-        <p:style>
-          <a:lnRef idx="1">
-            <a:schemeClr val="accent1"/>
-          </a:lnRef>
-          <a:fillRef idx="3">
-            <a:schemeClr val="accent1"/>
-          </a:fillRef>
-          <a:effectRef idx="2">
-            <a:schemeClr val="accent1"/>
-          </a:effectRef>
-          <a:fontRef idx="minor">
-            <a:schemeClr val="lt1"/>
-          </a:fontRef>
-        </p:style>
-        <p:txBody>
-          <a:bodyPr rtlCol="0" anchor="ctr"/>
-          <a:lstStyle/>
-          <a:p>
-            <a:pPr algn="ctr"/>
-          </a:p>
-        </p:txBody>
-      </p:sp>
-      <p:sp>
-        <p:nvSpPr>
-          <p:cNvPr id="15" name="TextBox 14"/>
-          <p:cNvSpPr txBox="1"/>
-          <p:nvPr/>
-        </p:nvSpPr>
-        <p:spPr>
-          <a:xfrm>
-            <a:off x="594360" y="3575304"/>
-            <a:ext cx="438912" cy="438912"/>
-          </a:xfrm>
-          <a:prstGeom prst="rect">
-            <a:avLst/>
-          </a:prstGeom>
-          <a:noFill/>
-        </p:spPr>
-        <p:txBody>
-          <a:bodyPr wrap="square" anchor="ctr"/>
-          <a:lstStyle/>
-          <a:p>
-            <a:pPr algn="ctr"/>
-            <a:r>
-              <a:rPr sz="1600" b="1" i="0">
-                <a:solidFill>
-                  <a:srgbClr val="FFFFFF"/>
-                </a:solidFill>
-                <a:latin typeface="Calibri"/>
-              </a:rPr>
-              <a:t>3</a:t>
-            </a:r>
-          </a:p>
-        </p:txBody>
-      </p:sp>
-      <p:sp>
-        <p:nvSpPr>
-          <p:cNvPr id="16" name="TextBox 15"/>
-          <p:cNvSpPr txBox="1"/>
-          <p:nvPr/>
-        </p:nvSpPr>
-        <p:spPr>
-          <a:xfrm>
-            <a:off x="1188720" y="3410712"/>
-            <a:ext cx="10271455" cy="786384"/>
-          </a:xfrm>
-          <a:prstGeom prst="rect">
-            <a:avLst/>
-          </a:prstGeom>
-          <a:noFill/>
-        </p:spPr>
-        <p:txBody>
-          <a:bodyPr wrap="square" anchor="ctr"/>
-          <a:lstStyle/>
-          <a:p>
-            <a:r>
-              <a:rPr sz="1500" b="1" i="0">
-                <a:solidFill>
-                  <a:srgbClr val="095292"/>
-                </a:solidFill>
-                <a:latin typeface="Calibri"/>
-              </a:rPr>
-              <a:t>Corra el guion de humo de cinco pasos (abrir con datos, registrar, buscar por ID, cerrar guardando, reabrir y verificar) y anote en qué paso exacto falla y con qué mensaje; si pasa completo a la primera, dañe una línea de mascotas.csv y vuelva a correrlo.</a:t>
-            </a:r>
-          </a:p>
-        </p:txBody>
-      </p:sp>
-      <p:sp>
-        <p:nvSpPr>
-          <p:cNvPr id="17" name="Rounded Rectangle 16"/>
-          <p:cNvSpPr/>
-          <p:nvPr/>
-        </p:nvSpPr>
-        <p:spPr>
-          <a:xfrm>
-            <a:off x="457200" y="4361688"/>
-            <a:ext cx="11277295" cy="950976"/>
-          </a:xfrm>
-          <a:prstGeom prst="roundRect">
-            <a:avLst>
-              <a:gd name="adj" fmla="val 12000"/>
-            </a:avLst>
-          </a:prstGeom>
-          <a:solidFill>
-            <a:srgbClr val="E8F4FA"/>
-          </a:solidFill>
-          <a:ln>
-            <a:noFill/>
-          </a:ln>
-        </p:spPr>
-        <p:style>
-          <a:lnRef idx="1">
-            <a:schemeClr val="accent1"/>
-          </a:lnRef>
-          <a:fillRef idx="3">
-            <a:schemeClr val="accent1"/>
-          </a:fillRef>
-          <a:effectRef idx="2">
-            <a:schemeClr val="accent1"/>
-          </a:effectRef>
-          <a:fontRef idx="minor">
-            <a:schemeClr val="lt1"/>
-          </a:fontRef>
-        </p:style>
-        <p:txBody>
-          <a:bodyPr rtlCol="0" anchor="ctr"/>
-          <a:lstStyle/>
-          <a:p>
-            <a:pPr algn="ctr"/>
-          </a:p>
-        </p:txBody>
-      </p:sp>
-      <p:sp>
-        <p:nvSpPr>
-          <p:cNvPr id="18" name="Rounded Rectangle 17"/>
-          <p:cNvSpPr/>
-          <p:nvPr/>
-        </p:nvSpPr>
-        <p:spPr>
-          <a:xfrm>
-            <a:off x="594360" y="4617720"/>
-            <a:ext cx="438912" cy="438912"/>
-          </a:xfrm>
-          <a:prstGeom prst="roundRect">
-            <a:avLst>
-              <a:gd name="adj" fmla="val 12000"/>
-            </a:avLst>
-          </a:prstGeom>
-          <a:solidFill>
-            <a:srgbClr val="095292"/>
-          </a:solidFill>
-          <a:ln>
-            <a:noFill/>
-          </a:ln>
-        </p:spPr>
-        <p:style>
-          <a:lnRef idx="1">
-            <a:schemeClr val="accent1"/>
-          </a:lnRef>
-          <a:fillRef idx="3">
-            <a:schemeClr val="accent1"/>
-          </a:fillRef>
-          <a:effectRef idx="2">
-            <a:schemeClr val="accent1"/>
-          </a:effectRef>
-          <a:fontRef idx="minor">
-            <a:schemeClr val="lt1"/>
-          </a:fontRef>
-        </p:style>
-        <p:txBody>
-          <a:bodyPr rtlCol="0" anchor="ctr"/>
-          <a:lstStyle/>
-          <a:p>
-            <a:pPr algn="ctr"/>
-          </a:p>
-        </p:txBody>
-      </p:sp>
-      <p:sp>
-        <p:nvSpPr>
-          <p:cNvPr id="19" name="TextBox 18"/>
-          <p:cNvSpPr txBox="1"/>
-          <p:nvPr/>
-        </p:nvSpPr>
-        <p:spPr>
-          <a:xfrm>
-            <a:off x="594360" y="4617720"/>
-            <a:ext cx="438912" cy="438912"/>
-          </a:xfrm>
-          <a:prstGeom prst="rect">
-            <a:avLst/>
-          </a:prstGeom>
-          <a:noFill/>
-        </p:spPr>
-        <p:txBody>
-          <a:bodyPr wrap="square" anchor="ctr"/>
-          <a:lstStyle/>
-          <a:p>
-            <a:pPr algn="ctr"/>
-            <a:r>
-              <a:rPr sz="1600" b="1" i="0">
-                <a:solidFill>
-                  <a:srgbClr val="FFFFFF"/>
-                </a:solidFill>
-                <a:latin typeface="Calibri"/>
-              </a:rPr>
-              <a:t>4</a:t>
-            </a:r>
-          </a:p>
-        </p:txBody>
-      </p:sp>
-      <p:sp>
-        <p:nvSpPr>
-          <p:cNvPr id="20" name="TextBox 19"/>
-          <p:cNvSpPr txBox="1"/>
-          <p:nvPr/>
-        </p:nvSpPr>
-        <p:spPr>
-          <a:xfrm>
-            <a:off x="1188720" y="4453128"/>
-            <a:ext cx="10271455" cy="786384"/>
-          </a:xfrm>
-          <a:prstGeom prst="rect">
-            <a:avLst/>
-          </a:prstGeom>
-          <a:noFill/>
-        </p:spPr>
-        <p:txBody>
-          <a:bodyPr wrap="square" anchor="ctr"/>
-          <a:lstStyle/>
-          <a:p>
-            <a:r>
-              <a:rPr sz="1400" b="1" i="0">
-                <a:solidFill>
-                  <a:srgbClr val="095292"/>
-                </a:solidFill>
-                <a:latin typeface="Calibri"/>
-              </a:rPr>
-              <a:t>Depure el primer defecto con el debugger: breakpoint en el manejador del botón, registre el valor real de cada campo del formulario antes de llegar al servicio, identifique en qué capa se corrompe el dato y aplique la corrección; deje la evidencia en la bitácora.</a:t>
-            </a:r>
-          </a:p>
-        </p:txBody>
-      </p:sp>
-      <p:sp>
-        <p:nvSpPr>
-          <p:cNvPr id="21" name="Rounded Rectangle 20"/>
-          <p:cNvSpPr/>
-          <p:nvPr/>
-        </p:nvSpPr>
-        <p:spPr>
-          <a:xfrm>
-            <a:off x="457200" y="5404104"/>
-            <a:ext cx="11277295" cy="950976"/>
-          </a:xfrm>
-          <a:prstGeom prst="roundRect">
-            <a:avLst>
-              <a:gd name="adj" fmla="val 12000"/>
-            </a:avLst>
-          </a:prstGeom>
-          <a:solidFill>
-            <a:srgbClr val="F2F2F2"/>
-          </a:solidFill>
-          <a:ln>
-            <a:noFill/>
-          </a:ln>
-        </p:spPr>
-        <p:style>
-          <a:lnRef idx="1">
-            <a:schemeClr val="accent1"/>
-          </a:lnRef>
-          <a:fillRef idx="3">
-            <a:schemeClr val="accent1"/>
-          </a:fillRef>
-          <a:effectRef idx="2">
-            <a:schemeClr val="accent1"/>
-          </a:effectRef>
-          <a:fontRef idx="minor">
-            <a:schemeClr val="lt1"/>
-          </a:fontRef>
-        </p:style>
-        <p:txBody>
-          <a:bodyPr rtlCol="0" anchor="ctr"/>
-          <a:lstStyle/>
-          <a:p>
-            <a:pPr algn="ctr"/>
-          </a:p>
-        </p:txBody>
-      </p:sp>
-      <p:sp>
-        <p:nvSpPr>
-          <p:cNvPr id="22" name="Rounded Rectangle 21"/>
-          <p:cNvSpPr/>
-          <p:nvPr/>
-        </p:nvSpPr>
-        <p:spPr>
-          <a:xfrm>
-            <a:off x="594360" y="5660136"/>
-            <a:ext cx="438912" cy="438912"/>
-          </a:xfrm>
-          <a:prstGeom prst="roundRect">
-            <a:avLst>
-              <a:gd name="adj" fmla="val 12000"/>
-            </a:avLst>
-          </a:prstGeom>
-          <a:solidFill>
-            <a:srgbClr val="095292"/>
-          </a:solidFill>
-          <a:ln>
-            <a:noFill/>
-          </a:ln>
-        </p:spPr>
-        <p:style>
-          <a:lnRef idx="1">
-            <a:schemeClr val="accent1"/>
-          </a:lnRef>
-          <a:fillRef idx="3">
-            <a:schemeClr val="accent1"/>
-          </a:fillRef>
-          <a:effectRef idx="2">
-            <a:schemeClr val="accent1"/>
-          </a:effectRef>
-          <a:fontRef idx="minor">
-            <a:schemeClr val="lt1"/>
-          </a:fontRef>
-        </p:style>
-        <p:txBody>
-          <a:bodyPr rtlCol="0" anchor="ctr"/>
-          <a:lstStyle/>
-          <a:p>
-            <a:pPr algn="ctr"/>
-          </a:p>
-        </p:txBody>
-      </p:sp>
-      <p:sp>
-        <p:nvSpPr>
-          <p:cNvPr id="23" name="TextBox 22"/>
-          <p:cNvSpPr txBox="1"/>
-          <p:nvPr/>
-        </p:nvSpPr>
-        <p:spPr>
-          <a:xfrm>
-            <a:off x="594360" y="5660136"/>
-            <a:ext cx="438912" cy="438912"/>
-          </a:xfrm>
-          <a:prstGeom prst="rect">
-            <a:avLst/>
-          </a:prstGeom>
-          <a:noFill/>
-        </p:spPr>
-        <p:txBody>
-          <a:bodyPr wrap="square" anchor="ctr"/>
-          <a:lstStyle/>
-          <a:p>
-            <a:pPr algn="ctr"/>
-            <a:r>
-              <a:rPr sz="1600" b="1" i="0">
-                <a:solidFill>
-                  <a:srgbClr val="FFFFFF"/>
-                </a:solidFill>
-                <a:latin typeface="Calibri"/>
-              </a:rPr>
-              <a:t>5</a:t>
-            </a:r>
-          </a:p>
-        </p:txBody>
-      </p:sp>
-      <p:sp>
-        <p:nvSpPr>
-          <p:cNvPr id="24" name="TextBox 23"/>
-          <p:cNvSpPr txBox="1"/>
-          <p:nvPr/>
-        </p:nvSpPr>
-        <p:spPr>
-          <a:xfrm>
-            <a:off x="1188720" y="5495544"/>
-            <a:ext cx="10271455" cy="786384"/>
-          </a:xfrm>
-          <a:prstGeom prst="rect">
-            <a:avLst/>
-          </a:prstGeom>
-          <a:noFill/>
-        </p:spPr>
-        <p:txBody>
-          <a:bodyPr wrap="square" anchor="ctr"/>
-          <a:lstStyle/>
-          <a:p>
-            <a:r>
-              <a:rPr sz="1500" b="1" i="0">
-                <a:solidFill>
-                  <a:srgbClr val="095292"/>
-                </a:solidFill>
-                <a:latin typeface="Calibri"/>
-              </a:rPr>
-              <a:t>Repita hasta que el guion de humo corra completo dos veces seguidas y entregue la bitácora de integración con tres defectos documentados con síntoma, causa, corrección y cómo lo verificó.</a:t>
-            </a:r>
-          </a:p>
-        </p:txBody>
-      </p:sp>
-      <p:sp>
-        <p:nvSpPr>
-          <p:cNvPr id="25" name="TextBox 24"/>
+          <a:bodyPr wrap="square">
+            <a:spAutoFit/>
+          </a:bodyPr>
+          <a:lstStyle/>
+          <a:p>
+            <a:pPr>
+              <a:spcAft>
+                <a:spcPts val="800"/>
+              </a:spcAft>
+            </a:pPr>
+            <a:r>
+              <a:rPr sz="2000" b="0" i="0">
+                <a:solidFill>
+                  <a:srgbClr val="333333"/>
+                </a:solidFill>
+                <a:latin typeface="Calibri"/>
+              </a:rPr>
+              <a:t>–   La forma de integrar sin sufrir es por goteo y no de un solo golpe.</a:t>
+            </a:r>
+          </a:p>
+          <a:p>
+            <a:pPr>
+              <a:spcAft>
+                <a:spcPts val="800"/>
+              </a:spcAft>
+            </a:pPr>
+            <a:r>
+              <a:rPr sz="2000" b="0" i="0">
+                <a:solidFill>
+                  <a:srgbClr val="333333"/>
+                </a:solidFill>
+                <a:latin typeface="Calibri"/>
+              </a:rPr>
+              <a:t>–   Integración de un solo golpe es juntar los cuatro módulos la noche anterior a la entrega; el resultado conocido es una aplicación que no arranca y nadie sabe cuál de los cuatro la rompió.</a:t>
+            </a:r>
+          </a:p>
+          <a:p>
+            <a:pPr>
+              <a:spcAft>
+                <a:spcPts val="800"/>
+              </a:spcAft>
+            </a:pPr>
+            <a:r>
+              <a:rPr sz="2000" b="0" i="0">
+                <a:solidFill>
+                  <a:srgbClr val="333333"/>
+                </a:solidFill>
+                <a:latin typeface="Calibri"/>
+              </a:rPr>
+              <a:t>–   Integración por goteo es unir de a un módulo, correr el guion de humo después de cada unión</a:t>
+            </a:r>
+          </a:p>
+          <a:p>
+            <a:pPr>
+              <a:spcAft>
+                <a:spcPts val="800"/>
+              </a:spcAft>
+            </a:pPr>
+            <a:r>
+              <a:rPr sz="2000" b="0" i="0">
+                <a:solidFill>
+                  <a:srgbClr val="333333"/>
+                </a:solidFill>
+                <a:latin typeface="Calibri"/>
+              </a:rPr>
+              <a:t>–   Y no avanzar mientras el ejecutable esté en rojo: primero modelo más servicio con un main de consola, después servicio más repositorio verificando el archivo en disco, después la ventana consumiendo el servicio, y por último el cierre que guarda.</a:t>
+            </a:r>
+          </a:p>
+        </p:txBody>
+      </p:sp>
+      <p:sp>
+        <p:nvSpPr>
+          <p:cNvPr id="6" name="TextBox 5"/>
           <p:cNvSpPr txBox="1"/>
           <p:nvPr/>
         </p:nvSpPr>

--- a/Programacion II/Clases/Clase 12 - Integracion de modulos/Presentacion.pptx
+++ b/Programacion II/Clases/Clase 12 - Integracion de modulos/Presentacion.pptx
@@ -9,53 +9,47 @@
     <p:sldId id="257" r:id="rId8"/>
     <p:sldId id="258" r:id="rId9"/>
     <p:sldId id="259" r:id="rId10"/>
-    <p:sldId id="260" r:id="rId11"/>
-    <p:sldId id="261" r:id="rId12"/>
-    <p:sldId id="262" r:id="rId13"/>
-    <p:sldId id="263" r:id="rId14"/>
-    <p:sldId id="264" r:id="rId15"/>
-    <p:sldId id="265" r:id="rId16"/>
-    <p:sldId id="266" r:id="rId17"/>
-    <p:sldId id="267" r:id="rId18"/>
-    <p:sldId id="268" r:id="rId19"/>
-    <p:sldId id="269" r:id="rId20"/>
-    <p:sldId id="270" r:id="rId21"/>
-    <p:sldId id="271" r:id="rId22"/>
-    <p:sldId id="272" r:id="rId23"/>
-    <p:sldId id="273" r:id="rId24"/>
-    <p:sldId id="274" r:id="rId25"/>
-    <p:sldId id="275" r:id="rId26"/>
-    <p:sldId id="276" r:id="rId27"/>
-    <p:sldId id="277" r:id="rId28"/>
-    <p:sldId id="278" r:id="rId29"/>
-    <p:sldId id="279" r:id="rId30"/>
-    <p:sldId id="280" r:id="rId31"/>
-    <p:sldId id="281" r:id="rId32"/>
-    <p:sldId id="282" r:id="rId33"/>
-    <p:sldId id="283" r:id="rId34"/>
-    <p:sldId id="284" r:id="rId35"/>
-    <p:sldId id="285" r:id="rId36"/>
-    <p:sldId id="286" r:id="rId37"/>
-    <p:sldId id="287" r:id="rId38"/>
-    <p:sldId id="288" r:id="rId39"/>
-    <p:sldId id="289" r:id="rId40"/>
-    <p:sldId id="290" r:id="rId41"/>
-    <p:sldId id="291" r:id="rId42"/>
-    <p:sldId id="292" r:id="rId43"/>
-    <p:sldId id="293" r:id="rId44"/>
-    <p:sldId id="294" r:id="rId45"/>
-    <p:sldId id="295" r:id="rId46"/>
-    <p:sldId id="296" r:id="rId47"/>
-    <p:sldId id="297" r:id="rId48"/>
-    <p:sldId id="298" r:id="rId49"/>
-    <p:sldId id="299" r:id="rId50"/>
-    <p:sldId id="300" r:id="rId51"/>
-    <p:sldId id="301" r:id="rId52"/>
-    <p:sldId id="302" r:id="rId53"/>
-    <p:sldId id="303" r:id="rId54"/>
-    <p:sldId id="304" r:id="rId55"/>
-    <p:sldId id="305" r:id="rId56"/>
-    <p:sldId id="306" r:id="rId57"/>
+    <p:sldId id="260" r:id="rId12"/>
+    <p:sldId id="261" r:id="rId13"/>
+    <p:sldId id="262" r:id="rId14"/>
+    <p:sldId id="263" r:id="rId15"/>
+    <p:sldId id="264" r:id="rId16"/>
+    <p:sldId id="265" r:id="rId17"/>
+    <p:sldId id="266" r:id="rId18"/>
+    <p:sldId id="267" r:id="rId19"/>
+    <p:sldId id="268" r:id="rId20"/>
+    <p:sldId id="269" r:id="rId21"/>
+    <p:sldId id="270" r:id="rId22"/>
+    <p:sldId id="271" r:id="rId23"/>
+    <p:sldId id="272" r:id="rId24"/>
+    <p:sldId id="273" r:id="rId25"/>
+    <p:sldId id="274" r:id="rId26"/>
+    <p:sldId id="275" r:id="rId27"/>
+    <p:sldId id="276" r:id="rId28"/>
+    <p:sldId id="277" r:id="rId29"/>
+    <p:sldId id="278" r:id="rId30"/>
+    <p:sldId id="279" r:id="rId31"/>
+    <p:sldId id="280" r:id="rId32"/>
+    <p:sldId id="281" r:id="rId33"/>
+    <p:sldId id="282" r:id="rId34"/>
+    <p:sldId id="283" r:id="rId35"/>
+    <p:sldId id="284" r:id="rId36"/>
+    <p:sldId id="285" r:id="rId37"/>
+    <p:sldId id="286" r:id="rId38"/>
+    <p:sldId id="287" r:id="rId39"/>
+    <p:sldId id="288" r:id="rId40"/>
+    <p:sldId id="289" r:id="rId41"/>
+    <p:sldId id="290" r:id="rId42"/>
+    <p:sldId id="291" r:id="rId43"/>
+    <p:sldId id="292" r:id="rId44"/>
+    <p:sldId id="293" r:id="rId45"/>
+    <p:sldId id="294" r:id="rId46"/>
+    <p:sldId id="295" r:id="rId47"/>
+    <p:sldId id="296" r:id="rId48"/>
+    <p:sldId id="297" r:id="rId49"/>
+    <p:sldId id="298" r:id="rId50"/>
+    <p:sldId id="299" r:id="rId51"/>
+    <p:sldId id="300" r:id="rId52"/>
   </p:sldIdLst>
   <p:sldSz cx="12191695" cy="6858000" type="screen4x3"/>
   <p:notesSz cx="6858000" cy="9144000"/>
@@ -155,6 +149,648 @@
     </a:lvl9pPr>
   </p:defaultTextStyle>
 </p:presentation>
+</file>
+
+<file path=ppt/notesMasters/notesMaster1.xml><?xml version="1.0" encoding="utf-8"?>
+<p:notesMaster xmlns:a="http://schemas.openxmlformats.org/drawingml/2006/main" xmlns:p="http://schemas.openxmlformats.org/presentationml/2006/main" xmlns:r="http://schemas.openxmlformats.org/officeDocument/2006/relationships">
+  <p:cSld>
+    <p:bg>
+      <p:bgRef idx="1001">
+        <a:schemeClr val="bg1"/>
+      </p:bgRef>
+    </p:bg>
+    <p:spTree>
+      <p:nvGrpSpPr>
+        <p:cNvPr id="1" name=""/>
+        <p:cNvGrpSpPr/>
+        <p:nvPr/>
+      </p:nvGrpSpPr>
+      <p:grpSpPr>
+        <a:xfrm>
+          <a:off x="0" y="0"/>
+          <a:ext cx="0" cy="0"/>
+          <a:chOff x="0" y="0"/>
+          <a:chExt cx="0" cy="0"/>
+        </a:xfrm>
+      </p:grpSpPr>
+      <p:sp>
+        <p:nvSpPr>
+          <p:cNvPr id="2" name="Header Placeholder 1"/>
+          <p:cNvSpPr>
+            <a:spLocks noGrp="1"/>
+          </p:cNvSpPr>
+          <p:nvPr>
+            <p:ph type="hdr" sz="quarter"/>
+          </p:nvPr>
+        </p:nvSpPr>
+        <p:spPr>
+          <a:xfrm>
+            <a:off x="0" y="0"/>
+            <a:ext cx="2971800" cy="457200"/>
+          </a:xfrm>
+          <a:prstGeom prst="rect">
+            <a:avLst/>
+          </a:prstGeom>
+        </p:spPr>
+        <p:txBody>
+          <a:bodyPr vert="horz" lIns="91440" tIns="45720" rIns="91440" bIns="45720" rtlCol="0"/>
+          <a:lstStyle>
+            <a:lvl1pPr algn="l">
+              <a:defRPr sz="1200"/>
+            </a:lvl1pPr>
+          </a:lstStyle>
+          <a:p>
+            <a:endParaRPr lang="en-US"/>
+          </a:p>
+        </p:txBody>
+      </p:sp>
+      <p:sp>
+        <p:nvSpPr>
+          <p:cNvPr id="3" name="Date Placeholder 2"/>
+          <p:cNvSpPr>
+            <a:spLocks noGrp="1"/>
+          </p:cNvSpPr>
+          <p:nvPr>
+            <p:ph type="dt" idx="1"/>
+          </p:nvPr>
+        </p:nvSpPr>
+        <p:spPr>
+          <a:xfrm>
+            <a:off x="3884613" y="0"/>
+            <a:ext cx="2971800" cy="457200"/>
+          </a:xfrm>
+          <a:prstGeom prst="rect">
+            <a:avLst/>
+          </a:prstGeom>
+        </p:spPr>
+        <p:txBody>
+          <a:bodyPr vert="horz" lIns="91440" tIns="45720" rIns="91440" bIns="45720" rtlCol="0"/>
+          <a:lstStyle>
+            <a:lvl1pPr algn="r">
+              <a:defRPr sz="1200"/>
+            </a:lvl1pPr>
+          </a:lstStyle>
+          <a:p>
+            <a:fld id="{0F89C1C7-3DCD-1040-A9CF-14679D8B5DDD}" type="datetimeFigureOut">
+              <a:rPr lang="en-US" smtClean="0"/>
+              <a:t>10/17/16</a:t>
+            </a:fld>
+            <a:endParaRPr lang="en-US"/>
+          </a:p>
+        </p:txBody>
+      </p:sp>
+      <p:sp>
+        <p:nvSpPr>
+          <p:cNvPr id="4" name="Slide Image Placeholder 3"/>
+          <p:cNvSpPr>
+            <a:spLocks noGrp="1" noRot="1" noChangeAspect="1"/>
+          </p:cNvSpPr>
+          <p:nvPr>
+            <p:ph type="sldImg" idx="2"/>
+          </p:nvPr>
+        </p:nvSpPr>
+        <p:spPr>
+          <a:xfrm>
+            <a:off x="1143000" y="685800"/>
+            <a:ext cx="4572000" cy="3429000"/>
+          </a:xfrm>
+          <a:prstGeom prst="rect">
+            <a:avLst/>
+          </a:prstGeom>
+          <a:noFill/>
+          <a:ln w="12700">
+            <a:solidFill>
+              <a:prstClr val="black"/>
+            </a:solidFill>
+          </a:ln>
+        </p:spPr>
+        <p:txBody>
+          <a:bodyPr vert="horz" lIns="91440" tIns="45720" rIns="91440" bIns="45720" rtlCol="0" anchor="ctr"/>
+          <a:lstStyle/>
+          <a:p>
+            <a:endParaRPr lang="en-US"/>
+          </a:p>
+        </p:txBody>
+      </p:sp>
+      <p:sp>
+        <p:nvSpPr>
+          <p:cNvPr id="5" name="Notes Placeholder 4"/>
+          <p:cNvSpPr>
+            <a:spLocks noGrp="1"/>
+          </p:cNvSpPr>
+          <p:nvPr>
+            <p:ph type="body" sz="quarter" idx="3"/>
+          </p:nvPr>
+        </p:nvSpPr>
+        <p:spPr>
+          <a:xfrm>
+            <a:off x="685800" y="4343400"/>
+            <a:ext cx="5486400" cy="4114800"/>
+          </a:xfrm>
+          <a:prstGeom prst="rect">
+            <a:avLst/>
+          </a:prstGeom>
+        </p:spPr>
+        <p:txBody>
+          <a:bodyPr vert="horz" lIns="91440" tIns="45720" rIns="91440" bIns="45720" rtlCol="0"/>
+          <a:lstStyle/>
+          <a:p>
+            <a:pPr lvl="0"/>
+            <a:r>
+              <a:rPr lang="en-US" smtClean="0"/>
+              <a:t>Click to edit Master text styles</a:t>
+            </a:r>
+          </a:p>
+          <a:p>
+            <a:pPr lvl="1"/>
+            <a:r>
+              <a:rPr lang="en-US" smtClean="0"/>
+              <a:t>Second level</a:t>
+            </a:r>
+          </a:p>
+          <a:p>
+            <a:pPr lvl="2"/>
+            <a:r>
+              <a:rPr lang="en-US" smtClean="0"/>
+              <a:t>Third level</a:t>
+            </a:r>
+          </a:p>
+          <a:p>
+            <a:pPr lvl="3"/>
+            <a:r>
+              <a:rPr lang="en-US" smtClean="0"/>
+              <a:t>Fourth level</a:t>
+            </a:r>
+          </a:p>
+          <a:p>
+            <a:pPr lvl="4"/>
+            <a:r>
+              <a:rPr lang="en-US" smtClean="0"/>
+              <a:t>Fifth level</a:t>
+            </a:r>
+            <a:endParaRPr lang="en-US"/>
+          </a:p>
+        </p:txBody>
+      </p:sp>
+      <p:sp>
+        <p:nvSpPr>
+          <p:cNvPr id="6" name="Footer Placeholder 5"/>
+          <p:cNvSpPr>
+            <a:spLocks noGrp="1"/>
+          </p:cNvSpPr>
+          <p:nvPr>
+            <p:ph type="ftr" sz="quarter" idx="4"/>
+          </p:nvPr>
+        </p:nvSpPr>
+        <p:spPr>
+          <a:xfrm>
+            <a:off x="0" y="8685213"/>
+            <a:ext cx="2971800" cy="457200"/>
+          </a:xfrm>
+          <a:prstGeom prst="rect">
+            <a:avLst/>
+          </a:prstGeom>
+        </p:spPr>
+        <p:txBody>
+          <a:bodyPr vert="horz" lIns="91440" tIns="45720" rIns="91440" bIns="45720" rtlCol="0" anchor="b"/>
+          <a:lstStyle>
+            <a:lvl1pPr algn="l">
+              <a:defRPr sz="1200"/>
+            </a:lvl1pPr>
+          </a:lstStyle>
+          <a:p>
+            <a:endParaRPr lang="en-US"/>
+          </a:p>
+        </p:txBody>
+      </p:sp>
+      <p:sp>
+        <p:nvSpPr>
+          <p:cNvPr id="7" name="Slide Number Placeholder 6"/>
+          <p:cNvSpPr>
+            <a:spLocks noGrp="1"/>
+          </p:cNvSpPr>
+          <p:nvPr>
+            <p:ph type="sldNum" sz="quarter" idx="5"/>
+          </p:nvPr>
+        </p:nvSpPr>
+        <p:spPr>
+          <a:xfrm>
+            <a:off x="3884613" y="8685213"/>
+            <a:ext cx="2971800" cy="457200"/>
+          </a:xfrm>
+          <a:prstGeom prst="rect">
+            <a:avLst/>
+          </a:prstGeom>
+        </p:spPr>
+        <p:txBody>
+          <a:bodyPr vert="horz" lIns="91440" tIns="45720" rIns="91440" bIns="45720" rtlCol="0" anchor="b"/>
+          <a:lstStyle>
+            <a:lvl1pPr algn="r">
+              <a:defRPr sz="1200"/>
+            </a:lvl1pPr>
+          </a:lstStyle>
+          <a:p>
+            <a:fld id="{BB5E49A5-4136-284D-997B-48E1D791AD67}" type="slidenum">
+              <a:rPr lang="en-US" smtClean="0"/>
+              <a:t>‹#›</a:t>
+            </a:fld>
+            <a:endParaRPr lang="en-US"/>
+          </a:p>
+        </p:txBody>
+      </p:sp>
+    </p:spTree>
+    <p:extLst>
+      <p:ext uri="{BB962C8B-B14F-4D97-AF65-F5344CB8AC3E}">
+        <p14:creationId xmlns:p14="http://schemas.microsoft.com/office/powerpoint/2010/main" val="2623252185"/>
+      </p:ext>
+    </p:extLst>
+  </p:cSld>
+  <p:clrMap bg1="lt1" tx1="dk1" bg2="lt2" tx2="dk2" accent1="accent1" accent2="accent2" accent3="accent3" accent4="accent4" accent5="accent5" accent6="accent6" hlink="hlink" folHlink="folHlink"/>
+  <p:notesStyle>
+    <a:lvl1pPr marL="0" algn="l" defTabSz="457200" rtl="0" eaLnBrk="1" latinLnBrk="0" hangingPunct="1">
+      <a:defRPr sz="1200" kern="1200">
+        <a:solidFill>
+          <a:schemeClr val="tx1"/>
+        </a:solidFill>
+        <a:latin typeface="+mn-lt"/>
+        <a:ea typeface="+mn-ea"/>
+        <a:cs typeface="+mn-cs"/>
+      </a:defRPr>
+    </a:lvl1pPr>
+    <a:lvl2pPr marL="457200" algn="l" defTabSz="457200" rtl="0" eaLnBrk="1" latinLnBrk="0" hangingPunct="1">
+      <a:defRPr sz="1200" kern="1200">
+        <a:solidFill>
+          <a:schemeClr val="tx1"/>
+        </a:solidFill>
+        <a:latin typeface="+mn-lt"/>
+        <a:ea typeface="+mn-ea"/>
+        <a:cs typeface="+mn-cs"/>
+      </a:defRPr>
+    </a:lvl2pPr>
+    <a:lvl3pPr marL="914400" algn="l" defTabSz="457200" rtl="0" eaLnBrk="1" latinLnBrk="0" hangingPunct="1">
+      <a:defRPr sz="1200" kern="1200">
+        <a:solidFill>
+          <a:schemeClr val="tx1"/>
+        </a:solidFill>
+        <a:latin typeface="+mn-lt"/>
+        <a:ea typeface="+mn-ea"/>
+        <a:cs typeface="+mn-cs"/>
+      </a:defRPr>
+    </a:lvl3pPr>
+    <a:lvl4pPr marL="1371600" algn="l" defTabSz="457200" rtl="0" eaLnBrk="1" latinLnBrk="0" hangingPunct="1">
+      <a:defRPr sz="1200" kern="1200">
+        <a:solidFill>
+          <a:schemeClr val="tx1"/>
+        </a:solidFill>
+        <a:latin typeface="+mn-lt"/>
+        <a:ea typeface="+mn-ea"/>
+        <a:cs typeface="+mn-cs"/>
+      </a:defRPr>
+    </a:lvl4pPr>
+    <a:lvl5pPr marL="1828800" algn="l" defTabSz="457200" rtl="0" eaLnBrk="1" latinLnBrk="0" hangingPunct="1">
+      <a:defRPr sz="1200" kern="1200">
+        <a:solidFill>
+          <a:schemeClr val="tx1"/>
+        </a:solidFill>
+        <a:latin typeface="+mn-lt"/>
+        <a:ea typeface="+mn-ea"/>
+        <a:cs typeface="+mn-cs"/>
+      </a:defRPr>
+    </a:lvl5pPr>
+    <a:lvl6pPr marL="2286000" algn="l" defTabSz="457200" rtl="0" eaLnBrk="1" latinLnBrk="0" hangingPunct="1">
+      <a:defRPr sz="1200" kern="1200">
+        <a:solidFill>
+          <a:schemeClr val="tx1"/>
+        </a:solidFill>
+        <a:latin typeface="+mn-lt"/>
+        <a:ea typeface="+mn-ea"/>
+        <a:cs typeface="+mn-cs"/>
+      </a:defRPr>
+    </a:lvl6pPr>
+    <a:lvl7pPr marL="2743200" algn="l" defTabSz="457200" rtl="0" eaLnBrk="1" latinLnBrk="0" hangingPunct="1">
+      <a:defRPr sz="1200" kern="1200">
+        <a:solidFill>
+          <a:schemeClr val="tx1"/>
+        </a:solidFill>
+        <a:latin typeface="+mn-lt"/>
+        <a:ea typeface="+mn-ea"/>
+        <a:cs typeface="+mn-cs"/>
+      </a:defRPr>
+    </a:lvl7pPr>
+    <a:lvl8pPr marL="3200400" algn="l" defTabSz="457200" rtl="0" eaLnBrk="1" latinLnBrk="0" hangingPunct="1">
+      <a:defRPr sz="1200" kern="1200">
+        <a:solidFill>
+          <a:schemeClr val="tx1"/>
+        </a:solidFill>
+        <a:latin typeface="+mn-lt"/>
+        <a:ea typeface="+mn-ea"/>
+        <a:cs typeface="+mn-cs"/>
+      </a:defRPr>
+    </a:lvl8pPr>
+    <a:lvl9pPr marL="3657600" algn="l" defTabSz="457200" rtl="0" eaLnBrk="1" latinLnBrk="0" hangingPunct="1">
+      <a:defRPr sz="1200" kern="1200">
+        <a:solidFill>
+          <a:schemeClr val="tx1"/>
+        </a:solidFill>
+        <a:latin typeface="+mn-lt"/>
+        <a:ea typeface="+mn-ea"/>
+        <a:cs typeface="+mn-cs"/>
+      </a:defRPr>
+    </a:lvl9pPr>
+  </p:notesStyle>
+</p:notesMaster>
+</file>
+
+<file path=ppt/notesSlides/notesSlide1.xml><?xml version="1.0" encoding="utf-8"?>
+<p:notes xmlns:a="http://schemas.openxmlformats.org/drawingml/2006/main" xmlns:p="http://schemas.openxmlformats.org/presentationml/2006/main" xmlns:r="http://schemas.openxmlformats.org/officeDocument/2006/relationships">
+  <p:cSld>
+    <p:spTree>
+      <p:nvGrpSpPr>
+        <p:cNvPr id="1" name=""/>
+        <p:cNvGrpSpPr/>
+        <p:nvPr/>
+      </p:nvGrpSpPr>
+      <p:grpSpPr>
+        <a:xfrm>
+          <a:off x="0" y="0"/>
+          <a:ext cx="0" cy="0"/>
+          <a:chOff x="0" y="0"/>
+          <a:chExt cx="0" cy="0"/>
+        </a:xfrm>
+      </p:grpSpPr>
+      <p:sp>
+        <p:nvSpPr>
+          <p:cNvPr id="2" name="Slide Image Placeholder 1"/>
+          <p:cNvSpPr>
+            <a:spLocks noGrp="1"/>
+          </p:cNvSpPr>
+          <p:nvPr>
+            <p:ph type="sldImg" idx="2"/>
+          </p:nvPr>
+        </p:nvSpPr>
+        <p:spPr/>
+      </p:sp>
+      <p:sp>
+        <p:nvSpPr>
+          <p:cNvPr id="3" name="Notes Placeholder 2"/>
+          <p:cNvSpPr>
+            <a:spLocks noGrp="1"/>
+          </p:cNvSpPr>
+          <p:nvPr>
+            <p:ph type="body" idx="3" sz="quarter"/>
+          </p:nvPr>
+        </p:nvSpPr>
+        <p:spPr/>
+        <p:txBody>
+          <a:bodyPr/>
+          <a:lstStyle/>
+          <a:p>
+            <a:r>
+              <a:t>¿Por qué importa?</a:t>
+            </a:r>
+          </a:p>
+        </p:txBody>
+      </p:sp>
+      <p:sp>
+        <p:nvSpPr>
+          <p:cNvPr id="4" name="Slide Number Placeholder 3"/>
+          <p:cNvSpPr>
+            <a:spLocks noGrp="1"/>
+          </p:cNvSpPr>
+          <p:nvPr>
+            <p:ph type="sldNum" idx="5" sz="quarter"/>
+          </p:nvPr>
+        </p:nvSpPr>
+        <p:spPr/>
+      </p:sp>
+    </p:spTree>
+  </p:cSld>
+  <p:clrMapOvr>
+    <a:masterClrMapping/>
+  </p:clrMapOvr>
+</p:notes>
+</file>
+
+<file path=ppt/notesSlides/notesSlide2.xml><?xml version="1.0" encoding="utf-8"?>
+<p:notes xmlns:a="http://schemas.openxmlformats.org/drawingml/2006/main" xmlns:p="http://schemas.openxmlformats.org/presentationml/2006/main" xmlns:r="http://schemas.openxmlformats.org/officeDocument/2006/relationships">
+  <p:cSld>
+    <p:spTree>
+      <p:nvGrpSpPr>
+        <p:cNvPr id="1" name=""/>
+        <p:cNvGrpSpPr/>
+        <p:nvPr/>
+      </p:nvGrpSpPr>
+      <p:grpSpPr>
+        <a:xfrm>
+          <a:off x="0" y="0"/>
+          <a:ext cx="0" cy="0"/>
+          <a:chOff x="0" y="0"/>
+          <a:chExt cx="0" cy="0"/>
+        </a:xfrm>
+      </p:grpSpPr>
+      <p:sp>
+        <p:nvSpPr>
+          <p:cNvPr id="2" name="Slide Image Placeholder 1"/>
+          <p:cNvSpPr>
+            <a:spLocks noGrp="1"/>
+          </p:cNvSpPr>
+          <p:nvPr>
+            <p:ph type="sldImg" idx="2"/>
+          </p:nvPr>
+        </p:nvSpPr>
+        <p:spPr/>
+      </p:sp>
+      <p:sp>
+        <p:nvSpPr>
+          <p:cNvPr id="3" name="Notes Placeholder 2"/>
+          <p:cNvSpPr>
+            <a:spLocks noGrp="1"/>
+          </p:cNvSpPr>
+          <p:nvPr>
+            <p:ph type="body" idx="3" sz="quarter"/>
+          </p:nvPr>
+        </p:nvSpPr>
+        <p:spPr/>
+        <p:txBody>
+          <a:bodyPr/>
+          <a:lstStyle/>
+          <a:p>
+            <a:r>
+              <a:t>Eso es lo que tiene que correr sin que nadie toque código en la mitad.</a:t>
+            </a:r>
+          </a:p>
+        </p:txBody>
+      </p:sp>
+      <p:sp>
+        <p:nvSpPr>
+          <p:cNvPr id="4" name="Slide Number Placeholder 3"/>
+          <p:cNvSpPr>
+            <a:spLocks noGrp="1"/>
+          </p:cNvSpPr>
+          <p:nvPr>
+            <p:ph type="sldNum" idx="5" sz="quarter"/>
+          </p:nvPr>
+        </p:nvSpPr>
+        <p:spPr/>
+      </p:sp>
+    </p:spTree>
+  </p:cSld>
+  <p:clrMapOvr>
+    <a:masterClrMapping/>
+  </p:clrMapOvr>
+</p:notes>
+</file>
+
+<file path=ppt/notesSlides/notesSlide3.xml><?xml version="1.0" encoding="utf-8"?>
+<p:notes xmlns:a="http://schemas.openxmlformats.org/drawingml/2006/main" xmlns:p="http://schemas.openxmlformats.org/presentationml/2006/main" xmlns:r="http://schemas.openxmlformats.org/officeDocument/2006/relationships">
+  <p:cSld>
+    <p:spTree>
+      <p:nvGrpSpPr>
+        <p:cNvPr id="1" name=""/>
+        <p:cNvGrpSpPr/>
+        <p:nvPr/>
+      </p:nvGrpSpPr>
+      <p:grpSpPr>
+        <a:xfrm>
+          <a:off x="0" y="0"/>
+          <a:ext cx="0" cy="0"/>
+          <a:chOff x="0" y="0"/>
+          <a:chExt cx="0" cy="0"/>
+        </a:xfrm>
+      </p:grpSpPr>
+      <p:sp>
+        <p:nvSpPr>
+          <p:cNvPr id="2" name="Slide Image Placeholder 1"/>
+          <p:cNvSpPr>
+            <a:spLocks noGrp="1"/>
+          </p:cNvSpPr>
+          <p:nvPr>
+            <p:ph type="sldImg" idx="2"/>
+          </p:nvPr>
+        </p:nvSpPr>
+        <p:spPr/>
+      </p:sp>
+      <p:sp>
+        <p:nvSpPr>
+          <p:cNvPr id="3" name="Notes Placeholder 2"/>
+          <p:cNvSpPr>
+            <a:spLocks noGrp="1"/>
+          </p:cNvSpPr>
+          <p:nvPr>
+            <p:ph type="body" idx="3" sz="quarter"/>
+          </p:nvPr>
+        </p:nvSpPr>
+        <p:spPr/>
+        <p:txBody>
+          <a:bodyPr/>
+          <a:lstStyle/>
+          <a:p>
+            <a:r>
+              <a:t>Los errores de integración tienen firma propia y conviene reconocerlos por el síntoma.</a:t>
+            </a:r>
+          </a:p>
+          <a:p/>
+          <a:p>
+            <a:r>
+              <a:t>Quinto, la unión del código de tres personas que trajeron cada una su propia clase Mascota con constructores distintos.</a:t>
+            </a:r>
+          </a:p>
+          <a:p/>
+          <a:p>
+            <a:r>
+              <a:t>Y sexto, el clásico NullPointerException porque buscarPorId devuelve null cuando el ID no existe y nadie valida antes de usar el resultado.</a:t>
+            </a:r>
+          </a:p>
+        </p:txBody>
+      </p:sp>
+      <p:sp>
+        <p:nvSpPr>
+          <p:cNvPr id="4" name="Slide Number Placeholder 3"/>
+          <p:cNvSpPr>
+            <a:spLocks noGrp="1"/>
+          </p:cNvSpPr>
+          <p:nvPr>
+            <p:ph type="sldNum" idx="5" sz="quarter"/>
+          </p:nvPr>
+        </p:nvSpPr>
+        <p:spPr/>
+      </p:sp>
+    </p:spTree>
+  </p:cSld>
+  <p:clrMapOvr>
+    <a:masterClrMapping/>
+  </p:clrMapOvr>
+</p:notes>
+</file>
+
+<file path=ppt/notesSlides/notesSlide4.xml><?xml version="1.0" encoding="utf-8"?>
+<p:notes xmlns:a="http://schemas.openxmlformats.org/drawingml/2006/main" xmlns:p="http://schemas.openxmlformats.org/presentationml/2006/main" xmlns:r="http://schemas.openxmlformats.org/officeDocument/2006/relationships">
+  <p:cSld>
+    <p:spTree>
+      <p:nvGrpSpPr>
+        <p:cNvPr id="1" name=""/>
+        <p:cNvGrpSpPr/>
+        <p:nvPr/>
+      </p:nvGrpSpPr>
+      <p:grpSpPr>
+        <a:xfrm>
+          <a:off x="0" y="0"/>
+          <a:ext cx="0" cy="0"/>
+          <a:chOff x="0" y="0"/>
+          <a:chExt cx="0" cy="0"/>
+        </a:xfrm>
+      </p:grpSpPr>
+      <p:sp>
+        <p:nvSpPr>
+          <p:cNvPr id="2" name="Slide Image Placeholder 1"/>
+          <p:cNvSpPr>
+            <a:spLocks noGrp="1"/>
+          </p:cNvSpPr>
+          <p:nvPr>
+            <p:ph type="sldImg" idx="2"/>
+          </p:nvPr>
+        </p:nvSpPr>
+        <p:spPr/>
+      </p:sp>
+      <p:sp>
+        <p:nvSpPr>
+          <p:cNvPr id="3" name="Notes Placeholder 2"/>
+          <p:cNvSpPr>
+            <a:spLocks noGrp="1"/>
+          </p:cNvSpPr>
+          <p:nvPr>
+            <p:ph type="body" idx="3" sz="quarter"/>
+          </p:nvPr>
+        </p:nvSpPr>
+        <p:spPr/>
+        <p:txBody>
+          <a:bodyPr/>
+          <a:lstStyle/>
+          <a:p>
+            <a:r>
+              <a:t>Cuando algo se rompe, uno sabe exactamente qué fue lo último que tocó.</a:t>
+            </a:r>
+          </a:p>
+        </p:txBody>
+      </p:sp>
+      <p:sp>
+        <p:nvSpPr>
+          <p:cNvPr id="4" name="Slide Number Placeholder 3"/>
+          <p:cNvSpPr>
+            <a:spLocks noGrp="1"/>
+          </p:cNvSpPr>
+          <p:nvPr>
+            <p:ph type="sldNum" idx="5" sz="quarter"/>
+          </p:nvPr>
+        </p:nvSpPr>
+        <p:spPr/>
+      </p:sp>
+    </p:spTree>
+  </p:cSld>
+  <p:clrMapOvr>
+    <a:masterClrMapping/>
+  </p:clrMapOvr>
+</p:notes>
 </file>
 
 <file path=ppt/slideLayouts/slideLayout1.xml><?xml version="1.0" encoding="utf-8"?>
@@ -8303,7 +8939,7 @@
                 </a:solidFill>
                 <a:latin typeface="Calibri"/>
               </a:rPr>
-              <a:t>Encuadre de hoy · Objetivo del PI</a:t>
+              <a:t>Encuadre de hoy</a:t>
             </a:r>
           </a:p>
         </p:txBody>
@@ -8351,7 +8987,7 @@
                 </a:solidFill>
                 <a:latin typeface="Calibri"/>
               </a:rPr>
-              <a:t>Hoy avanzamos VetCare en:</a:t>
+              <a:t>Tema de hoy:</a:t>
             </a:r>
             <a:r>
               <a:rPr sz="2000" b="0" i="0">
@@ -8360,7 +8996,7 @@
                 </a:solidFill>
                 <a:latin typeface="Calibri"/>
               </a:rPr>
-              <a:t> VetCare arranca, carga el archivo, registra, busca por ID, lista y guarda al cerrar: el flujo completo del PI corre sin tocar código.</a:t>
+              <a:t> Integración de módulos — De piezas sueltas a una aplicación que corre de punta a punta</a:t>
             </a:r>
           </a:p>
           <a:p>
@@ -8419,41 +9055,23 @@
                 </a:solidFill>
                 <a:latin typeface="Calibri"/>
               </a:rPr>
-              <a:t>–   </a:t>
-            </a:r>
-            <a:r>
-              <a:rPr sz="2000" b="1" i="0">
+              <a:t>–   Primero el concepto, despues el codigo que lo muestra y la demo en vivo.</a:t>
+            </a:r>
+          </a:p>
+          <a:p>
+            <a:pPr>
+              <a:spcAft>
+                <a:spcPts val="800"/>
+              </a:spcAft>
+            </a:pPr>
+            <a:r>
+              <a:rPr sz="2000" b="0" i="0">
                 <a:solidFill>
                   <a:srgbClr val="333333"/>
                 </a:solidFill>
                 <a:latin typeface="Calibri"/>
               </a:rPr>
-              <a:t>Entregable de hoy:</a:t>
-            </a:r>
-            <a:r>
-              <a:rPr sz="2000" b="0" i="0">
-                <a:solidFill>
-                  <a:srgbClr val="333333"/>
-                </a:solidFill>
-                <a:latin typeface="Calibri"/>
-              </a:rPr>
-              <a:t> El proyecto VetCare ejecutable (carpeta del proyecto o JAR) más la bitácora de integración con tres defectos hallados con el debugger, cada uno con síntoma, causa, corrección y evidencia, subidos a la plataforma del curso.</a:t>
-            </a:r>
-          </a:p>
-          <a:p>
-            <a:pPr>
-              <a:spcAft>
-                <a:spcPts val="800"/>
-              </a:spcAft>
-            </a:pPr>
-            <a:r>
-              <a:rPr sz="2000" b="0" i="0">
-                <a:solidFill>
-                  <a:srgbClr val="333333"/>
-                </a:solidFill>
-                <a:latin typeface="Calibri"/>
-              </a:rPr>
-              <a:t>–   La teoria esta al servicio del producto: al salir, VetCare avanzo.</a:t>
+              <a:t>–   Todo con el mismo dominio: la clinica veterinaria Huellitas (VetCare).</a:t>
             </a:r>
           </a:p>
         </p:txBody>
@@ -13392,7 +14010,7 @@
                 </a:solidFill>
                 <a:latin typeface="Calibri"/>
               </a:rPr>
-              <a:t>Encuadre y repaso del avance</a:t>
+              <a:t>Encuadre y repaso de la clase anterior</a:t>
             </a:r>
           </a:p>
         </p:txBody>
@@ -13737,7 +14355,7 @@
                 </a:solidFill>
                 <a:latin typeface="Calibri"/>
               </a:rPr>
-              <a:t>Taller guiado = avance del PI</a:t>
+              <a:t>Practica (opcional, guia en la carpeta)</a:t>
             </a:r>
           </a:p>
         </p:txBody>
@@ -13852,7 +14470,7 @@
                 </a:solidFill>
                 <a:latin typeface="Calibri"/>
               </a:rPr>
-              <a:t>Criterios de exito y cierre</a:t>
+              <a:t>Repaso de conceptos y cierre</a:t>
             </a:r>
           </a:p>
         </p:txBody>
@@ -21553,1695 +22171,7 @@
         <p:spPr>
           <a:xfrm>
             <a:off x="0" y="0"/>
-            <a:ext cx="12191695" cy="960120"/>
-          </a:xfrm>
-          <a:prstGeom prst="rect">
-            <a:avLst/>
-          </a:prstGeom>
-          <a:solidFill>
-            <a:srgbClr val="095292"/>
-          </a:solidFill>
-          <a:ln>
-            <a:noFill/>
-          </a:ln>
-        </p:spPr>
-        <p:style>
-          <a:lnRef idx="1">
-            <a:schemeClr val="accent1"/>
-          </a:lnRef>
-          <a:fillRef idx="3">
-            <a:schemeClr val="accent1"/>
-          </a:fillRef>
-          <a:effectRef idx="2">
-            <a:schemeClr val="accent1"/>
-          </a:effectRef>
-          <a:fontRef idx="minor">
-            <a:schemeClr val="lt1"/>
-          </a:fontRef>
-        </p:style>
-        <p:txBody>
-          <a:bodyPr rtlCol="0" anchor="ctr"/>
-          <a:lstStyle/>
-          <a:p>
-            <a:pPr algn="ctr"/>
-          </a:p>
-        </p:txBody>
-      </p:sp>
-      <p:sp>
-        <p:nvSpPr>
-          <p:cNvPr id="3" name="Rectangle 2"/>
-          <p:cNvSpPr/>
-          <p:nvPr/>
-        </p:nvSpPr>
-        <p:spPr>
-          <a:xfrm>
-            <a:off x="0" y="960120"/>
-            <a:ext cx="12191695" cy="41148"/>
-          </a:xfrm>
-          <a:prstGeom prst="rect">
-            <a:avLst/>
-          </a:prstGeom>
-          <a:solidFill>
-            <a:srgbClr val="FFD000"/>
-          </a:solidFill>
-          <a:ln>
-            <a:noFill/>
-          </a:ln>
-        </p:spPr>
-        <p:style>
-          <a:lnRef idx="1">
-            <a:schemeClr val="accent1"/>
-          </a:lnRef>
-          <a:fillRef idx="3">
-            <a:schemeClr val="accent1"/>
-          </a:fillRef>
-          <a:effectRef idx="2">
-            <a:schemeClr val="accent1"/>
-          </a:effectRef>
-          <a:fontRef idx="minor">
-            <a:schemeClr val="lt1"/>
-          </a:fontRef>
-        </p:style>
-        <p:txBody>
-          <a:bodyPr rtlCol="0" anchor="ctr"/>
-          <a:lstStyle/>
-          <a:p>
-            <a:pPr algn="ctr"/>
-          </a:p>
-        </p:txBody>
-      </p:sp>
-      <p:sp>
-        <p:nvSpPr>
-          <p:cNvPr id="4" name="TextBox 3"/>
-          <p:cNvSpPr txBox="1"/>
-          <p:nvPr/>
-        </p:nvSpPr>
-        <p:spPr>
-          <a:xfrm>
-            <a:off x="457200" y="164592"/>
-            <a:ext cx="11277295" cy="502920"/>
-          </a:xfrm>
-          <a:prstGeom prst="rect">
-            <a:avLst/>
-          </a:prstGeom>
-          <a:noFill/>
-        </p:spPr>
-        <p:txBody>
-          <a:bodyPr wrap="square">
-            <a:spAutoFit/>
-          </a:bodyPr>
-          <a:lstStyle/>
-          <a:p>
-            <a:r>
-              <a:rPr sz="2600" b="1" i="0">
-                <a:solidFill>
-                  <a:srgbClr val="FFFFFF"/>
-                </a:solidFill>
-                <a:latin typeface="Calibri"/>
-              </a:rPr>
-              <a:t>Taller PI — por que importa</a:t>
-            </a:r>
-          </a:p>
-        </p:txBody>
-      </p:sp>
-      <p:sp>
-        <p:nvSpPr>
-          <p:cNvPr id="5" name="TextBox 4"/>
-          <p:cNvSpPr txBox="1"/>
-          <p:nvPr/>
-        </p:nvSpPr>
-        <p:spPr>
-          <a:xfrm>
-            <a:off x="457200" y="1170432"/>
-            <a:ext cx="11277295" cy="5230368"/>
-          </a:xfrm>
-          <a:prstGeom prst="rect">
-            <a:avLst/>
-          </a:prstGeom>
-          <a:noFill/>
-        </p:spPr>
-        <p:txBody>
-          <a:bodyPr wrap="square">
-            <a:spAutoFit/>
-          </a:bodyPr>
-          <a:lstStyle/>
-          <a:p>
-            <a:pPr>
-              <a:spcAft>
-                <a:spcPts val="800"/>
-              </a:spcAft>
-            </a:pPr>
-            <a:r>
-              <a:rPr sz="2000" b="0" i="0">
-                <a:solidFill>
-                  <a:srgbClr val="333333"/>
-                </a:solidFill>
-                <a:latin typeface="Calibri"/>
-              </a:rPr>
-              <a:t>–   </a:t>
-            </a:r>
-            <a:r>
-              <a:rPr sz="2000" b="1" i="0">
-                <a:solidFill>
-                  <a:srgbClr val="333333"/>
-                </a:solidFill>
-                <a:latin typeface="Calibri"/>
-              </a:rPr>
-              <a:t>Por que importa al PI:</a:t>
-            </a:r>
-            <a:r>
-              <a:rPr sz="2000" b="0" i="0">
-                <a:solidFill>
-                  <a:srgbClr val="333333"/>
-                </a:solidFill>
-                <a:latin typeface="Calibri"/>
-              </a:rPr>
-              <a:t> hasta hoy VetCare eran cuatro talleres que funcionaban por separado; a partir de esta clase es un producto que la clínica Huellitas podría instalar, y eso es exactamente lo que se sustenta al final.</a:t>
-            </a:r>
-          </a:p>
-          <a:p>
-            <a:pPr>
-              <a:spcAft>
-                <a:spcPts val="800"/>
-              </a:spcAft>
-            </a:pPr>
-            <a:r>
-              <a:rPr sz="2000" b="0" i="0">
-                <a:solidFill>
-                  <a:srgbClr val="333333"/>
-                </a:solidFill>
-                <a:latin typeface="Calibri"/>
-              </a:rPr>
-              <a:t>–   Todo lo que se construyó desde la clase 1 (POO, colecciones, GUI, try-catch y persistencia) tiene que aparecer funcionando en el mismo ejecutable: la integración es donde el PI se comprueba como un todo.</a:t>
-            </a:r>
-          </a:p>
-          <a:p>
-            <a:pPr>
-              <a:spcAft>
-                <a:spcPts val="800"/>
-              </a:spcAft>
-            </a:pPr>
-            <a:r>
-              <a:rPr sz="2000" b="0" i="0">
-                <a:solidFill>
-                  <a:srgbClr val="333333"/>
-                </a:solidFill>
-                <a:latin typeface="Calibri"/>
-              </a:rPr>
-              <a:t>–   La bitácora de integración con el debugger es la evidencia de que el equipo sabe diagnosticar y no solo adivinar, que es lo que se evalúa en la defensa del proyecto.</a:t>
-            </a:r>
-          </a:p>
-        </p:txBody>
-      </p:sp>
-      <p:sp>
-        <p:nvSpPr>
-          <p:cNvPr id="6" name="TextBox 5"/>
-          <p:cNvSpPr txBox="1"/>
-          <p:nvPr/>
-        </p:nvSpPr>
-        <p:spPr>
-          <a:xfrm>
-            <a:off x="11185855" y="6473952"/>
-            <a:ext cx="640080" cy="274320"/>
-          </a:xfrm>
-          <a:prstGeom prst="rect">
-            <a:avLst/>
-          </a:prstGeom>
-          <a:noFill/>
-        </p:spPr>
-        <p:txBody>
-          <a:bodyPr wrap="square">
-            <a:spAutoFit/>
-          </a:bodyPr>
-          <a:lstStyle/>
-          <a:p>
-            <a:pPr algn="r"/>
-            <a:r>
-              <a:rPr sz="1100" b="0" i="0">
-                <a:solidFill>
-                  <a:srgbClr val="666666"/>
-                </a:solidFill>
-                <a:latin typeface="Calibri"/>
-              </a:rPr>
-              <a:t>45</a:t>
-            </a:r>
-          </a:p>
-        </p:txBody>
-      </p:sp>
-    </p:spTree>
-  </p:cSld>
-  <p:clrMapOvr>
-    <a:masterClrMapping/>
-  </p:clrMapOvr>
-</p:sld>
-</file>
-
-<file path=ppt/slides/slide46.xml><?xml version="1.0" encoding="utf-8"?>
-<p:sld xmlns:a="http://schemas.openxmlformats.org/drawingml/2006/main" xmlns:p="http://schemas.openxmlformats.org/presentationml/2006/main" xmlns:r="http://schemas.openxmlformats.org/officeDocument/2006/relationships">
-  <p:cSld>
-    <p:bg>
-      <p:bgPr>
-        <a:solidFill>
-          <a:srgbClr val="FFFFFF"/>
-        </a:solidFill>
-        <a:effectLst/>
-      </p:bgPr>
-    </p:bg>
-    <p:spTree>
-      <p:nvGrpSpPr>
-        <p:cNvPr id="1" name=""/>
-        <p:cNvGrpSpPr/>
-        <p:nvPr/>
-      </p:nvGrpSpPr>
-      <p:grpSpPr/>
-      <p:sp>
-        <p:nvSpPr>
-          <p:cNvPr id="2" name="Rectangle 1"/>
-          <p:cNvSpPr/>
-          <p:nvPr/>
-        </p:nvSpPr>
-        <p:spPr>
-          <a:xfrm>
-            <a:off x="0" y="0"/>
-            <a:ext cx="12191695" cy="960120"/>
-          </a:xfrm>
-          <a:prstGeom prst="rect">
-            <a:avLst/>
-          </a:prstGeom>
-          <a:solidFill>
-            <a:srgbClr val="095292"/>
-          </a:solidFill>
-          <a:ln>
-            <a:noFill/>
-          </a:ln>
-        </p:spPr>
-        <p:style>
-          <a:lnRef idx="1">
-            <a:schemeClr val="accent1"/>
-          </a:lnRef>
-          <a:fillRef idx="3">
-            <a:schemeClr val="accent1"/>
-          </a:fillRef>
-          <a:effectRef idx="2">
-            <a:schemeClr val="accent1"/>
-          </a:effectRef>
-          <a:fontRef idx="minor">
-            <a:schemeClr val="lt1"/>
-          </a:fontRef>
-        </p:style>
-        <p:txBody>
-          <a:bodyPr rtlCol="0" anchor="ctr"/>
-          <a:lstStyle/>
-          <a:p>
-            <a:pPr algn="ctr"/>
-          </a:p>
-        </p:txBody>
-      </p:sp>
-      <p:sp>
-        <p:nvSpPr>
-          <p:cNvPr id="3" name="Rectangle 2"/>
-          <p:cNvSpPr/>
-          <p:nvPr/>
-        </p:nvSpPr>
-        <p:spPr>
-          <a:xfrm>
-            <a:off x="0" y="960120"/>
-            <a:ext cx="12191695" cy="41148"/>
-          </a:xfrm>
-          <a:prstGeom prst="rect">
-            <a:avLst/>
-          </a:prstGeom>
-          <a:solidFill>
-            <a:srgbClr val="FFD000"/>
-          </a:solidFill>
-          <a:ln>
-            <a:noFill/>
-          </a:ln>
-        </p:spPr>
-        <p:style>
-          <a:lnRef idx="1">
-            <a:schemeClr val="accent1"/>
-          </a:lnRef>
-          <a:fillRef idx="3">
-            <a:schemeClr val="accent1"/>
-          </a:fillRef>
-          <a:effectRef idx="2">
-            <a:schemeClr val="accent1"/>
-          </a:effectRef>
-          <a:fontRef idx="minor">
-            <a:schemeClr val="lt1"/>
-          </a:fontRef>
-        </p:style>
-        <p:txBody>
-          <a:bodyPr rtlCol="0" anchor="ctr"/>
-          <a:lstStyle/>
-          <a:p>
-            <a:pPr algn="ctr"/>
-          </a:p>
-        </p:txBody>
-      </p:sp>
-      <p:sp>
-        <p:nvSpPr>
-          <p:cNvPr id="4" name="TextBox 3"/>
-          <p:cNvSpPr txBox="1"/>
-          <p:nvPr/>
-        </p:nvSpPr>
-        <p:spPr>
-          <a:xfrm>
-            <a:off x="457200" y="164592"/>
-            <a:ext cx="11277295" cy="502920"/>
-          </a:xfrm>
-          <a:prstGeom prst="rect">
-            <a:avLst/>
-          </a:prstGeom>
-          <a:noFill/>
-        </p:spPr>
-        <p:txBody>
-          <a:bodyPr wrap="square">
-            <a:spAutoFit/>
-          </a:bodyPr>
-          <a:lstStyle/>
-          <a:p>
-            <a:r>
-              <a:rPr sz="2600" b="1" i="0">
-                <a:solidFill>
-                  <a:srgbClr val="FFFFFF"/>
-                </a:solidFill>
-                <a:latin typeface="Calibri"/>
-              </a:rPr>
-              <a:t>Taller PI — punto de partida</a:t>
-            </a:r>
-          </a:p>
-        </p:txBody>
-      </p:sp>
-      <p:sp>
-        <p:nvSpPr>
-          <p:cNvPr id="5" name="TextBox 4"/>
-          <p:cNvSpPr txBox="1"/>
-          <p:nvPr/>
-        </p:nvSpPr>
-        <p:spPr>
-          <a:xfrm>
-            <a:off x="457200" y="1170432"/>
-            <a:ext cx="11277295" cy="5230368"/>
-          </a:xfrm>
-          <a:prstGeom prst="rect">
-            <a:avLst/>
-          </a:prstGeom>
-          <a:noFill/>
-        </p:spPr>
-        <p:txBody>
-          <a:bodyPr wrap="square">
-            <a:spAutoFit/>
-          </a:bodyPr>
-          <a:lstStyle/>
-          <a:p>
-            <a:pPr>
-              <a:spcAft>
-                <a:spcPts val="800"/>
-              </a:spcAft>
-            </a:pPr>
-            <a:r>
-              <a:rPr sz="2000" b="0" i="0">
-                <a:solidFill>
-                  <a:srgbClr val="333333"/>
-                </a:solidFill>
-                <a:latin typeface="Calibri"/>
-              </a:rPr>
-              <a:t>–   Cada estudiante llega con los cuatro módulos funcionando por separado y ya revisados por otro compañero en la clase anterior, con su plan de corrección en la mano.</a:t>
-            </a:r>
-          </a:p>
-          <a:p>
-            <a:pPr>
-              <a:spcAft>
-                <a:spcPts val="800"/>
-              </a:spcAft>
-            </a:pPr>
-            <a:r>
-              <a:rPr sz="2000" b="0" i="0">
-                <a:solidFill>
-                  <a:srgbClr val="333333"/>
-                </a:solidFill>
-                <a:latin typeface="Calibri"/>
-              </a:rPr>
-              <a:t>–   Existe un archivo mascotas.csv con datos reales de pruebas anteriores, y al menos una línea de ese archivo está dañada a propósito para probar el arranque.</a:t>
-            </a:r>
-          </a:p>
-          <a:p>
-            <a:pPr>
-              <a:spcAft>
-                <a:spcPts val="800"/>
-              </a:spcAft>
-            </a:pPr>
-            <a:r>
-              <a:rPr sz="2000" b="0" i="0">
-                <a:solidFill>
-                  <a:srgbClr val="333333"/>
-                </a:solidFill>
-                <a:latin typeface="Calibri"/>
-              </a:rPr>
-              <a:t>–   El contrato acordado del archivo es id;nombre;especie;edad;cedula_dueno y todos deben respetarlo tal cual para poder intercambiar archivos de datos.</a:t>
-            </a:r>
-          </a:p>
-        </p:txBody>
-      </p:sp>
-      <p:sp>
-        <p:nvSpPr>
-          <p:cNvPr id="6" name="TextBox 5"/>
-          <p:cNvSpPr txBox="1"/>
-          <p:nvPr/>
-        </p:nvSpPr>
-        <p:spPr>
-          <a:xfrm>
-            <a:off x="11185855" y="6473952"/>
-            <a:ext cx="640080" cy="274320"/>
-          </a:xfrm>
-          <a:prstGeom prst="rect">
-            <a:avLst/>
-          </a:prstGeom>
-          <a:noFill/>
-        </p:spPr>
-        <p:txBody>
-          <a:bodyPr wrap="square">
-            <a:spAutoFit/>
-          </a:bodyPr>
-          <a:lstStyle/>
-          <a:p>
-            <a:pPr algn="r"/>
-            <a:r>
-              <a:rPr sz="1100" b="0" i="0">
-                <a:solidFill>
-                  <a:srgbClr val="666666"/>
-                </a:solidFill>
-                <a:latin typeface="Calibri"/>
-              </a:rPr>
-              <a:t>46</a:t>
-            </a:r>
-          </a:p>
-        </p:txBody>
-      </p:sp>
-    </p:spTree>
-  </p:cSld>
-  <p:clrMapOvr>
-    <a:masterClrMapping/>
-  </p:clrMapOvr>
-</p:sld>
-</file>
-
-<file path=ppt/slides/slide47.xml><?xml version="1.0" encoding="utf-8"?>
-<p:sld xmlns:a="http://schemas.openxmlformats.org/drawingml/2006/main" xmlns:p="http://schemas.openxmlformats.org/presentationml/2006/main" xmlns:r="http://schemas.openxmlformats.org/officeDocument/2006/relationships">
-  <p:cSld>
-    <p:bg>
-      <p:bgPr>
-        <a:solidFill>
-          <a:srgbClr val="FFFFFF"/>
-        </a:solidFill>
-        <a:effectLst/>
-      </p:bgPr>
-    </p:bg>
-    <p:spTree>
-      <p:nvGrpSpPr>
-        <p:cNvPr id="1" name=""/>
-        <p:cNvGrpSpPr/>
-        <p:nvPr/>
-      </p:nvGrpSpPr>
-      <p:grpSpPr/>
-      <p:sp>
-        <p:nvSpPr>
-          <p:cNvPr id="2" name="Rectangle 1"/>
-          <p:cNvSpPr/>
-          <p:nvPr/>
-        </p:nvSpPr>
-        <p:spPr>
-          <a:xfrm>
-            <a:off x="0" y="0"/>
-            <a:ext cx="12191695" cy="960120"/>
-          </a:xfrm>
-          <a:prstGeom prst="rect">
-            <a:avLst/>
-          </a:prstGeom>
-          <a:solidFill>
-            <a:srgbClr val="095292"/>
-          </a:solidFill>
-          <a:ln>
-            <a:noFill/>
-          </a:ln>
-        </p:spPr>
-        <p:style>
-          <a:lnRef idx="1">
-            <a:schemeClr val="accent1"/>
-          </a:lnRef>
-          <a:fillRef idx="3">
-            <a:schemeClr val="accent1"/>
-          </a:fillRef>
-          <a:effectRef idx="2">
-            <a:schemeClr val="accent1"/>
-          </a:effectRef>
-          <a:fontRef idx="minor">
-            <a:schemeClr val="lt1"/>
-          </a:fontRef>
-        </p:style>
-        <p:txBody>
-          <a:bodyPr rtlCol="0" anchor="ctr"/>
-          <a:lstStyle/>
-          <a:p>
-            <a:pPr algn="ctr"/>
-          </a:p>
-        </p:txBody>
-      </p:sp>
-      <p:sp>
-        <p:nvSpPr>
-          <p:cNvPr id="3" name="Rectangle 2"/>
-          <p:cNvSpPr/>
-          <p:nvPr/>
-        </p:nvSpPr>
-        <p:spPr>
-          <a:xfrm>
-            <a:off x="0" y="960120"/>
-            <a:ext cx="12191695" cy="41148"/>
-          </a:xfrm>
-          <a:prstGeom prst="rect">
-            <a:avLst/>
-          </a:prstGeom>
-          <a:solidFill>
-            <a:srgbClr val="FFD000"/>
-          </a:solidFill>
-          <a:ln>
-            <a:noFill/>
-          </a:ln>
-        </p:spPr>
-        <p:style>
-          <a:lnRef idx="1">
-            <a:schemeClr val="accent1"/>
-          </a:lnRef>
-          <a:fillRef idx="3">
-            <a:schemeClr val="accent1"/>
-          </a:fillRef>
-          <a:effectRef idx="2">
-            <a:schemeClr val="accent1"/>
-          </a:effectRef>
-          <a:fontRef idx="minor">
-            <a:schemeClr val="lt1"/>
-          </a:fontRef>
-        </p:style>
-        <p:txBody>
-          <a:bodyPr rtlCol="0" anchor="ctr"/>
-          <a:lstStyle/>
-          <a:p>
-            <a:pPr algn="ctr"/>
-          </a:p>
-        </p:txBody>
-      </p:sp>
-      <p:sp>
-        <p:nvSpPr>
-          <p:cNvPr id="4" name="TextBox 3"/>
-          <p:cNvSpPr txBox="1"/>
-          <p:nvPr/>
-        </p:nvSpPr>
-        <p:spPr>
-          <a:xfrm>
-            <a:off x="457200" y="164592"/>
-            <a:ext cx="11277295" cy="502920"/>
-          </a:xfrm>
-          <a:prstGeom prst="rect">
-            <a:avLst/>
-          </a:prstGeom>
-          <a:noFill/>
-        </p:spPr>
-        <p:txBody>
-          <a:bodyPr wrap="square">
-            <a:spAutoFit/>
-          </a:bodyPr>
-          <a:lstStyle/>
-          <a:p>
-            <a:r>
-              <a:rPr sz="2600" b="1" i="0">
-                <a:solidFill>
-                  <a:srgbClr val="FFFFFF"/>
-                </a:solidFill>
-                <a:latin typeface="Calibri"/>
-              </a:rPr>
-              <a:t>Taller PI — pasos guiados</a:t>
-            </a:r>
-          </a:p>
-        </p:txBody>
-      </p:sp>
-      <p:sp>
-        <p:nvSpPr>
-          <p:cNvPr id="5" name="Rounded Rectangle 4"/>
-          <p:cNvSpPr/>
-          <p:nvPr/>
-        </p:nvSpPr>
-        <p:spPr>
-          <a:xfrm>
-            <a:off x="457200" y="1234440"/>
-            <a:ext cx="11277295" cy="950976"/>
-          </a:xfrm>
-          <a:prstGeom prst="roundRect">
-            <a:avLst>
-              <a:gd name="adj" fmla="val 12000"/>
-            </a:avLst>
-          </a:prstGeom>
-          <a:solidFill>
-            <a:srgbClr val="F2F2F2"/>
-          </a:solidFill>
-          <a:ln>
-            <a:noFill/>
-          </a:ln>
-        </p:spPr>
-        <p:style>
-          <a:lnRef idx="1">
-            <a:schemeClr val="accent1"/>
-          </a:lnRef>
-          <a:fillRef idx="3">
-            <a:schemeClr val="accent1"/>
-          </a:fillRef>
-          <a:effectRef idx="2">
-            <a:schemeClr val="accent1"/>
-          </a:effectRef>
-          <a:fontRef idx="minor">
-            <a:schemeClr val="lt1"/>
-          </a:fontRef>
-        </p:style>
-        <p:txBody>
-          <a:bodyPr rtlCol="0" anchor="ctr"/>
-          <a:lstStyle/>
-          <a:p>
-            <a:pPr algn="ctr"/>
-          </a:p>
-        </p:txBody>
-      </p:sp>
-      <p:sp>
-        <p:nvSpPr>
-          <p:cNvPr id="6" name="Rounded Rectangle 5"/>
-          <p:cNvSpPr/>
-          <p:nvPr/>
-        </p:nvSpPr>
-        <p:spPr>
-          <a:xfrm>
-            <a:off x="594360" y="1490472"/>
-            <a:ext cx="438912" cy="438912"/>
-          </a:xfrm>
-          <a:prstGeom prst="roundRect">
-            <a:avLst>
-              <a:gd name="adj" fmla="val 12000"/>
-            </a:avLst>
-          </a:prstGeom>
-          <a:solidFill>
-            <a:srgbClr val="095292"/>
-          </a:solidFill>
-          <a:ln>
-            <a:noFill/>
-          </a:ln>
-        </p:spPr>
-        <p:style>
-          <a:lnRef idx="1">
-            <a:schemeClr val="accent1"/>
-          </a:lnRef>
-          <a:fillRef idx="3">
-            <a:schemeClr val="accent1"/>
-          </a:fillRef>
-          <a:effectRef idx="2">
-            <a:schemeClr val="accent1"/>
-          </a:effectRef>
-          <a:fontRef idx="minor">
-            <a:schemeClr val="lt1"/>
-          </a:fontRef>
-        </p:style>
-        <p:txBody>
-          <a:bodyPr rtlCol="0" anchor="ctr"/>
-          <a:lstStyle/>
-          <a:p>
-            <a:pPr algn="ctr"/>
-          </a:p>
-        </p:txBody>
-      </p:sp>
-      <p:sp>
-        <p:nvSpPr>
-          <p:cNvPr id="7" name="TextBox 6"/>
-          <p:cNvSpPr txBox="1"/>
-          <p:nvPr/>
-        </p:nvSpPr>
-        <p:spPr>
-          <a:xfrm>
-            <a:off x="594360" y="1490472"/>
-            <a:ext cx="438912" cy="438912"/>
-          </a:xfrm>
-          <a:prstGeom prst="rect">
-            <a:avLst/>
-          </a:prstGeom>
-          <a:noFill/>
-        </p:spPr>
-        <p:txBody>
-          <a:bodyPr wrap="square" anchor="ctr"/>
-          <a:lstStyle/>
-          <a:p>
-            <a:pPr algn="ctr"/>
-            <a:r>
-              <a:rPr sz="1600" b="1" i="0">
-                <a:solidFill>
-                  <a:srgbClr val="FFFFFF"/>
-                </a:solidFill>
-                <a:latin typeface="Calibri"/>
-              </a:rPr>
-              <a:t>1</a:t>
-            </a:r>
-          </a:p>
-        </p:txBody>
-      </p:sp>
-      <p:sp>
-        <p:nvSpPr>
-          <p:cNvPr id="8" name="TextBox 7"/>
-          <p:cNvSpPr txBox="1"/>
-          <p:nvPr/>
-        </p:nvSpPr>
-        <p:spPr>
-          <a:xfrm>
-            <a:off x="1188720" y="1325880"/>
-            <a:ext cx="10271455" cy="786384"/>
-          </a:xfrm>
-          <a:prstGeom prst="rect">
-            <a:avLst/>
-          </a:prstGeom>
-          <a:noFill/>
-        </p:spPr>
-        <p:txBody>
-          <a:bodyPr wrap="square" anchor="ctr"/>
-          <a:lstStyle/>
-          <a:p>
-            <a:r>
-              <a:rPr sz="1400" b="1" i="0">
-                <a:solidFill>
-                  <a:srgbClr val="095292"/>
-                </a:solidFill>
-                <a:latin typeface="Calibri"/>
-              </a:rPr>
-              <a:t>Organice el proyecto en los paquetes vetcare.modelo, vetcare.datos, vetcare.logica y vetcare.ui, deje un único método main en la clase de arranque, elimine cualquier otro main que haya quedado de los talleres anteriores y verifique que la aplicación abre desde ese único punto.</a:t>
-            </a:r>
-          </a:p>
-        </p:txBody>
-      </p:sp>
-      <p:sp>
-        <p:nvSpPr>
-          <p:cNvPr id="9" name="Rounded Rectangle 8"/>
-          <p:cNvSpPr/>
-          <p:nvPr/>
-        </p:nvSpPr>
-        <p:spPr>
-          <a:xfrm>
-            <a:off x="457200" y="2276856"/>
-            <a:ext cx="11277295" cy="950976"/>
-          </a:xfrm>
-          <a:prstGeom prst="roundRect">
-            <a:avLst>
-              <a:gd name="adj" fmla="val 12000"/>
-            </a:avLst>
-          </a:prstGeom>
-          <a:solidFill>
-            <a:srgbClr val="E8F4FA"/>
-          </a:solidFill>
-          <a:ln>
-            <a:noFill/>
-          </a:ln>
-        </p:spPr>
-        <p:style>
-          <a:lnRef idx="1">
-            <a:schemeClr val="accent1"/>
-          </a:lnRef>
-          <a:fillRef idx="3">
-            <a:schemeClr val="accent1"/>
-          </a:fillRef>
-          <a:effectRef idx="2">
-            <a:schemeClr val="accent1"/>
-          </a:effectRef>
-          <a:fontRef idx="minor">
-            <a:schemeClr val="lt1"/>
-          </a:fontRef>
-        </p:style>
-        <p:txBody>
-          <a:bodyPr rtlCol="0" anchor="ctr"/>
-          <a:lstStyle/>
-          <a:p>
-            <a:pPr algn="ctr"/>
-          </a:p>
-        </p:txBody>
-      </p:sp>
-      <p:sp>
-        <p:nvSpPr>
-          <p:cNvPr id="10" name="Rounded Rectangle 9"/>
-          <p:cNvSpPr/>
-          <p:nvPr/>
-        </p:nvSpPr>
-        <p:spPr>
-          <a:xfrm>
-            <a:off x="594360" y="2532888"/>
-            <a:ext cx="438912" cy="438912"/>
-          </a:xfrm>
-          <a:prstGeom prst="roundRect">
-            <a:avLst>
-              <a:gd name="adj" fmla="val 12000"/>
-            </a:avLst>
-          </a:prstGeom>
-          <a:solidFill>
-            <a:srgbClr val="095292"/>
-          </a:solidFill>
-          <a:ln>
-            <a:noFill/>
-          </a:ln>
-        </p:spPr>
-        <p:style>
-          <a:lnRef idx="1">
-            <a:schemeClr val="accent1"/>
-          </a:lnRef>
-          <a:fillRef idx="3">
-            <a:schemeClr val="accent1"/>
-          </a:fillRef>
-          <a:effectRef idx="2">
-            <a:schemeClr val="accent1"/>
-          </a:effectRef>
-          <a:fontRef idx="minor">
-            <a:schemeClr val="lt1"/>
-          </a:fontRef>
-        </p:style>
-        <p:txBody>
-          <a:bodyPr rtlCol="0" anchor="ctr"/>
-          <a:lstStyle/>
-          <a:p>
-            <a:pPr algn="ctr"/>
-          </a:p>
-        </p:txBody>
-      </p:sp>
-      <p:sp>
-        <p:nvSpPr>
-          <p:cNvPr id="11" name="TextBox 10"/>
-          <p:cNvSpPr txBox="1"/>
-          <p:nvPr/>
-        </p:nvSpPr>
-        <p:spPr>
-          <a:xfrm>
-            <a:off x="594360" y="2532888"/>
-            <a:ext cx="438912" cy="438912"/>
-          </a:xfrm>
-          <a:prstGeom prst="rect">
-            <a:avLst/>
-          </a:prstGeom>
-          <a:noFill/>
-        </p:spPr>
-        <p:txBody>
-          <a:bodyPr wrap="square" anchor="ctr"/>
-          <a:lstStyle/>
-          <a:p>
-            <a:pPr algn="ctr"/>
-            <a:r>
-              <a:rPr sz="1600" b="1" i="0">
-                <a:solidFill>
-                  <a:srgbClr val="FFFFFF"/>
-                </a:solidFill>
-                <a:latin typeface="Calibri"/>
-              </a:rPr>
-              <a:t>2</a:t>
-            </a:r>
-          </a:p>
-        </p:txBody>
-      </p:sp>
-      <p:sp>
-        <p:nvSpPr>
-          <p:cNvPr id="12" name="TextBox 11"/>
-          <p:cNvSpPr txBox="1"/>
-          <p:nvPr/>
-        </p:nvSpPr>
-        <p:spPr>
-          <a:xfrm>
-            <a:off x="1188720" y="2368296"/>
-            <a:ext cx="10271455" cy="786384"/>
-          </a:xfrm>
-          <a:prstGeom prst="rect">
-            <a:avLst/>
-          </a:prstGeom>
-          <a:noFill/>
-        </p:spPr>
-        <p:txBody>
-          <a:bodyPr wrap="square" anchor="ctr"/>
-          <a:lstStyle/>
-          <a:p>
-            <a:r>
-              <a:rPr sz="1400" b="1" i="0">
-                <a:solidFill>
-                  <a:srgbClr val="095292"/>
-                </a:solidFill>
-                <a:latin typeface="Calibri"/>
-              </a:rPr>
-              <a:t>Asegure una sola instancia: cree el repositorio y el servicio en el main y páselos por constructor a la ventana; ponga un breakpoint en el botón Registrar y otro en el cierre, y compruebe en la ventana Variables que el objeto servicio tiene el mismo identificador en ambos puntos.</a:t>
-            </a:r>
-          </a:p>
-        </p:txBody>
-      </p:sp>
-      <p:sp>
-        <p:nvSpPr>
-          <p:cNvPr id="13" name="Rounded Rectangle 12"/>
-          <p:cNvSpPr/>
-          <p:nvPr/>
-        </p:nvSpPr>
-        <p:spPr>
-          <a:xfrm>
-            <a:off x="457200" y="3319272"/>
-            <a:ext cx="11277295" cy="950976"/>
-          </a:xfrm>
-          <a:prstGeom prst="roundRect">
-            <a:avLst>
-              <a:gd name="adj" fmla="val 12000"/>
-            </a:avLst>
-          </a:prstGeom>
-          <a:solidFill>
-            <a:srgbClr val="F2F2F2"/>
-          </a:solidFill>
-          <a:ln>
-            <a:noFill/>
-          </a:ln>
-        </p:spPr>
-        <p:style>
-          <a:lnRef idx="1">
-            <a:schemeClr val="accent1"/>
-          </a:lnRef>
-          <a:fillRef idx="3">
-            <a:schemeClr val="accent1"/>
-          </a:fillRef>
-          <a:effectRef idx="2">
-            <a:schemeClr val="accent1"/>
-          </a:effectRef>
-          <a:fontRef idx="minor">
-            <a:schemeClr val="lt1"/>
-          </a:fontRef>
-        </p:style>
-        <p:txBody>
-          <a:bodyPr rtlCol="0" anchor="ctr"/>
-          <a:lstStyle/>
-          <a:p>
-            <a:pPr algn="ctr"/>
-          </a:p>
-        </p:txBody>
-      </p:sp>
-      <p:sp>
-        <p:nvSpPr>
-          <p:cNvPr id="14" name="Rounded Rectangle 13"/>
-          <p:cNvSpPr/>
-          <p:nvPr/>
-        </p:nvSpPr>
-        <p:spPr>
-          <a:xfrm>
-            <a:off x="594360" y="3575304"/>
-            <a:ext cx="438912" cy="438912"/>
-          </a:xfrm>
-          <a:prstGeom prst="roundRect">
-            <a:avLst>
-              <a:gd name="adj" fmla="val 12000"/>
-            </a:avLst>
-          </a:prstGeom>
-          <a:solidFill>
-            <a:srgbClr val="095292"/>
-          </a:solidFill>
-          <a:ln>
-            <a:noFill/>
-          </a:ln>
-        </p:spPr>
-        <p:style>
-          <a:lnRef idx="1">
-            <a:schemeClr val="accent1"/>
-          </a:lnRef>
-          <a:fillRef idx="3">
-            <a:schemeClr val="accent1"/>
-          </a:fillRef>
-          <a:effectRef idx="2">
-            <a:schemeClr val="accent1"/>
-          </a:effectRef>
-          <a:fontRef idx="minor">
-            <a:schemeClr val="lt1"/>
-          </a:fontRef>
-        </p:style>
-        <p:txBody>
-          <a:bodyPr rtlCol="0" anchor="ctr"/>
-          <a:lstStyle/>
-          <a:p>
-            <a:pPr algn="ctr"/>
-          </a:p>
-        </p:txBody>
-      </p:sp>
-      <p:sp>
-        <p:nvSpPr>
-          <p:cNvPr id="15" name="TextBox 14"/>
-          <p:cNvSpPr txBox="1"/>
-          <p:nvPr/>
-        </p:nvSpPr>
-        <p:spPr>
-          <a:xfrm>
-            <a:off x="594360" y="3575304"/>
-            <a:ext cx="438912" cy="438912"/>
-          </a:xfrm>
-          <a:prstGeom prst="rect">
-            <a:avLst/>
-          </a:prstGeom>
-          <a:noFill/>
-        </p:spPr>
-        <p:txBody>
-          <a:bodyPr wrap="square" anchor="ctr"/>
-          <a:lstStyle/>
-          <a:p>
-            <a:pPr algn="ctr"/>
-            <a:r>
-              <a:rPr sz="1600" b="1" i="0">
-                <a:solidFill>
-                  <a:srgbClr val="FFFFFF"/>
-                </a:solidFill>
-                <a:latin typeface="Calibri"/>
-              </a:rPr>
-              <a:t>3</a:t>
-            </a:r>
-          </a:p>
-        </p:txBody>
-      </p:sp>
-      <p:sp>
-        <p:nvSpPr>
-          <p:cNvPr id="16" name="TextBox 15"/>
-          <p:cNvSpPr txBox="1"/>
-          <p:nvPr/>
-        </p:nvSpPr>
-        <p:spPr>
-          <a:xfrm>
-            <a:off x="1188720" y="3410712"/>
-            <a:ext cx="10271455" cy="786384"/>
-          </a:xfrm>
-          <a:prstGeom prst="rect">
-            <a:avLst/>
-          </a:prstGeom>
-          <a:noFill/>
-        </p:spPr>
-        <p:txBody>
-          <a:bodyPr wrap="square" anchor="ctr"/>
-          <a:lstStyle/>
-          <a:p>
-            <a:r>
-              <a:rPr sz="1500" b="1" i="0">
-                <a:solidFill>
-                  <a:srgbClr val="095292"/>
-                </a:solidFill>
-                <a:latin typeface="Calibri"/>
-              </a:rPr>
-              <a:t>Corra el guion de humo de cinco pasos (abrir con datos, registrar, buscar por ID, cerrar guardando, reabrir y verificar) y anote en qué paso exacto falla y con qué mensaje; si pasa completo a la primera, dañe una línea de mascotas.csv y vuelva a correrlo.</a:t>
-            </a:r>
-          </a:p>
-        </p:txBody>
-      </p:sp>
-      <p:sp>
-        <p:nvSpPr>
-          <p:cNvPr id="17" name="Rounded Rectangle 16"/>
-          <p:cNvSpPr/>
-          <p:nvPr/>
-        </p:nvSpPr>
-        <p:spPr>
-          <a:xfrm>
-            <a:off x="457200" y="4361688"/>
-            <a:ext cx="11277295" cy="950976"/>
-          </a:xfrm>
-          <a:prstGeom prst="roundRect">
-            <a:avLst>
-              <a:gd name="adj" fmla="val 12000"/>
-            </a:avLst>
-          </a:prstGeom>
-          <a:solidFill>
-            <a:srgbClr val="E8F4FA"/>
-          </a:solidFill>
-          <a:ln>
-            <a:noFill/>
-          </a:ln>
-        </p:spPr>
-        <p:style>
-          <a:lnRef idx="1">
-            <a:schemeClr val="accent1"/>
-          </a:lnRef>
-          <a:fillRef idx="3">
-            <a:schemeClr val="accent1"/>
-          </a:fillRef>
-          <a:effectRef idx="2">
-            <a:schemeClr val="accent1"/>
-          </a:effectRef>
-          <a:fontRef idx="minor">
-            <a:schemeClr val="lt1"/>
-          </a:fontRef>
-        </p:style>
-        <p:txBody>
-          <a:bodyPr rtlCol="0" anchor="ctr"/>
-          <a:lstStyle/>
-          <a:p>
-            <a:pPr algn="ctr"/>
-          </a:p>
-        </p:txBody>
-      </p:sp>
-      <p:sp>
-        <p:nvSpPr>
-          <p:cNvPr id="18" name="Rounded Rectangle 17"/>
-          <p:cNvSpPr/>
-          <p:nvPr/>
-        </p:nvSpPr>
-        <p:spPr>
-          <a:xfrm>
-            <a:off x="594360" y="4617720"/>
-            <a:ext cx="438912" cy="438912"/>
-          </a:xfrm>
-          <a:prstGeom prst="roundRect">
-            <a:avLst>
-              <a:gd name="adj" fmla="val 12000"/>
-            </a:avLst>
-          </a:prstGeom>
-          <a:solidFill>
-            <a:srgbClr val="095292"/>
-          </a:solidFill>
-          <a:ln>
-            <a:noFill/>
-          </a:ln>
-        </p:spPr>
-        <p:style>
-          <a:lnRef idx="1">
-            <a:schemeClr val="accent1"/>
-          </a:lnRef>
-          <a:fillRef idx="3">
-            <a:schemeClr val="accent1"/>
-          </a:fillRef>
-          <a:effectRef idx="2">
-            <a:schemeClr val="accent1"/>
-          </a:effectRef>
-          <a:fontRef idx="minor">
-            <a:schemeClr val="lt1"/>
-          </a:fontRef>
-        </p:style>
-        <p:txBody>
-          <a:bodyPr rtlCol="0" anchor="ctr"/>
-          <a:lstStyle/>
-          <a:p>
-            <a:pPr algn="ctr"/>
-          </a:p>
-        </p:txBody>
-      </p:sp>
-      <p:sp>
-        <p:nvSpPr>
-          <p:cNvPr id="19" name="TextBox 18"/>
-          <p:cNvSpPr txBox="1"/>
-          <p:nvPr/>
-        </p:nvSpPr>
-        <p:spPr>
-          <a:xfrm>
-            <a:off x="594360" y="4617720"/>
-            <a:ext cx="438912" cy="438912"/>
-          </a:xfrm>
-          <a:prstGeom prst="rect">
-            <a:avLst/>
-          </a:prstGeom>
-          <a:noFill/>
-        </p:spPr>
-        <p:txBody>
-          <a:bodyPr wrap="square" anchor="ctr"/>
-          <a:lstStyle/>
-          <a:p>
-            <a:pPr algn="ctr"/>
-            <a:r>
-              <a:rPr sz="1600" b="1" i="0">
-                <a:solidFill>
-                  <a:srgbClr val="FFFFFF"/>
-                </a:solidFill>
-                <a:latin typeface="Calibri"/>
-              </a:rPr>
-              <a:t>4</a:t>
-            </a:r>
-          </a:p>
-        </p:txBody>
-      </p:sp>
-      <p:sp>
-        <p:nvSpPr>
-          <p:cNvPr id="20" name="TextBox 19"/>
-          <p:cNvSpPr txBox="1"/>
-          <p:nvPr/>
-        </p:nvSpPr>
-        <p:spPr>
-          <a:xfrm>
-            <a:off x="1188720" y="4453128"/>
-            <a:ext cx="10271455" cy="786384"/>
-          </a:xfrm>
-          <a:prstGeom prst="rect">
-            <a:avLst/>
-          </a:prstGeom>
-          <a:noFill/>
-        </p:spPr>
-        <p:txBody>
-          <a:bodyPr wrap="square" anchor="ctr"/>
-          <a:lstStyle/>
-          <a:p>
-            <a:r>
-              <a:rPr sz="1400" b="1" i="0">
-                <a:solidFill>
-                  <a:srgbClr val="095292"/>
-                </a:solidFill>
-                <a:latin typeface="Calibri"/>
-              </a:rPr>
-              <a:t>Depure el primer defecto con el debugger: breakpoint en el manejador del botón, registre el valor real de cada campo del formulario antes de llegar al servicio, identifique en qué capa se corrompe el dato y aplique la corrección; deje la evidencia en la bitácora.</a:t>
-            </a:r>
-          </a:p>
-        </p:txBody>
-      </p:sp>
-      <p:sp>
-        <p:nvSpPr>
-          <p:cNvPr id="21" name="Rounded Rectangle 20"/>
-          <p:cNvSpPr/>
-          <p:nvPr/>
-        </p:nvSpPr>
-        <p:spPr>
-          <a:xfrm>
-            <a:off x="457200" y="5404104"/>
-            <a:ext cx="11277295" cy="950976"/>
-          </a:xfrm>
-          <a:prstGeom prst="roundRect">
-            <a:avLst>
-              <a:gd name="adj" fmla="val 12000"/>
-            </a:avLst>
-          </a:prstGeom>
-          <a:solidFill>
-            <a:srgbClr val="F2F2F2"/>
-          </a:solidFill>
-          <a:ln>
-            <a:noFill/>
-          </a:ln>
-        </p:spPr>
-        <p:style>
-          <a:lnRef idx="1">
-            <a:schemeClr val="accent1"/>
-          </a:lnRef>
-          <a:fillRef idx="3">
-            <a:schemeClr val="accent1"/>
-          </a:fillRef>
-          <a:effectRef idx="2">
-            <a:schemeClr val="accent1"/>
-          </a:effectRef>
-          <a:fontRef idx="minor">
-            <a:schemeClr val="lt1"/>
-          </a:fontRef>
-        </p:style>
-        <p:txBody>
-          <a:bodyPr rtlCol="0" anchor="ctr"/>
-          <a:lstStyle/>
-          <a:p>
-            <a:pPr algn="ctr"/>
-          </a:p>
-        </p:txBody>
-      </p:sp>
-      <p:sp>
-        <p:nvSpPr>
-          <p:cNvPr id="22" name="Rounded Rectangle 21"/>
-          <p:cNvSpPr/>
-          <p:nvPr/>
-        </p:nvSpPr>
-        <p:spPr>
-          <a:xfrm>
-            <a:off x="594360" y="5660136"/>
-            <a:ext cx="438912" cy="438912"/>
-          </a:xfrm>
-          <a:prstGeom prst="roundRect">
-            <a:avLst>
-              <a:gd name="adj" fmla="val 12000"/>
-            </a:avLst>
-          </a:prstGeom>
-          <a:solidFill>
-            <a:srgbClr val="095292"/>
-          </a:solidFill>
-          <a:ln>
-            <a:noFill/>
-          </a:ln>
-        </p:spPr>
-        <p:style>
-          <a:lnRef idx="1">
-            <a:schemeClr val="accent1"/>
-          </a:lnRef>
-          <a:fillRef idx="3">
-            <a:schemeClr val="accent1"/>
-          </a:fillRef>
-          <a:effectRef idx="2">
-            <a:schemeClr val="accent1"/>
-          </a:effectRef>
-          <a:fontRef idx="minor">
-            <a:schemeClr val="lt1"/>
-          </a:fontRef>
-        </p:style>
-        <p:txBody>
-          <a:bodyPr rtlCol="0" anchor="ctr"/>
-          <a:lstStyle/>
-          <a:p>
-            <a:pPr algn="ctr"/>
-          </a:p>
-        </p:txBody>
-      </p:sp>
-      <p:sp>
-        <p:nvSpPr>
-          <p:cNvPr id="23" name="TextBox 22"/>
-          <p:cNvSpPr txBox="1"/>
-          <p:nvPr/>
-        </p:nvSpPr>
-        <p:spPr>
-          <a:xfrm>
-            <a:off x="594360" y="5660136"/>
-            <a:ext cx="438912" cy="438912"/>
-          </a:xfrm>
-          <a:prstGeom prst="rect">
-            <a:avLst/>
-          </a:prstGeom>
-          <a:noFill/>
-        </p:spPr>
-        <p:txBody>
-          <a:bodyPr wrap="square" anchor="ctr"/>
-          <a:lstStyle/>
-          <a:p>
-            <a:pPr algn="ctr"/>
-            <a:r>
-              <a:rPr sz="1600" b="1" i="0">
-                <a:solidFill>
-                  <a:srgbClr val="FFFFFF"/>
-                </a:solidFill>
-                <a:latin typeface="Calibri"/>
-              </a:rPr>
-              <a:t>5</a:t>
-            </a:r>
-          </a:p>
-        </p:txBody>
-      </p:sp>
-      <p:sp>
-        <p:nvSpPr>
-          <p:cNvPr id="24" name="TextBox 23"/>
-          <p:cNvSpPr txBox="1"/>
-          <p:nvPr/>
-        </p:nvSpPr>
-        <p:spPr>
-          <a:xfrm>
-            <a:off x="1188720" y="5495544"/>
-            <a:ext cx="10271455" cy="786384"/>
-          </a:xfrm>
-          <a:prstGeom prst="rect">
-            <a:avLst/>
-          </a:prstGeom>
-          <a:noFill/>
-        </p:spPr>
-        <p:txBody>
-          <a:bodyPr wrap="square" anchor="ctr"/>
-          <a:lstStyle/>
-          <a:p>
-            <a:r>
-              <a:rPr sz="1500" b="1" i="0">
-                <a:solidFill>
-                  <a:srgbClr val="095292"/>
-                </a:solidFill>
-                <a:latin typeface="Calibri"/>
-              </a:rPr>
-              <a:t>Repita hasta que el guion de humo corra completo dos veces seguidas y entregue la bitácora de integración con tres defectos documentados con síntoma, causa, corrección y cómo lo verificó.</a:t>
-            </a:r>
-          </a:p>
-        </p:txBody>
-      </p:sp>
-      <p:sp>
-        <p:nvSpPr>
-          <p:cNvPr id="25" name="TextBox 24"/>
-          <p:cNvSpPr txBox="1"/>
-          <p:nvPr/>
-        </p:nvSpPr>
-        <p:spPr>
-          <a:xfrm>
-            <a:off x="11185855" y="6473952"/>
-            <a:ext cx="640080" cy="274320"/>
-          </a:xfrm>
-          <a:prstGeom prst="rect">
-            <a:avLst/>
-          </a:prstGeom>
-          <a:noFill/>
-        </p:spPr>
-        <p:txBody>
-          <a:bodyPr wrap="square">
-            <a:spAutoFit/>
-          </a:bodyPr>
-          <a:lstStyle/>
-          <a:p>
-            <a:pPr algn="r"/>
-            <a:r>
-              <a:rPr sz="1100" b="0" i="0">
-                <a:solidFill>
-                  <a:srgbClr val="666666"/>
-                </a:solidFill>
-                <a:latin typeface="Calibri"/>
-              </a:rPr>
-              <a:t>47</a:t>
-            </a:r>
-          </a:p>
-        </p:txBody>
-      </p:sp>
-    </p:spTree>
-  </p:cSld>
-  <p:clrMapOvr>
-    <a:masterClrMapping/>
-  </p:clrMapOvr>
-</p:sld>
-</file>
-
-<file path=ppt/slides/slide48.xml><?xml version="1.0" encoding="utf-8"?>
-<p:sld xmlns:a="http://schemas.openxmlformats.org/drawingml/2006/main" xmlns:p="http://schemas.openxmlformats.org/presentationml/2006/main" xmlns:r="http://schemas.openxmlformats.org/officeDocument/2006/relationships">
-  <p:cSld>
-    <p:bg>
-      <p:bgPr>
-        <a:solidFill>
-          <a:srgbClr val="FFFFFF"/>
-        </a:solidFill>
-        <a:effectLst/>
-      </p:bgPr>
-    </p:bg>
-    <p:spTree>
-      <p:nvGrpSpPr>
-        <p:cNvPr id="1" name=""/>
-        <p:cNvGrpSpPr/>
-        <p:nvPr/>
-      </p:nvGrpSpPr>
-      <p:grpSpPr/>
-      <p:sp>
-        <p:nvSpPr>
-          <p:cNvPr id="2" name="Rectangle 1"/>
-          <p:cNvSpPr/>
-          <p:nvPr/>
-        </p:nvSpPr>
-        <p:spPr>
-          <a:xfrm>
-            <a:off x="0" y="0"/>
-            <a:ext cx="12191695" cy="960120"/>
-          </a:xfrm>
-          <a:prstGeom prst="rect">
-            <a:avLst/>
-          </a:prstGeom>
-          <a:solidFill>
-            <a:srgbClr val="095292"/>
-          </a:solidFill>
-          <a:ln>
-            <a:noFill/>
-          </a:ln>
-        </p:spPr>
-        <p:style>
-          <a:lnRef idx="1">
-            <a:schemeClr val="accent1"/>
-          </a:lnRef>
-          <a:fillRef idx="3">
-            <a:schemeClr val="accent1"/>
-          </a:fillRef>
-          <a:effectRef idx="2">
-            <a:schemeClr val="accent1"/>
-          </a:effectRef>
-          <a:fontRef idx="minor">
-            <a:schemeClr val="lt1"/>
-          </a:fontRef>
-        </p:style>
-        <p:txBody>
-          <a:bodyPr rtlCol="0" anchor="ctr"/>
-          <a:lstStyle/>
-          <a:p>
-            <a:pPr algn="ctr"/>
-          </a:p>
-        </p:txBody>
-      </p:sp>
-      <p:sp>
-        <p:nvSpPr>
-          <p:cNvPr id="3" name="Rectangle 2"/>
-          <p:cNvSpPr/>
-          <p:nvPr/>
-        </p:nvSpPr>
-        <p:spPr>
-          <a:xfrm>
-            <a:off x="0" y="960120"/>
-            <a:ext cx="12191695" cy="41148"/>
-          </a:xfrm>
-          <a:prstGeom prst="rect">
-            <a:avLst/>
-          </a:prstGeom>
-          <a:solidFill>
-            <a:srgbClr val="FFD000"/>
-          </a:solidFill>
-          <a:ln>
-            <a:noFill/>
-          </a:ln>
-        </p:spPr>
-        <p:style>
-          <a:lnRef idx="1">
-            <a:schemeClr val="accent1"/>
-          </a:lnRef>
-          <a:fillRef idx="3">
-            <a:schemeClr val="accent1"/>
-          </a:fillRef>
-          <a:effectRef idx="2">
-            <a:schemeClr val="accent1"/>
-          </a:effectRef>
-          <a:fontRef idx="minor">
-            <a:schemeClr val="lt1"/>
-          </a:fontRef>
-        </p:style>
-        <p:txBody>
-          <a:bodyPr rtlCol="0" anchor="ctr"/>
-          <a:lstStyle/>
-          <a:p>
-            <a:pPr algn="ctr"/>
-          </a:p>
-        </p:txBody>
-      </p:sp>
-      <p:sp>
-        <p:nvSpPr>
-          <p:cNvPr id="4" name="TextBox 3"/>
-          <p:cNvSpPr txBox="1"/>
-          <p:nvPr/>
-        </p:nvSpPr>
-        <p:spPr>
-          <a:xfrm>
-            <a:off x="457200" y="164592"/>
-            <a:ext cx="11277295" cy="502920"/>
-          </a:xfrm>
-          <a:prstGeom prst="rect">
-            <a:avLst/>
-          </a:prstGeom>
-          <a:noFill/>
-        </p:spPr>
-        <p:txBody>
-          <a:bodyPr wrap="square">
-            <a:spAutoFit/>
-          </a:bodyPr>
-          <a:lstStyle/>
-          <a:p>
-            <a:r>
-              <a:rPr sz="2600" b="1" i="0">
-                <a:solidFill>
-                  <a:srgbClr val="FFFFFF"/>
-                </a:solidFill>
-                <a:latin typeface="Calibri"/>
-              </a:rPr>
-              <a:t>Antes de entregar — autochequeo</a:t>
-            </a:r>
-          </a:p>
-        </p:txBody>
-      </p:sp>
-      <p:sp>
-        <p:nvSpPr>
-          <p:cNvPr id="5" name="Rounded Rectangle 4"/>
-          <p:cNvSpPr/>
-          <p:nvPr/>
-        </p:nvSpPr>
-        <p:spPr>
-          <a:xfrm>
-            <a:off x="457200" y="1261872"/>
-            <a:ext cx="11277295" cy="566928"/>
-          </a:xfrm>
-          <a:prstGeom prst="roundRect">
-            <a:avLst>
-              <a:gd name="adj" fmla="val 12000"/>
-            </a:avLst>
-          </a:prstGeom>
-          <a:solidFill>
-            <a:srgbClr val="F2F2F2"/>
-          </a:solidFill>
-          <a:ln>
-            <a:noFill/>
-          </a:ln>
-        </p:spPr>
-        <p:style>
-          <a:lnRef idx="1">
-            <a:schemeClr val="accent1"/>
-          </a:lnRef>
-          <a:fillRef idx="3">
-            <a:schemeClr val="accent1"/>
-          </a:fillRef>
-          <a:effectRef idx="2">
-            <a:schemeClr val="accent1"/>
-          </a:effectRef>
-          <a:fontRef idx="minor">
-            <a:schemeClr val="lt1"/>
-          </a:fontRef>
-        </p:style>
-        <p:txBody>
-          <a:bodyPr rtlCol="0" anchor="ctr"/>
-          <a:lstStyle/>
-          <a:p>
-            <a:pPr algn="ctr"/>
-          </a:p>
-        </p:txBody>
-      </p:sp>
-      <p:sp>
-        <p:nvSpPr>
-          <p:cNvPr id="6" name="Rectangle 5"/>
-          <p:cNvSpPr/>
-          <p:nvPr/>
-        </p:nvSpPr>
-        <p:spPr>
-          <a:xfrm>
-            <a:off x="640080" y="1408175"/>
-            <a:ext cx="274320" cy="274320"/>
-          </a:xfrm>
-          <a:prstGeom prst="rect">
-            <a:avLst/>
-          </a:prstGeom>
-          <a:solidFill>
-            <a:srgbClr val="FFFFFF"/>
-          </a:solidFill>
-          <a:ln>
-            <a:solidFill>
-              <a:srgbClr val="333333"/>
-            </a:solidFill>
-          </a:ln>
-        </p:spPr>
-        <p:style>
-          <a:lnRef idx="1">
-            <a:schemeClr val="accent1"/>
-          </a:lnRef>
-          <a:fillRef idx="3">
-            <a:schemeClr val="accent1"/>
-          </a:fillRef>
-          <a:effectRef idx="2">
-            <a:schemeClr val="accent1"/>
-          </a:effectRef>
-          <a:fontRef idx="minor">
-            <a:schemeClr val="lt1"/>
-          </a:fontRef>
-        </p:style>
-        <p:txBody>
-          <a:bodyPr rtlCol="0" anchor="ctr"/>
-          <a:lstStyle/>
-          <a:p>
-            <a:pPr algn="ctr"/>
-          </a:p>
-        </p:txBody>
-      </p:sp>
-      <p:sp>
-        <p:nvSpPr>
-          <p:cNvPr id="7" name="Rectangle 6"/>
-          <p:cNvSpPr/>
-          <p:nvPr/>
-        </p:nvSpPr>
-        <p:spPr>
-          <a:xfrm>
-            <a:off x="640080" y="1408175"/>
-            <a:ext cx="73152" cy="274320"/>
+            <a:ext cx="12191695" cy="164592"/>
           </a:xfrm>
           <a:prstGeom prst="rect">
             <a:avLst/>
@@ -23275,16 +22205,40 @@
           </a:p>
         </p:txBody>
       </p:sp>
-      <p:sp>
-        <p:nvSpPr>
-          <p:cNvPr id="8" name="TextBox 7"/>
+      <p:pic>
+        <p:nvPicPr>
+          <p:cNvPr id="3" name="Picture 2" descr="logo_uniajc_color.png"/>
+          <p:cNvPicPr>
+            <a:picLocks noChangeAspect="1"/>
+          </p:cNvPicPr>
+          <p:nvPr/>
+        </p:nvPicPr>
+        <p:blipFill>
+          <a:blip r:embed="rId2"/>
+          <a:stretch>
+            <a:fillRect/>
+          </a:stretch>
+        </p:blipFill>
+        <p:spPr>
+          <a:xfrm>
+            <a:off x="10271455" y="5998464"/>
+            <a:ext cx="1463040" cy="643233"/>
+          </a:xfrm>
+          <a:prstGeom prst="rect">
+            <a:avLst/>
+          </a:prstGeom>
+        </p:spPr>
+      </p:pic>
+      <p:sp>
+        <p:nvSpPr>
+          <p:cNvPr id="4" name="TextBox 3"/>
           <p:cNvSpPr txBox="1"/>
           <p:nvPr/>
         </p:nvSpPr>
         <p:spPr>
           <a:xfrm>
-            <a:off x="1097280" y="1353312"/>
-            <a:ext cx="10362895" cy="402336"/>
+            <a:off x="457200" y="1737360"/>
+            <a:ext cx="11277295" cy="1097280"/>
           </a:xfrm>
           <a:prstGeom prst="rect">
             <a:avLst/>
@@ -23295,358 +22249,29 @@
           <a:bodyPr wrap="square" anchor="ctr"/>
           <a:lstStyle/>
           <a:p>
-            <a:r>
-              <a:rPr sz="1500" b="0" i="0">
-                <a:solidFill>
-                  <a:srgbClr val="333333"/>
-                </a:solidFill>
-                <a:latin typeface="Calibri"/>
-              </a:rPr>
-              <a:t>Si la consola dice 'Mascotas cargadas: 12' pero la tabla aparece vacía, ¿el problema está en el archivo, en la carga o en el momento en que se llena la tabla?</a:t>
-            </a:r>
-          </a:p>
-        </p:txBody>
-      </p:sp>
-      <p:sp>
-        <p:nvSpPr>
-          <p:cNvPr id="9" name="Rounded Rectangle 8"/>
-          <p:cNvSpPr/>
-          <p:nvPr/>
-        </p:nvSpPr>
-        <p:spPr>
-          <a:xfrm>
-            <a:off x="457200" y="1938528"/>
-            <a:ext cx="11277295" cy="566928"/>
-          </a:xfrm>
-          <a:prstGeom prst="roundRect">
-            <a:avLst>
-              <a:gd name="adj" fmla="val 12000"/>
-            </a:avLst>
-          </a:prstGeom>
-          <a:solidFill>
-            <a:srgbClr val="F2F2F2"/>
-          </a:solidFill>
-          <a:ln>
-            <a:noFill/>
-          </a:ln>
-        </p:spPr>
-        <p:style>
-          <a:lnRef idx="1">
-            <a:schemeClr val="accent1"/>
-          </a:lnRef>
-          <a:fillRef idx="3">
-            <a:schemeClr val="accent1"/>
-          </a:fillRef>
-          <a:effectRef idx="2">
-            <a:schemeClr val="accent1"/>
-          </a:effectRef>
-          <a:fontRef idx="minor">
-            <a:schemeClr val="lt1"/>
-          </a:fontRef>
-        </p:style>
-        <p:txBody>
-          <a:bodyPr rtlCol="0" anchor="ctr"/>
-          <a:lstStyle/>
-          <a:p>
             <a:pPr algn="ctr"/>
-          </a:p>
-        </p:txBody>
-      </p:sp>
-      <p:sp>
-        <p:nvSpPr>
-          <p:cNvPr id="10" name="Rectangle 9"/>
-          <p:cNvSpPr/>
-          <p:nvPr/>
-        </p:nvSpPr>
-        <p:spPr>
-          <a:xfrm>
-            <a:off x="640080" y="2084832"/>
-            <a:ext cx="274320" cy="274320"/>
-          </a:xfrm>
-          <a:prstGeom prst="rect">
-            <a:avLst/>
-          </a:prstGeom>
-          <a:solidFill>
-            <a:srgbClr val="FFFFFF"/>
-          </a:solidFill>
-          <a:ln>
-            <a:solidFill>
-              <a:srgbClr val="333333"/>
-            </a:solidFill>
-          </a:ln>
-        </p:spPr>
-        <p:style>
-          <a:lnRef idx="1">
-            <a:schemeClr val="accent1"/>
-          </a:lnRef>
-          <a:fillRef idx="3">
-            <a:schemeClr val="accent1"/>
-          </a:fillRef>
-          <a:effectRef idx="2">
-            <a:schemeClr val="accent1"/>
-          </a:effectRef>
-          <a:fontRef idx="minor">
-            <a:schemeClr val="lt1"/>
-          </a:fontRef>
-        </p:style>
-        <p:txBody>
-          <a:bodyPr rtlCol="0" anchor="ctr"/>
-          <a:lstStyle/>
-          <a:p>
-            <a:pPr algn="ctr"/>
-          </a:p>
-        </p:txBody>
-      </p:sp>
-      <p:sp>
-        <p:nvSpPr>
-          <p:cNvPr id="11" name="Rectangle 10"/>
-          <p:cNvSpPr/>
-          <p:nvPr/>
-        </p:nvSpPr>
-        <p:spPr>
-          <a:xfrm>
-            <a:off x="640080" y="2084832"/>
-            <a:ext cx="73152" cy="274320"/>
-          </a:xfrm>
-          <a:prstGeom prst="rect">
-            <a:avLst/>
-          </a:prstGeom>
-          <a:solidFill>
-            <a:srgbClr val="269CCB"/>
-          </a:solidFill>
-          <a:ln>
-            <a:noFill/>
-          </a:ln>
-        </p:spPr>
-        <p:style>
-          <a:lnRef idx="1">
-            <a:schemeClr val="accent1"/>
-          </a:lnRef>
-          <a:fillRef idx="3">
-            <a:schemeClr val="accent1"/>
-          </a:fillRef>
-          <a:effectRef idx="2">
-            <a:schemeClr val="accent1"/>
-          </a:effectRef>
-          <a:fontRef idx="minor">
-            <a:schemeClr val="lt1"/>
-          </a:fontRef>
-        </p:style>
-        <p:txBody>
-          <a:bodyPr rtlCol="0" anchor="ctr"/>
-          <a:lstStyle/>
-          <a:p>
-            <a:pPr algn="ctr"/>
-          </a:p>
-        </p:txBody>
-      </p:sp>
-      <p:sp>
-        <p:nvSpPr>
-          <p:cNvPr id="12" name="TextBox 11"/>
+            <a:r>
+              <a:rPr sz="3400" b="1" i="0">
+                <a:solidFill>
+                  <a:srgbClr val="095292"/>
+                </a:solidFill>
+                <a:latin typeface="Calibri"/>
+              </a:rPr>
+              <a:t>Clase 12 · Integración de módulos</a:t>
+            </a:r>
+          </a:p>
+        </p:txBody>
+      </p:sp>
+      <p:sp>
+        <p:nvSpPr>
+          <p:cNvPr id="5" name="TextBox 4"/>
           <p:cNvSpPr txBox="1"/>
           <p:nvPr/>
         </p:nvSpPr>
         <p:spPr>
           <a:xfrm>
-            <a:off x="1097280" y="2029968"/>
-            <a:ext cx="10362895" cy="402336"/>
-          </a:xfrm>
-          <a:prstGeom prst="rect">
-            <a:avLst/>
-          </a:prstGeom>
-          <a:noFill/>
-        </p:spPr>
-        <p:txBody>
-          <a:bodyPr wrap="square" anchor="ctr"/>
-          <a:lstStyle/>
-          <a:p>
-            <a:r>
-              <a:rPr sz="1500" b="0" i="0">
-                <a:solidFill>
-                  <a:srgbClr val="333333"/>
-                </a:solidFill>
-                <a:latin typeface="Calibri"/>
-              </a:rPr>
-              <a:t>¿Cuántas veces aparece la expresión new ServicioVetCare en todo su proyecto, y qué pasaría si aparece más de una?</a:t>
-            </a:r>
-          </a:p>
-        </p:txBody>
-      </p:sp>
-      <p:sp>
-        <p:nvSpPr>
-          <p:cNvPr id="13" name="Rounded Rectangle 12"/>
-          <p:cNvSpPr/>
-          <p:nvPr/>
-        </p:nvSpPr>
-        <p:spPr>
-          <a:xfrm>
-            <a:off x="457200" y="2615184"/>
-            <a:ext cx="11277295" cy="566928"/>
-          </a:xfrm>
-          <a:prstGeom prst="roundRect">
-            <a:avLst>
-              <a:gd name="adj" fmla="val 12000"/>
-            </a:avLst>
-          </a:prstGeom>
-          <a:solidFill>
-            <a:srgbClr val="F2F2F2"/>
-          </a:solidFill>
-          <a:ln>
-            <a:noFill/>
-          </a:ln>
-        </p:spPr>
-        <p:style>
-          <a:lnRef idx="1">
-            <a:schemeClr val="accent1"/>
-          </a:lnRef>
-          <a:fillRef idx="3">
-            <a:schemeClr val="accent1"/>
-          </a:fillRef>
-          <a:effectRef idx="2">
-            <a:schemeClr val="accent1"/>
-          </a:effectRef>
-          <a:fontRef idx="minor">
-            <a:schemeClr val="lt1"/>
-          </a:fontRef>
-        </p:style>
-        <p:txBody>
-          <a:bodyPr rtlCol="0" anchor="ctr"/>
-          <a:lstStyle/>
-          <a:p>
-            <a:pPr algn="ctr"/>
-          </a:p>
-        </p:txBody>
-      </p:sp>
-      <p:sp>
-        <p:nvSpPr>
-          <p:cNvPr id="14" name="Rectangle 13"/>
-          <p:cNvSpPr/>
-          <p:nvPr/>
-        </p:nvSpPr>
-        <p:spPr>
-          <a:xfrm>
-            <a:off x="640080" y="2761488"/>
-            <a:ext cx="274320" cy="274320"/>
-          </a:xfrm>
-          <a:prstGeom prst="rect">
-            <a:avLst/>
-          </a:prstGeom>
-          <a:solidFill>
-            <a:srgbClr val="FFFFFF"/>
-          </a:solidFill>
-          <a:ln>
-            <a:solidFill>
-              <a:srgbClr val="333333"/>
-            </a:solidFill>
-          </a:ln>
-        </p:spPr>
-        <p:style>
-          <a:lnRef idx="1">
-            <a:schemeClr val="accent1"/>
-          </a:lnRef>
-          <a:fillRef idx="3">
-            <a:schemeClr val="accent1"/>
-          </a:fillRef>
-          <a:effectRef idx="2">
-            <a:schemeClr val="accent1"/>
-          </a:effectRef>
-          <a:fontRef idx="minor">
-            <a:schemeClr val="lt1"/>
-          </a:fontRef>
-        </p:style>
-        <p:txBody>
-          <a:bodyPr rtlCol="0" anchor="ctr"/>
-          <a:lstStyle/>
-          <a:p>
-            <a:pPr algn="ctr"/>
-          </a:p>
-        </p:txBody>
-      </p:sp>
-      <p:sp>
-        <p:nvSpPr>
-          <p:cNvPr id="15" name="Rectangle 14"/>
-          <p:cNvSpPr/>
-          <p:nvPr/>
-        </p:nvSpPr>
-        <p:spPr>
-          <a:xfrm>
-            <a:off x="640080" y="2761488"/>
-            <a:ext cx="73152" cy="274320"/>
-          </a:xfrm>
-          <a:prstGeom prst="rect">
-            <a:avLst/>
-          </a:prstGeom>
-          <a:solidFill>
-            <a:srgbClr val="269CCB"/>
-          </a:solidFill>
-          <a:ln>
-            <a:noFill/>
-          </a:ln>
-        </p:spPr>
-        <p:style>
-          <a:lnRef idx="1">
-            <a:schemeClr val="accent1"/>
-          </a:lnRef>
-          <a:fillRef idx="3">
-            <a:schemeClr val="accent1"/>
-          </a:fillRef>
-          <a:effectRef idx="2">
-            <a:schemeClr val="accent1"/>
-          </a:effectRef>
-          <a:fontRef idx="minor">
-            <a:schemeClr val="lt1"/>
-          </a:fontRef>
-        </p:style>
-        <p:txBody>
-          <a:bodyPr rtlCol="0" anchor="ctr"/>
-          <a:lstStyle/>
-          <a:p>
-            <a:pPr algn="ctr"/>
-          </a:p>
-        </p:txBody>
-      </p:sp>
-      <p:sp>
-        <p:nvSpPr>
-          <p:cNvPr id="16" name="TextBox 15"/>
-          <p:cNvSpPr txBox="1"/>
-          <p:nvPr/>
-        </p:nvSpPr>
-        <p:spPr>
-          <a:xfrm>
-            <a:off x="1097280" y="2706624"/>
-            <a:ext cx="10362895" cy="402336"/>
-          </a:xfrm>
-          <a:prstGeom prst="rect">
-            <a:avLst/>
-          </a:prstGeom>
-          <a:noFill/>
-        </p:spPr>
-        <p:txBody>
-          <a:bodyPr wrap="square" anchor="ctr"/>
-          <a:lstStyle/>
-          <a:p>
-            <a:r>
-              <a:rPr sz="1500" b="0" i="0">
-                <a:solidFill>
-                  <a:srgbClr val="333333"/>
-                </a:solidFill>
-                <a:latin typeface="Calibri"/>
-              </a:rPr>
-              <a:t>Cuando el dato llega mal, ¿ya comprobó con el debugger si sale mal del formulario o si se daña más adelante, en el servicio o al escribir la línea del archivo?</a:t>
-            </a:r>
-          </a:p>
-        </p:txBody>
-      </p:sp>
-      <p:sp>
-        <p:nvSpPr>
-          <p:cNvPr id="17" name="TextBox 16"/>
-          <p:cNvSpPr txBox="1"/>
-          <p:nvPr/>
-        </p:nvSpPr>
-        <p:spPr>
-          <a:xfrm>
-            <a:off x="11185855" y="6473952"/>
-            <a:ext cx="640080" cy="274320"/>
+            <a:off x="457200" y="3017520"/>
+            <a:ext cx="11277295" cy="1645920"/>
           </a:xfrm>
           <a:prstGeom prst="rect">
             <a:avLst/>
@@ -23659,141 +22284,65 @@
           </a:bodyPr>
           <a:lstStyle/>
           <a:p>
-            <a:pPr algn="r"/>
-            <a:r>
-              <a:rPr sz="1100" b="0" i="0">
-                <a:solidFill>
-                  <a:srgbClr val="666666"/>
-                </a:solidFill>
-                <a:latin typeface="Calibri"/>
-              </a:rPr>
-              <a:t>48</a:t>
-            </a:r>
-          </a:p>
-        </p:txBody>
-      </p:sp>
-    </p:spTree>
-  </p:cSld>
-  <p:clrMapOvr>
-    <a:masterClrMapping/>
-  </p:clrMapOvr>
-</p:sld>
-</file>
-
-<file path=ppt/slides/slide49.xml><?xml version="1.0" encoding="utf-8"?>
-<p:sld xmlns:a="http://schemas.openxmlformats.org/drawingml/2006/main" xmlns:p="http://schemas.openxmlformats.org/presentationml/2006/main" xmlns:r="http://schemas.openxmlformats.org/officeDocument/2006/relationships">
-  <p:cSld>
-    <p:bg>
-      <p:bgPr>
-        <a:solidFill>
-          <a:srgbClr val="FFFFFF"/>
-        </a:solidFill>
-        <a:effectLst/>
-      </p:bgPr>
-    </p:bg>
-    <p:spTree>
-      <p:nvGrpSpPr>
-        <p:cNvPr id="1" name=""/>
-        <p:cNvGrpSpPr/>
-        <p:nvPr/>
-      </p:nvGrpSpPr>
-      <p:grpSpPr/>
-      <p:sp>
-        <p:nvSpPr>
-          <p:cNvPr id="2" name="Rectangle 1"/>
-          <p:cNvSpPr/>
-          <p:nvPr/>
-        </p:nvSpPr>
-        <p:spPr>
-          <a:xfrm>
-            <a:off x="0" y="0"/>
-            <a:ext cx="12191695" cy="960120"/>
-          </a:xfrm>
-          <a:prstGeom prst="rect">
-            <a:avLst/>
-          </a:prstGeom>
-          <a:solidFill>
-            <a:srgbClr val="095292"/>
-          </a:solidFill>
-          <a:ln>
-            <a:noFill/>
-          </a:ln>
-        </p:spPr>
-        <p:style>
-          <a:lnRef idx="1">
-            <a:schemeClr val="accent1"/>
-          </a:lnRef>
-          <a:fillRef idx="3">
-            <a:schemeClr val="accent1"/>
-          </a:fillRef>
-          <a:effectRef idx="2">
-            <a:schemeClr val="accent1"/>
-          </a:effectRef>
-          <a:fontRef idx="minor">
-            <a:schemeClr val="lt1"/>
-          </a:fontRef>
-        </p:style>
-        <p:txBody>
-          <a:bodyPr rtlCol="0" anchor="ctr"/>
-          <a:lstStyle/>
-          <a:p>
-            <a:pPr algn="ctr"/>
-          </a:p>
-        </p:txBody>
-      </p:sp>
-      <p:sp>
-        <p:nvSpPr>
-          <p:cNvPr id="3" name="Rectangle 2"/>
-          <p:cNvSpPr/>
-          <p:nvPr/>
-        </p:nvSpPr>
-        <p:spPr>
-          <a:xfrm>
-            <a:off x="0" y="960120"/>
-            <a:ext cx="12191695" cy="41148"/>
-          </a:xfrm>
-          <a:prstGeom prst="rect">
-            <a:avLst/>
-          </a:prstGeom>
-          <a:solidFill>
-            <a:srgbClr val="FFD000"/>
-          </a:solidFill>
-          <a:ln>
-            <a:noFill/>
-          </a:ln>
-        </p:spPr>
-        <p:style>
-          <a:lnRef idx="1">
-            <a:schemeClr val="accent1"/>
-          </a:lnRef>
-          <a:fillRef idx="3">
-            <a:schemeClr val="accent1"/>
-          </a:fillRef>
-          <a:effectRef idx="2">
-            <a:schemeClr val="accent1"/>
-          </a:effectRef>
-          <a:fontRef idx="minor">
-            <a:schemeClr val="lt1"/>
-          </a:fontRef>
-        </p:style>
-        <p:txBody>
-          <a:bodyPr rtlCol="0" anchor="ctr"/>
-          <a:lstStyle/>
-          <a:p>
-            <a:pPr algn="ctr"/>
-          </a:p>
-        </p:txBody>
-      </p:sp>
-      <p:sp>
-        <p:nvSpPr>
-          <p:cNvPr id="4" name="TextBox 3"/>
+            <a:pPr algn="ctr">
+              <a:spcAft>
+                <a:spcPts val="600"/>
+              </a:spcAft>
+            </a:pPr>
+            <a:r>
+              <a:rPr sz="1600" b="0" i="0">
+                <a:solidFill>
+                  <a:srgbClr val="333333"/>
+                </a:solidFill>
+                <a:latin typeface="Calibri"/>
+              </a:rPr>
+              <a:t>De piezas sueltas a una aplicación que corre de punta a punta</a:t>
+            </a:r>
+          </a:p>
+          <a:p>
+            <a:pPr algn="ctr">
+              <a:spcAft>
+                <a:spcPts val="600"/>
+              </a:spcAft>
+            </a:pPr>
+            <a:r>
+              <a:rPr sz="1600" b="0" i="0">
+                <a:solidFill>
+                  <a:srgbClr val="333333"/>
+                </a:solidFill>
+                <a:latin typeface="Calibri"/>
+              </a:rPr>
+              <a:t>Repasa las laminas de concepto y el codigo de la demo</a:t>
+            </a:r>
+          </a:p>
+          <a:p>
+            <a:pPr algn="ctr">
+              <a:spcAft>
+                <a:spcPts val="600"/>
+              </a:spcAft>
+            </a:pPr>
+            <a:r>
+              <a:rPr sz="1600" b="0" i="0">
+                <a:solidFill>
+                  <a:srgbClr val="333333"/>
+                </a:solidFill>
+                <a:latin typeface="Calibri"/>
+              </a:rPr>
+              <a:t>Siguiente clase: continuamos el hilo del tema</a:t>
+            </a:r>
+          </a:p>
+        </p:txBody>
+      </p:sp>
+      <p:sp>
+        <p:nvSpPr>
+          <p:cNvPr id="6" name="TextBox 5"/>
           <p:cNvSpPr txBox="1"/>
           <p:nvPr/>
         </p:nvSpPr>
         <p:spPr>
           <a:xfrm>
-            <a:off x="457200" y="164592"/>
-            <a:ext cx="11277295" cy="502920"/>
+            <a:off x="457200" y="4754880"/>
+            <a:ext cx="11277295" cy="640080"/>
           </a:xfrm>
           <a:prstGeom prst="rect">
             <a:avLst/>
@@ -23806,276 +22355,15 @@
           </a:bodyPr>
           <a:lstStyle/>
           <a:p>
-            <a:r>
-              <a:rPr sz="2600" b="1" i="0">
-                <a:solidFill>
-                  <a:srgbClr val="FFFFFF"/>
-                </a:solidFill>
-                <a:latin typeface="Calibri"/>
-              </a:rPr>
-              <a:t>Criterios de exito / entregable</a:t>
-            </a:r>
-          </a:p>
-        </p:txBody>
-      </p:sp>
-      <p:sp>
-        <p:nvSpPr>
-          <p:cNvPr id="5" name="TextBox 4"/>
-          <p:cNvSpPr txBox="1"/>
-          <p:nvPr/>
-        </p:nvSpPr>
-        <p:spPr>
-          <a:xfrm>
-            <a:off x="457200" y="1170432"/>
-            <a:ext cx="11277295" cy="5230368"/>
-          </a:xfrm>
-          <a:prstGeom prst="rect">
-            <a:avLst/>
-          </a:prstGeom>
-          <a:noFill/>
-        </p:spPr>
-        <p:txBody>
-          <a:bodyPr wrap="square">
-            <a:spAutoFit/>
-          </a:bodyPr>
-          <a:lstStyle/>
-          <a:p>
-            <a:pPr>
-              <a:spcAft>
-                <a:spcPts val="800"/>
-              </a:spcAft>
-            </a:pPr>
-            <a:r>
-              <a:rPr sz="2000" b="0" i="0">
-                <a:solidFill>
-                  <a:srgbClr val="333333"/>
-                </a:solidFill>
-                <a:latin typeface="Calibri"/>
-              </a:rPr>
-              <a:t>–   </a:t>
-            </a:r>
+            <a:pPr algn="ctr"/>
             <a:r>
               <a:rPr sz="2000" b="1" i="0">
                 <a:solidFill>
-                  <a:srgbClr val="333333"/>
-                </a:solidFill>
-                <a:latin typeface="Calibri"/>
-              </a:rPr>
-              <a:t>Entregable:</a:t>
-            </a:r>
-            <a:r>
-              <a:rPr sz="2000" b="0" i="0">
-                <a:solidFill>
-                  <a:srgbClr val="333333"/>
-                </a:solidFill>
-                <a:latin typeface="Calibri"/>
-              </a:rPr>
-              <a:t> El proyecto VetCare ejecutable (carpeta del proyecto o JAR) más la bitácora de integración con tres defectos hallados con el debugger, cada uno con síntoma, causa, corrección y evidencia, subidos a la plataforma del curso.</a:t>
-            </a:r>
-          </a:p>
-          <a:p>
-            <a:pPr>
-              <a:spcAft>
-                <a:spcPts val="800"/>
-              </a:spcAft>
-            </a:pPr>
-            <a:r>
-              <a:rPr sz="2000" b="0" i="0">
-                <a:solidFill>
-                  <a:srgbClr val="333333"/>
-                </a:solidFill>
-                <a:latin typeface="Calibri"/>
-              </a:rPr>
-              <a:t>–   </a:t>
-            </a:r>
-            <a:r>
-              <a:rPr sz="2000" b="1" i="0">
-                <a:solidFill>
-                  <a:srgbClr val="333333"/>
-                </a:solidFill>
-                <a:latin typeface="Calibri"/>
-              </a:rPr>
-              <a:t>Exito:</a:t>
-            </a:r>
-            <a:r>
-              <a:rPr sz="2000" b="0" i="0">
-                <a:solidFill>
-                  <a:srgbClr val="333333"/>
-                </a:solidFill>
-                <a:latin typeface="Calibri"/>
-              </a:rPr>
-              <a:t> La aplicación arranca desde un único main, muestra la tabla con los datos del archivo y no requiere tocar código para completar el guion de humo.</a:t>
-            </a:r>
-          </a:p>
-          <a:p>
-            <a:pPr>
-              <a:spcAft>
-                <a:spcPts val="800"/>
-              </a:spcAft>
-            </a:pPr>
-            <a:r>
-              <a:rPr sz="2000" b="0" i="0">
-                <a:solidFill>
-                  <a:srgbClr val="333333"/>
-                </a:solidFill>
-                <a:latin typeface="Calibri"/>
-              </a:rPr>
-              <a:t>–   </a:t>
-            </a:r>
-            <a:r>
-              <a:rPr sz="2000" b="1" i="0">
-                <a:solidFill>
-                  <a:srgbClr val="333333"/>
-                </a:solidFill>
-                <a:latin typeface="Calibri"/>
-              </a:rPr>
-              <a:t>Exito:</a:t>
-            </a:r>
-            <a:r>
-              <a:rPr sz="2000" b="0" i="0">
-                <a:solidFill>
-                  <a:srgbClr val="333333"/>
-                </a:solidFill>
-                <a:latin typeface="Calibri"/>
-              </a:rPr>
-              <a:t> Existe una sola instancia del servicio y del repositorio en toda la aplicación, verificable con el debugger: lo que se ve en la tabla es lo que se guarda al cerrar.</a:t>
-            </a:r>
-          </a:p>
-          <a:p>
-            <a:pPr>
-              <a:spcAft>
-                <a:spcPts val="800"/>
-              </a:spcAft>
-            </a:pPr>
-            <a:r>
-              <a:rPr sz="2000" b="0" i="0">
-                <a:solidFill>
-                  <a:srgbClr val="333333"/>
-                </a:solidFill>
-                <a:latin typeface="Calibri"/>
-              </a:rPr>
-              <a:t>–   </a:t>
-            </a:r>
-            <a:r>
-              <a:rPr sz="2000" b="1" i="0">
-                <a:solidFill>
-                  <a:srgbClr val="333333"/>
-                </a:solidFill>
-                <a:latin typeface="Calibri"/>
-              </a:rPr>
-              <a:t>Exito:</a:t>
-            </a:r>
-            <a:r>
-              <a:rPr sz="2000" b="0" i="0">
-                <a:solidFill>
-                  <a:srgbClr val="333333"/>
-                </a:solidFill>
-                <a:latin typeface="Calibri"/>
-              </a:rPr>
-              <a:t> Los cinco pasos del guion de humo se ejecutan de corrido dos veces seguidas, y al reabrir aparecen las mascotas registradas en la corrida anterior.</a:t>
-            </a:r>
-          </a:p>
-          <a:p>
-            <a:pPr>
-              <a:spcAft>
-                <a:spcPts val="800"/>
-              </a:spcAft>
-            </a:pPr>
-            <a:r>
-              <a:rPr sz="2000" b="0" i="0">
-                <a:solidFill>
-                  <a:srgbClr val="333333"/>
-                </a:solidFill>
-                <a:latin typeface="Calibri"/>
-              </a:rPr>
-              <a:t>–   </a:t>
-            </a:r>
-            <a:r>
-              <a:rPr sz="2000" b="1" i="0">
-                <a:solidFill>
-                  <a:srgbClr val="333333"/>
-                </a:solidFill>
-                <a:latin typeface="Calibri"/>
-              </a:rPr>
-              <a:t>Exito:</a:t>
-            </a:r>
-            <a:r>
-              <a:rPr sz="2000" b="0" i="0">
-                <a:solidFill>
-                  <a:srgbClr val="333333"/>
-                </a:solidFill>
-                <a:latin typeface="Calibri"/>
-              </a:rPr>
-              <a:t> La bitácora documenta tres defectos con síntoma observable, causa encontrada con el debugger, corrección aplicada y forma de verificarla; ningún defecto quedó 'arreglado' sin explicación.</a:t>
-            </a:r>
-          </a:p>
-          <a:p>
-            <a:pPr>
-              <a:spcAft>
-                <a:spcPts val="800"/>
-              </a:spcAft>
-            </a:pPr>
-            <a:r>
-              <a:rPr sz="2000" b="0" i="0">
-                <a:solidFill>
-                  <a:srgbClr val="333333"/>
-                </a:solidFill>
-                <a:latin typeface="Calibri"/>
-              </a:rPr>
-              <a:t>–   </a:t>
-            </a:r>
-            <a:r>
-              <a:rPr sz="2000" b="1" i="0">
-                <a:solidFill>
-                  <a:srgbClr val="333333"/>
-                </a:solidFill>
-                <a:latin typeface="Calibri"/>
-              </a:rPr>
-              <a:t>Entrega en la plataforma del curso</a:t>
-            </a:r>
-            <a:r>
-              <a:rPr sz="2000" b="0" i="0">
-                <a:solidFill>
-                  <a:srgbClr val="333333"/>
-                </a:solidFill>
-                <a:latin typeface="Calibri"/>
-              </a:rPr>
-              <a:t> — en la fecha que indique el docente.</a:t>
-            </a:r>
-          </a:p>
-        </p:txBody>
-      </p:sp>
-      <p:sp>
-        <p:nvSpPr>
-          <p:cNvPr id="6" name="TextBox 5"/>
-          <p:cNvSpPr txBox="1"/>
-          <p:nvPr/>
-        </p:nvSpPr>
-        <p:spPr>
-          <a:xfrm>
-            <a:off x="11185855" y="6473952"/>
-            <a:ext cx="640080" cy="274320"/>
-          </a:xfrm>
-          <a:prstGeom prst="rect">
-            <a:avLst/>
-          </a:prstGeom>
-          <a:noFill/>
-        </p:spPr>
-        <p:txBody>
-          <a:bodyPr wrap="square">
-            <a:spAutoFit/>
-          </a:bodyPr>
-          <a:lstStyle/>
-          <a:p>
-            <a:pPr algn="r"/>
-            <a:r>
-              <a:rPr sz="1100" b="0" i="0">
-                <a:solidFill>
-                  <a:srgbClr val="666666"/>
-                </a:solidFill>
-                <a:latin typeface="Calibri"/>
-              </a:rPr>
-              <a:t>49</a:t>
+                  <a:srgbClr val="269CCB"/>
+                </a:solidFill>
+                <a:latin typeface="Calibri"/>
+              </a:rPr>
+              <a:t>Teoria al servicio del proyecto</a:t>
             </a:r>
           </a:p>
         </p:txBody>
@@ -24328,833 +22616,6 @@
                 <a:latin typeface="Calibri"/>
               </a:rPr>
               <a:t>5</a:t>
-            </a:r>
-          </a:p>
-        </p:txBody>
-      </p:sp>
-    </p:spTree>
-  </p:cSld>
-  <p:clrMapOvr>
-    <a:masterClrMapping/>
-  </p:clrMapOvr>
-</p:sld>
-</file>
-
-<file path=ppt/slides/slide50.xml><?xml version="1.0" encoding="utf-8"?>
-<p:sld xmlns:a="http://schemas.openxmlformats.org/drawingml/2006/main" xmlns:p="http://schemas.openxmlformats.org/presentationml/2006/main" xmlns:r="http://schemas.openxmlformats.org/officeDocument/2006/relationships">
-  <p:cSld>
-    <p:bg>
-      <p:bgPr>
-        <a:solidFill>
-          <a:srgbClr val="FFFFFF"/>
-        </a:solidFill>
-        <a:effectLst/>
-      </p:bgPr>
-    </p:bg>
-    <p:spTree>
-      <p:nvGrpSpPr>
-        <p:cNvPr id="1" name=""/>
-        <p:cNvGrpSpPr/>
-        <p:nvPr/>
-      </p:nvGrpSpPr>
-      <p:grpSpPr/>
-      <p:sp>
-        <p:nvSpPr>
-          <p:cNvPr id="2" name="Rectangle 1"/>
-          <p:cNvSpPr/>
-          <p:nvPr/>
-        </p:nvSpPr>
-        <p:spPr>
-          <a:xfrm>
-            <a:off x="0" y="0"/>
-            <a:ext cx="12191695" cy="960120"/>
-          </a:xfrm>
-          <a:prstGeom prst="rect">
-            <a:avLst/>
-          </a:prstGeom>
-          <a:solidFill>
-            <a:srgbClr val="095292"/>
-          </a:solidFill>
-          <a:ln>
-            <a:noFill/>
-          </a:ln>
-        </p:spPr>
-        <p:style>
-          <a:lnRef idx="1">
-            <a:schemeClr val="accent1"/>
-          </a:lnRef>
-          <a:fillRef idx="3">
-            <a:schemeClr val="accent1"/>
-          </a:fillRef>
-          <a:effectRef idx="2">
-            <a:schemeClr val="accent1"/>
-          </a:effectRef>
-          <a:fontRef idx="minor">
-            <a:schemeClr val="lt1"/>
-          </a:fontRef>
-        </p:style>
-        <p:txBody>
-          <a:bodyPr rtlCol="0" anchor="ctr"/>
-          <a:lstStyle/>
-          <a:p>
-            <a:pPr algn="ctr"/>
-          </a:p>
-        </p:txBody>
-      </p:sp>
-      <p:sp>
-        <p:nvSpPr>
-          <p:cNvPr id="3" name="Rectangle 2"/>
-          <p:cNvSpPr/>
-          <p:nvPr/>
-        </p:nvSpPr>
-        <p:spPr>
-          <a:xfrm>
-            <a:off x="0" y="960120"/>
-            <a:ext cx="12191695" cy="41148"/>
-          </a:xfrm>
-          <a:prstGeom prst="rect">
-            <a:avLst/>
-          </a:prstGeom>
-          <a:solidFill>
-            <a:srgbClr val="FFD000"/>
-          </a:solidFill>
-          <a:ln>
-            <a:noFill/>
-          </a:ln>
-        </p:spPr>
-        <p:style>
-          <a:lnRef idx="1">
-            <a:schemeClr val="accent1"/>
-          </a:lnRef>
-          <a:fillRef idx="3">
-            <a:schemeClr val="accent1"/>
-          </a:fillRef>
-          <a:effectRef idx="2">
-            <a:schemeClr val="accent1"/>
-          </a:effectRef>
-          <a:fontRef idx="minor">
-            <a:schemeClr val="lt1"/>
-          </a:fontRef>
-        </p:style>
-        <p:txBody>
-          <a:bodyPr rtlCol="0" anchor="ctr"/>
-          <a:lstStyle/>
-          <a:p>
-            <a:pPr algn="ctr"/>
-          </a:p>
-        </p:txBody>
-      </p:sp>
-      <p:sp>
-        <p:nvSpPr>
-          <p:cNvPr id="4" name="TextBox 3"/>
-          <p:cNvSpPr txBox="1"/>
-          <p:nvPr/>
-        </p:nvSpPr>
-        <p:spPr>
-          <a:xfrm>
-            <a:off x="457200" y="164592"/>
-            <a:ext cx="11277295" cy="502920"/>
-          </a:xfrm>
-          <a:prstGeom prst="rect">
-            <a:avLst/>
-          </a:prstGeom>
-          <a:noFill/>
-        </p:spPr>
-        <p:txBody>
-          <a:bodyPr wrap="square">
-            <a:spAutoFit/>
-          </a:bodyPr>
-          <a:lstStyle/>
-          <a:p>
-            <a:r>
-              <a:rPr sz="2600" b="1" i="0">
-                <a:solidFill>
-                  <a:srgbClr val="FFFFFF"/>
-                </a:solidFill>
-                <a:latin typeface="Calibri"/>
-              </a:rPr>
-              <a:t>Para el PI esta semana</a:t>
-            </a:r>
-          </a:p>
-        </p:txBody>
-      </p:sp>
-      <p:sp>
-        <p:nvSpPr>
-          <p:cNvPr id="5" name="Rounded Rectangle 4"/>
-          <p:cNvSpPr/>
-          <p:nvPr/>
-        </p:nvSpPr>
-        <p:spPr>
-          <a:xfrm>
-            <a:off x="457200" y="1261872"/>
-            <a:ext cx="11277295" cy="1051560"/>
-          </a:xfrm>
-          <a:prstGeom prst="roundRect">
-            <a:avLst>
-              <a:gd name="adj" fmla="val 12000"/>
-            </a:avLst>
-          </a:prstGeom>
-          <a:solidFill>
-            <a:srgbClr val="E8F4FA"/>
-          </a:solidFill>
-          <a:ln>
-            <a:noFill/>
-          </a:ln>
-        </p:spPr>
-        <p:style>
-          <a:lnRef idx="1">
-            <a:schemeClr val="accent1"/>
-          </a:lnRef>
-          <a:fillRef idx="3">
-            <a:schemeClr val="accent1"/>
-          </a:fillRef>
-          <a:effectRef idx="2">
-            <a:schemeClr val="accent1"/>
-          </a:effectRef>
-          <a:fontRef idx="minor">
-            <a:schemeClr val="lt1"/>
-          </a:fontRef>
-        </p:style>
-        <p:txBody>
-          <a:bodyPr rtlCol="0" anchor="ctr"/>
-          <a:lstStyle/>
-          <a:p>
-            <a:pPr algn="ctr"/>
-          </a:p>
-        </p:txBody>
-      </p:sp>
-      <p:sp>
-        <p:nvSpPr>
-          <p:cNvPr id="6" name="Rectangle 5"/>
-          <p:cNvSpPr/>
-          <p:nvPr/>
-        </p:nvSpPr>
-        <p:spPr>
-          <a:xfrm>
-            <a:off x="457200" y="1261872"/>
-            <a:ext cx="128016" cy="1051560"/>
-          </a:xfrm>
-          <a:prstGeom prst="rect">
-            <a:avLst/>
-          </a:prstGeom>
-          <a:solidFill>
-            <a:srgbClr val="269CCB"/>
-          </a:solidFill>
-          <a:ln>
-            <a:noFill/>
-          </a:ln>
-        </p:spPr>
-        <p:style>
-          <a:lnRef idx="1">
-            <a:schemeClr val="accent1"/>
-          </a:lnRef>
-          <a:fillRef idx="3">
-            <a:schemeClr val="accent1"/>
-          </a:fillRef>
-          <a:effectRef idx="2">
-            <a:schemeClr val="accent1"/>
-          </a:effectRef>
-          <a:fontRef idx="minor">
-            <a:schemeClr val="lt1"/>
-          </a:fontRef>
-        </p:style>
-        <p:txBody>
-          <a:bodyPr rtlCol="0" anchor="ctr"/>
-          <a:lstStyle/>
-          <a:p>
-            <a:pPr algn="ctr"/>
-          </a:p>
-        </p:txBody>
-      </p:sp>
-      <p:sp>
-        <p:nvSpPr>
-          <p:cNvPr id="7" name="TextBox 6"/>
-          <p:cNvSpPr txBox="1"/>
-          <p:nvPr/>
-        </p:nvSpPr>
-        <p:spPr>
-          <a:xfrm>
-            <a:off x="777240" y="1399031"/>
-            <a:ext cx="10774375" cy="822959"/>
-          </a:xfrm>
-          <a:prstGeom prst="rect">
-            <a:avLst/>
-          </a:prstGeom>
-          <a:noFill/>
-        </p:spPr>
-        <p:txBody>
-          <a:bodyPr wrap="square">
-            <a:spAutoFit/>
-          </a:bodyPr>
-          <a:lstStyle/>
-          <a:p>
-            <a:r>
-              <a:rPr sz="1200" b="1" i="0">
-                <a:solidFill>
-                  <a:srgbClr val="269CCB"/>
-                </a:solidFill>
-                <a:latin typeface="Calibri"/>
-              </a:rPr>
-              <a:t>Info</a:t>
-            </a:r>
-          </a:p>
-          <a:p>
-            <a:pPr>
-              <a:spcBef>
-                <a:spcPts val="400"/>
-              </a:spcBef>
-            </a:pPr>
-            <a:r>
-              <a:rPr sz="1400" b="0" i="0">
-                <a:solidFill>
-                  <a:srgbClr val="333333"/>
-                </a:solidFill>
-                <a:latin typeface="Calibri"/>
-              </a:rPr>
-              <a:t>Hito: VetCare arranca, carga el archivo, registra, busca por ID, lista y guarda al cerrar: el flujo completo del PI corre sin tocar código.</a:t>
-            </a:r>
-          </a:p>
-        </p:txBody>
-      </p:sp>
-      <p:sp>
-        <p:nvSpPr>
-          <p:cNvPr id="8" name="Rounded Rectangle 7"/>
-          <p:cNvSpPr/>
-          <p:nvPr/>
-        </p:nvSpPr>
-        <p:spPr>
-          <a:xfrm>
-            <a:off x="457200" y="2478024"/>
-            <a:ext cx="11277295" cy="1051560"/>
-          </a:xfrm>
-          <a:prstGeom prst="roundRect">
-            <a:avLst>
-              <a:gd name="adj" fmla="val 12000"/>
-            </a:avLst>
-          </a:prstGeom>
-          <a:solidFill>
-            <a:srgbClr val="FFF8E1"/>
-          </a:solidFill>
-          <a:ln>
-            <a:noFill/>
-          </a:ln>
-        </p:spPr>
-        <p:style>
-          <a:lnRef idx="1">
-            <a:schemeClr val="accent1"/>
-          </a:lnRef>
-          <a:fillRef idx="3">
-            <a:schemeClr val="accent1"/>
-          </a:fillRef>
-          <a:effectRef idx="2">
-            <a:schemeClr val="accent1"/>
-          </a:effectRef>
-          <a:fontRef idx="minor">
-            <a:schemeClr val="lt1"/>
-          </a:fontRef>
-        </p:style>
-        <p:txBody>
-          <a:bodyPr rtlCol="0" anchor="ctr"/>
-          <a:lstStyle/>
-          <a:p>
-            <a:pPr algn="ctr"/>
-          </a:p>
-        </p:txBody>
-      </p:sp>
-      <p:sp>
-        <p:nvSpPr>
-          <p:cNvPr id="9" name="Rectangle 8"/>
-          <p:cNvSpPr/>
-          <p:nvPr/>
-        </p:nvSpPr>
-        <p:spPr>
-          <a:xfrm>
-            <a:off x="457200" y="2478024"/>
-            <a:ext cx="128016" cy="1051560"/>
-          </a:xfrm>
-          <a:prstGeom prst="rect">
-            <a:avLst/>
-          </a:prstGeom>
-          <a:solidFill>
-            <a:srgbClr val="FFD000"/>
-          </a:solidFill>
-          <a:ln>
-            <a:noFill/>
-          </a:ln>
-        </p:spPr>
-        <p:style>
-          <a:lnRef idx="1">
-            <a:schemeClr val="accent1"/>
-          </a:lnRef>
-          <a:fillRef idx="3">
-            <a:schemeClr val="accent1"/>
-          </a:fillRef>
-          <a:effectRef idx="2">
-            <a:schemeClr val="accent1"/>
-          </a:effectRef>
-          <a:fontRef idx="minor">
-            <a:schemeClr val="lt1"/>
-          </a:fontRef>
-        </p:style>
-        <p:txBody>
-          <a:bodyPr rtlCol="0" anchor="ctr"/>
-          <a:lstStyle/>
-          <a:p>
-            <a:pPr algn="ctr"/>
-          </a:p>
-        </p:txBody>
-      </p:sp>
-      <p:sp>
-        <p:nvSpPr>
-          <p:cNvPr id="10" name="TextBox 9"/>
-          <p:cNvSpPr txBox="1"/>
-          <p:nvPr/>
-        </p:nvSpPr>
-        <p:spPr>
-          <a:xfrm>
-            <a:off x="777240" y="2615184"/>
-            <a:ext cx="10774375" cy="822959"/>
-          </a:xfrm>
-          <a:prstGeom prst="rect">
-            <a:avLst/>
-          </a:prstGeom>
-          <a:noFill/>
-        </p:spPr>
-        <p:txBody>
-          <a:bodyPr wrap="square">
-            <a:spAutoFit/>
-          </a:bodyPr>
-          <a:lstStyle/>
-          <a:p>
-            <a:r>
-              <a:rPr sz="1200" b="1" i="0">
-                <a:solidFill>
-                  <a:srgbClr val="FFD000"/>
-                </a:solidFill>
-                <a:latin typeface="Calibri"/>
-              </a:rPr>
-              <a:t>Aclaración</a:t>
-            </a:r>
-          </a:p>
-          <a:p>
-            <a:pPr>
-              <a:spcBef>
-                <a:spcPts val="400"/>
-              </a:spcBef>
-            </a:pPr>
-            <a:r>
-              <a:rPr sz="1400" b="0" i="0">
-                <a:solidFill>
-                  <a:srgbClr val="333333"/>
-                </a:solidFill>
-                <a:latin typeface="Calibri"/>
-              </a:rPr>
-              <a:t>Enunciado completo: Clases/Proyecto Integrador/ (VetCare).</a:t>
-            </a:r>
-          </a:p>
-        </p:txBody>
-      </p:sp>
-      <p:sp>
-        <p:nvSpPr>
-          <p:cNvPr id="11" name="Rounded Rectangle 10"/>
-          <p:cNvSpPr/>
-          <p:nvPr/>
-        </p:nvSpPr>
-        <p:spPr>
-          <a:xfrm>
-            <a:off x="457200" y="3694176"/>
-            <a:ext cx="11277295" cy="1051560"/>
-          </a:xfrm>
-          <a:prstGeom prst="roundRect">
-            <a:avLst>
-              <a:gd name="adj" fmla="val 12000"/>
-            </a:avLst>
-          </a:prstGeom>
-          <a:solidFill>
-            <a:srgbClr val="FBE4E4"/>
-          </a:solidFill>
-          <a:ln>
-            <a:noFill/>
-          </a:ln>
-        </p:spPr>
-        <p:style>
-          <a:lnRef idx="1">
-            <a:schemeClr val="accent1"/>
-          </a:lnRef>
-          <a:fillRef idx="3">
-            <a:schemeClr val="accent1"/>
-          </a:fillRef>
-          <a:effectRef idx="2">
-            <a:schemeClr val="accent1"/>
-          </a:effectRef>
-          <a:fontRef idx="minor">
-            <a:schemeClr val="lt1"/>
-          </a:fontRef>
-        </p:style>
-        <p:txBody>
-          <a:bodyPr rtlCol="0" anchor="ctr"/>
-          <a:lstStyle/>
-          <a:p>
-            <a:pPr algn="ctr"/>
-          </a:p>
-        </p:txBody>
-      </p:sp>
-      <p:sp>
-        <p:nvSpPr>
-          <p:cNvPr id="12" name="Rectangle 11"/>
-          <p:cNvSpPr/>
-          <p:nvPr/>
-        </p:nvSpPr>
-        <p:spPr>
-          <a:xfrm>
-            <a:off x="457200" y="3694176"/>
-            <a:ext cx="128016" cy="1051560"/>
-          </a:xfrm>
-          <a:prstGeom prst="rect">
-            <a:avLst/>
-          </a:prstGeom>
-          <a:solidFill>
-            <a:srgbClr val="A02030"/>
-          </a:solidFill>
-          <a:ln>
-            <a:noFill/>
-          </a:ln>
-        </p:spPr>
-        <p:style>
-          <a:lnRef idx="1">
-            <a:schemeClr val="accent1"/>
-          </a:lnRef>
-          <a:fillRef idx="3">
-            <a:schemeClr val="accent1"/>
-          </a:fillRef>
-          <a:effectRef idx="2">
-            <a:schemeClr val="accent1"/>
-          </a:effectRef>
-          <a:fontRef idx="minor">
-            <a:schemeClr val="lt1"/>
-          </a:fontRef>
-        </p:style>
-        <p:txBody>
-          <a:bodyPr rtlCol="0" anchor="ctr"/>
-          <a:lstStyle/>
-          <a:p>
-            <a:pPr algn="ctr"/>
-          </a:p>
-        </p:txBody>
-      </p:sp>
-      <p:sp>
-        <p:nvSpPr>
-          <p:cNvPr id="13" name="TextBox 12"/>
-          <p:cNvSpPr txBox="1"/>
-          <p:nvPr/>
-        </p:nvSpPr>
-        <p:spPr>
-          <a:xfrm>
-            <a:off x="777240" y="3831336"/>
-            <a:ext cx="10774375" cy="822959"/>
-          </a:xfrm>
-          <a:prstGeom prst="rect">
-            <a:avLst/>
-          </a:prstGeom>
-          <a:noFill/>
-        </p:spPr>
-        <p:txBody>
-          <a:bodyPr wrap="square">
-            <a:spAutoFit/>
-          </a:bodyPr>
-          <a:lstStyle/>
-          <a:p>
-            <a:r>
-              <a:rPr sz="1200" b="1" i="0">
-                <a:solidFill>
-                  <a:srgbClr val="A02030"/>
-                </a:solidFill>
-                <a:latin typeface="Calibri"/>
-              </a:rPr>
-              <a:t>Atención</a:t>
-            </a:r>
-          </a:p>
-          <a:p>
-            <a:pPr>
-              <a:spcBef>
-                <a:spcPts val="400"/>
-              </a:spcBef>
-            </a:pPr>
-            <a:r>
-              <a:rPr sz="1400" b="0" i="0">
-                <a:solidFill>
-                  <a:srgbClr val="333333"/>
-                </a:solidFill>
-                <a:latin typeface="Calibri"/>
-              </a:rPr>
-              <a:t>Entrega del taller, si el docente lo asigna · en la fecha que indique el docente.</a:t>
-            </a:r>
-          </a:p>
-        </p:txBody>
-      </p:sp>
-      <p:sp>
-        <p:nvSpPr>
-          <p:cNvPr id="14" name="TextBox 13"/>
-          <p:cNvSpPr txBox="1"/>
-          <p:nvPr/>
-        </p:nvSpPr>
-        <p:spPr>
-          <a:xfrm>
-            <a:off x="11185855" y="6473952"/>
-            <a:ext cx="640080" cy="274320"/>
-          </a:xfrm>
-          <a:prstGeom prst="rect">
-            <a:avLst/>
-          </a:prstGeom>
-          <a:noFill/>
-        </p:spPr>
-        <p:txBody>
-          <a:bodyPr wrap="square">
-            <a:spAutoFit/>
-          </a:bodyPr>
-          <a:lstStyle/>
-          <a:p>
-            <a:pPr algn="r"/>
-            <a:r>
-              <a:rPr sz="1100" b="0" i="0">
-                <a:solidFill>
-                  <a:srgbClr val="666666"/>
-                </a:solidFill>
-                <a:latin typeface="Calibri"/>
-              </a:rPr>
-              <a:t>50</a:t>
-            </a:r>
-          </a:p>
-        </p:txBody>
-      </p:sp>
-    </p:spTree>
-  </p:cSld>
-  <p:clrMapOvr>
-    <a:masterClrMapping/>
-  </p:clrMapOvr>
-</p:sld>
-</file>
-
-<file path=ppt/slides/slide51.xml><?xml version="1.0" encoding="utf-8"?>
-<p:sld xmlns:a="http://schemas.openxmlformats.org/drawingml/2006/main" xmlns:p="http://schemas.openxmlformats.org/presentationml/2006/main" xmlns:r="http://schemas.openxmlformats.org/officeDocument/2006/relationships">
-  <p:cSld>
-    <p:bg>
-      <p:bgPr>
-        <a:solidFill>
-          <a:srgbClr val="FFFFFF"/>
-        </a:solidFill>
-        <a:effectLst/>
-      </p:bgPr>
-    </p:bg>
-    <p:spTree>
-      <p:nvGrpSpPr>
-        <p:cNvPr id="1" name=""/>
-        <p:cNvGrpSpPr/>
-        <p:nvPr/>
-      </p:nvGrpSpPr>
-      <p:grpSpPr/>
-      <p:sp>
-        <p:nvSpPr>
-          <p:cNvPr id="2" name="Rectangle 1"/>
-          <p:cNvSpPr/>
-          <p:nvPr/>
-        </p:nvSpPr>
-        <p:spPr>
-          <a:xfrm>
-            <a:off x="0" y="0"/>
-            <a:ext cx="12191695" cy="164592"/>
-          </a:xfrm>
-          <a:prstGeom prst="rect">
-            <a:avLst/>
-          </a:prstGeom>
-          <a:solidFill>
-            <a:srgbClr val="269CCB"/>
-          </a:solidFill>
-          <a:ln>
-            <a:noFill/>
-          </a:ln>
-        </p:spPr>
-        <p:style>
-          <a:lnRef idx="1">
-            <a:schemeClr val="accent1"/>
-          </a:lnRef>
-          <a:fillRef idx="3">
-            <a:schemeClr val="accent1"/>
-          </a:fillRef>
-          <a:effectRef idx="2">
-            <a:schemeClr val="accent1"/>
-          </a:effectRef>
-          <a:fontRef idx="minor">
-            <a:schemeClr val="lt1"/>
-          </a:fontRef>
-        </p:style>
-        <p:txBody>
-          <a:bodyPr rtlCol="0" anchor="ctr"/>
-          <a:lstStyle/>
-          <a:p>
-            <a:pPr algn="ctr"/>
-          </a:p>
-        </p:txBody>
-      </p:sp>
-      <p:pic>
-        <p:nvPicPr>
-          <p:cNvPr id="3" name="Picture 2" descr="logo_uniajc_color.png"/>
-          <p:cNvPicPr>
-            <a:picLocks noChangeAspect="1"/>
-          </p:cNvPicPr>
-          <p:nvPr/>
-        </p:nvPicPr>
-        <p:blipFill>
-          <a:blip r:embed="rId2"/>
-          <a:stretch>
-            <a:fillRect/>
-          </a:stretch>
-        </p:blipFill>
-        <p:spPr>
-          <a:xfrm>
-            <a:off x="10271455" y="5998464"/>
-            <a:ext cx="1463040" cy="643233"/>
-          </a:xfrm>
-          <a:prstGeom prst="rect">
-            <a:avLst/>
-          </a:prstGeom>
-        </p:spPr>
-      </p:pic>
-      <p:sp>
-        <p:nvSpPr>
-          <p:cNvPr id="4" name="TextBox 3"/>
-          <p:cNvSpPr txBox="1"/>
-          <p:nvPr/>
-        </p:nvSpPr>
-        <p:spPr>
-          <a:xfrm>
-            <a:off x="457200" y="1737360"/>
-            <a:ext cx="11277295" cy="1097280"/>
-          </a:xfrm>
-          <a:prstGeom prst="rect">
-            <a:avLst/>
-          </a:prstGeom>
-          <a:noFill/>
-        </p:spPr>
-        <p:txBody>
-          <a:bodyPr wrap="square" anchor="ctr"/>
-          <a:lstStyle/>
-          <a:p>
-            <a:pPr algn="ctr"/>
-            <a:r>
-              <a:rPr sz="3400" b="1" i="0">
-                <a:solidFill>
-                  <a:srgbClr val="095292"/>
-                </a:solidFill>
-                <a:latin typeface="Calibri"/>
-              </a:rPr>
-              <a:t>Clase 12 · VetCare avanza</a:t>
-            </a:r>
-          </a:p>
-        </p:txBody>
-      </p:sp>
-      <p:sp>
-        <p:nvSpPr>
-          <p:cNvPr id="5" name="TextBox 4"/>
-          <p:cNvSpPr txBox="1"/>
-          <p:nvPr/>
-        </p:nvSpPr>
-        <p:spPr>
-          <a:xfrm>
-            <a:off x="457200" y="3017520"/>
-            <a:ext cx="11277295" cy="1645920"/>
-          </a:xfrm>
-          <a:prstGeom prst="rect">
-            <a:avLst/>
-          </a:prstGeom>
-          <a:noFill/>
-        </p:spPr>
-        <p:txBody>
-          <a:bodyPr wrap="square">
-            <a:spAutoFit/>
-          </a:bodyPr>
-          <a:lstStyle/>
-          <a:p>
-            <a:pPr algn="ctr">
-              <a:spcAft>
-                <a:spcPts val="600"/>
-              </a:spcAft>
-            </a:pPr>
-            <a:r>
-              <a:rPr sz="1600" b="0" i="0">
-                <a:solidFill>
-                  <a:srgbClr val="333333"/>
-                </a:solidFill>
-                <a:latin typeface="Calibri"/>
-              </a:rPr>
-              <a:t>VetCare arranca, carga el archivo, registra, busca por ID, lista y guarda al cerrar: el flujo completo del PI corre sin tocar código.</a:t>
-            </a:r>
-          </a:p>
-          <a:p>
-            <a:pPr algn="ctr">
-              <a:spcAft>
-                <a:spcPts val="600"/>
-              </a:spcAft>
-            </a:pPr>
-            <a:r>
-              <a:rPr sz="1600" b="0" i="0">
-                <a:solidFill>
-                  <a:srgbClr val="333333"/>
-                </a:solidFill>
-                <a:latin typeface="Calibri"/>
-              </a:rPr>
-              <a:t>Entregable: El proyecto VetCare ejecutable (carpeta del proyecto o JAR) más la bitácora de integración con tres defectos hallados con el debugger, cada uno con síntoma, causa, corrección y evidencia, subidos a la plataforma del curso.</a:t>
-            </a:r>
-          </a:p>
-          <a:p>
-            <a:pPr algn="ctr">
-              <a:spcAft>
-                <a:spcPts val="600"/>
-              </a:spcAft>
-            </a:pPr>
-            <a:r>
-              <a:rPr sz="1600" b="0" i="0">
-                <a:solidFill>
-                  <a:srgbClr val="333333"/>
-                </a:solidFill>
-                <a:latin typeface="Calibri"/>
-              </a:rPr>
-              <a:t>Siguiente clase: continuamos el hilo del PI</a:t>
-            </a:r>
-          </a:p>
-        </p:txBody>
-      </p:sp>
-      <p:sp>
-        <p:nvSpPr>
-          <p:cNvPr id="6" name="TextBox 5"/>
-          <p:cNvSpPr txBox="1"/>
-          <p:nvPr/>
-        </p:nvSpPr>
-        <p:spPr>
-          <a:xfrm>
-            <a:off x="457200" y="4754880"/>
-            <a:ext cx="11277295" cy="640080"/>
-          </a:xfrm>
-          <a:prstGeom prst="rect">
-            <a:avLst/>
-          </a:prstGeom>
-          <a:noFill/>
-        </p:spPr>
-        <p:txBody>
-          <a:bodyPr wrap="square">
-            <a:spAutoFit/>
-          </a:bodyPr>
-          <a:lstStyle/>
-          <a:p>
-            <a:pPr algn="ctr"/>
-            <a:r>
-              <a:rPr sz="2000" b="1" i="0">
-                <a:solidFill>
-                  <a:srgbClr val="269CCB"/>
-                </a:solidFill>
-                <a:latin typeface="Calibri"/>
-              </a:rPr>
-              <a:t>Teoria al servicio del proyecto</a:t>
             </a:r>
           </a:p>
         </p:txBody>
@@ -26541,4 +24002,324 @@
   </a:objectDefaults>
   <a:extraClrSchemeLst/>
 </a:theme>
+</file>
+
+<file path=ppt/theme/theme2.xml><?xml version="1.0" encoding="utf-8"?>
+<a:theme xmlns:a="http://schemas.openxmlformats.org/drawingml/2006/main" name="Office Theme">
+  <a:themeElements>
+    <a:clrScheme name="Office">
+      <a:dk1>
+        <a:sysClr val="windowText" lastClr="000000"/>
+      </a:dk1>
+      <a:lt1>
+        <a:sysClr val="window" lastClr="FFFFFF"/>
+      </a:lt1>
+      <a:dk2>
+        <a:srgbClr val="1F497D"/>
+      </a:dk2>
+      <a:lt2>
+        <a:srgbClr val="EEECE1"/>
+      </a:lt2>
+      <a:accent1>
+        <a:srgbClr val="4F81BD"/>
+      </a:accent1>
+      <a:accent2>
+        <a:srgbClr val="C0504D"/>
+      </a:accent2>
+      <a:accent3>
+        <a:srgbClr val="9BBB59"/>
+      </a:accent3>
+      <a:accent4>
+        <a:srgbClr val="8064A2"/>
+      </a:accent4>
+      <a:accent5>
+        <a:srgbClr val="4BACC6"/>
+      </a:accent5>
+      <a:accent6>
+        <a:srgbClr val="F79646"/>
+      </a:accent6>
+      <a:hlink>
+        <a:srgbClr val="0000FF"/>
+      </a:hlink>
+      <a:folHlink>
+        <a:srgbClr val="800080"/>
+      </a:folHlink>
+    </a:clrScheme>
+    <a:fontScheme name="Office">
+      <a:majorFont>
+        <a:latin typeface="Calibri"/>
+        <a:ea typeface=""/>
+        <a:cs typeface=""/>
+        <a:font script="Jpan" typeface="ＭＳ Ｐゴシック"/>
+        <a:font script="Hang" typeface="맑은 고딕"/>
+        <a:font script="Hans" typeface="宋体"/>
+        <a:font script="Hant" typeface="新細明體"/>
+        <a:font script="Arab" typeface="Times New Roman"/>
+        <a:font script="Hebr" typeface="Times New Roman"/>
+        <a:font script="Thai" typeface="Angsana New"/>
+        <a:font script="Ethi" typeface="Nyala"/>
+        <a:font script="Beng" typeface="Vrinda"/>
+        <a:font script="Gujr" typeface="Shruti"/>
+        <a:font script="Khmr" typeface="MoolBoran"/>
+        <a:font script="Knda" typeface="Tunga"/>
+        <a:font script="Guru" typeface="Raavi"/>
+        <a:font script="Cans" typeface="Euphemia"/>
+        <a:font script="Cher" typeface="Plantagenet Cherokee"/>
+        <a:font script="Yiii" typeface="Microsoft Yi Baiti"/>
+        <a:font script="Tibt" typeface="Microsoft Himalaya"/>
+        <a:font script="Thaa" typeface="MV Boli"/>
+        <a:font script="Deva" typeface="Mangal"/>
+        <a:font script="Telu" typeface="Gautami"/>
+        <a:font script="Taml" typeface="Latha"/>
+        <a:font script="Syrc" typeface="Estrangelo Edessa"/>
+        <a:font script="Orya" typeface="Kalinga"/>
+        <a:font script="Mlym" typeface="Kartika"/>
+        <a:font script="Laoo" typeface="DokChampa"/>
+        <a:font script="Sinh" typeface="Iskoola Pota"/>
+        <a:font script="Mong" typeface="Mongolian Baiti"/>
+        <a:font script="Viet" typeface="Times New Roman"/>
+        <a:font script="Uigh" typeface="Microsoft Uighur"/>
+        <a:font script="Geor" typeface="Sylfaen"/>
+      </a:majorFont>
+      <a:minorFont>
+        <a:latin typeface="Calibri"/>
+        <a:ea typeface=""/>
+        <a:cs typeface=""/>
+        <a:font script="Jpan" typeface="ＭＳ Ｐゴシック"/>
+        <a:font script="Hang" typeface="맑은 고딕"/>
+        <a:font script="Hans" typeface="宋体"/>
+        <a:font script="Hant" typeface="新細明體"/>
+        <a:font script="Arab" typeface="Arial"/>
+        <a:font script="Hebr" typeface="Arial"/>
+        <a:font script="Thai" typeface="Cordia New"/>
+        <a:font script="Ethi" typeface="Nyala"/>
+        <a:font script="Beng" typeface="Vrinda"/>
+        <a:font script="Gujr" typeface="Shruti"/>
+        <a:font script="Khmr" typeface="DaunPenh"/>
+        <a:font script="Knda" typeface="Tunga"/>
+        <a:font script="Guru" typeface="Raavi"/>
+        <a:font script="Cans" typeface="Euphemia"/>
+        <a:font script="Cher" typeface="Plantagenet Cherokee"/>
+        <a:font script="Yiii" typeface="Microsoft Yi Baiti"/>
+        <a:font script="Tibt" typeface="Microsoft Himalaya"/>
+        <a:font script="Thaa" typeface="MV Boli"/>
+        <a:font script="Deva" typeface="Mangal"/>
+        <a:font script="Telu" typeface="Gautami"/>
+        <a:font script="Taml" typeface="Latha"/>
+        <a:font script="Syrc" typeface="Estrangelo Edessa"/>
+        <a:font script="Orya" typeface="Kalinga"/>
+        <a:font script="Mlym" typeface="Kartika"/>
+        <a:font script="Laoo" typeface="DokChampa"/>
+        <a:font script="Sinh" typeface="Iskoola Pota"/>
+        <a:font script="Mong" typeface="Mongolian Baiti"/>
+        <a:font script="Viet" typeface="Arial"/>
+        <a:font script="Uigh" typeface="Microsoft Uighur"/>
+        <a:font script="Geor" typeface="Sylfaen"/>
+      </a:minorFont>
+    </a:fontScheme>
+    <a:fmtScheme name="Office">
+      <a:fillStyleLst>
+        <a:solidFill>
+          <a:schemeClr val="phClr"/>
+        </a:solidFill>
+        <a:gradFill rotWithShape="1">
+          <a:gsLst>
+            <a:gs pos="0">
+              <a:schemeClr val="phClr">
+                <a:tint val="50000"/>
+                <a:satMod val="300000"/>
+              </a:schemeClr>
+            </a:gs>
+            <a:gs pos="35000">
+              <a:schemeClr val="phClr">
+                <a:tint val="37000"/>
+                <a:satMod val="300000"/>
+              </a:schemeClr>
+            </a:gs>
+            <a:gs pos="100000">
+              <a:schemeClr val="phClr">
+                <a:tint val="15000"/>
+                <a:satMod val="350000"/>
+              </a:schemeClr>
+            </a:gs>
+          </a:gsLst>
+          <a:lin ang="16200000" scaled="1"/>
+        </a:gradFill>
+        <a:gradFill rotWithShape="1">
+          <a:gsLst>
+            <a:gs pos="0">
+              <a:schemeClr val="phClr">
+                <a:tint val="100000"/>
+                <a:shade val="100000"/>
+                <a:satMod val="130000"/>
+              </a:schemeClr>
+            </a:gs>
+            <a:gs pos="100000">
+              <a:schemeClr val="phClr">
+                <a:tint val="50000"/>
+                <a:shade val="100000"/>
+                <a:satMod val="350000"/>
+              </a:schemeClr>
+            </a:gs>
+          </a:gsLst>
+          <a:lin ang="16200000" scaled="0"/>
+        </a:gradFill>
+      </a:fillStyleLst>
+      <a:lnStyleLst>
+        <a:ln w="9525" cap="flat" cmpd="sng" algn="ctr">
+          <a:solidFill>
+            <a:schemeClr val="phClr">
+              <a:shade val="95000"/>
+              <a:satMod val="105000"/>
+            </a:schemeClr>
+          </a:solidFill>
+          <a:prstDash val="solid"/>
+        </a:ln>
+        <a:ln w="25400" cap="flat" cmpd="sng" algn="ctr">
+          <a:solidFill>
+            <a:schemeClr val="phClr"/>
+          </a:solidFill>
+          <a:prstDash val="solid"/>
+        </a:ln>
+        <a:ln w="38100" cap="flat" cmpd="sng" algn="ctr">
+          <a:solidFill>
+            <a:schemeClr val="phClr"/>
+          </a:solidFill>
+          <a:prstDash val="solid"/>
+        </a:ln>
+      </a:lnStyleLst>
+      <a:effectStyleLst>
+        <a:effectStyle>
+          <a:effectLst>
+            <a:outerShdw blurRad="40000" dist="20000" dir="5400000" rotWithShape="0">
+              <a:srgbClr val="000000">
+                <a:alpha val="38000"/>
+              </a:srgbClr>
+            </a:outerShdw>
+          </a:effectLst>
+        </a:effectStyle>
+        <a:effectStyle>
+          <a:effectLst>
+            <a:outerShdw blurRad="40000" dist="23000" dir="5400000" rotWithShape="0">
+              <a:srgbClr val="000000">
+                <a:alpha val="35000"/>
+              </a:srgbClr>
+            </a:outerShdw>
+          </a:effectLst>
+        </a:effectStyle>
+        <a:effectStyle>
+          <a:effectLst>
+            <a:outerShdw blurRad="40000" dist="23000" dir="5400000" rotWithShape="0">
+              <a:srgbClr val="000000">
+                <a:alpha val="35000"/>
+              </a:srgbClr>
+            </a:outerShdw>
+          </a:effectLst>
+          <a:scene3d>
+            <a:camera prst="orthographicFront">
+              <a:rot lat="0" lon="0" rev="0"/>
+            </a:camera>
+            <a:lightRig rig="threePt" dir="t">
+              <a:rot lat="0" lon="0" rev="1200000"/>
+            </a:lightRig>
+          </a:scene3d>
+          <a:sp3d>
+            <a:bevelT w="63500" h="25400"/>
+          </a:sp3d>
+        </a:effectStyle>
+      </a:effectStyleLst>
+      <a:bgFillStyleLst>
+        <a:solidFill>
+          <a:schemeClr val="phClr"/>
+        </a:solidFill>
+        <a:gradFill rotWithShape="1">
+          <a:gsLst>
+            <a:gs pos="0">
+              <a:schemeClr val="phClr">
+                <a:tint val="40000"/>
+                <a:satMod val="350000"/>
+              </a:schemeClr>
+            </a:gs>
+            <a:gs pos="40000">
+              <a:schemeClr val="phClr">
+                <a:tint val="45000"/>
+                <a:shade val="99000"/>
+                <a:satMod val="350000"/>
+              </a:schemeClr>
+            </a:gs>
+            <a:gs pos="100000">
+              <a:schemeClr val="phClr">
+                <a:shade val="20000"/>
+                <a:satMod val="255000"/>
+              </a:schemeClr>
+            </a:gs>
+          </a:gsLst>
+          <a:path path="circle">
+            <a:fillToRect l="50000" t="-80000" r="50000" b="180000"/>
+          </a:path>
+        </a:gradFill>
+        <a:gradFill rotWithShape="1">
+          <a:gsLst>
+            <a:gs pos="0">
+              <a:schemeClr val="phClr">
+                <a:tint val="80000"/>
+                <a:satMod val="300000"/>
+              </a:schemeClr>
+            </a:gs>
+            <a:gs pos="100000">
+              <a:schemeClr val="phClr">
+                <a:shade val="30000"/>
+                <a:satMod val="200000"/>
+              </a:schemeClr>
+            </a:gs>
+          </a:gsLst>
+          <a:path path="circle">
+            <a:fillToRect l="50000" t="50000" r="50000" b="50000"/>
+          </a:path>
+        </a:gradFill>
+      </a:bgFillStyleLst>
+    </a:fmtScheme>
+  </a:themeElements>
+  <a:objectDefaults>
+    <a:spDef>
+      <a:spPr/>
+      <a:bodyPr/>
+      <a:lstStyle/>
+      <a:style>
+        <a:lnRef idx="1">
+          <a:schemeClr val="accent1"/>
+        </a:lnRef>
+        <a:fillRef idx="3">
+          <a:schemeClr val="accent1"/>
+        </a:fillRef>
+        <a:effectRef idx="2">
+          <a:schemeClr val="accent1"/>
+        </a:effectRef>
+        <a:fontRef idx="minor">
+          <a:schemeClr val="lt1"/>
+        </a:fontRef>
+      </a:style>
+    </a:spDef>
+    <a:lnDef>
+      <a:spPr/>
+      <a:bodyPr/>
+      <a:lstStyle/>
+      <a:style>
+        <a:lnRef idx="2">
+          <a:schemeClr val="accent1"/>
+        </a:lnRef>
+        <a:fillRef idx="0">
+          <a:schemeClr val="accent1"/>
+        </a:fillRef>
+        <a:effectRef idx="1">
+          <a:schemeClr val="accent1"/>
+        </a:effectRef>
+        <a:fontRef idx="minor">
+          <a:schemeClr val="tx1"/>
+        </a:fontRef>
+      </a:style>
+    </a:lnDef>
+  </a:objectDefaults>
+  <a:extraClrSchemeLst/>
+</a:theme>
 </file>
--- a/Programacion II/Clases/Clase 12 - Integracion de modulos/Presentacion.pptx
+++ b/Programacion II/Clases/Clase 12 - Integracion de modulos/Presentacion.pptx
@@ -5080,7 +5080,7 @@
                 </a:solidFill>
                 <a:latin typeface="Calibri"/>
               </a:rPr>
-              <a:t>VetCareApp.java — class VetCareApp</a:t>
+              <a:t>ClinicaApp.java — class ClinicaApp</a:t>
             </a:r>
           </a:p>
         </p:txBody>
@@ -5239,7 +5239,7 @@
                 </a:solidFill>
                 <a:latin typeface="Calibri"/>
               </a:rPr>
-              <a:t>public class VetCareApp extends JFrame {</a:t>
+              <a:t>public class ClinicaApp extends JFrame {</a:t>
             </a:r>
           </a:p>
           <a:p>
@@ -5271,7 +5271,7 @@
                 </a:solidFill>
                 <a:latin typeface="Calibri"/>
               </a:rPr>
-              <a:t>    private final ServicioVetCare servicio;</a:t>
+              <a:t>    private final ServicioClinica servicio;</a:t>
             </a:r>
           </a:p>
           <a:p>
@@ -5692,7 +5692,7 @@
                 </a:solidFill>
                 <a:latin typeface="Calibri"/>
               </a:rPr>
-              <a:t>VetCareApp.java — VetCareApp()</a:t>
+              <a:t>ClinicaApp.java — ClinicaApp()</a:t>
             </a:r>
           </a:p>
         </p:txBody>
@@ -5851,23 +5851,23 @@
                 </a:solidFill>
                 <a:latin typeface="Calibri"/>
               </a:rPr>
-              <a:t>    public VetCareApp(ServicioVetCare servicio) {</a:t>
-            </a:r>
-          </a:p>
-          <a:p>
-            <a:pPr>
-              <a:spcAft>
-                <a:spcPts val="400"/>
-              </a:spcAft>
-            </a:pPr>
-            <a:r>
-              <a:rPr sz="1400" b="0" i="0">
-                <a:solidFill>
-                  <a:srgbClr val="FFFFFF"/>
-                </a:solidFill>
-                <a:latin typeface="Calibri"/>
-              </a:rPr>
-              <a:t>        super("VetCare - Clinica Veterinaria Huellitas");</a:t>
+              <a:t>    public ClinicaApp(ServicioClinica servicio) {</a:t>
+            </a:r>
+          </a:p>
+          <a:p>
+            <a:pPr>
+              <a:spcAft>
+                <a:spcPts val="400"/>
+              </a:spcAft>
+            </a:pPr>
+            <a:r>
+              <a:rPr sz="1400" b="0" i="0">
+                <a:solidFill>
+                  <a:srgbClr val="FFFFFF"/>
+                </a:solidFill>
+                <a:latin typeface="Calibri"/>
+              </a:rPr>
+              <a:t>        super("Clinica - Clinica Veterinaria");</a:t>
             </a:r>
           </a:p>
           <a:p>
@@ -6272,7 +6272,7 @@
                 </a:solidFill>
                 <a:latin typeface="Calibri"/>
               </a:rPr>
-              <a:t>VetCareApp.java — construirInterfaz() (1/2)</a:t>
+              <a:t>ClinicaApp.java — construirInterfaz() (1/2)</a:t>
             </a:r>
           </a:p>
         </p:txBody>
@@ -6939,7 +6939,7 @@
                 </a:solidFill>
                 <a:latin typeface="Calibri"/>
               </a:rPr>
-              <a:t>VetCareApp.java — construirInterfaz() (2/2)</a:t>
+              <a:t>ClinicaApp.java — construirInterfaz() (2/2)</a:t>
             </a:r>
           </a:p>
         </p:txBody>
@@ -7455,7 +7455,7 @@
                 </a:solidFill>
                 <a:latin typeface="Calibri"/>
               </a:rPr>
-              <a:t>VetCareApp.java — registrarMascota()</a:t>
+              <a:t>ClinicaApp.java — registrarMascota()</a:t>
             </a:r>
           </a:p>
         </p:txBody>
@@ -7987,7 +7987,7 @@
                 </a:solidFill>
                 <a:latin typeface="Calibri"/>
               </a:rPr>
-              <a:t>VetCareApp.java — buscarPorId()</a:t>
+              <a:t>ClinicaApp.java — buscarPorId()</a:t>
             </a:r>
           </a:p>
         </p:txBody>
@@ -8487,7 +8487,7 @@
                 </a:solidFill>
                 <a:latin typeface="Calibri"/>
               </a:rPr>
-              <a:t>VetCareApp.java — refrescarTabla()</a:t>
+              <a:t>ClinicaApp.java — refrescarTabla()</a:t>
             </a:r>
           </a:p>
         </p:txBody>
@@ -9071,7 +9071,7 @@
                 </a:solidFill>
                 <a:latin typeface="Calibri"/>
               </a:rPr>
-              <a:t>–   Todo con el mismo dominio: la clinica veterinaria Huellitas (VetCare).</a:t>
+              <a:t>–   Todo con el mismo dominio: una clinica veterinaria.</a:t>
             </a:r>
           </a:p>
         </p:txBody>
@@ -9252,7 +9252,7 @@
                 </a:solidFill>
                 <a:latin typeface="Calibri"/>
               </a:rPr>
-              <a:t>VetCareApp.java — limpiarFormulario()</a:t>
+              <a:t>ClinicaApp.java — limpiarFormulario()</a:t>
             </a:r>
           </a:p>
         </p:txBody>
@@ -9688,7 +9688,7 @@
                 </a:solidFill>
                 <a:latin typeface="Calibri"/>
               </a:rPr>
-              <a:t>VetCareApp.java — cerrarGuardando()</a:t>
+              <a:t>ClinicaApp.java — cerrarGuardando()</a:t>
             </a:r>
           </a:p>
         </p:txBody>
@@ -10268,7 +10268,7 @@
                 </a:solidFill>
                 <a:latin typeface="Calibri"/>
               </a:rPr>
-              <a:t>VetCareApp.java — main()</a:t>
+              <a:t>ClinicaApp.java — main()</a:t>
             </a:r>
           </a:p>
         </p:txBody>
@@ -10459,7 +10459,7 @@
                 </a:solidFill>
                 <a:latin typeface="Calibri"/>
               </a:rPr>
-              <a:t>        ServicioVetCare servicio = new ServicioVetCare(repositorio);</a:t>
+              <a:t>        ServicioClinica servicio = new ServicioClinica(repositorio);</a:t>
             </a:r>
           </a:p>
           <a:p>
@@ -10491,7 +10491,7 @@
                 </a:solidFill>
                 <a:latin typeface="Calibri"/>
               </a:rPr>
-              <a:t>        SwingUtilities.invokeLater(() -&gt; new VetCareApp(servicio).setVisible(true));</a:t>
+              <a:t>        SwingUtilities.invokeLater(() -&gt; new ClinicaApp(servicio).setVisible(true));</a:t>
             </a:r>
           </a:p>
           <a:p>
@@ -11332,7 +11332,7 @@
                 </a:solidFill>
                 <a:latin typeface="Calibri"/>
               </a:rPr>
-              <a:t>VetCareApp.java — Mascota()</a:t>
+              <a:t>ClinicaApp.java — Mascota()</a:t>
             </a:r>
           </a:p>
         </p:txBody>
@@ -11784,7 +11784,7 @@
                 </a:solidFill>
                 <a:latin typeface="Calibri"/>
               </a:rPr>
-              <a:t>VetCareApp.java — ficha()</a:t>
+              <a:t>ClinicaApp.java — ficha()</a:t>
             </a:r>
           </a:p>
         </p:txBody>
@@ -12220,7 +12220,7 @@
                 </a:solidFill>
                 <a:latin typeface="Calibri"/>
               </a:rPr>
-              <a:t>VetCareApp.java — class ServicioVetCare</a:t>
+              <a:t>ClinicaApp.java — class ServicioClinica</a:t>
             </a:r>
           </a:p>
         </p:txBody>
@@ -12379,7 +12379,7 @@
                 </a:solidFill>
                 <a:latin typeface="Calibri"/>
               </a:rPr>
-              <a:t>class ServicioVetCare {</a:t>
+              <a:t>class ServicioClinica {</a:t>
             </a:r>
           </a:p>
           <a:p>
@@ -12656,7 +12656,7 @@
                 </a:solidFill>
                 <a:latin typeface="Calibri"/>
               </a:rPr>
-              <a:t>VetCareApp.java — ServicioVetCare()</a:t>
+              <a:t>ClinicaApp.java — ServicioClinica()</a:t>
             </a:r>
           </a:p>
         </p:txBody>
@@ -12815,7 +12815,7 @@
                 </a:solidFill>
                 <a:latin typeface="Calibri"/>
               </a:rPr>
-              <a:t>    public ServicioVetCare(RepositorioMascotasCSV repositorio) {</a:t>
+              <a:t>    public ServicioClinica(RepositorioMascotasCSV repositorio) {</a:t>
             </a:r>
           </a:p>
           <a:p>
@@ -13044,7 +13044,7 @@
                 </a:solidFill>
                 <a:latin typeface="Calibri"/>
               </a:rPr>
-              <a:t>VetCareApp.java — cargarDesdeArchivo()</a:t>
+              <a:t>ClinicaApp.java — cargarDesdeArchivo()</a:t>
             </a:r>
           </a:p>
         </p:txBody>
@@ -13464,7 +13464,7 @@
                 </a:solidFill>
                 <a:latin typeface="Calibri"/>
               </a:rPr>
-              <a:t>VetCareApp.java — guardarEnArchivo()</a:t>
+              <a:t>ClinicaApp.java — guardarEnArchivo()</a:t>
             </a:r>
           </a:p>
         </p:txBody>
@@ -14240,7 +14240,7 @@
                 </a:solidFill>
                 <a:latin typeface="Calibri"/>
               </a:rPr>
-              <a:t>Demo en vivo sobre VetCare</a:t>
+              <a:t>Demo en vivo sobre el tema</a:t>
             </a:r>
           </a:p>
         </p:txBody>
@@ -14704,7 +14704,7 @@
                 </a:solidFill>
                 <a:latin typeface="Calibri"/>
               </a:rPr>
-              <a:t>VetCareApp.java — listar()</a:t>
+              <a:t>ClinicaApp.java — listar()</a:t>
             </a:r>
           </a:p>
         </p:txBody>
@@ -15092,7 +15092,7 @@
                 </a:solidFill>
                 <a:latin typeface="Calibri"/>
               </a:rPr>
-              <a:t>VetCareApp.java — buscarPorId()</a:t>
+              <a:t>ClinicaApp.java — buscarPorId()</a:t>
             </a:r>
           </a:p>
         </p:txBody>
@@ -15608,7 +15608,7 @@
                 </a:solidFill>
                 <a:latin typeface="Calibri"/>
               </a:rPr>
-              <a:t>VetCareApp.java — registrar() (1/2)</a:t>
+              <a:t>ClinicaApp.java — registrar() (1/2)</a:t>
             </a:r>
           </a:p>
         </p:txBody>
@@ -16252,7 +16252,7 @@
                 </a:solidFill>
                 <a:latin typeface="Calibri"/>
               </a:rPr>
-              <a:t>VetCareApp.java — registrar() (2/2)</a:t>
+              <a:t>ClinicaApp.java — registrar() (2/2)</a:t>
             </a:r>
           </a:p>
         </p:txBody>
@@ -16672,7 +16672,7 @@
                 </a:solidFill>
                 <a:latin typeface="Calibri"/>
               </a:rPr>
-              <a:t>VetCareApp.java — siguienteId() (1/2)</a:t>
+              <a:t>ClinicaApp.java — siguienteId() (1/2)</a:t>
             </a:r>
           </a:p>
         </p:txBody>
@@ -17339,7 +17339,7 @@
                 </a:solidFill>
                 <a:latin typeface="Calibri"/>
               </a:rPr>
-              <a:t>VetCareApp.java — siguienteId() (2/2)</a:t>
+              <a:t>ClinicaApp.java — siguienteId() (2/2)</a:t>
             </a:r>
           </a:p>
         </p:txBody>
@@ -17679,7 +17679,7 @@
                 </a:solidFill>
                 <a:latin typeface="Calibri"/>
               </a:rPr>
-              <a:t>VetCareApp.java — class RepositorioMascotasCSV</a:t>
+              <a:t>ClinicaApp.java — class RepositorioMascotasCSV</a:t>
             </a:r>
           </a:p>
         </p:txBody>
@@ -18131,7 +18131,7 @@
                 </a:solidFill>
                 <a:latin typeface="Calibri"/>
               </a:rPr>
-              <a:t>VetCareApp.java — RepositorioMascotasCSV()</a:t>
+              <a:t>ClinicaApp.java — RepositorioMascotasCSV()</a:t>
             </a:r>
           </a:p>
         </p:txBody>
@@ -18519,7 +18519,7 @@
                 </a:solidFill>
                 <a:latin typeface="Calibri"/>
               </a:rPr>
-              <a:t>VetCareApp.java — rutaAbsoluta()</a:t>
+              <a:t>ClinicaApp.java — rutaAbsoluta()</a:t>
             </a:r>
           </a:p>
         </p:txBody>
@@ -18907,7 +18907,7 @@
                 </a:solidFill>
                 <a:latin typeface="Calibri"/>
               </a:rPr>
-              <a:t>VetCareApp.java — guardar()</a:t>
+              <a:t>ClinicaApp.java — guardar()</a:t>
             </a:r>
           </a:p>
         </p:txBody>
@@ -19526,7 +19526,7 @@
                 </a:solidFill>
                 <a:latin typeface="Calibri"/>
               </a:rPr>
-              <a:t>–   VetCare tiene cuatro piezas y conviene ponerles nombre de paquete para verlas: vetcare.modelo con Mascota (y Dueno, si el equipo lo separó)</a:t>
+              <a:t>–   El sistema de la clinica tiene cuatro piezas y conviene ponerles nombre de paquete para verlas: clinica.modelo con Mascota (y Dueno, si el equipo lo separó)</a:t>
             </a:r>
           </a:p>
           <a:p>
@@ -19542,7 +19542,7 @@
                 </a:solidFill>
                 <a:latin typeface="Calibri"/>
               </a:rPr>
-              <a:t>–   Vetcare.datos con RepositorioMascotasCSV, vetcare.logica con ServicioVetCare que administra el ArrayList y aplica las reglas, y vetcare.ui con la ventana Swing.</a:t>
+              <a:t>–   Clinica.datos con RepositorioMascotasCSV, clinica.logica con ServicioClinica que administra el ArrayList y aplica las reglas, y clinica.ui con la ventana Swing.</a:t>
             </a:r>
           </a:p>
           <a:p>
@@ -19739,7 +19739,7 @@
                 </a:solidFill>
                 <a:latin typeface="Calibri"/>
               </a:rPr>
-              <a:t>VetCareApp.java — cargar() (1/2)</a:t>
+              <a:t>ClinicaApp.java — cargar() (1/2)</a:t>
             </a:r>
           </a:p>
         </p:txBody>
@@ -20406,7 +20406,7 @@
                 </a:solidFill>
                 <a:latin typeface="Calibri"/>
               </a:rPr>
-              <a:t>VetCareApp.java — cargar() (2/2)</a:t>
+              <a:t>ClinicaApp.java — cargar() (2/2)</a:t>
             </a:r>
           </a:p>
         </p:txBody>
@@ -20970,7 +20970,7 @@
                 </a:solidFill>
                 <a:latin typeface="Calibri"/>
               </a:rPr>
-              <a:t>VetCareApp.java — limpiar()</a:t>
+              <a:t>ClinicaApp.java — limpiar()</a:t>
             </a:r>
           </a:p>
         </p:txBody>
@@ -21422,7 +21422,7 @@
                 </a:solidFill>
                 <a:latin typeface="Calibri"/>
               </a:rPr>
-              <a:t>El main que amarra las cuatro capas de VetCare</a:t>
+              <a:t>El main que amarra las cuatro capas del sistema de la clinica</a:t>
             </a:r>
           </a:p>
         </p:txBody>
@@ -21613,7 +21613,7 @@
                 </a:solidFill>
                 <a:latin typeface="Calibri"/>
               </a:rPr>
-              <a:t>    ServicioVetCare servicio = new ServicioVetCare(repositorio);   // logica: dueno del ArrayList</a:t>
+              <a:t>    ServicioClinica servicio = new ServicioClinica(repositorio);   // logica: dueno del ArrayList</a:t>
             </a:r>
           </a:p>
           <a:p>
@@ -21645,7 +21645,7 @@
                 </a:solidFill>
                 <a:latin typeface="Calibri"/>
               </a:rPr>
-              <a:t>    SwingUtilities.invokeLater(() -&gt; new VetCareApp(servicio).setVisible(true)); // ...DESPUES la ventana</a:t>
+              <a:t>    SwingUtilities.invokeLater(() -&gt; new ClinicaApp(servicio).setVisible(true)); // ...DESPUES la ventana</a:t>
             </a:r>
           </a:p>
           <a:p>
@@ -22096,7 +22096,7 @@
                 </a:solidFill>
                 <a:latin typeface="Calibri"/>
               </a:rPr>
-              <a:t>–   Mismo dominio VetCare — no otro ejemplo.</a:t>
+              <a:t>–   Mismo dominio de la clinica — no otro ejemplo.</a:t>
             </a:r>
           </a:p>
         </p:txBody>
@@ -22816,7 +22816,7 @@
                 </a:solidFill>
                 <a:latin typeface="Calibri"/>
               </a:rPr>
-              <a:t>–   Para VetCare son cinco pasos: abrir la aplicación y ver la tabla poblada con lo que había en mascotas.csv; registrar una mascota nueva con dueño y ver que aparece de inmediato en la tabla</a:t>
+              <a:t>–   Para el sistema de la clinica son cinco pasos: abrir la aplicación y ver la tabla poblada con lo que había en mascotas.csv; registrar una mascota nueva con dueño y ver que aparece de inmediato en la tabla</a:t>
             </a:r>
           </a:p>
           <a:p>

--- a/Programacion II/Clases/Clase 12 - Integracion de modulos/Presentacion.pptx
+++ b/Programacion II/Clases/Clase 12 - Integracion de modulos/Presentacion.pptx
@@ -5867,7 +5867,7 @@
                 </a:solidFill>
                 <a:latin typeface="Calibri"/>
               </a:rPr>
-              <a:t>        super("Clinica - Clinica Veterinaria");</a:t>
+              <a:t>        super("Clinica Veterinaria");</a:t>
             </a:r>
           </a:p>
           <a:p>

--- a/Programacion II/Clases/Clase 12 - Integracion de modulos/Presentacion.pptx
+++ b/Programacion II/Clases/Clase 12 - Integracion de modulos/Presentacion.pptx
@@ -828,94 +828,6 @@
           <a:p>
             <a:r>
               <a:t>La forma de integrar sin sufrir es por goteo y no de un solo golpe. Integración de un solo golpe es juntar los cuatro módulos la noche anterior a la entrega; el resultado conocido es una aplicación que no arranca y nadie sabe cuál de los cuatro la rompió. Integración por goteo es unir de a un módulo, correr el guion de humo después de cada unión, y no avanzar mientras el ejecutable esté en rojo: primero modelo más servicio con un main de consola, después servicio más repositorio verificando el archivo en disco, después la ventana consumiendo el servicio, y por último el cierre que guarda. Cuando algo se rompe, uno sabe exactamente qué fue lo último que tocó. Tres hábitos más que valen oro: fijar por escrito el contrato entre módulos, es decir la firma de los métodos públicos del servicio y el orden exacto de los campos del CSV, para que quien escribe y quien lee no se contradigan; poner el try-catch en las fronteras, o sea en el manejador del botón y en el acceso al archivo, y no repartido por todo el modelo; y llevar la bitácora de integración con síntoma, causa y corrección de cada defecto, que es lo que se entrega y lo que salva en la sustentación.</a:t>
-            </a:r>
-          </a:p>
-        </p:txBody>
-      </p:sp>
-      <p:sp>
-        <p:nvSpPr>
-          <p:cNvPr id="4" name="Slide Number Placeholder 3"/>
-          <p:cNvSpPr>
-            <a:spLocks noGrp="1"/>
-          </p:cNvSpPr>
-          <p:nvPr>
-            <p:ph type="sldNum" idx="5" sz="quarter"/>
-          </p:nvPr>
-        </p:nvSpPr>
-        <p:spPr/>
-      </p:sp>
-    </p:spTree>
-  </p:cSld>
-  <p:clrMapOvr>
-    <a:masterClrMapping/>
-  </p:clrMapOvr>
-</p:notes>
-</file>
-
-<file path=ppt/notesSlides/notesSlide6.xml><?xml version="1.0" encoding="utf-8"?>
-<p:notes xmlns:a="http://schemas.openxmlformats.org/drawingml/2006/main" xmlns:p="http://schemas.openxmlformats.org/presentationml/2006/main" xmlns:r="http://schemas.openxmlformats.org/officeDocument/2006/relationships">
-  <p:cSld>
-    <p:spTree>
-      <p:nvGrpSpPr>
-        <p:cNvPr id="1" name=""/>
-        <p:cNvGrpSpPr/>
-        <p:nvPr/>
-      </p:nvGrpSpPr>
-      <p:grpSpPr>
-        <a:xfrm>
-          <a:off x="0" y="0"/>
-          <a:ext cx="0" cy="0"/>
-          <a:chOff x="0" y="0"/>
-          <a:chExt cx="0" cy="0"/>
-        </a:xfrm>
-      </p:grpSpPr>
-      <p:sp>
-        <p:nvSpPr>
-          <p:cNvPr id="2" name="Slide Image Placeholder 1"/>
-          <p:cNvSpPr>
-            <a:spLocks noGrp="1"/>
-          </p:cNvSpPr>
-          <p:nvPr>
-            <p:ph type="sldImg" idx="2"/>
-          </p:nvPr>
-        </p:nvSpPr>
-        <p:spPr/>
-      </p:sp>
-      <p:sp>
-        <p:nvSpPr>
-          <p:cNvPr id="3" name="Notes Placeholder 2"/>
-          <p:cNvSpPr>
-            <a:spLocks noGrp="1"/>
-          </p:cNvSpPr>
-          <p:nvPr>
-            <p:ph type="body" idx="3" sz="quarter"/>
-          </p:nvPr>
-        </p:nvSpPr>
-        <p:spPr/>
-        <p:txBody>
-          <a:bodyPr/>
-          <a:lstStyle/>
-          <a:p>
-            <a:r>
-              <a:t>TEXTO COMPLETO DE LA LÁMINA (se proyecta resumido):</a:t>
-            </a:r>
-          </a:p>
-          <a:p/>
-          <a:p>
-            <a:r>
-              <a:t>Herramienta: Visual Studio Code (Java)</a:t>
-            </a:r>
-          </a:p>
-          <a:p/>
-          <a:p>
-            <a:r>
-              <a:t>Demo: El docente corre el guion de humo completo (abrir, registrar, buscar, cerrar, reabrir) y luego pone un breakpoint en el botón Registrar para mostrar con el debugger por qué una edad vacía estaba entrando como cero.</a:t>
-            </a:r>
-          </a:p>
-          <a:p/>
-          <a:p>
-            <a:r>
-              <a:t>Mismo dominio de la clinica — no otro ejemplo.</a:t>
             </a:r>
           </a:p>
         </p:txBody>
@@ -5792,83 +5704,14 @@
       </p:sp>
       <p:sp>
         <p:nvSpPr>
-          <p:cNvPr id="5" name="Rounded Rectangle 4"/>
-          <p:cNvSpPr/>
-          <p:nvPr/>
-        </p:nvSpPr>
-        <p:spPr>
-          <a:xfrm>
-            <a:off x="5797149" y="1576932"/>
-            <a:ext cx="6010497" cy="4051607"/>
-          </a:xfrm>
-          <a:prstGeom prst="roundRect">
-            <a:avLst>
-              <a:gd name="adj" fmla="val 4000"/>
-            </a:avLst>
-          </a:prstGeom>
-          <a:solidFill>
-            <a:srgbClr val="E8EEF4"/>
-          </a:solidFill>
-          <a:ln>
-            <a:noFill/>
-          </a:ln>
-        </p:spPr>
-        <p:style>
-          <a:lnRef idx="1">
-            <a:schemeClr val="accent1"/>
-          </a:lnRef>
-          <a:fillRef idx="3">
-            <a:schemeClr val="accent1"/>
-          </a:fillRef>
-          <a:effectRef idx="2">
-            <a:schemeClr val="accent1"/>
-          </a:effectRef>
-          <a:fontRef idx="minor">
-            <a:schemeClr val="lt1"/>
-          </a:fontRef>
-        </p:style>
-        <p:txBody>
-          <a:bodyPr rtlCol="0" anchor="ctr"/>
-          <a:lstStyle/>
-          <a:p>
-            <a:pPr algn="ctr"/>
-          </a:p>
-        </p:txBody>
-      </p:sp>
-      <p:pic>
-        <p:nvPicPr>
-          <p:cNvPr id="6" name="Picture 5" descr="programmer-debugging-code-laptop.jpg"/>
-          <p:cNvPicPr>
-            <a:picLocks noChangeAspect="1"/>
-          </p:cNvPicPr>
-          <p:nvPr/>
-        </p:nvPicPr>
-        <p:blipFill>
-          <a:blip r:embed="rId2"/>
-          <a:stretch>
-            <a:fillRect/>
-          </a:stretch>
-        </p:blipFill>
-        <p:spPr>
-          <a:xfrm>
-            <a:off x="5870301" y="1650084"/>
-            <a:ext cx="5864193" cy="3905303"/>
-          </a:xfrm>
-          <a:prstGeom prst="rect">
-            <a:avLst/>
-          </a:prstGeom>
-        </p:spPr>
-      </p:pic>
-      <p:sp>
-        <p:nvSpPr>
-          <p:cNvPr id="7" name="TextBox 6"/>
+          <p:cNvPr id="5" name="TextBox 4"/>
           <p:cNvSpPr txBox="1"/>
           <p:nvPr/>
         </p:nvSpPr>
         <p:spPr>
           <a:xfrm>
-            <a:off x="5870301" y="5961888"/>
-            <a:ext cx="5864193" cy="320040"/>
+            <a:off x="457200" y="1170432"/>
+            <a:ext cx="11277295" cy="5230368"/>
           </a:xfrm>
           <a:prstGeom prst="rect">
             <a:avLst/>
@@ -5881,40 +5724,21 @@
           </a:bodyPr>
           <a:lstStyle/>
           <a:p>
-            <a:pPr algn="ctr"/>
-            <a:r>
-              <a:rPr sz="1100" b="0" i="1">
-                <a:solidFill>
-                  <a:srgbClr val="666666"/>
+            <a:pPr>
+              <a:spcAft>
+                <a:spcPts val="800"/>
+              </a:spcAft>
+            </a:pPr>
+            <a:r>
+              <a:rPr sz="2000" b="0" i="0">
+                <a:solidFill>
+                  <a:srgbClr val="333333"/>
                 </a:solidFill>
                 <a:latin typeface="Calibri"/>
               </a:rPr>
-              <a:t>Foto: Daniil Komov · Pexels</a:t>
-            </a:r>
-          </a:p>
-        </p:txBody>
-      </p:sp>
-      <p:sp>
-        <p:nvSpPr>
-          <p:cNvPr id="8" name="TextBox 7"/>
-          <p:cNvSpPr txBox="1"/>
-          <p:nvPr/>
-        </p:nvSpPr>
-        <p:spPr>
-          <a:xfrm>
-            <a:off x="457200" y="1353312"/>
-            <a:ext cx="5093061" cy="5047488"/>
-          </a:xfrm>
-          <a:prstGeom prst="rect">
-            <a:avLst/>
-          </a:prstGeom>
-          <a:noFill/>
-        </p:spPr>
-        <p:txBody>
-          <a:bodyPr wrap="square">
-            <a:spAutoFit/>
-          </a:bodyPr>
-          <a:lstStyle/>
+              <a:t>–   Breakpoint con clic en el margen o F9; F5 inicia la depuración y se detiene ahí.</a:t>
+            </a:r>
+          </a:p>
           <a:p>
             <a:pPr>
               <a:spcAft>
@@ -5928,7 +5752,7 @@
                 </a:solidFill>
                 <a:latin typeface="Calibri"/>
               </a:rPr>
-              <a:t>–   Breakpoint con clic en el margen o F9; F5 inicia la depuración y se detiene ahí.</a:t>
+              <a:t>–   F10 pasa a la línea siguiente, F11 entra al método, Mayús+F11 sale de él.</a:t>
             </a:r>
           </a:p>
           <a:p>
@@ -5944,7 +5768,7 @@
                 </a:solidFill>
                 <a:latin typeface="Calibri"/>
               </a:rPr>
-              <a:t>–   F10 pasa a la línea siguiente, F11 entra al método, Mayús+F11 sale de él.</a:t>
+              <a:t>–   Variables, Watch y Call Stack muestran el estado real y quién llamó a quién.</a:t>
             </a:r>
           </a:p>
           <a:p>
@@ -5960,22 +5784,6 @@
                 </a:solidFill>
                 <a:latin typeface="Calibri"/>
               </a:rPr>
-              <a:t>–   Variables, Watch y Call Stack muestran el estado real y quién llamó a quién.</a:t>
-            </a:r>
-          </a:p>
-          <a:p>
-            <a:pPr>
-              <a:spcAft>
-                <a:spcPts val="800"/>
-              </a:spcAft>
-            </a:pPr>
-            <a:r>
-              <a:rPr sz="2000" b="0" i="0">
-                <a:solidFill>
-                  <a:srgbClr val="333333"/>
-                </a:solidFill>
-                <a:latin typeface="Calibri"/>
-              </a:rPr>
               <a:t>–   Un breakpoint condicional (id.equals("M009")) se detiene solo en el caso problemático.</a:t>
             </a:r>
           </a:p>
@@ -5983,7 +5791,7 @@
       </p:sp>
       <p:sp>
         <p:nvSpPr>
-          <p:cNvPr id="9" name="TextBox 8"/>
+          <p:cNvPr id="6" name="TextBox 5"/>
           <p:cNvSpPr txBox="1"/>
           <p:nvPr/>
         </p:nvSpPr>
@@ -10207,83 +10015,14 @@
       </p:sp>
       <p:sp>
         <p:nvSpPr>
-          <p:cNvPr id="5" name="Rounded Rectangle 4"/>
-          <p:cNvSpPr/>
-          <p:nvPr/>
-        </p:nvSpPr>
-        <p:spPr>
-          <a:xfrm>
-            <a:off x="5797149" y="1573813"/>
-            <a:ext cx="6010497" cy="4057845"/>
-          </a:xfrm>
-          <a:prstGeom prst="roundRect">
-            <a:avLst>
-              <a:gd name="adj" fmla="val 4000"/>
-            </a:avLst>
-          </a:prstGeom>
-          <a:solidFill>
-            <a:srgbClr val="E8EEF4"/>
-          </a:solidFill>
-          <a:ln>
-            <a:noFill/>
-          </a:ln>
-        </p:spPr>
-        <p:style>
-          <a:lnRef idx="1">
-            <a:schemeClr val="accent1"/>
-          </a:lnRef>
-          <a:fillRef idx="3">
-            <a:schemeClr val="accent1"/>
-          </a:fillRef>
-          <a:effectRef idx="2">
-            <a:schemeClr val="accent1"/>
-          </a:effectRef>
-          <a:fontRef idx="minor">
-            <a:schemeClr val="lt1"/>
-          </a:fontRef>
-        </p:style>
-        <p:txBody>
-          <a:bodyPr rtlCol="0" anchor="ctr"/>
-          <a:lstStyle/>
-          <a:p>
-            <a:pPr algn="ctr"/>
-          </a:p>
-        </p:txBody>
-      </p:sp>
-      <p:pic>
-        <p:nvPicPr>
-          <p:cNvPr id="6" name="Picture 5" descr="laptop-code-live-demo.jpg"/>
-          <p:cNvPicPr>
-            <a:picLocks noChangeAspect="1"/>
-          </p:cNvPicPr>
-          <p:nvPr/>
-        </p:nvPicPr>
-        <p:blipFill>
-          <a:blip r:embed="rId2"/>
-          <a:stretch>
-            <a:fillRect/>
-          </a:stretch>
-        </p:blipFill>
-        <p:spPr>
-          <a:xfrm>
-            <a:off x="5870301" y="1646965"/>
-            <a:ext cx="5864193" cy="3911541"/>
-          </a:xfrm>
-          <a:prstGeom prst="rect">
-            <a:avLst/>
-          </a:prstGeom>
-        </p:spPr>
-      </p:pic>
-      <p:sp>
-        <p:nvSpPr>
-          <p:cNvPr id="7" name="TextBox 6"/>
+          <p:cNvPr id="5" name="TextBox 4"/>
           <p:cNvSpPr txBox="1"/>
           <p:nvPr/>
         </p:nvSpPr>
         <p:spPr>
           <a:xfrm>
-            <a:off x="5870301" y="5961888"/>
-            <a:ext cx="5864193" cy="320040"/>
+            <a:off x="457200" y="1170432"/>
+            <a:ext cx="11277295" cy="5230368"/>
           </a:xfrm>
           <a:prstGeom prst="rect">
             <a:avLst/>
@@ -10296,40 +10035,39 @@
           </a:bodyPr>
           <a:lstStyle/>
           <a:p>
-            <a:pPr algn="ctr"/>
-            <a:r>
-              <a:rPr sz="1100" b="0" i="1">
-                <a:solidFill>
-                  <a:srgbClr val="666666"/>
+            <a:pPr>
+              <a:spcAft>
+                <a:spcPts val="800"/>
+              </a:spcAft>
+            </a:pPr>
+            <a:r>
+              <a:rPr sz="2000" b="0" i="0">
+                <a:solidFill>
+                  <a:srgbClr val="333333"/>
                 </a:solidFill>
                 <a:latin typeface="Calibri"/>
               </a:rPr>
-              <a:t>Foto: olia danilevich · Pexels</a:t>
-            </a:r>
-          </a:p>
-        </p:txBody>
-      </p:sp>
-      <p:sp>
-        <p:nvSpPr>
-          <p:cNvPr id="8" name="TextBox 7"/>
-          <p:cNvSpPr txBox="1"/>
-          <p:nvPr/>
-        </p:nvSpPr>
-        <p:spPr>
-          <a:xfrm>
-            <a:off x="457200" y="1353312"/>
-            <a:ext cx="5093061" cy="5047488"/>
-          </a:xfrm>
-          <a:prstGeom prst="rect">
-            <a:avLst/>
-          </a:prstGeom>
-          <a:noFill/>
-        </p:spPr>
-        <p:txBody>
-          <a:bodyPr wrap="square">
-            <a:spAutoFit/>
-          </a:bodyPr>
-          <a:lstStyle/>
+              <a:t>–   </a:t>
+            </a:r>
+            <a:r>
+              <a:rPr sz="2000" b="1" i="0">
+                <a:solidFill>
+                  <a:srgbClr val="333333"/>
+                </a:solidFill>
+                <a:latin typeface="Calibri"/>
+              </a:rPr>
+              <a:t>Herramienta:</a:t>
+            </a:r>
+            <a:r>
+              <a:rPr sz="2000" b="0" i="0">
+                <a:solidFill>
+                  <a:srgbClr val="333333"/>
+                </a:solidFill>
+                <a:latin typeface="Calibri"/>
+              </a:rPr>
+              <a:t> Visual Studio Code (Java)</a:t>
+            </a:r>
+          </a:p>
           <a:p>
             <a:pPr>
               <a:spcAft>
@@ -10352,7 +10090,7 @@
                 </a:solidFill>
                 <a:latin typeface="Calibri"/>
               </a:rPr>
-              <a:t>Herramienta:</a:t>
+              <a:t>Demo:</a:t>
             </a:r>
             <a:r>
               <a:rPr sz="2000" b="0" i="0">
@@ -10361,7 +10099,7 @@
                 </a:solidFill>
                 <a:latin typeface="Calibri"/>
               </a:rPr>
-              <a:t> Visual Studio Code (Java)</a:t>
+              <a:t> El docente corre el guion de humo completo (abrir, registrar, buscar, cerrar, reabrir) y luego pone un breakpoint en el botón Registrar para mostrar con el debugger por qué una edad vacía estaba entrando como cero.</a:t>
             </a:r>
           </a:p>
           <a:p>
@@ -10377,31 +10115,6 @@
                 </a:solidFill>
                 <a:latin typeface="Calibri"/>
               </a:rPr>
-              <a:t>–   </a:t>
-            </a:r>
-            <a:r>
-              <a:rPr sz="2000" b="1" i="0">
-                <a:solidFill>
-                  <a:srgbClr val="333333"/>
-                </a:solidFill>
-                <a:latin typeface="Calibri"/>
-              </a:rPr>
-              <a:t>Demo:</a:t>
-            </a:r>
-          </a:p>
-          <a:p>
-            <a:pPr>
-              <a:spcAft>
-                <a:spcPts val="800"/>
-              </a:spcAft>
-            </a:pPr>
-            <a:r>
-              <a:rPr sz="2000" b="0" i="0">
-                <a:solidFill>
-                  <a:srgbClr val="333333"/>
-                </a:solidFill>
-                <a:latin typeface="Calibri"/>
-              </a:rPr>
               <a:t>–   Mismo dominio de la clinica — no otro ejemplo.</a:t>
             </a:r>
           </a:p>
@@ -10409,7 +10122,7 @@
       </p:sp>
       <p:sp>
         <p:nvSpPr>
-          <p:cNvPr id="9" name="TextBox 8"/>
+          <p:cNvPr id="6" name="TextBox 5"/>
           <p:cNvSpPr txBox="1"/>
           <p:nvPr/>
         </p:nvSpPr>
@@ -10822,83 +10535,14 @@
       </p:sp>
       <p:sp>
         <p:nvSpPr>
-          <p:cNvPr id="5" name="Rounded Rectangle 4"/>
-          <p:cNvSpPr/>
-          <p:nvPr/>
-        </p:nvSpPr>
-        <p:spPr>
-          <a:xfrm>
-            <a:off x="5797149" y="1573813"/>
-            <a:ext cx="6010497" cy="4057845"/>
-          </a:xfrm>
-          <a:prstGeom prst="roundRect">
-            <a:avLst>
-              <a:gd name="adj" fmla="val 4000"/>
-            </a:avLst>
-          </a:prstGeom>
-          <a:solidFill>
-            <a:srgbClr val="E8EEF4"/>
-          </a:solidFill>
-          <a:ln>
-            <a:noFill/>
-          </a:ln>
-        </p:spPr>
-        <p:style>
-          <a:lnRef idx="1">
-            <a:schemeClr val="accent1"/>
-          </a:lnRef>
-          <a:fillRef idx="3">
-            <a:schemeClr val="accent1"/>
-          </a:fillRef>
-          <a:effectRef idx="2">
-            <a:schemeClr val="accent1"/>
-          </a:effectRef>
-          <a:fontRef idx="minor">
-            <a:schemeClr val="lt1"/>
-          </a:fontRef>
-        </p:style>
-        <p:txBody>
-          <a:bodyPr rtlCol="0" anchor="ctr"/>
-          <a:lstStyle/>
-          <a:p>
-            <a:pPr algn="ctr"/>
-          </a:p>
-        </p:txBody>
-      </p:sp>
-      <p:pic>
-        <p:nvPicPr>
-          <p:cNvPr id="6" name="Picture 5" descr="notebook-planning-desk-coffee.jpg"/>
-          <p:cNvPicPr>
-            <a:picLocks noChangeAspect="1"/>
-          </p:cNvPicPr>
-          <p:nvPr/>
-        </p:nvPicPr>
-        <p:blipFill>
-          <a:blip r:embed="rId2"/>
-          <a:stretch>
-            <a:fillRect/>
-          </a:stretch>
-        </p:blipFill>
-        <p:spPr>
-          <a:xfrm>
-            <a:off x="5870301" y="1646965"/>
-            <a:ext cx="5864193" cy="3911541"/>
-          </a:xfrm>
-          <a:prstGeom prst="rect">
-            <a:avLst/>
-          </a:prstGeom>
-        </p:spPr>
-      </p:pic>
-      <p:sp>
-        <p:nvSpPr>
-          <p:cNvPr id="7" name="TextBox 6"/>
+          <p:cNvPr id="5" name="TextBox 4"/>
           <p:cNvSpPr txBox="1"/>
           <p:nvPr/>
         </p:nvSpPr>
         <p:spPr>
           <a:xfrm>
-            <a:off x="5870301" y="5961888"/>
-            <a:ext cx="5864193" cy="320040"/>
+            <a:off x="457200" y="1170432"/>
+            <a:ext cx="11277295" cy="5230368"/>
           </a:xfrm>
           <a:prstGeom prst="rect">
             <a:avLst/>
@@ -10911,40 +10555,39 @@
           </a:bodyPr>
           <a:lstStyle/>
           <a:p>
-            <a:pPr algn="ctr"/>
-            <a:r>
-              <a:rPr sz="1100" b="0" i="1">
-                <a:solidFill>
-                  <a:srgbClr val="666666"/>
+            <a:pPr>
+              <a:spcAft>
+                <a:spcPts val="800"/>
+              </a:spcAft>
+            </a:pPr>
+            <a:r>
+              <a:rPr sz="2000" b="0" i="0">
+                <a:solidFill>
+                  <a:srgbClr val="333333"/>
                 </a:solidFill>
                 <a:latin typeface="Calibri"/>
               </a:rPr>
-              <a:t>Foto: Cup of  Couple · Pexels</a:t>
-            </a:r>
-          </a:p>
-        </p:txBody>
-      </p:sp>
-      <p:sp>
-        <p:nvSpPr>
-          <p:cNvPr id="8" name="TextBox 7"/>
-          <p:cNvSpPr txBox="1"/>
-          <p:nvPr/>
-        </p:nvSpPr>
-        <p:spPr>
-          <a:xfrm>
-            <a:off x="457200" y="1353312"/>
-            <a:ext cx="5093061" cy="5047488"/>
-          </a:xfrm>
-          <a:prstGeom prst="rect">
-            <a:avLst/>
-          </a:prstGeom>
-          <a:noFill/>
-        </p:spPr>
-        <p:txBody>
-          <a:bodyPr wrap="square">
-            <a:spAutoFit/>
-          </a:bodyPr>
-          <a:lstStyle/>
+              <a:t>–   </a:t>
+            </a:r>
+            <a:r>
+              <a:rPr sz="2000" b="1" i="0">
+                <a:solidFill>
+                  <a:srgbClr val="333333"/>
+                </a:solidFill>
+                <a:latin typeface="Calibri"/>
+              </a:rPr>
+              <a:t>Tema de hoy:</a:t>
+            </a:r>
+            <a:r>
+              <a:rPr sz="2000" b="0" i="0">
+                <a:solidFill>
+                  <a:srgbClr val="333333"/>
+                </a:solidFill>
+                <a:latin typeface="Calibri"/>
+              </a:rPr>
+              <a:t> Integración de módulos — De piezas sueltas a una aplicación que corre de punta a punta</a:t>
+            </a:r>
+          </a:p>
           <a:p>
             <a:pPr>
               <a:spcAft>
@@ -10958,7 +10601,7 @@
                 </a:solidFill>
                 <a:latin typeface="Calibri"/>
               </a:rPr>
-              <a:t>–   </a:t>
+              <a:t>–   Herramienta: </a:t>
             </a:r>
             <a:r>
               <a:rPr sz="2000" b="1" i="0">
@@ -10967,7 +10610,7 @@
                 </a:solidFill>
                 <a:latin typeface="Calibri"/>
               </a:rPr>
-              <a:t>Tema de hoy:</a:t>
+              <a:t>Visual Studio Code (Java)</a:t>
             </a:r>
             <a:r>
               <a:rPr sz="2000" b="0" i="0">
@@ -10976,7 +10619,16 @@
                 </a:solidFill>
                 <a:latin typeface="Calibri"/>
               </a:rPr>
-              <a:t> Integración de módulos — De piezas sueltas a una aplicación que corre de punta a punta</a:t>
+              <a:t> · Bloque </a:t>
+            </a:r>
+            <a:r>
+              <a:rPr sz="2000" b="1" i="0">
+                <a:solidFill>
+                  <a:srgbClr val="333333"/>
+                </a:solidFill>
+                <a:latin typeface="Calibri"/>
+              </a:rPr>
+              <a:t>120 min</a:t>
             </a:r>
           </a:p>
           <a:p>
@@ -10992,65 +10644,22 @@
                 </a:solidFill>
                 <a:latin typeface="Calibri"/>
               </a:rPr>
-              <a:t>–   Herramienta: </a:t>
-            </a:r>
-            <a:r>
-              <a:rPr sz="2000" b="1" i="0">
+              <a:t>–   Primero el concepto, despues el codigo que lo muestra y la demo en vivo.</a:t>
+            </a:r>
+          </a:p>
+          <a:p>
+            <a:pPr>
+              <a:spcAft>
+                <a:spcPts val="800"/>
+              </a:spcAft>
+            </a:pPr>
+            <a:r>
+              <a:rPr sz="2000" b="0" i="0">
                 <a:solidFill>
                   <a:srgbClr val="333333"/>
                 </a:solidFill>
                 <a:latin typeface="Calibri"/>
               </a:rPr>
-              <a:t>Visual Studio Code (Java)</a:t>
-            </a:r>
-            <a:r>
-              <a:rPr sz="2000" b="0" i="0">
-                <a:solidFill>
-                  <a:srgbClr val="333333"/>
-                </a:solidFill>
-                <a:latin typeface="Calibri"/>
-              </a:rPr>
-              <a:t> · Bloque </a:t>
-            </a:r>
-            <a:r>
-              <a:rPr sz="2000" b="1" i="0">
-                <a:solidFill>
-                  <a:srgbClr val="333333"/>
-                </a:solidFill>
-                <a:latin typeface="Calibri"/>
-              </a:rPr>
-              <a:t>120 min</a:t>
-            </a:r>
-          </a:p>
-          <a:p>
-            <a:pPr>
-              <a:spcAft>
-                <a:spcPts val="800"/>
-              </a:spcAft>
-            </a:pPr>
-            <a:r>
-              <a:rPr sz="2000" b="0" i="0">
-                <a:solidFill>
-                  <a:srgbClr val="333333"/>
-                </a:solidFill>
-                <a:latin typeface="Calibri"/>
-              </a:rPr>
-              <a:t>–   Primero el concepto, despues el codigo que lo muestra y la demo en vivo.</a:t>
-            </a:r>
-          </a:p>
-          <a:p>
-            <a:pPr>
-              <a:spcAft>
-                <a:spcPts val="800"/>
-              </a:spcAft>
-            </a:pPr>
-            <a:r>
-              <a:rPr sz="2000" b="0" i="0">
-                <a:solidFill>
-                  <a:srgbClr val="333333"/>
-                </a:solidFill>
-                <a:latin typeface="Calibri"/>
-              </a:rPr>
               <a:t>–   Todo con el mismo dominio: una clinica veterinaria.</a:t>
             </a:r>
           </a:p>
@@ -11058,7 +10667,7 @@
       </p:sp>
       <p:sp>
         <p:nvSpPr>
-          <p:cNvPr id="9" name="TextBox 8"/>
+          <p:cNvPr id="6" name="TextBox 5"/>
           <p:cNvSpPr txBox="1"/>
           <p:nvPr/>
         </p:nvSpPr>

--- a/Programacion II/Clases/Clase 12 - Integracion de modulos/Presentacion.pptx
+++ b/Programacion II/Clases/Clase 12 - Integracion de modulos/Presentacion.pptx
@@ -828,6 +828,94 @@
           <a:p>
             <a:r>
               <a:t>La forma de integrar sin sufrir es por goteo y no de un solo golpe. Integración de un solo golpe es juntar los cuatro módulos la noche anterior a la entrega; el resultado conocido es una aplicación que no arranca y nadie sabe cuál de los cuatro la rompió. Integración por goteo es unir de a un módulo, correr el guion de humo después de cada unión, y no avanzar mientras el ejecutable esté en rojo: primero modelo más servicio con un main de consola, después servicio más repositorio verificando el archivo en disco, después la ventana consumiendo el servicio, y por último el cierre que guarda. Cuando algo se rompe, uno sabe exactamente qué fue lo último que tocó. Tres hábitos más que valen oro: fijar por escrito el contrato entre módulos, es decir la firma de los métodos públicos del servicio y el orden exacto de los campos del CSV, para que quien escribe y quien lee no se contradigan; poner el try-catch en las fronteras, o sea en el manejador del botón y en el acceso al archivo, y no repartido por todo el modelo; y llevar la bitácora de integración con síntoma, causa y corrección de cada defecto, que es lo que se entrega y lo que salva en la sustentación.</a:t>
+            </a:r>
+          </a:p>
+        </p:txBody>
+      </p:sp>
+      <p:sp>
+        <p:nvSpPr>
+          <p:cNvPr id="4" name="Slide Number Placeholder 3"/>
+          <p:cNvSpPr>
+            <a:spLocks noGrp="1"/>
+          </p:cNvSpPr>
+          <p:nvPr>
+            <p:ph type="sldNum" idx="5" sz="quarter"/>
+          </p:nvPr>
+        </p:nvSpPr>
+        <p:spPr/>
+      </p:sp>
+    </p:spTree>
+  </p:cSld>
+  <p:clrMapOvr>
+    <a:masterClrMapping/>
+  </p:clrMapOvr>
+</p:notes>
+</file>
+
+<file path=ppt/notesSlides/notesSlide6.xml><?xml version="1.0" encoding="utf-8"?>
+<p:notes xmlns:a="http://schemas.openxmlformats.org/drawingml/2006/main" xmlns:p="http://schemas.openxmlformats.org/presentationml/2006/main" xmlns:r="http://schemas.openxmlformats.org/officeDocument/2006/relationships">
+  <p:cSld>
+    <p:spTree>
+      <p:nvGrpSpPr>
+        <p:cNvPr id="1" name=""/>
+        <p:cNvGrpSpPr/>
+        <p:nvPr/>
+      </p:nvGrpSpPr>
+      <p:grpSpPr>
+        <a:xfrm>
+          <a:off x="0" y="0"/>
+          <a:ext cx="0" cy="0"/>
+          <a:chOff x="0" y="0"/>
+          <a:chExt cx="0" cy="0"/>
+        </a:xfrm>
+      </p:grpSpPr>
+      <p:sp>
+        <p:nvSpPr>
+          <p:cNvPr id="2" name="Slide Image Placeholder 1"/>
+          <p:cNvSpPr>
+            <a:spLocks noGrp="1"/>
+          </p:cNvSpPr>
+          <p:nvPr>
+            <p:ph type="sldImg" idx="2"/>
+          </p:nvPr>
+        </p:nvSpPr>
+        <p:spPr/>
+      </p:sp>
+      <p:sp>
+        <p:nvSpPr>
+          <p:cNvPr id="3" name="Notes Placeholder 2"/>
+          <p:cNvSpPr>
+            <a:spLocks noGrp="1"/>
+          </p:cNvSpPr>
+          <p:nvPr>
+            <p:ph type="body" idx="3" sz="quarter"/>
+          </p:nvPr>
+        </p:nvSpPr>
+        <p:spPr/>
+        <p:txBody>
+          <a:bodyPr/>
+          <a:lstStyle/>
+          <a:p>
+            <a:r>
+              <a:t>TEXTO COMPLETO DE LA LÁMINA (se proyecta resumido):</a:t>
+            </a:r>
+          </a:p>
+          <a:p/>
+          <a:p>
+            <a:r>
+              <a:t>Herramienta: Visual Studio Code (Java)</a:t>
+            </a:r>
+          </a:p>
+          <a:p/>
+          <a:p>
+            <a:r>
+              <a:t>Demo: El docente corre el guion de humo completo (abrir, registrar, buscar, cerrar, reabrir) y luego pone un breakpoint en el botón Registrar para mostrar con el debugger por qué una edad vacía estaba entrando como cero.</a:t>
+            </a:r>
+          </a:p>
+          <a:p/>
+          <a:p>
+            <a:r>
+              <a:t>Mismo dominio de la clinica — no otro ejemplo.</a:t>
             </a:r>
           </a:p>
         </p:txBody>
@@ -5704,14 +5792,83 @@
       </p:sp>
       <p:sp>
         <p:nvSpPr>
-          <p:cNvPr id="5" name="TextBox 4"/>
+          <p:cNvPr id="5" name="Rounded Rectangle 4"/>
+          <p:cNvSpPr/>
+          <p:nvPr/>
+        </p:nvSpPr>
+        <p:spPr>
+          <a:xfrm>
+            <a:off x="5797149" y="1343926"/>
+            <a:ext cx="6010497" cy="4837658"/>
+          </a:xfrm>
+          <a:prstGeom prst="roundRect">
+            <a:avLst>
+              <a:gd name="adj" fmla="val 4000"/>
+            </a:avLst>
+          </a:prstGeom>
+          <a:solidFill>
+            <a:srgbClr val="E8EEF4"/>
+          </a:solidFill>
+          <a:ln>
+            <a:noFill/>
+          </a:ln>
+        </p:spPr>
+        <p:style>
+          <a:lnRef idx="1">
+            <a:schemeClr val="accent1"/>
+          </a:lnRef>
+          <a:fillRef idx="3">
+            <a:schemeClr val="accent1"/>
+          </a:fillRef>
+          <a:effectRef idx="2">
+            <a:schemeClr val="accent1"/>
+          </a:effectRef>
+          <a:fontRef idx="minor">
+            <a:schemeClr val="lt1"/>
+          </a:fontRef>
+        </p:style>
+        <p:txBody>
+          <a:bodyPr rtlCol="0" anchor="ctr"/>
+          <a:lstStyle/>
+          <a:p>
+            <a:pPr algn="ctr"/>
+          </a:p>
+        </p:txBody>
+      </p:sp>
+      <p:pic>
+        <p:nvPicPr>
+          <p:cNvPr id="6" name="Picture 5" descr="ilus-depurador-paso1.png"/>
+          <p:cNvPicPr>
+            <a:picLocks noChangeAspect="1"/>
+          </p:cNvPicPr>
+          <p:nvPr/>
+        </p:nvPicPr>
+        <p:blipFill>
+          <a:blip r:embed="rId2"/>
+          <a:stretch>
+            <a:fillRect/>
+          </a:stretch>
+        </p:blipFill>
+        <p:spPr>
+          <a:xfrm>
+            <a:off x="5870301" y="1417078"/>
+            <a:ext cx="5864193" cy="4691354"/>
+          </a:xfrm>
+          <a:prstGeom prst="rect">
+            <a:avLst/>
+          </a:prstGeom>
+        </p:spPr>
+      </p:pic>
+      <p:sp>
+        <p:nvSpPr>
+          <p:cNvPr id="7" name="TextBox 6"/>
           <p:cNvSpPr txBox="1"/>
           <p:nvPr/>
         </p:nvSpPr>
         <p:spPr>
           <a:xfrm>
-            <a:off x="457200" y="1170432"/>
-            <a:ext cx="11277295" cy="5230368"/>
+            <a:off x="457200" y="1353312"/>
+            <a:ext cx="5093061" cy="5047488"/>
           </a:xfrm>
           <a:prstGeom prst="rect">
             <a:avLst/>
@@ -5791,7 +5948,7 @@
       </p:sp>
       <p:sp>
         <p:nvSpPr>
-          <p:cNvPr id="6" name="TextBox 5"/>
+          <p:cNvPr id="8" name="TextBox 7"/>
           <p:cNvSpPr txBox="1"/>
           <p:nvPr/>
         </p:nvSpPr>
@@ -10015,14 +10172,83 @@
       </p:sp>
       <p:sp>
         <p:nvSpPr>
-          <p:cNvPr id="5" name="TextBox 4"/>
+          <p:cNvPr id="5" name="Rounded Rectangle 4"/>
+          <p:cNvSpPr/>
+          <p:nvPr/>
+        </p:nvSpPr>
+        <p:spPr>
+          <a:xfrm>
+            <a:off x="5797149" y="1343926"/>
+            <a:ext cx="6010497" cy="4837658"/>
+          </a:xfrm>
+          <a:prstGeom prst="roundRect">
+            <a:avLst>
+              <a:gd name="adj" fmla="val 4000"/>
+            </a:avLst>
+          </a:prstGeom>
+          <a:solidFill>
+            <a:srgbClr val="E8EEF4"/>
+          </a:solidFill>
+          <a:ln>
+            <a:noFill/>
+          </a:ln>
+        </p:spPr>
+        <p:style>
+          <a:lnRef idx="1">
+            <a:schemeClr val="accent1"/>
+          </a:lnRef>
+          <a:fillRef idx="3">
+            <a:schemeClr val="accent1"/>
+          </a:fillRef>
+          <a:effectRef idx="2">
+            <a:schemeClr val="accent1"/>
+          </a:effectRef>
+          <a:fontRef idx="minor">
+            <a:schemeClr val="lt1"/>
+          </a:fontRef>
+        </p:style>
+        <p:txBody>
+          <a:bodyPr rtlCol="0" anchor="ctr"/>
+          <a:lstStyle/>
+          <a:p>
+            <a:pPr algn="ctr"/>
+          </a:p>
+        </p:txBody>
+      </p:sp>
+      <p:pic>
+        <p:nvPicPr>
+          <p:cNvPr id="6" name="Picture 5" descr="ilus-demo-paso1.png"/>
+          <p:cNvPicPr>
+            <a:picLocks noChangeAspect="1"/>
+          </p:cNvPicPr>
+          <p:nvPr/>
+        </p:nvPicPr>
+        <p:blipFill>
+          <a:blip r:embed="rId2"/>
+          <a:stretch>
+            <a:fillRect/>
+          </a:stretch>
+        </p:blipFill>
+        <p:spPr>
+          <a:xfrm>
+            <a:off x="5870301" y="1417078"/>
+            <a:ext cx="5864193" cy="4691354"/>
+          </a:xfrm>
+          <a:prstGeom prst="rect">
+            <a:avLst/>
+          </a:prstGeom>
+        </p:spPr>
+      </p:pic>
+      <p:sp>
+        <p:nvSpPr>
+          <p:cNvPr id="7" name="TextBox 6"/>
           <p:cNvSpPr txBox="1"/>
           <p:nvPr/>
         </p:nvSpPr>
         <p:spPr>
           <a:xfrm>
-            <a:off x="457200" y="1170432"/>
-            <a:ext cx="11277295" cy="5230368"/>
+            <a:off x="457200" y="1353312"/>
+            <a:ext cx="5093061" cy="5047488"/>
           </a:xfrm>
           <a:prstGeom prst="rect">
             <a:avLst/>
@@ -10099,7 +10325,7 @@
                 </a:solidFill>
                 <a:latin typeface="Calibri"/>
               </a:rPr>
-              <a:t> El docente corre el guion de humo completo (abrir, registrar, buscar, cerrar, reabrir) y luego pone un breakpoint en el botón Registrar para mostrar con el debugger por qué una edad vacía estaba entrando como cero.</a:t>
+              <a:t> El docente corre el guion de humo completo (abrir, registrar, buscar, cerrar, reabrir) y luego pone un breakpoint en el botón Registrar para…</a:t>
             </a:r>
           </a:p>
           <a:p>
@@ -10122,7 +10348,7 @@
       </p:sp>
       <p:sp>
         <p:nvSpPr>
-          <p:cNvPr id="6" name="TextBox 5"/>
+          <p:cNvPr id="8" name="TextBox 7"/>
           <p:cNvSpPr txBox="1"/>
           <p:nvPr/>
         </p:nvSpPr>

--- a/Programacion II/Clases/Clase 12 - Integracion de modulos/Presentacion.pptx
+++ b/Programacion II/Clases/Clase 12 - Integracion de modulos/Presentacion.pptx
@@ -8792,7 +8792,7 @@
         <p:spPr>
           <a:xfrm>
             <a:off x="457200" y="1261872"/>
-            <a:ext cx="11277295" cy="4459049"/>
+            <a:ext cx="11277295" cy="4257511"/>
           </a:xfrm>
           <a:prstGeom prst="roundRect">
             <a:avLst>
@@ -9042,7 +9042,7 @@
         <p:spPr>
           <a:xfrm>
             <a:off x="685800" y="1719072"/>
-            <a:ext cx="502920" cy="3864689"/>
+            <a:ext cx="502920" cy="3663151"/>
           </a:xfrm>
           <a:prstGeom prst="rect">
             <a:avLst/>
@@ -9057,11 +9057,11 @@
           <a:p>
             <a:pPr algn="r">
               <a:spcAft>
-                <a:spcPts val="342"/>
-              </a:spcAft>
-            </a:pPr>
-            <a:r>
-              <a:rPr sz="1600" i="0" b="0">
+                <a:spcPts val="321"/>
+              </a:spcAft>
+            </a:pPr>
+            <a:r>
+              <a:rPr sz="1500" i="0" b="0">
                 <a:solidFill>
                   <a:srgbClr val="858585"/>
                 </a:solidFill>
@@ -9073,11 +9073,11 @@
           <a:p>
             <a:pPr algn="r">
               <a:spcAft>
-                <a:spcPts val="342"/>
-              </a:spcAft>
-            </a:pPr>
-            <a:r>
-              <a:rPr sz="1600" i="0" b="0">
+                <a:spcPts val="321"/>
+              </a:spcAft>
+            </a:pPr>
+            <a:r>
+              <a:rPr sz="1500" i="0" b="0">
                 <a:solidFill>
                   <a:srgbClr val="858585"/>
                 </a:solidFill>
@@ -9089,11 +9089,11 @@
           <a:p>
             <a:pPr algn="r">
               <a:spcAft>
-                <a:spcPts val="342"/>
-              </a:spcAft>
-            </a:pPr>
-            <a:r>
-              <a:rPr sz="1600" i="0" b="0">
+                <a:spcPts val="321"/>
+              </a:spcAft>
+            </a:pPr>
+            <a:r>
+              <a:rPr sz="1500" i="0" b="0">
                 <a:solidFill>
                   <a:srgbClr val="858585"/>
                 </a:solidFill>
@@ -9105,11 +9105,11 @@
           <a:p>
             <a:pPr algn="r">
               <a:spcAft>
-                <a:spcPts val="342"/>
-              </a:spcAft>
-            </a:pPr>
-            <a:r>
-              <a:rPr sz="1600" i="0" b="0">
+                <a:spcPts val="321"/>
+              </a:spcAft>
+            </a:pPr>
+            <a:r>
+              <a:rPr sz="1500" i="0" b="0">
                 <a:solidFill>
                   <a:srgbClr val="858585"/>
                 </a:solidFill>
@@ -9121,11 +9121,11 @@
           <a:p>
             <a:pPr algn="r">
               <a:spcAft>
-                <a:spcPts val="342"/>
-              </a:spcAft>
-            </a:pPr>
-            <a:r>
-              <a:rPr sz="1600" i="0" b="0">
+                <a:spcPts val="321"/>
+              </a:spcAft>
+            </a:pPr>
+            <a:r>
+              <a:rPr sz="1500" i="0" b="0">
                 <a:solidFill>
                   <a:srgbClr val="858585"/>
                 </a:solidFill>
@@ -9137,11 +9137,11 @@
           <a:p>
             <a:pPr algn="r">
               <a:spcAft>
-                <a:spcPts val="342"/>
-              </a:spcAft>
-            </a:pPr>
-            <a:r>
-              <a:rPr sz="1600" i="0" b="0">
+                <a:spcPts val="321"/>
+              </a:spcAft>
+            </a:pPr>
+            <a:r>
+              <a:rPr sz="1500" i="0" b="0">
                 <a:solidFill>
                   <a:srgbClr val="858585"/>
                 </a:solidFill>
@@ -9153,11 +9153,11 @@
           <a:p>
             <a:pPr algn="r">
               <a:spcAft>
-                <a:spcPts val="342"/>
-              </a:spcAft>
-            </a:pPr>
-            <a:r>
-              <a:rPr sz="1600" i="0" b="0">
+                <a:spcPts val="321"/>
+              </a:spcAft>
+            </a:pPr>
+            <a:r>
+              <a:rPr sz="1500" i="0" b="0">
                 <a:solidFill>
                   <a:srgbClr val="858585"/>
                 </a:solidFill>
@@ -9169,11 +9169,11 @@
           <a:p>
             <a:pPr algn="r">
               <a:spcAft>
-                <a:spcPts val="342"/>
-              </a:spcAft>
-            </a:pPr>
-            <a:r>
-              <a:rPr sz="1600" i="0" b="0">
+                <a:spcPts val="321"/>
+              </a:spcAft>
+            </a:pPr>
+            <a:r>
+              <a:rPr sz="1500" i="0" b="0">
                 <a:solidFill>
                   <a:srgbClr val="858585"/>
                 </a:solidFill>
@@ -9185,11 +9185,11 @@
           <a:p>
             <a:pPr algn="r">
               <a:spcAft>
-                <a:spcPts val="342"/>
-              </a:spcAft>
-            </a:pPr>
-            <a:r>
-              <a:rPr sz="1600" i="0" b="0">
+                <a:spcPts val="321"/>
+              </a:spcAft>
+            </a:pPr>
+            <a:r>
+              <a:rPr sz="1500" i="0" b="0">
                 <a:solidFill>
                   <a:srgbClr val="858585"/>
                 </a:solidFill>
@@ -9201,11 +9201,11 @@
           <a:p>
             <a:pPr algn="r">
               <a:spcAft>
-                <a:spcPts val="342"/>
-              </a:spcAft>
-            </a:pPr>
-            <a:r>
-              <a:rPr sz="1600" i="0" b="0">
+                <a:spcPts val="321"/>
+              </a:spcAft>
+            </a:pPr>
+            <a:r>
+              <a:rPr sz="1500" i="0" b="0">
                 <a:solidFill>
                   <a:srgbClr val="858585"/>
                 </a:solidFill>
@@ -9217,11 +9217,11 @@
           <a:p>
             <a:pPr algn="r">
               <a:spcAft>
-                <a:spcPts val="342"/>
-              </a:spcAft>
-            </a:pPr>
-            <a:r>
-              <a:rPr sz="1600" i="0" b="0">
+                <a:spcPts val="321"/>
+              </a:spcAft>
+            </a:pPr>
+            <a:r>
+              <a:rPr sz="1500" i="0" b="0">
                 <a:solidFill>
                   <a:srgbClr val="858585"/>
                 </a:solidFill>
@@ -9233,11 +9233,11 @@
           <a:p>
             <a:pPr algn="r">
               <a:spcAft>
-                <a:spcPts val="342"/>
-              </a:spcAft>
-            </a:pPr>
-            <a:r>
-              <a:rPr sz="1600" i="0" b="0">
+                <a:spcPts val="321"/>
+              </a:spcAft>
+            </a:pPr>
+            <a:r>
+              <a:rPr sz="1500" i="0" b="0">
                 <a:solidFill>
                   <a:srgbClr val="858585"/>
                 </a:solidFill>
@@ -9249,11 +9249,11 @@
           <a:p>
             <a:pPr algn="r">
               <a:spcAft>
-                <a:spcPts val="342"/>
-              </a:spcAft>
-            </a:pPr>
-            <a:r>
-              <a:rPr sz="1600" i="0" b="0">
+                <a:spcPts val="321"/>
+              </a:spcAft>
+            </a:pPr>
+            <a:r>
+              <a:rPr sz="1500" i="0" b="0">
                 <a:solidFill>
                   <a:srgbClr val="858585"/>
                 </a:solidFill>
@@ -9273,7 +9273,7 @@
         <p:spPr>
           <a:xfrm>
             <a:off x="1188720" y="1719072"/>
-            <a:ext cx="10271455" cy="3864689"/>
+            <a:ext cx="10271455" cy="3663151"/>
           </a:xfrm>
           <a:prstGeom prst="rect">
             <a:avLst/>
@@ -9288,11 +9288,11 @@
           <a:p>
             <a:pPr>
               <a:spcAft>
-                <a:spcPts val="342"/>
-              </a:spcAft>
-            </a:pPr>
-            <a:r>
-              <a:rPr sz="1600" i="1" b="0">
+                <a:spcPts val="321"/>
+              </a:spcAft>
+            </a:pPr>
+            <a:r>
+              <a:rPr sz="1500" i="1" b="0">
                 <a:solidFill>
                   <a:srgbClr val="6A9955"/>
                 </a:solidFill>
@@ -9304,11 +9304,11 @@
           <a:p>
             <a:pPr>
               <a:spcAft>
-                <a:spcPts val="342"/>
-              </a:spcAft>
-            </a:pPr>
-            <a:r>
-              <a:rPr sz="1600" i="0" b="0">
+                <a:spcPts val="321"/>
+              </a:spcAft>
+            </a:pPr>
+            <a:r>
+              <a:rPr sz="1500" i="0" b="0">
                 <a:solidFill>
                   <a:srgbClr val="569CD6"/>
                 </a:solidFill>
@@ -9317,7 +9317,7 @@
               <a:t>private</a:t>
             </a:r>
             <a:r>
-              <a:rPr sz="1600" i="0" b="0">
+              <a:rPr sz="1500" i="0" b="0">
                 <a:solidFill>
                   <a:srgbClr val="D4D4D4"/>
                 </a:solidFill>
@@ -9326,7 +9326,7 @@
               <a:t> </a:t>
             </a:r>
             <a:r>
-              <a:rPr sz="1600" i="0" b="0">
+              <a:rPr sz="1500" i="0" b="0">
                 <a:solidFill>
                   <a:srgbClr val="569CD6"/>
                 </a:solidFill>
@@ -9335,7 +9335,7 @@
               <a:t>void</a:t>
             </a:r>
             <a:r>
-              <a:rPr sz="1600" i="0" b="0">
+              <a:rPr sz="1500" i="0" b="0">
                 <a:solidFill>
                   <a:srgbClr val="D4D4D4"/>
                 </a:solidFill>
@@ -9344,7 +9344,7 @@
               <a:t> </a:t>
             </a:r>
             <a:r>
-              <a:rPr sz="1600" i="0" b="0">
+              <a:rPr sz="1500" i="0" b="0">
                 <a:solidFill>
                   <a:srgbClr val="DCDCAA"/>
                 </a:solidFill>
@@ -9353,7 +9353,7 @@
               <a:t>registrarMascota</a:t>
             </a:r>
             <a:r>
-              <a:rPr sz="1600" i="0" b="0">
+              <a:rPr sz="1500" i="0" b="0">
                 <a:solidFill>
                   <a:srgbClr val="D4D4D4"/>
                 </a:solidFill>
@@ -9365,11 +9365,11 @@
           <a:p>
             <a:pPr>
               <a:spcAft>
-                <a:spcPts val="342"/>
-              </a:spcAft>
-            </a:pPr>
-            <a:r>
-              <a:rPr sz="1600" i="0" b="0">
+                <a:spcPts val="321"/>
+              </a:spcAft>
+            </a:pPr>
+            <a:r>
+              <a:rPr sz="1500" i="0" b="0">
                 <a:solidFill>
                   <a:srgbClr val="D4D4D4"/>
                 </a:solidFill>
@@ -9378,7 +9378,7 @@
               <a:t>    </a:t>
             </a:r>
             <a:r>
-              <a:rPr sz="1600" i="0" b="0">
+              <a:rPr sz="1500" i="0" b="0">
                 <a:solidFill>
                   <a:srgbClr val="569CD6"/>
                 </a:solidFill>
@@ -9387,7 +9387,7 @@
               <a:t>try</a:t>
             </a:r>
             <a:r>
-              <a:rPr sz="1600" i="0" b="0">
+              <a:rPr sz="1500" i="0" b="0">
                 <a:solidFill>
                   <a:srgbClr val="D4D4D4"/>
                 </a:solidFill>
@@ -9399,11 +9399,11 @@
           <a:p>
             <a:pPr>
               <a:spcAft>
-                <a:spcPts val="342"/>
-              </a:spcAft>
-            </a:pPr>
-            <a:r>
-              <a:rPr sz="1600" i="0" b="0">
+                <a:spcPts val="321"/>
+              </a:spcAft>
+            </a:pPr>
+            <a:r>
+              <a:rPr sz="1500" i="0" b="0">
                 <a:solidFill>
                   <a:srgbClr val="D4D4D4"/>
                 </a:solidFill>
@@ -9412,7 +9412,7 @@
               <a:t>        </a:t>
             </a:r>
             <a:r>
-              <a:rPr sz="1600" i="0" b="0">
+              <a:rPr sz="1500" i="0" b="0">
                 <a:solidFill>
                   <a:srgbClr val="D4D4D4"/>
                 </a:solidFill>
@@ -9421,7 +9421,7 @@
               <a:t>Mascota</a:t>
             </a:r>
             <a:r>
-              <a:rPr sz="1600" i="0" b="0">
+              <a:rPr sz="1500" i="0" b="0">
                 <a:solidFill>
                   <a:srgbClr val="D4D4D4"/>
                 </a:solidFill>
@@ -9430,7 +9430,7 @@
               <a:t> </a:t>
             </a:r>
             <a:r>
-              <a:rPr sz="1600" i="0" b="0">
+              <a:rPr sz="1500" i="0" b="0">
                 <a:solidFill>
                   <a:srgbClr val="D4D4D4"/>
                 </a:solidFill>
@@ -9439,7 +9439,7 @@
               <a:t>registrada</a:t>
             </a:r>
             <a:r>
-              <a:rPr sz="1600" i="0" b="0">
+              <a:rPr sz="1500" i="0" b="0">
                 <a:solidFill>
                   <a:srgbClr val="D4D4D4"/>
                 </a:solidFill>
@@ -9448,7 +9448,7 @@
               <a:t> = </a:t>
             </a:r>
             <a:r>
-              <a:rPr sz="1600" i="0" b="0">
+              <a:rPr sz="1500" i="0" b="0">
                 <a:solidFill>
                   <a:srgbClr val="DCDCAA"/>
                 </a:solidFill>
@@ -9457,7 +9457,7 @@
               <a:t>servicio.registrar</a:t>
             </a:r>
             <a:r>
-              <a:rPr sz="1600" i="0" b="0">
+              <a:rPr sz="1500" i="0" b="0">
                 <a:solidFill>
                   <a:srgbClr val="D4D4D4"/>
                 </a:solidFill>
@@ -9466,7 +9466,7 @@
               <a:t>(</a:t>
             </a:r>
             <a:r>
-              <a:rPr sz="1600" i="0" b="0">
+              <a:rPr sz="1500" i="0" b="0">
                 <a:solidFill>
                   <a:srgbClr val="DCDCAA"/>
                 </a:solidFill>
@@ -9475,7 +9475,7 @@
               <a:t>txtNombre.getText</a:t>
             </a:r>
             <a:r>
-              <a:rPr sz="1600" i="0" b="0">
+              <a:rPr sz="1500" i="0" b="0">
                 <a:solidFill>
                   <a:srgbClr val="D4D4D4"/>
                 </a:solidFill>
@@ -9484,7 +9484,7 @@
               <a:t>(), </a:t>
             </a:r>
             <a:r>
-              <a:rPr sz="1600" i="0" b="0">
+              <a:rPr sz="1500" i="0" b="0">
                 <a:solidFill>
                   <a:srgbClr val="DCDCAA"/>
                 </a:solidFill>
@@ -9493,7 +9493,7 @@
               <a:t>txtEspecie.getText</a:t>
             </a:r>
             <a:r>
-              <a:rPr sz="1600" i="0" b="0">
+              <a:rPr sz="1500" i="0" b="0">
                 <a:solidFill>
                   <a:srgbClr val="D4D4D4"/>
                 </a:solidFill>
@@ -9505,11 +9505,11 @@
           <a:p>
             <a:pPr>
               <a:spcAft>
-                <a:spcPts val="342"/>
-              </a:spcAft>
-            </a:pPr>
-            <a:r>
-              <a:rPr sz="1600" i="0" b="0">
+                <a:spcPts val="321"/>
+              </a:spcAft>
+            </a:pPr>
+            <a:r>
+              <a:rPr sz="1500" i="0" b="0">
                 <a:solidFill>
                   <a:srgbClr val="D4D4D4"/>
                 </a:solidFill>
@@ -9518,7 +9518,7 @@
               <a:t>                </a:t>
             </a:r>
             <a:r>
-              <a:rPr sz="1600" i="0" b="0">
+              <a:rPr sz="1500" i="0" b="0">
                 <a:solidFill>
                   <a:srgbClr val="DCDCAA"/>
                 </a:solidFill>
@@ -9527,7 +9527,7 @@
               <a:t>txtEdad.getText</a:t>
             </a:r>
             <a:r>
-              <a:rPr sz="1600" i="0" b="0">
+              <a:rPr sz="1500" i="0" b="0">
                 <a:solidFill>
                   <a:srgbClr val="D4D4D4"/>
                 </a:solidFill>
@@ -9536,7 +9536,7 @@
               <a:t>(), </a:t>
             </a:r>
             <a:r>
-              <a:rPr sz="1600" i="0" b="0">
+              <a:rPr sz="1500" i="0" b="0">
                 <a:solidFill>
                   <a:srgbClr val="DCDCAA"/>
                 </a:solidFill>
@@ -9545,7 +9545,7 @@
               <a:t>txtCedula.getText</a:t>
             </a:r>
             <a:r>
-              <a:rPr sz="1600" i="0" b="0">
+              <a:rPr sz="1500" i="0" b="0">
                 <a:solidFill>
                   <a:srgbClr val="D4D4D4"/>
                 </a:solidFill>
@@ -9557,11 +9557,11 @@
           <a:p>
             <a:pPr>
               <a:spcAft>
-                <a:spcPts val="342"/>
-              </a:spcAft>
-            </a:pPr>
-            <a:r>
-              <a:rPr sz="1600" i="0" b="0">
+                <a:spcPts val="321"/>
+              </a:spcAft>
+            </a:pPr>
+            <a:r>
+              <a:rPr sz="1500" i="0" b="0">
                 <a:solidFill>
                   <a:srgbClr val="D4D4D4"/>
                 </a:solidFill>
@@ -9570,7 +9570,7 @@
               <a:t>        </a:t>
             </a:r>
             <a:r>
-              <a:rPr sz="1600" i="0" b="0">
+              <a:rPr sz="1500" i="0" b="0">
                 <a:solidFill>
                   <a:srgbClr val="DCDCAA"/>
                 </a:solidFill>
@@ -9579,7 +9579,7 @@
               <a:t>refrescarTabla</a:t>
             </a:r>
             <a:r>
-              <a:rPr sz="1600" i="0" b="0">
+              <a:rPr sz="1500" i="0" b="0">
                 <a:solidFill>
                   <a:srgbClr val="D4D4D4"/>
                 </a:solidFill>
@@ -9591,11 +9591,11 @@
           <a:p>
             <a:pPr>
               <a:spcAft>
-                <a:spcPts val="342"/>
-              </a:spcAft>
-            </a:pPr>
-            <a:r>
-              <a:rPr sz="1600" i="0" b="0">
+                <a:spcPts val="321"/>
+              </a:spcAft>
+            </a:pPr>
+            <a:r>
+              <a:rPr sz="1500" i="0" b="0">
                 <a:solidFill>
                   <a:srgbClr val="D4D4D4"/>
                 </a:solidFill>
@@ -9604,7 +9604,7 @@
               <a:t>        </a:t>
             </a:r>
             <a:r>
-              <a:rPr sz="1600" i="0" b="0">
+              <a:rPr sz="1500" i="0" b="0">
                 <a:solidFill>
                   <a:srgbClr val="DCDCAA"/>
                 </a:solidFill>
@@ -9613,7 +9613,7 @@
               <a:t>limpiarFormulario</a:t>
             </a:r>
             <a:r>
-              <a:rPr sz="1600" i="0" b="0">
+              <a:rPr sz="1500" i="0" b="0">
                 <a:solidFill>
                   <a:srgbClr val="D4D4D4"/>
                 </a:solidFill>
@@ -9625,11 +9625,11 @@
           <a:p>
             <a:pPr>
               <a:spcAft>
-                <a:spcPts val="342"/>
-              </a:spcAft>
-            </a:pPr>
-            <a:r>
-              <a:rPr sz="1600" i="0" b="0">
+                <a:spcPts val="321"/>
+              </a:spcAft>
+            </a:pPr>
+            <a:r>
+              <a:rPr sz="1500" i="0" b="0">
                 <a:solidFill>
                   <a:srgbClr val="D4D4D4"/>
                 </a:solidFill>
@@ -9638,7 +9638,7 @@
               <a:t>        </a:t>
             </a:r>
             <a:r>
-              <a:rPr sz="1600" i="0" b="0">
+              <a:rPr sz="1500" i="0" b="0">
                 <a:solidFill>
                   <a:srgbClr val="DCDCAA"/>
                 </a:solidFill>
@@ -9647,7 +9647,7 @@
               <a:t>JOptionPane.showMessageDialog</a:t>
             </a:r>
             <a:r>
-              <a:rPr sz="1600" i="0" b="0">
+              <a:rPr sz="1500" i="0" b="0">
                 <a:solidFill>
                   <a:srgbClr val="D4D4D4"/>
                 </a:solidFill>
@@ -9656,7 +9656,7 @@
               <a:t>(</a:t>
             </a:r>
             <a:r>
-              <a:rPr sz="1600" i="0" b="0">
+              <a:rPr sz="1500" i="0" b="0">
                 <a:solidFill>
                   <a:srgbClr val="569CD6"/>
                 </a:solidFill>
@@ -9665,7 +9665,7 @@
               <a:t>this</a:t>
             </a:r>
             <a:r>
-              <a:rPr sz="1600" i="0" b="0">
+              <a:rPr sz="1500" i="0" b="0">
                 <a:solidFill>
                   <a:srgbClr val="D4D4D4"/>
                 </a:solidFill>
@@ -9674,7 +9674,7 @@
               <a:t>, </a:t>
             </a:r>
             <a:r>
-              <a:rPr sz="1600" i="0" b="0">
+              <a:rPr sz="1500" i="0" b="0">
                 <a:solidFill>
                   <a:srgbClr val="CE9178"/>
                 </a:solidFill>
@@ -9683,7 +9683,7 @@
               <a:t>"Mascota registrada con ID "</a:t>
             </a:r>
             <a:r>
-              <a:rPr sz="1600" i="0" b="0">
+              <a:rPr sz="1500" i="0" b="0">
                 <a:solidFill>
                   <a:srgbClr val="D4D4D4"/>
                 </a:solidFill>
@@ -9692,7 +9692,7 @@
               <a:t> + </a:t>
             </a:r>
             <a:r>
-              <a:rPr sz="1600" i="0" b="0">
+              <a:rPr sz="1500" i="0" b="0">
                 <a:solidFill>
                   <a:srgbClr val="DCDCAA"/>
                 </a:solidFill>
@@ -9701,7 +9701,7 @@
               <a:t>registrada.getId</a:t>
             </a:r>
             <a:r>
-              <a:rPr sz="1600" i="0" b="0">
+              <a:rPr sz="1500" i="0" b="0">
                 <a:solidFill>
                   <a:srgbClr val="D4D4D4"/>
                 </a:solidFill>
@@ -9713,11 +9713,11 @@
           <a:p>
             <a:pPr>
               <a:spcAft>
-                <a:spcPts val="342"/>
-              </a:spcAft>
-            </a:pPr>
-            <a:r>
-              <a:rPr sz="1600" i="0" b="0">
+                <a:spcPts val="321"/>
+              </a:spcAft>
+            </a:pPr>
+            <a:r>
+              <a:rPr sz="1500" i="0" b="0">
                 <a:solidFill>
                   <a:srgbClr val="D4D4D4"/>
                 </a:solidFill>
@@ -9726,7 +9726,7 @@
               <a:t>    } </a:t>
             </a:r>
             <a:r>
-              <a:rPr sz="1600" i="0" b="0">
+              <a:rPr sz="1500" i="0" b="0">
                 <a:solidFill>
                   <a:srgbClr val="569CD6"/>
                 </a:solidFill>
@@ -9735,7 +9735,7 @@
               <a:t>catch</a:t>
             </a:r>
             <a:r>
-              <a:rPr sz="1600" i="0" b="0">
+              <a:rPr sz="1500" i="0" b="0">
                 <a:solidFill>
                   <a:srgbClr val="D4D4D4"/>
                 </a:solidFill>
@@ -9744,7 +9744,7 @@
               <a:t> (</a:t>
             </a:r>
             <a:r>
-              <a:rPr sz="1600" i="0" b="0">
+              <a:rPr sz="1500" i="0" b="0">
                 <a:solidFill>
                   <a:srgbClr val="D4D4D4"/>
                 </a:solidFill>
@@ -9753,7 +9753,7 @@
               <a:t>DatosInvalidosException</a:t>
             </a:r>
             <a:r>
-              <a:rPr sz="1600" i="0" b="0">
+              <a:rPr sz="1500" i="0" b="0">
                 <a:solidFill>
                   <a:srgbClr val="D4D4D4"/>
                 </a:solidFill>
@@ -9762,7 +9762,7 @@
               <a:t> </a:t>
             </a:r>
             <a:r>
-              <a:rPr sz="1600" i="0" b="0">
+              <a:rPr sz="1500" i="0" b="0">
                 <a:solidFill>
                   <a:srgbClr val="D4D4D4"/>
                 </a:solidFill>
@@ -9771,7 +9771,7 @@
               <a:t>ex</a:t>
             </a:r>
             <a:r>
-              <a:rPr sz="1600" i="0" b="0">
+              <a:rPr sz="1500" i="0" b="0">
                 <a:solidFill>
                   <a:srgbClr val="D4D4D4"/>
                 </a:solidFill>
@@ -9783,11 +9783,11 @@
           <a:p>
             <a:pPr>
               <a:spcAft>
-                <a:spcPts val="342"/>
-              </a:spcAft>
-            </a:pPr>
-            <a:r>
-              <a:rPr sz="1600" i="0" b="0">
+                <a:spcPts val="321"/>
+              </a:spcAft>
+            </a:pPr>
+            <a:r>
+              <a:rPr sz="1500" i="0" b="0">
                 <a:solidFill>
                   <a:srgbClr val="D4D4D4"/>
                 </a:solidFill>
@@ -9796,7 +9796,7 @@
               <a:t>        </a:t>
             </a:r>
             <a:r>
-              <a:rPr sz="1600" i="0" b="0">
+              <a:rPr sz="1500" i="0" b="0">
                 <a:solidFill>
                   <a:srgbClr val="DCDCAA"/>
                 </a:solidFill>
@@ -9805,7 +9805,7 @@
               <a:t>JOptionPane.showMessageDialog</a:t>
             </a:r>
             <a:r>
-              <a:rPr sz="1600" i="0" b="0">
+              <a:rPr sz="1500" i="0" b="0">
                 <a:solidFill>
                   <a:srgbClr val="D4D4D4"/>
                 </a:solidFill>
@@ -9814,7 +9814,7 @@
               <a:t>(</a:t>
             </a:r>
             <a:r>
-              <a:rPr sz="1600" i="0" b="0">
+              <a:rPr sz="1500" i="0" b="0">
                 <a:solidFill>
                   <a:srgbClr val="569CD6"/>
                 </a:solidFill>
@@ -9823,7 +9823,7 @@
               <a:t>this</a:t>
             </a:r>
             <a:r>
-              <a:rPr sz="1600" i="0" b="0">
+              <a:rPr sz="1500" i="0" b="0">
                 <a:solidFill>
                   <a:srgbClr val="D4D4D4"/>
                 </a:solidFill>
@@ -9832,7 +9832,7 @@
               <a:t>, </a:t>
             </a:r>
             <a:r>
-              <a:rPr sz="1600" i="0" b="0">
+              <a:rPr sz="1500" i="0" b="0">
                 <a:solidFill>
                   <a:srgbClr val="DCDCAA"/>
                 </a:solidFill>
@@ -9841,7 +9841,7 @@
               <a:t>ex.getMessage</a:t>
             </a:r>
             <a:r>
-              <a:rPr sz="1600" i="0" b="0">
+              <a:rPr sz="1500" i="0" b="0">
                 <a:solidFill>
                   <a:srgbClr val="D4D4D4"/>
                 </a:solidFill>
@@ -9850,7 +9850,7 @@
               <a:t>(), </a:t>
             </a:r>
             <a:r>
-              <a:rPr sz="1600" i="0" b="0">
+              <a:rPr sz="1500" i="0" b="0">
                 <a:solidFill>
                   <a:srgbClr val="CE9178"/>
                 </a:solidFill>
@@ -9859,7 +9859,7 @@
               <a:t>"Datos invalidos"</a:t>
             </a:r>
             <a:r>
-              <a:rPr sz="1600" i="0" b="0">
+              <a:rPr sz="1500" i="0" b="0">
                 <a:solidFill>
                   <a:srgbClr val="D4D4D4"/>
                 </a:solidFill>
@@ -9871,11 +9871,11 @@
           <a:p>
             <a:pPr>
               <a:spcAft>
-                <a:spcPts val="342"/>
-              </a:spcAft>
-            </a:pPr>
-            <a:r>
-              <a:rPr sz="1600" i="0" b="0">
+                <a:spcPts val="321"/>
+              </a:spcAft>
+            </a:pPr>
+            <a:r>
+              <a:rPr sz="1500" i="0" b="0">
                 <a:solidFill>
                   <a:srgbClr val="D4D4D4"/>
                 </a:solidFill>
@@ -9884,7 +9884,7 @@
               <a:t>                </a:t>
             </a:r>
             <a:r>
-              <a:rPr sz="1600" i="0" b="0">
+              <a:rPr sz="1500" i="0" b="0">
                 <a:solidFill>
                   <a:srgbClr val="D4D4D4"/>
                 </a:solidFill>
@@ -9893,7 +9893,7 @@
               <a:t>JOptionPane</a:t>
             </a:r>
             <a:r>
-              <a:rPr sz="1600" i="0" b="0">
+              <a:rPr sz="1500" i="0" b="0">
                 <a:solidFill>
                   <a:srgbClr val="D4D4D4"/>
                 </a:solidFill>
@@ -9902,7 +9902,7 @@
               <a:t>.</a:t>
             </a:r>
             <a:r>
-              <a:rPr sz="1600" i="0" b="0">
+              <a:rPr sz="1500" i="0" b="0">
                 <a:solidFill>
                   <a:srgbClr val="D4D4D4"/>
                 </a:solidFill>
@@ -9911,7 +9911,7 @@
               <a:t>WARNING_MESSAGE</a:t>
             </a:r>
             <a:r>
-              <a:rPr sz="1600" i="0" b="0">
+              <a:rPr sz="1500" i="0" b="0">
                 <a:solidFill>
                   <a:srgbClr val="D4D4D4"/>
                 </a:solidFill>
@@ -9923,11 +9923,11 @@
           <a:p>
             <a:pPr>
               <a:spcAft>
-                <a:spcPts val="342"/>
-              </a:spcAft>
-            </a:pPr>
-            <a:r>
-              <a:rPr sz="1600" i="0" b="0">
+                <a:spcPts val="321"/>
+              </a:spcAft>
+            </a:pPr>
+            <a:r>
+              <a:rPr sz="1500" i="0" b="0">
                 <a:solidFill>
                   <a:srgbClr val="D4D4D4"/>
                 </a:solidFill>
@@ -9939,11 +9939,11 @@
           <a:p>
             <a:pPr>
               <a:spcAft>
-                <a:spcPts val="342"/>
-              </a:spcAft>
-            </a:pPr>
-            <a:r>
-              <a:rPr sz="1600" i="0" b="0">
+                <a:spcPts val="321"/>
+              </a:spcAft>
+            </a:pPr>
+            <a:r>
+              <a:rPr sz="1500" i="0" b="0">
                 <a:solidFill>
                   <a:srgbClr val="D4D4D4"/>
                 </a:solidFill>
@@ -12489,7 +12489,7 @@
         <p:spPr>
           <a:xfrm>
             <a:off x="457200" y="1261872"/>
-            <a:ext cx="11277295" cy="3448208"/>
+            <a:ext cx="11277295" cy="2456021"/>
           </a:xfrm>
           <a:prstGeom prst="roundRect">
             <a:avLst>
@@ -12738,8 +12738,8 @@
         </p:nvSpPr>
         <p:spPr>
           <a:xfrm>
-            <a:off x="1188720" y="1719072"/>
-            <a:ext cx="10271455" cy="2853848"/>
+            <a:off x="685800" y="1719072"/>
+            <a:ext cx="502920" cy="1861661"/>
           </a:xfrm>
           <a:prstGeom prst="rect">
             <a:avLst/>
@@ -12752,504 +12752,99 @@
           </a:bodyPr>
           <a:lstStyle/>
           <a:p>
-            <a:pPr>
-              <a:spcAft>
-                <a:spcPts val="428"/>
-              </a:spcAft>
-            </a:pPr>
-            <a:r>
-              <a:rPr sz="2000" i="0" b="0">
-                <a:solidFill>
-                  <a:srgbClr val="569CD6"/>
-                </a:solidFill>
-                <a:latin typeface="Consolas"/>
-              </a:rPr>
-              <a:t>public</a:t>
-            </a:r>
-            <a:r>
-              <a:rPr sz="2000" i="0" b="0">
-                <a:solidFill>
-                  <a:srgbClr val="D4D4D4"/>
-                </a:solidFill>
-                <a:latin typeface="Consolas"/>
-              </a:rPr>
-              <a:t> </a:t>
-            </a:r>
-            <a:r>
-              <a:rPr sz="2000" i="0" b="0">
-                <a:solidFill>
-                  <a:srgbClr val="569CD6"/>
-                </a:solidFill>
-                <a:latin typeface="Consolas"/>
-              </a:rPr>
-              <a:t>static</a:t>
-            </a:r>
-            <a:r>
-              <a:rPr sz="2000" i="0" b="0">
-                <a:solidFill>
-                  <a:srgbClr val="D4D4D4"/>
-                </a:solidFill>
-                <a:latin typeface="Consolas"/>
-              </a:rPr>
-              <a:t> </a:t>
-            </a:r>
-            <a:r>
-              <a:rPr sz="2000" i="0" b="0">
-                <a:solidFill>
-                  <a:srgbClr val="569CD6"/>
-                </a:solidFill>
-                <a:latin typeface="Consolas"/>
-              </a:rPr>
-              <a:t>void</a:t>
-            </a:r>
-            <a:r>
-              <a:rPr sz="2000" i="0" b="0">
-                <a:solidFill>
-                  <a:srgbClr val="D4D4D4"/>
-                </a:solidFill>
-                <a:latin typeface="Consolas"/>
-              </a:rPr>
-              <a:t> </a:t>
-            </a:r>
-            <a:r>
-              <a:rPr sz="2000" i="0" b="0">
-                <a:solidFill>
-                  <a:srgbClr val="DCDCAA"/>
-                </a:solidFill>
-                <a:latin typeface="Consolas"/>
-              </a:rPr>
-              <a:t>main</a:t>
-            </a:r>
-            <a:r>
-              <a:rPr sz="2000" i="0" b="0">
-                <a:solidFill>
-                  <a:srgbClr val="D4D4D4"/>
-                </a:solidFill>
-                <a:latin typeface="Consolas"/>
-              </a:rPr>
-              <a:t>(</a:t>
-            </a:r>
-            <a:r>
-              <a:rPr sz="2000" i="0" b="0">
-                <a:solidFill>
-                  <a:srgbClr val="4EC9B0"/>
-                </a:solidFill>
-                <a:latin typeface="Consolas"/>
-              </a:rPr>
-              <a:t>String</a:t>
-            </a:r>
-            <a:r>
-              <a:rPr sz="2000" i="0" b="0">
-                <a:solidFill>
-                  <a:srgbClr val="D4D4D4"/>
-                </a:solidFill>
-                <a:latin typeface="Consolas"/>
-              </a:rPr>
-              <a:t>[] </a:t>
-            </a:r>
-            <a:r>
-              <a:rPr sz="2000" i="0" b="0">
-                <a:solidFill>
-                  <a:srgbClr val="D4D4D4"/>
-                </a:solidFill>
-                <a:latin typeface="Consolas"/>
-              </a:rPr>
-              <a:t>args</a:t>
-            </a:r>
-            <a:r>
-              <a:rPr sz="2000" i="0" b="0">
-                <a:solidFill>
-                  <a:srgbClr val="D4D4D4"/>
-                </a:solidFill>
-                <a:latin typeface="Consolas"/>
-              </a:rPr>
-              <a:t>) {</a:t>
-            </a:r>
-          </a:p>
-          <a:p>
-            <a:pPr>
-              <a:spcAft>
-                <a:spcPts val="428"/>
-              </a:spcAft>
-            </a:pPr>
-            <a:r>
-              <a:rPr sz="2000" i="0" b="0">
-                <a:solidFill>
-                  <a:srgbClr val="D4D4D4"/>
-                </a:solidFill>
-                <a:latin typeface="Consolas"/>
-              </a:rPr>
-              <a:t>    </a:t>
-            </a:r>
-            <a:r>
-              <a:rPr sz="2000" i="0" b="0">
-                <a:solidFill>
-                  <a:srgbClr val="D4D4D4"/>
-                </a:solidFill>
-                <a:latin typeface="Consolas"/>
-              </a:rPr>
-              <a:t>RepositorioMascotasCSV</a:t>
-            </a:r>
-            <a:r>
-              <a:rPr sz="2000" i="0" b="0">
-                <a:solidFill>
-                  <a:srgbClr val="D4D4D4"/>
-                </a:solidFill>
-                <a:latin typeface="Consolas"/>
-              </a:rPr>
-              <a:t> </a:t>
-            </a:r>
-            <a:r>
-              <a:rPr sz="2000" i="0" b="0">
-                <a:solidFill>
-                  <a:srgbClr val="D4D4D4"/>
-                </a:solidFill>
-                <a:latin typeface="Consolas"/>
-              </a:rPr>
-              <a:t>repositorio</a:t>
-            </a:r>
-            <a:r>
-              <a:rPr sz="2000" i="0" b="0">
-                <a:solidFill>
-                  <a:srgbClr val="D4D4D4"/>
-                </a:solidFill>
-                <a:latin typeface="Consolas"/>
-              </a:rPr>
-              <a:t> = </a:t>
-            </a:r>
-            <a:r>
-              <a:rPr sz="2000" i="0" b="0">
-                <a:solidFill>
-                  <a:srgbClr val="569CD6"/>
-                </a:solidFill>
-                <a:latin typeface="Consolas"/>
-              </a:rPr>
-              <a:t>new</a:t>
-            </a:r>
-            <a:r>
-              <a:rPr sz="2000" i="0" b="0">
-                <a:solidFill>
-                  <a:srgbClr val="D4D4D4"/>
-                </a:solidFill>
-                <a:latin typeface="Consolas"/>
-              </a:rPr>
-              <a:t> </a:t>
-            </a:r>
-            <a:r>
-              <a:rPr sz="2000" i="0" b="0">
-                <a:solidFill>
-                  <a:srgbClr val="4EC9B0"/>
-                </a:solidFill>
-                <a:latin typeface="Consolas"/>
-              </a:rPr>
-              <a:t>RepositorioMascotasCSV</a:t>
-            </a:r>
-            <a:r>
-              <a:rPr sz="2000" i="0" b="0">
-                <a:solidFill>
-                  <a:srgbClr val="D4D4D4"/>
-                </a:solidFill>
-                <a:latin typeface="Consolas"/>
-              </a:rPr>
-              <a:t>(</a:t>
-            </a:r>
-            <a:r>
-              <a:rPr sz="2000" i="0" b="0">
-                <a:solidFill>
-                  <a:srgbClr val="CE9178"/>
-                </a:solidFill>
-                <a:latin typeface="Consolas"/>
-              </a:rPr>
-              <a:t>"mascotas.csv"</a:t>
-            </a:r>
-            <a:r>
-              <a:rPr sz="2000" i="0" b="0">
-                <a:solidFill>
-                  <a:srgbClr val="D4D4D4"/>
-                </a:solidFill>
-                <a:latin typeface="Consolas"/>
-              </a:rPr>
-              <a:t>);</a:t>
-            </a:r>
-          </a:p>
-          <a:p>
-            <a:pPr>
-              <a:spcAft>
-                <a:spcPts val="428"/>
-              </a:spcAft>
-            </a:pPr>
-            <a:r>
-              <a:rPr sz="2000" i="0" b="0">
-                <a:solidFill>
-                  <a:srgbClr val="D4D4D4"/>
-                </a:solidFill>
-                <a:latin typeface="Consolas"/>
-              </a:rPr>
-              <a:t>    </a:t>
-            </a:r>
-            <a:r>
-              <a:rPr sz="2000" i="0" b="0">
-                <a:solidFill>
-                  <a:srgbClr val="D4D4D4"/>
-                </a:solidFill>
-                <a:latin typeface="Consolas"/>
-              </a:rPr>
-              <a:t>ServicioClinica</a:t>
-            </a:r>
-            <a:r>
-              <a:rPr sz="2000" i="0" b="0">
-                <a:solidFill>
-                  <a:srgbClr val="D4D4D4"/>
-                </a:solidFill>
-                <a:latin typeface="Consolas"/>
-              </a:rPr>
-              <a:t> </a:t>
-            </a:r>
-            <a:r>
-              <a:rPr sz="2000" i="0" b="0">
-                <a:solidFill>
-                  <a:srgbClr val="D4D4D4"/>
-                </a:solidFill>
-                <a:latin typeface="Consolas"/>
-              </a:rPr>
-              <a:t>servicio</a:t>
-            </a:r>
-            <a:r>
-              <a:rPr sz="2000" i="0" b="0">
-                <a:solidFill>
-                  <a:srgbClr val="D4D4D4"/>
-                </a:solidFill>
-                <a:latin typeface="Consolas"/>
-              </a:rPr>
-              <a:t> = </a:t>
-            </a:r>
-            <a:r>
-              <a:rPr sz="2000" i="0" b="0">
-                <a:solidFill>
-                  <a:srgbClr val="569CD6"/>
-                </a:solidFill>
-                <a:latin typeface="Consolas"/>
-              </a:rPr>
-              <a:t>new</a:t>
-            </a:r>
-            <a:r>
-              <a:rPr sz="2000" i="0" b="0">
-                <a:solidFill>
-                  <a:srgbClr val="D4D4D4"/>
-                </a:solidFill>
-                <a:latin typeface="Consolas"/>
-              </a:rPr>
-              <a:t> </a:t>
-            </a:r>
-            <a:r>
-              <a:rPr sz="2000" i="0" b="0">
-                <a:solidFill>
-                  <a:srgbClr val="4EC9B0"/>
-                </a:solidFill>
-                <a:latin typeface="Consolas"/>
-              </a:rPr>
-              <a:t>ServicioClinica</a:t>
-            </a:r>
-            <a:r>
-              <a:rPr sz="2000" i="0" b="0">
-                <a:solidFill>
-                  <a:srgbClr val="D4D4D4"/>
-                </a:solidFill>
-                <a:latin typeface="Consolas"/>
-              </a:rPr>
-              <a:t>(</a:t>
-            </a:r>
-            <a:r>
-              <a:rPr sz="2000" i="0" b="0">
-                <a:solidFill>
-                  <a:srgbClr val="D4D4D4"/>
-                </a:solidFill>
-                <a:latin typeface="Consolas"/>
-              </a:rPr>
-              <a:t>repositorio</a:t>
-            </a:r>
-            <a:r>
-              <a:rPr sz="2000" i="0" b="0">
-                <a:solidFill>
-                  <a:srgbClr val="D4D4D4"/>
-                </a:solidFill>
-                <a:latin typeface="Consolas"/>
-              </a:rPr>
-              <a:t>);</a:t>
-            </a:r>
-          </a:p>
-          <a:p>
-            <a:pPr>
-              <a:spcAft>
-                <a:spcPts val="428"/>
-              </a:spcAft>
-            </a:pPr>
-            <a:r>
-              <a:rPr sz="2000" i="0" b="0">
-                <a:solidFill>
-                  <a:srgbClr val="D4D4D4"/>
-                </a:solidFill>
-                <a:latin typeface="Consolas"/>
-              </a:rPr>
-              <a:t>    </a:t>
-            </a:r>
-            <a:r>
-              <a:rPr sz="2000" i="0" b="0">
-                <a:solidFill>
-                  <a:srgbClr val="DCDCAA"/>
-                </a:solidFill>
-                <a:latin typeface="Consolas"/>
-              </a:rPr>
-              <a:t>servicio.cargarDesdeArchivo</a:t>
-            </a:r>
-            <a:r>
-              <a:rPr sz="2000" i="0" b="0">
-                <a:solidFill>
-                  <a:srgbClr val="D4D4D4"/>
-                </a:solidFill>
-                <a:latin typeface="Consolas"/>
-              </a:rPr>
-              <a:t>();</a:t>
-            </a:r>
-          </a:p>
-          <a:p>
-            <a:pPr>
-              <a:spcAft>
-                <a:spcPts val="428"/>
-              </a:spcAft>
-            </a:pPr>
-            <a:r>
-              <a:rPr sz="2000" i="0" b="0">
-                <a:solidFill>
-                  <a:srgbClr val="D4D4D4"/>
-                </a:solidFill>
-                <a:latin typeface="Consolas"/>
-              </a:rPr>
-              <a:t>    </a:t>
-            </a:r>
-            <a:r>
-              <a:rPr sz="2000" i="0" b="0">
-                <a:solidFill>
-                  <a:srgbClr val="DCDCAA"/>
-                </a:solidFill>
-                <a:latin typeface="Consolas"/>
-              </a:rPr>
-              <a:t>SwingUtilities.invokeLater</a:t>
-            </a:r>
-            <a:r>
-              <a:rPr sz="2000" i="0" b="0">
-                <a:solidFill>
-                  <a:srgbClr val="D4D4D4"/>
-                </a:solidFill>
-                <a:latin typeface="Consolas"/>
-              </a:rPr>
-              <a:t>(() -&gt; </a:t>
-            </a:r>
-            <a:r>
-              <a:rPr sz="2000" i="0" b="0">
-                <a:solidFill>
-                  <a:srgbClr val="569CD6"/>
-                </a:solidFill>
-                <a:latin typeface="Consolas"/>
-              </a:rPr>
-              <a:t>new</a:t>
-            </a:r>
-            <a:r>
-              <a:rPr sz="2000" i="0" b="0">
-                <a:solidFill>
-                  <a:srgbClr val="D4D4D4"/>
-                </a:solidFill>
-                <a:latin typeface="Consolas"/>
-              </a:rPr>
-              <a:t> </a:t>
-            </a:r>
-            <a:r>
-              <a:rPr sz="2000" i="0" b="0">
-                <a:solidFill>
-                  <a:srgbClr val="4EC9B0"/>
-                </a:solidFill>
-                <a:latin typeface="Consolas"/>
-              </a:rPr>
-              <a:t>ClinicaApp</a:t>
-            </a:r>
-            <a:r>
-              <a:rPr sz="2000" i="0" b="0">
-                <a:solidFill>
-                  <a:srgbClr val="D4D4D4"/>
-                </a:solidFill>
-                <a:latin typeface="Consolas"/>
-              </a:rPr>
-              <a:t>(</a:t>
-            </a:r>
-            <a:r>
-              <a:rPr sz="2000" i="0" b="0">
-                <a:solidFill>
-                  <a:srgbClr val="D4D4D4"/>
-                </a:solidFill>
-                <a:latin typeface="Consolas"/>
-              </a:rPr>
-              <a:t>servicio</a:t>
-            </a:r>
-            <a:r>
-              <a:rPr sz="2000" i="0" b="0">
-                <a:solidFill>
-                  <a:srgbClr val="D4D4D4"/>
-                </a:solidFill>
-                <a:latin typeface="Consolas"/>
-              </a:rPr>
-              <a:t>).</a:t>
-            </a:r>
-            <a:r>
-              <a:rPr sz="2000" i="0" b="0">
-                <a:solidFill>
-                  <a:srgbClr val="DCDCAA"/>
-                </a:solidFill>
-                <a:latin typeface="Consolas"/>
-              </a:rPr>
-              <a:t>setVisible</a:t>
-            </a:r>
-            <a:r>
-              <a:rPr sz="2000" i="0" b="0">
-                <a:solidFill>
-                  <a:srgbClr val="D4D4D4"/>
-                </a:solidFill>
-                <a:latin typeface="Consolas"/>
-              </a:rPr>
-              <a:t>(</a:t>
-            </a:r>
-            <a:r>
-              <a:rPr sz="2000" i="0" b="0">
-                <a:solidFill>
-                  <a:srgbClr val="569CD6"/>
-                </a:solidFill>
-                <a:latin typeface="Consolas"/>
-              </a:rPr>
-              <a:t>true</a:t>
-            </a:r>
-            <a:r>
-              <a:rPr sz="2000" i="0" b="0">
-                <a:solidFill>
-                  <a:srgbClr val="D4D4D4"/>
-                </a:solidFill>
-                <a:latin typeface="Consolas"/>
-              </a:rPr>
-              <a:t>));</a:t>
-            </a:r>
-          </a:p>
-          <a:p>
-            <a:pPr>
-              <a:spcAft>
-                <a:spcPts val="428"/>
-              </a:spcAft>
-            </a:pPr>
-            <a:r>
-              <a:rPr sz="2000" i="0" b="0">
-                <a:solidFill>
-                  <a:srgbClr val="D4D4D4"/>
-                </a:solidFill>
-                <a:latin typeface="Consolas"/>
-              </a:rPr>
-              <a:t>}</a:t>
+            <a:pPr algn="r">
+              <a:spcAft>
+                <a:spcPts val="342"/>
+              </a:spcAft>
+            </a:pPr>
+            <a:r>
+              <a:rPr sz="1600" i="0" b="0">
+                <a:solidFill>
+                  <a:srgbClr val="858585"/>
+                </a:solidFill>
+                <a:latin typeface="Consolas"/>
+              </a:rPr>
+              <a:t>1</a:t>
+            </a:r>
+          </a:p>
+          <a:p>
+            <a:pPr algn="r">
+              <a:spcAft>
+                <a:spcPts val="342"/>
+              </a:spcAft>
+            </a:pPr>
+            <a:r>
+              <a:rPr sz="1600" i="0" b="0">
+                <a:solidFill>
+                  <a:srgbClr val="858585"/>
+                </a:solidFill>
+                <a:latin typeface="Consolas"/>
+              </a:rPr>
+              <a:t>2</a:t>
+            </a:r>
+          </a:p>
+          <a:p>
+            <a:pPr algn="r">
+              <a:spcAft>
+                <a:spcPts val="342"/>
+              </a:spcAft>
+            </a:pPr>
+            <a:r>
+              <a:rPr sz="1600" i="0" b="0">
+                <a:solidFill>
+                  <a:srgbClr val="858585"/>
+                </a:solidFill>
+                <a:latin typeface="Consolas"/>
+              </a:rPr>
+              <a:t>3</a:t>
+            </a:r>
+          </a:p>
+          <a:p>
+            <a:pPr algn="r">
+              <a:spcAft>
+                <a:spcPts val="342"/>
+              </a:spcAft>
+            </a:pPr>
+            <a:r>
+              <a:rPr sz="1600" i="0" b="0">
+                <a:solidFill>
+                  <a:srgbClr val="858585"/>
+                </a:solidFill>
+                <a:latin typeface="Consolas"/>
+              </a:rPr>
+              <a:t>4</a:t>
+            </a:r>
+          </a:p>
+          <a:p>
+            <a:pPr algn="r">
+              <a:spcAft>
+                <a:spcPts val="342"/>
+              </a:spcAft>
+            </a:pPr>
+            <a:r>
+              <a:rPr sz="1600" i="0" b="0">
+                <a:solidFill>
+                  <a:srgbClr val="858585"/>
+                </a:solidFill>
+                <a:latin typeface="Consolas"/>
+              </a:rPr>
+              <a:t>5</a:t>
+            </a:r>
+          </a:p>
+          <a:p>
+            <a:pPr algn="r">
+              <a:spcAft>
+                <a:spcPts val="342"/>
+              </a:spcAft>
+            </a:pPr>
+            <a:r>
+              <a:rPr sz="1600" i="0" b="0">
+                <a:solidFill>
+                  <a:srgbClr val="858585"/>
+                </a:solidFill>
+                <a:latin typeface="Consolas"/>
+              </a:rPr>
+              <a:t>6</a:t>
             </a:r>
           </a:p>
         </p:txBody>
@@ -13262,8 +12857,8 @@
         </p:nvSpPr>
         <p:spPr>
           <a:xfrm>
-            <a:off x="457200" y="6035040"/>
-            <a:ext cx="11277295" cy="365760"/>
+            <a:off x="1188720" y="1719072"/>
+            <a:ext cx="10271455" cy="1861661"/>
           </a:xfrm>
           <a:prstGeom prst="rect">
             <a:avLst/>
@@ -13276,6 +12871,530 @@
           </a:bodyPr>
           <a:lstStyle/>
           <a:p>
+            <a:pPr>
+              <a:spcAft>
+                <a:spcPts val="342"/>
+              </a:spcAft>
+            </a:pPr>
+            <a:r>
+              <a:rPr sz="1600" i="0" b="0">
+                <a:solidFill>
+                  <a:srgbClr val="569CD6"/>
+                </a:solidFill>
+                <a:latin typeface="Consolas"/>
+              </a:rPr>
+              <a:t>public</a:t>
+            </a:r>
+            <a:r>
+              <a:rPr sz="1600" i="0" b="0">
+                <a:solidFill>
+                  <a:srgbClr val="D4D4D4"/>
+                </a:solidFill>
+                <a:latin typeface="Consolas"/>
+              </a:rPr>
+              <a:t> </a:t>
+            </a:r>
+            <a:r>
+              <a:rPr sz="1600" i="0" b="0">
+                <a:solidFill>
+                  <a:srgbClr val="569CD6"/>
+                </a:solidFill>
+                <a:latin typeface="Consolas"/>
+              </a:rPr>
+              <a:t>static</a:t>
+            </a:r>
+            <a:r>
+              <a:rPr sz="1600" i="0" b="0">
+                <a:solidFill>
+                  <a:srgbClr val="D4D4D4"/>
+                </a:solidFill>
+                <a:latin typeface="Consolas"/>
+              </a:rPr>
+              <a:t> </a:t>
+            </a:r>
+            <a:r>
+              <a:rPr sz="1600" i="0" b="0">
+                <a:solidFill>
+                  <a:srgbClr val="569CD6"/>
+                </a:solidFill>
+                <a:latin typeface="Consolas"/>
+              </a:rPr>
+              <a:t>void</a:t>
+            </a:r>
+            <a:r>
+              <a:rPr sz="1600" i="0" b="0">
+                <a:solidFill>
+                  <a:srgbClr val="D4D4D4"/>
+                </a:solidFill>
+                <a:latin typeface="Consolas"/>
+              </a:rPr>
+              <a:t> </a:t>
+            </a:r>
+            <a:r>
+              <a:rPr sz="1600" i="0" b="0">
+                <a:solidFill>
+                  <a:srgbClr val="DCDCAA"/>
+                </a:solidFill>
+                <a:latin typeface="Consolas"/>
+              </a:rPr>
+              <a:t>main</a:t>
+            </a:r>
+            <a:r>
+              <a:rPr sz="1600" i="0" b="0">
+                <a:solidFill>
+                  <a:srgbClr val="D4D4D4"/>
+                </a:solidFill>
+                <a:latin typeface="Consolas"/>
+              </a:rPr>
+              <a:t>(</a:t>
+            </a:r>
+            <a:r>
+              <a:rPr sz="1600" i="0" b="0">
+                <a:solidFill>
+                  <a:srgbClr val="4EC9B0"/>
+                </a:solidFill>
+                <a:latin typeface="Consolas"/>
+              </a:rPr>
+              <a:t>String</a:t>
+            </a:r>
+            <a:r>
+              <a:rPr sz="1600" i="0" b="0">
+                <a:solidFill>
+                  <a:srgbClr val="D4D4D4"/>
+                </a:solidFill>
+                <a:latin typeface="Consolas"/>
+              </a:rPr>
+              <a:t>[] </a:t>
+            </a:r>
+            <a:r>
+              <a:rPr sz="1600" i="0" b="0">
+                <a:solidFill>
+                  <a:srgbClr val="D4D4D4"/>
+                </a:solidFill>
+                <a:latin typeface="Consolas"/>
+              </a:rPr>
+              <a:t>args</a:t>
+            </a:r>
+            <a:r>
+              <a:rPr sz="1600" i="0" b="0">
+                <a:solidFill>
+                  <a:srgbClr val="D4D4D4"/>
+                </a:solidFill>
+                <a:latin typeface="Consolas"/>
+              </a:rPr>
+              <a:t>) {</a:t>
+            </a:r>
+          </a:p>
+          <a:p>
+            <a:pPr>
+              <a:spcAft>
+                <a:spcPts val="342"/>
+              </a:spcAft>
+            </a:pPr>
+            <a:r>
+              <a:rPr sz="1600" i="0" b="0">
+                <a:solidFill>
+                  <a:srgbClr val="D4D4D4"/>
+                </a:solidFill>
+                <a:latin typeface="Consolas"/>
+              </a:rPr>
+              <a:t>    </a:t>
+            </a:r>
+            <a:r>
+              <a:rPr sz="1600" i="0" b="0">
+                <a:solidFill>
+                  <a:srgbClr val="D4D4D4"/>
+                </a:solidFill>
+                <a:latin typeface="Consolas"/>
+              </a:rPr>
+              <a:t>RepositorioMascotasCSV</a:t>
+            </a:r>
+            <a:r>
+              <a:rPr sz="1600" i="0" b="0">
+                <a:solidFill>
+                  <a:srgbClr val="D4D4D4"/>
+                </a:solidFill>
+                <a:latin typeface="Consolas"/>
+              </a:rPr>
+              <a:t> </a:t>
+            </a:r>
+            <a:r>
+              <a:rPr sz="1600" i="0" b="0">
+                <a:solidFill>
+                  <a:srgbClr val="D4D4D4"/>
+                </a:solidFill>
+                <a:latin typeface="Consolas"/>
+              </a:rPr>
+              <a:t>repositorio</a:t>
+            </a:r>
+            <a:r>
+              <a:rPr sz="1600" i="0" b="0">
+                <a:solidFill>
+                  <a:srgbClr val="D4D4D4"/>
+                </a:solidFill>
+                <a:latin typeface="Consolas"/>
+              </a:rPr>
+              <a:t> = </a:t>
+            </a:r>
+            <a:r>
+              <a:rPr sz="1600" i="0" b="0">
+                <a:solidFill>
+                  <a:srgbClr val="569CD6"/>
+                </a:solidFill>
+                <a:latin typeface="Consolas"/>
+              </a:rPr>
+              <a:t>new</a:t>
+            </a:r>
+            <a:r>
+              <a:rPr sz="1600" i="0" b="0">
+                <a:solidFill>
+                  <a:srgbClr val="D4D4D4"/>
+                </a:solidFill>
+                <a:latin typeface="Consolas"/>
+              </a:rPr>
+              <a:t> </a:t>
+            </a:r>
+            <a:r>
+              <a:rPr sz="1600" i="0" b="0">
+                <a:solidFill>
+                  <a:srgbClr val="4EC9B0"/>
+                </a:solidFill>
+                <a:latin typeface="Consolas"/>
+              </a:rPr>
+              <a:t>RepositorioMascotasCSV</a:t>
+            </a:r>
+            <a:r>
+              <a:rPr sz="1600" i="0" b="0">
+                <a:solidFill>
+                  <a:srgbClr val="D4D4D4"/>
+                </a:solidFill>
+                <a:latin typeface="Consolas"/>
+              </a:rPr>
+              <a:t>(</a:t>
+            </a:r>
+            <a:r>
+              <a:rPr sz="1600" i="0" b="0">
+                <a:solidFill>
+                  <a:srgbClr val="CE9178"/>
+                </a:solidFill>
+                <a:latin typeface="Consolas"/>
+              </a:rPr>
+              <a:t>"mascotas.csv"</a:t>
+            </a:r>
+            <a:r>
+              <a:rPr sz="1600" i="0" b="0">
+                <a:solidFill>
+                  <a:srgbClr val="D4D4D4"/>
+                </a:solidFill>
+                <a:latin typeface="Consolas"/>
+              </a:rPr>
+              <a:t>);</a:t>
+            </a:r>
+          </a:p>
+          <a:p>
+            <a:pPr>
+              <a:spcAft>
+                <a:spcPts val="342"/>
+              </a:spcAft>
+            </a:pPr>
+            <a:r>
+              <a:rPr sz="1600" i="0" b="0">
+                <a:solidFill>
+                  <a:srgbClr val="D4D4D4"/>
+                </a:solidFill>
+                <a:latin typeface="Consolas"/>
+              </a:rPr>
+              <a:t>    </a:t>
+            </a:r>
+            <a:r>
+              <a:rPr sz="1600" i="0" b="0">
+                <a:solidFill>
+                  <a:srgbClr val="D4D4D4"/>
+                </a:solidFill>
+                <a:latin typeface="Consolas"/>
+              </a:rPr>
+              <a:t>ServicioClinica</a:t>
+            </a:r>
+            <a:r>
+              <a:rPr sz="1600" i="0" b="0">
+                <a:solidFill>
+                  <a:srgbClr val="D4D4D4"/>
+                </a:solidFill>
+                <a:latin typeface="Consolas"/>
+              </a:rPr>
+              <a:t> </a:t>
+            </a:r>
+            <a:r>
+              <a:rPr sz="1600" i="0" b="0">
+                <a:solidFill>
+                  <a:srgbClr val="D4D4D4"/>
+                </a:solidFill>
+                <a:latin typeface="Consolas"/>
+              </a:rPr>
+              <a:t>servicio</a:t>
+            </a:r>
+            <a:r>
+              <a:rPr sz="1600" i="0" b="0">
+                <a:solidFill>
+                  <a:srgbClr val="D4D4D4"/>
+                </a:solidFill>
+                <a:latin typeface="Consolas"/>
+              </a:rPr>
+              <a:t> = </a:t>
+            </a:r>
+            <a:r>
+              <a:rPr sz="1600" i="0" b="0">
+                <a:solidFill>
+                  <a:srgbClr val="569CD6"/>
+                </a:solidFill>
+                <a:latin typeface="Consolas"/>
+              </a:rPr>
+              <a:t>new</a:t>
+            </a:r>
+            <a:r>
+              <a:rPr sz="1600" i="0" b="0">
+                <a:solidFill>
+                  <a:srgbClr val="D4D4D4"/>
+                </a:solidFill>
+                <a:latin typeface="Consolas"/>
+              </a:rPr>
+              <a:t> </a:t>
+            </a:r>
+            <a:r>
+              <a:rPr sz="1600" i="0" b="0">
+                <a:solidFill>
+                  <a:srgbClr val="4EC9B0"/>
+                </a:solidFill>
+                <a:latin typeface="Consolas"/>
+              </a:rPr>
+              <a:t>ServicioClinica</a:t>
+            </a:r>
+            <a:r>
+              <a:rPr sz="1600" i="0" b="0">
+                <a:solidFill>
+                  <a:srgbClr val="D4D4D4"/>
+                </a:solidFill>
+                <a:latin typeface="Consolas"/>
+              </a:rPr>
+              <a:t>(</a:t>
+            </a:r>
+            <a:r>
+              <a:rPr sz="1600" i="0" b="0">
+                <a:solidFill>
+                  <a:srgbClr val="D4D4D4"/>
+                </a:solidFill>
+                <a:latin typeface="Consolas"/>
+              </a:rPr>
+              <a:t>repositorio</a:t>
+            </a:r>
+            <a:r>
+              <a:rPr sz="1600" i="0" b="0">
+                <a:solidFill>
+                  <a:srgbClr val="D4D4D4"/>
+                </a:solidFill>
+                <a:latin typeface="Consolas"/>
+              </a:rPr>
+              <a:t>);</a:t>
+            </a:r>
+          </a:p>
+          <a:p>
+            <a:pPr>
+              <a:spcAft>
+                <a:spcPts val="342"/>
+              </a:spcAft>
+            </a:pPr>
+            <a:r>
+              <a:rPr sz="1600" i="0" b="0">
+                <a:solidFill>
+                  <a:srgbClr val="D4D4D4"/>
+                </a:solidFill>
+                <a:latin typeface="Consolas"/>
+              </a:rPr>
+              <a:t>    </a:t>
+            </a:r>
+            <a:r>
+              <a:rPr sz="1600" i="0" b="0">
+                <a:solidFill>
+                  <a:srgbClr val="DCDCAA"/>
+                </a:solidFill>
+                <a:latin typeface="Consolas"/>
+              </a:rPr>
+              <a:t>servicio.cargarDesdeArchivo</a:t>
+            </a:r>
+            <a:r>
+              <a:rPr sz="1600" i="0" b="0">
+                <a:solidFill>
+                  <a:srgbClr val="D4D4D4"/>
+                </a:solidFill>
+                <a:latin typeface="Consolas"/>
+              </a:rPr>
+              <a:t>();</a:t>
+            </a:r>
+          </a:p>
+          <a:p>
+            <a:pPr>
+              <a:spcAft>
+                <a:spcPts val="342"/>
+              </a:spcAft>
+            </a:pPr>
+            <a:r>
+              <a:rPr sz="1600" i="0" b="0">
+                <a:solidFill>
+                  <a:srgbClr val="D4D4D4"/>
+                </a:solidFill>
+                <a:latin typeface="Consolas"/>
+              </a:rPr>
+              <a:t>    </a:t>
+            </a:r>
+            <a:r>
+              <a:rPr sz="1600" i="0" b="0">
+                <a:solidFill>
+                  <a:srgbClr val="DCDCAA"/>
+                </a:solidFill>
+                <a:latin typeface="Consolas"/>
+              </a:rPr>
+              <a:t>SwingUtilities.invokeLater</a:t>
+            </a:r>
+            <a:r>
+              <a:rPr sz="1600" i="0" b="0">
+                <a:solidFill>
+                  <a:srgbClr val="D4D4D4"/>
+                </a:solidFill>
+                <a:latin typeface="Consolas"/>
+              </a:rPr>
+              <a:t>(() -&gt; </a:t>
+            </a:r>
+            <a:r>
+              <a:rPr sz="1600" i="0" b="0">
+                <a:solidFill>
+                  <a:srgbClr val="569CD6"/>
+                </a:solidFill>
+                <a:latin typeface="Consolas"/>
+              </a:rPr>
+              <a:t>new</a:t>
+            </a:r>
+            <a:r>
+              <a:rPr sz="1600" i="0" b="0">
+                <a:solidFill>
+                  <a:srgbClr val="D4D4D4"/>
+                </a:solidFill>
+                <a:latin typeface="Consolas"/>
+              </a:rPr>
+              <a:t> </a:t>
+            </a:r>
+            <a:r>
+              <a:rPr sz="1600" i="0" b="0">
+                <a:solidFill>
+                  <a:srgbClr val="4EC9B0"/>
+                </a:solidFill>
+                <a:latin typeface="Consolas"/>
+              </a:rPr>
+              <a:t>ClinicaApp</a:t>
+            </a:r>
+            <a:r>
+              <a:rPr sz="1600" i="0" b="0">
+                <a:solidFill>
+                  <a:srgbClr val="D4D4D4"/>
+                </a:solidFill>
+                <a:latin typeface="Consolas"/>
+              </a:rPr>
+              <a:t>(</a:t>
+            </a:r>
+            <a:r>
+              <a:rPr sz="1600" i="0" b="0">
+                <a:solidFill>
+                  <a:srgbClr val="D4D4D4"/>
+                </a:solidFill>
+                <a:latin typeface="Consolas"/>
+              </a:rPr>
+              <a:t>servicio</a:t>
+            </a:r>
+            <a:r>
+              <a:rPr sz="1600" i="0" b="0">
+                <a:solidFill>
+                  <a:srgbClr val="D4D4D4"/>
+                </a:solidFill>
+                <a:latin typeface="Consolas"/>
+              </a:rPr>
+              <a:t>).</a:t>
+            </a:r>
+            <a:r>
+              <a:rPr sz="1600" i="0" b="0">
+                <a:solidFill>
+                  <a:srgbClr val="DCDCAA"/>
+                </a:solidFill>
+                <a:latin typeface="Consolas"/>
+              </a:rPr>
+              <a:t>setVisible</a:t>
+            </a:r>
+            <a:r>
+              <a:rPr sz="1600" i="0" b="0">
+                <a:solidFill>
+                  <a:srgbClr val="D4D4D4"/>
+                </a:solidFill>
+                <a:latin typeface="Consolas"/>
+              </a:rPr>
+              <a:t>(</a:t>
+            </a:r>
+            <a:r>
+              <a:rPr sz="1600" i="0" b="0">
+                <a:solidFill>
+                  <a:srgbClr val="569CD6"/>
+                </a:solidFill>
+                <a:latin typeface="Consolas"/>
+              </a:rPr>
+              <a:t>true</a:t>
+            </a:r>
+            <a:r>
+              <a:rPr sz="1600" i="0" b="0">
+                <a:solidFill>
+                  <a:srgbClr val="D4D4D4"/>
+                </a:solidFill>
+                <a:latin typeface="Consolas"/>
+              </a:rPr>
+              <a:t>));</a:t>
+            </a:r>
+          </a:p>
+          <a:p>
+            <a:pPr>
+              <a:spcAft>
+                <a:spcPts val="342"/>
+              </a:spcAft>
+            </a:pPr>
+            <a:r>
+              <a:rPr sz="1600" i="0" b="0">
+                <a:solidFill>
+                  <a:srgbClr val="D4D4D4"/>
+                </a:solidFill>
+                <a:latin typeface="Consolas"/>
+              </a:rPr>
+              <a:t>}</a:t>
+            </a:r>
+          </a:p>
+        </p:txBody>
+      </p:sp>
+      <p:sp>
+        <p:nvSpPr>
+          <p:cNvPr id="13" name="TextBox 12"/>
+          <p:cNvSpPr txBox="1"/>
+          <p:nvPr/>
+        </p:nvSpPr>
+        <p:spPr>
+          <a:xfrm>
+            <a:off x="457200" y="6035040"/>
+            <a:ext cx="11277295" cy="365760"/>
+          </a:xfrm>
+          <a:prstGeom prst="rect">
+            <a:avLst/>
+          </a:prstGeom>
+          <a:noFill/>
+        </p:spPr>
+        <p:txBody>
+          <a:bodyPr wrap="square">
+            <a:spAutoFit/>
+          </a:bodyPr>
+          <a:lstStyle/>
+          <a:p>
             <a:pPr algn="ctr"/>
             <a:r>
               <a:rPr sz="1300" b="0" i="1">
@@ -13291,7 +13410,7 @@
       </p:sp>
       <p:sp>
         <p:nvSpPr>
-          <p:cNvPr id="13" name="TextBox 12"/>
+          <p:cNvPr id="14" name="TextBox 13"/>
           <p:cNvSpPr txBox="1"/>
           <p:nvPr/>
         </p:nvSpPr>
